--- a/examples/theme-layouts-demo/deck.pptx
+++ b/examples/theme-layouts-demo/deck.pptx
@@ -729,8 +729,10 @@
       <p:sp>
         <p:nvSpPr>
           <p:cNvPr id="2" name="TextBox 1"/>
-          <p:cNvSpPr txBox="1"/>
-          <p:nvPr/>
+          <p:cNvSpPr/>
+          <p:nvPr>
+            <p:ph type="title"/>
+          </p:nvPr>
         </p:nvSpPr>
         <p:spPr>
           <a:xfrm>
@@ -802,8 +804,10 @@
       <p:sp>
         <p:nvSpPr>
           <p:cNvPr id="2" name="TextBox 1"/>
-          <p:cNvSpPr txBox="1"/>
-          <p:nvPr/>
+          <p:cNvSpPr/>
+          <p:nvPr>
+            <p:ph type="title"/>
+          </p:nvPr>
         </p:nvSpPr>
         <p:spPr>
           <a:xfrm>
@@ -837,8 +841,10 @@
       <p:sp>
         <p:nvSpPr>
           <p:cNvPr id="3" name="TextBox 2"/>
-          <p:cNvSpPr txBox="1"/>
-          <p:nvPr/>
+          <p:cNvSpPr/>
+          <p:nvPr>
+            <p:ph type="body" idx="1"/>
+          </p:nvPr>
         </p:nvSpPr>
         <p:spPr>
           <a:xfrm>
@@ -872,8 +878,10 @@
       <p:sp>
         <p:nvSpPr>
           <p:cNvPr id="4" name="TextBox 3"/>
-          <p:cNvSpPr txBox="1"/>
-          <p:nvPr/>
+          <p:cNvSpPr/>
+          <p:nvPr>
+            <p:ph type="body" idx="2"/>
+          </p:nvPr>
         </p:nvSpPr>
         <p:spPr>
           <a:xfrm>
@@ -907,8 +915,10 @@
       <p:sp>
         <p:nvSpPr>
           <p:cNvPr id="5" name="TextBox 4"/>
-          <p:cNvSpPr txBox="1"/>
-          <p:nvPr/>
+          <p:cNvSpPr/>
+          <p:nvPr>
+            <p:ph type="body" idx="3"/>
+          </p:nvPr>
         </p:nvSpPr>
         <p:spPr>
           <a:xfrm>
@@ -942,8 +952,10 @@
       <p:sp>
         <p:nvSpPr>
           <p:cNvPr id="6" name="TextBox 5"/>
-          <p:cNvSpPr txBox="1"/>
-          <p:nvPr/>
+          <p:cNvSpPr/>
+          <p:nvPr>
+            <p:ph type="body" idx="4"/>
+          </p:nvPr>
         </p:nvSpPr>
         <p:spPr>
           <a:xfrm>
@@ -977,8 +989,10 @@
       <p:sp>
         <p:nvSpPr>
           <p:cNvPr id="7" name="TextBox 6"/>
-          <p:cNvSpPr txBox="1"/>
-          <p:nvPr/>
+          <p:cNvSpPr/>
+          <p:nvPr>
+            <p:ph type="body" idx="5"/>
+          </p:nvPr>
         </p:nvSpPr>
         <p:spPr>
           <a:xfrm>
@@ -1012,8 +1026,10 @@
       <p:sp>
         <p:nvSpPr>
           <p:cNvPr id="8" name="TextBox 7"/>
-          <p:cNvSpPr txBox="1"/>
-          <p:nvPr/>
+          <p:cNvSpPr/>
+          <p:nvPr>
+            <p:ph type="body" idx="6"/>
+          </p:nvPr>
         </p:nvSpPr>
         <p:spPr>
           <a:xfrm>
@@ -1085,8 +1101,10 @@
       <p:sp>
         <p:nvSpPr>
           <p:cNvPr id="2" name="TextBox 1"/>
-          <p:cNvSpPr txBox="1"/>
-          <p:nvPr/>
+          <p:cNvSpPr/>
+          <p:nvPr>
+            <p:ph type="title"/>
+          </p:nvPr>
         </p:nvSpPr>
         <p:spPr>
           <a:xfrm>
@@ -1120,8 +1138,10 @@
       <p:sp>
         <p:nvSpPr>
           <p:cNvPr id="3" name="TextBox 2"/>
-          <p:cNvSpPr txBox="1"/>
-          <p:nvPr/>
+          <p:cNvSpPr/>
+          <p:nvPr>
+            <p:ph type="body" idx="1"/>
+          </p:nvPr>
         </p:nvSpPr>
         <p:spPr>
           <a:xfrm>
@@ -1155,8 +1175,10 @@
       <p:sp>
         <p:nvSpPr>
           <p:cNvPr id="4" name="TextBox 3"/>
-          <p:cNvSpPr txBox="1"/>
-          <p:nvPr/>
+          <p:cNvSpPr/>
+          <p:nvPr>
+            <p:ph type="body" idx="2"/>
+          </p:nvPr>
         </p:nvSpPr>
         <p:spPr>
           <a:xfrm>
@@ -1190,8 +1212,10 @@
       <p:sp>
         <p:nvSpPr>
           <p:cNvPr id="5" name="TextBox 4"/>
-          <p:cNvSpPr txBox="1"/>
-          <p:nvPr/>
+          <p:cNvSpPr/>
+          <p:nvPr>
+            <p:ph type="body" idx="3"/>
+          </p:nvPr>
         </p:nvSpPr>
         <p:spPr>
           <a:xfrm>
@@ -1225,8 +1249,10 @@
       <p:sp>
         <p:nvSpPr>
           <p:cNvPr id="6" name="TextBox 5"/>
-          <p:cNvSpPr txBox="1"/>
-          <p:nvPr/>
+          <p:cNvSpPr/>
+          <p:nvPr>
+            <p:ph type="body" idx="4"/>
+          </p:nvPr>
         </p:nvSpPr>
         <p:spPr>
           <a:xfrm>
@@ -1260,8 +1286,10 @@
       <p:sp>
         <p:nvSpPr>
           <p:cNvPr id="7" name="TextBox 6"/>
-          <p:cNvSpPr txBox="1"/>
-          <p:nvPr/>
+          <p:cNvSpPr/>
+          <p:nvPr>
+            <p:ph type="body" idx="5"/>
+          </p:nvPr>
         </p:nvSpPr>
         <p:spPr>
           <a:xfrm>
@@ -1295,8 +1323,10 @@
       <p:sp>
         <p:nvSpPr>
           <p:cNvPr id="8" name="TextBox 7"/>
-          <p:cNvSpPr txBox="1"/>
-          <p:nvPr/>
+          <p:cNvSpPr/>
+          <p:nvPr>
+            <p:ph type="body" idx="6"/>
+          </p:nvPr>
         </p:nvSpPr>
         <p:spPr>
           <a:xfrm>
@@ -1368,8 +1398,10 @@
       <p:sp>
         <p:nvSpPr>
           <p:cNvPr id="2" name="TextBox 1"/>
-          <p:cNvSpPr txBox="1"/>
-          <p:nvPr/>
+          <p:cNvSpPr/>
+          <p:nvPr>
+            <p:ph type="title"/>
+          </p:nvPr>
         </p:nvSpPr>
         <p:spPr>
           <a:xfrm>
@@ -1403,8 +1435,10 @@
       <p:sp>
         <p:nvSpPr>
           <p:cNvPr id="3" name="TextBox 2"/>
-          <p:cNvSpPr txBox="1"/>
-          <p:nvPr/>
+          <p:cNvSpPr/>
+          <p:nvPr>
+            <p:ph type="body" idx="1"/>
+          </p:nvPr>
         </p:nvSpPr>
         <p:spPr>
           <a:xfrm>
@@ -1438,8 +1472,10 @@
       <p:sp>
         <p:nvSpPr>
           <p:cNvPr id="4" name="TextBox 3"/>
-          <p:cNvSpPr txBox="1"/>
-          <p:nvPr/>
+          <p:cNvSpPr/>
+          <p:nvPr>
+            <p:ph type="body" idx="2"/>
+          </p:nvPr>
         </p:nvSpPr>
         <p:spPr>
           <a:xfrm>
@@ -1473,8 +1509,10 @@
       <p:sp>
         <p:nvSpPr>
           <p:cNvPr id="5" name="TextBox 4"/>
-          <p:cNvSpPr txBox="1"/>
-          <p:nvPr/>
+          <p:cNvSpPr/>
+          <p:nvPr>
+            <p:ph type="body" idx="3"/>
+          </p:nvPr>
         </p:nvSpPr>
         <p:spPr>
           <a:xfrm>
@@ -1508,8 +1546,10 @@
       <p:sp>
         <p:nvSpPr>
           <p:cNvPr id="6" name="TextBox 5"/>
-          <p:cNvSpPr txBox="1"/>
-          <p:nvPr/>
+          <p:cNvSpPr/>
+          <p:nvPr>
+            <p:ph type="body" idx="4"/>
+          </p:nvPr>
         </p:nvSpPr>
         <p:spPr>
           <a:xfrm>
@@ -1543,8 +1583,10 @@
       <p:sp>
         <p:nvSpPr>
           <p:cNvPr id="7" name="TextBox 6"/>
-          <p:cNvSpPr txBox="1"/>
-          <p:nvPr/>
+          <p:cNvSpPr/>
+          <p:nvPr>
+            <p:ph type="body" idx="5"/>
+          </p:nvPr>
         </p:nvSpPr>
         <p:spPr>
           <a:xfrm>
@@ -1578,8 +1620,10 @@
       <p:sp>
         <p:nvSpPr>
           <p:cNvPr id="8" name="TextBox 7"/>
-          <p:cNvSpPr txBox="1"/>
-          <p:nvPr/>
+          <p:cNvSpPr/>
+          <p:nvPr>
+            <p:ph type="body" idx="6"/>
+          </p:nvPr>
         </p:nvSpPr>
         <p:spPr>
           <a:xfrm>
@@ -1613,8 +1657,10 @@
       <p:sp>
         <p:nvSpPr>
           <p:cNvPr id="9" name="TextBox 8"/>
-          <p:cNvSpPr txBox="1"/>
-          <p:nvPr/>
+          <p:cNvSpPr/>
+          <p:nvPr>
+            <p:ph type="body" idx="7"/>
+          </p:nvPr>
         </p:nvSpPr>
         <p:spPr>
           <a:xfrm>
@@ -1648,8 +1694,10 @@
       <p:sp>
         <p:nvSpPr>
           <p:cNvPr id="10" name="TextBox 9"/>
-          <p:cNvSpPr txBox="1"/>
-          <p:nvPr/>
+          <p:cNvSpPr/>
+          <p:nvPr>
+            <p:ph type="body" idx="8"/>
+          </p:nvPr>
         </p:nvSpPr>
         <p:spPr>
           <a:xfrm>
@@ -1721,8 +1769,10 @@
       <p:sp>
         <p:nvSpPr>
           <p:cNvPr id="2" name="TextBox 1"/>
-          <p:cNvSpPr txBox="1"/>
-          <p:nvPr/>
+          <p:cNvSpPr/>
+          <p:nvPr>
+            <p:ph type="title"/>
+          </p:nvPr>
         </p:nvSpPr>
         <p:spPr>
           <a:xfrm>
@@ -1756,8 +1806,10 @@
       <p:sp>
         <p:nvSpPr>
           <p:cNvPr id="3" name="TextBox 2"/>
-          <p:cNvSpPr txBox="1"/>
-          <p:nvPr/>
+          <p:cNvSpPr/>
+          <p:nvPr>
+            <p:ph type="body" idx="1"/>
+          </p:nvPr>
         </p:nvSpPr>
         <p:spPr>
           <a:xfrm>
@@ -1791,8 +1843,10 @@
       <p:sp>
         <p:nvSpPr>
           <p:cNvPr id="4" name="TextBox 3"/>
-          <p:cNvSpPr txBox="1"/>
-          <p:nvPr/>
+          <p:cNvSpPr/>
+          <p:nvPr>
+            <p:ph type="body" idx="2"/>
+          </p:nvPr>
         </p:nvSpPr>
         <p:spPr>
           <a:xfrm>
@@ -1826,8 +1880,10 @@
       <p:sp>
         <p:nvSpPr>
           <p:cNvPr id="5" name="TextBox 4"/>
-          <p:cNvSpPr txBox="1"/>
-          <p:nvPr/>
+          <p:cNvSpPr/>
+          <p:nvPr>
+            <p:ph type="body" idx="3"/>
+          </p:nvPr>
         </p:nvSpPr>
         <p:spPr>
           <a:xfrm>
@@ -1861,8 +1917,10 @@
       <p:sp>
         <p:nvSpPr>
           <p:cNvPr id="6" name="TextBox 5"/>
-          <p:cNvSpPr txBox="1"/>
-          <p:nvPr/>
+          <p:cNvSpPr/>
+          <p:nvPr>
+            <p:ph type="body" idx="4"/>
+          </p:nvPr>
         </p:nvSpPr>
         <p:spPr>
           <a:xfrm>
@@ -1896,8 +1954,10 @@
       <p:sp>
         <p:nvSpPr>
           <p:cNvPr id="7" name="TextBox 6"/>
-          <p:cNvSpPr txBox="1"/>
-          <p:nvPr/>
+          <p:cNvSpPr/>
+          <p:nvPr>
+            <p:ph type="body" idx="5"/>
+          </p:nvPr>
         </p:nvSpPr>
         <p:spPr>
           <a:xfrm>
@@ -1931,8 +1991,10 @@
       <p:sp>
         <p:nvSpPr>
           <p:cNvPr id="8" name="TextBox 7"/>
-          <p:cNvSpPr txBox="1"/>
-          <p:nvPr/>
+          <p:cNvSpPr/>
+          <p:nvPr>
+            <p:ph type="body" idx="6"/>
+          </p:nvPr>
         </p:nvSpPr>
         <p:spPr>
           <a:xfrm>
@@ -1966,8 +2028,10 @@
       <p:sp>
         <p:nvSpPr>
           <p:cNvPr id="9" name="TextBox 8"/>
-          <p:cNvSpPr txBox="1"/>
-          <p:nvPr/>
+          <p:cNvSpPr/>
+          <p:nvPr>
+            <p:ph type="body" idx="7"/>
+          </p:nvPr>
         </p:nvSpPr>
         <p:spPr>
           <a:xfrm>
@@ -2001,8 +2065,10 @@
       <p:sp>
         <p:nvSpPr>
           <p:cNvPr id="10" name="TextBox 9"/>
-          <p:cNvSpPr txBox="1"/>
-          <p:nvPr/>
+          <p:cNvSpPr/>
+          <p:nvPr>
+            <p:ph type="body" idx="8"/>
+          </p:nvPr>
         </p:nvSpPr>
         <p:spPr>
           <a:xfrm>
@@ -2036,8 +2102,10 @@
       <p:sp>
         <p:nvSpPr>
           <p:cNvPr id="11" name="TextBox 10"/>
-          <p:cNvSpPr txBox="1"/>
-          <p:nvPr/>
+          <p:cNvSpPr/>
+          <p:nvPr>
+            <p:ph type="body" idx="9"/>
+          </p:nvPr>
         </p:nvSpPr>
         <p:spPr>
           <a:xfrm>
@@ -2071,8 +2139,10 @@
       <p:sp>
         <p:nvSpPr>
           <p:cNvPr id="12" name="TextBox 11"/>
-          <p:cNvSpPr txBox="1"/>
-          <p:nvPr/>
+          <p:cNvSpPr/>
+          <p:nvPr>
+            <p:ph type="body" idx="13"/>
+          </p:nvPr>
         </p:nvSpPr>
         <p:spPr>
           <a:xfrm>
@@ -2106,8 +2176,10 @@
       <p:sp>
         <p:nvSpPr>
           <p:cNvPr id="13" name="TextBox 12"/>
-          <p:cNvSpPr txBox="1"/>
-          <p:nvPr/>
+          <p:cNvSpPr/>
+          <p:nvPr>
+            <p:ph type="body" idx="14"/>
+          </p:nvPr>
         </p:nvSpPr>
         <p:spPr>
           <a:xfrm>
@@ -2141,8 +2213,10 @@
       <p:sp>
         <p:nvSpPr>
           <p:cNvPr id="14" name="TextBox 13"/>
-          <p:cNvSpPr txBox="1"/>
-          <p:nvPr/>
+          <p:cNvSpPr/>
+          <p:nvPr>
+            <p:ph type="body" idx="15"/>
+          </p:nvPr>
         </p:nvSpPr>
         <p:spPr>
           <a:xfrm>
@@ -2214,8 +2288,10 @@
       <p:sp>
         <p:nvSpPr>
           <p:cNvPr id="2" name="TextBox 1"/>
-          <p:cNvSpPr txBox="1"/>
-          <p:nvPr/>
+          <p:cNvSpPr/>
+          <p:nvPr>
+            <p:ph type="title"/>
+          </p:nvPr>
         </p:nvSpPr>
         <p:spPr>
           <a:xfrm>
@@ -2249,8 +2325,10 @@
       <p:sp>
         <p:nvSpPr>
           <p:cNvPr id="3" name="TextBox 2"/>
-          <p:cNvSpPr txBox="1"/>
-          <p:nvPr/>
+          <p:cNvSpPr/>
+          <p:nvPr>
+            <p:ph type="body" idx="1"/>
+          </p:nvPr>
         </p:nvSpPr>
         <p:spPr>
           <a:xfrm>
@@ -2284,8 +2362,10 @@
       <p:sp>
         <p:nvSpPr>
           <p:cNvPr id="4" name="TextBox 3"/>
-          <p:cNvSpPr txBox="1"/>
-          <p:nvPr/>
+          <p:cNvSpPr/>
+          <p:nvPr>
+            <p:ph type="body" idx="2"/>
+          </p:nvPr>
         </p:nvSpPr>
         <p:spPr>
           <a:xfrm>
@@ -2357,8 +2437,10 @@
       <p:sp>
         <p:nvSpPr>
           <p:cNvPr id="2" name="TextBox 1"/>
-          <p:cNvSpPr txBox="1"/>
-          <p:nvPr/>
+          <p:cNvSpPr/>
+          <p:nvPr>
+            <p:ph type="title"/>
+          </p:nvPr>
         </p:nvSpPr>
         <p:spPr>
           <a:xfrm>
@@ -2392,8 +2474,10 @@
       <p:sp>
         <p:nvSpPr>
           <p:cNvPr id="3" name="TextBox 2"/>
-          <p:cNvSpPr txBox="1"/>
-          <p:nvPr/>
+          <p:cNvSpPr/>
+          <p:nvPr>
+            <p:ph type="body" idx="1"/>
+          </p:nvPr>
         </p:nvSpPr>
         <p:spPr>
           <a:xfrm>
@@ -2427,8 +2511,10 @@
       <p:sp>
         <p:nvSpPr>
           <p:cNvPr id="4" name="TextBox 3"/>
-          <p:cNvSpPr txBox="1"/>
-          <p:nvPr/>
+          <p:cNvSpPr/>
+          <p:nvPr>
+            <p:ph type="body" idx="2"/>
+          </p:nvPr>
         </p:nvSpPr>
         <p:spPr>
           <a:xfrm>
@@ -2462,8 +2548,10 @@
       <p:sp>
         <p:nvSpPr>
           <p:cNvPr id="5" name="TextBox 4"/>
-          <p:cNvSpPr txBox="1"/>
-          <p:nvPr/>
+          <p:cNvSpPr/>
+          <p:nvPr>
+            <p:ph type="body" idx="3"/>
+          </p:nvPr>
         </p:nvSpPr>
         <p:spPr>
           <a:xfrm>
@@ -2497,8 +2585,10 @@
       <p:sp>
         <p:nvSpPr>
           <p:cNvPr id="6" name="TextBox 5"/>
-          <p:cNvSpPr txBox="1"/>
-          <p:nvPr/>
+          <p:cNvSpPr/>
+          <p:nvPr>
+            <p:ph type="body" idx="4"/>
+          </p:nvPr>
         </p:nvSpPr>
         <p:spPr>
           <a:xfrm>
@@ -2532,8 +2622,10 @@
       <p:sp>
         <p:nvSpPr>
           <p:cNvPr id="7" name="TextBox 6"/>
-          <p:cNvSpPr txBox="1"/>
-          <p:nvPr/>
+          <p:cNvSpPr/>
+          <p:nvPr>
+            <p:ph type="body" idx="5"/>
+          </p:nvPr>
         </p:nvSpPr>
         <p:spPr>
           <a:xfrm>
@@ -2567,8 +2659,10 @@
       <p:sp>
         <p:nvSpPr>
           <p:cNvPr id="8" name="TextBox 7"/>
-          <p:cNvSpPr txBox="1"/>
-          <p:nvPr/>
+          <p:cNvSpPr/>
+          <p:nvPr>
+            <p:ph type="body" idx="6"/>
+          </p:nvPr>
         </p:nvSpPr>
         <p:spPr>
           <a:xfrm>
@@ -2602,8 +2696,10 @@
       <p:sp>
         <p:nvSpPr>
           <p:cNvPr id="9" name="TextBox 8"/>
-          <p:cNvSpPr txBox="1"/>
-          <p:nvPr/>
+          <p:cNvSpPr/>
+          <p:nvPr>
+            <p:ph type="body" idx="7"/>
+          </p:nvPr>
         </p:nvSpPr>
         <p:spPr>
           <a:xfrm>
@@ -2637,8 +2733,10 @@
       <p:sp>
         <p:nvSpPr>
           <p:cNvPr id="10" name="TextBox 9"/>
-          <p:cNvSpPr txBox="1"/>
-          <p:nvPr/>
+          <p:cNvSpPr/>
+          <p:nvPr>
+            <p:ph type="body" idx="8"/>
+          </p:nvPr>
         </p:nvSpPr>
         <p:spPr>
           <a:xfrm>
@@ -2754,8 +2852,10 @@
       <p:sp>
         <p:nvSpPr>
           <p:cNvPr id="3" name="TextBox 2"/>
-          <p:cNvSpPr txBox="1"/>
-          <p:nvPr/>
+          <p:cNvSpPr/>
+          <p:nvPr>
+            <p:ph type="body" idx="1"/>
+          </p:nvPr>
         </p:nvSpPr>
         <p:spPr>
           <a:xfrm>
@@ -2789,8 +2889,10 @@
       <p:sp>
         <p:nvSpPr>
           <p:cNvPr id="4" name="TextBox 3"/>
-          <p:cNvSpPr txBox="1"/>
-          <p:nvPr/>
+          <p:cNvSpPr/>
+          <p:nvPr>
+            <p:ph type="body" idx="2"/>
+          </p:nvPr>
         </p:nvSpPr>
         <p:spPr>
           <a:xfrm>
@@ -3032,8 +3134,10 @@
       <p:sp>
         <p:nvSpPr>
           <p:cNvPr id="2" name="TextBox 1"/>
-          <p:cNvSpPr txBox="1"/>
-          <p:nvPr/>
+          <p:cNvSpPr/>
+          <p:nvPr>
+            <p:ph type="title"/>
+          </p:nvPr>
         </p:nvSpPr>
         <p:spPr>
           <a:xfrm>
@@ -3111,8 +3215,10 @@
       <p:sp>
         <p:nvSpPr>
           <p:cNvPr id="4" name="TextBox 3"/>
-          <p:cNvSpPr txBox="1"/>
-          <p:nvPr/>
+          <p:cNvSpPr/>
+          <p:nvPr>
+            <p:ph type="body" idx="1"/>
+          </p:nvPr>
         </p:nvSpPr>
         <p:spPr>
           <a:xfrm>
@@ -3146,8 +3252,10 @@
       <p:sp>
         <p:nvSpPr>
           <p:cNvPr id="5" name="TextBox 4"/>
-          <p:cNvSpPr txBox="1"/>
-          <p:nvPr/>
+          <p:cNvSpPr/>
+          <p:nvPr>
+            <p:ph type="body" idx="2"/>
+          </p:nvPr>
         </p:nvSpPr>
         <p:spPr>
           <a:xfrm>
@@ -3181,8 +3289,10 @@
       <p:sp>
         <p:nvSpPr>
           <p:cNvPr id="6" name="TextBox 5"/>
-          <p:cNvSpPr txBox="1"/>
-          <p:nvPr/>
+          <p:cNvSpPr/>
+          <p:nvPr>
+            <p:ph type="body" idx="3"/>
+          </p:nvPr>
         </p:nvSpPr>
         <p:spPr>
           <a:xfrm>
@@ -3216,8 +3326,10 @@
       <p:sp>
         <p:nvSpPr>
           <p:cNvPr id="7" name="TextBox 6"/>
-          <p:cNvSpPr txBox="1"/>
-          <p:nvPr/>
+          <p:cNvSpPr/>
+          <p:nvPr>
+            <p:ph type="body" idx="4"/>
+          </p:nvPr>
         </p:nvSpPr>
         <p:spPr>
           <a:xfrm>
@@ -3251,8 +3363,10 @@
       <p:sp>
         <p:nvSpPr>
           <p:cNvPr id="8" name="TextBox 7"/>
-          <p:cNvSpPr txBox="1"/>
-          <p:nvPr/>
+          <p:cNvSpPr/>
+          <p:nvPr>
+            <p:ph type="body" idx="5"/>
+          </p:nvPr>
         </p:nvSpPr>
         <p:spPr>
           <a:xfrm>
@@ -3286,8 +3400,10 @@
       <p:sp>
         <p:nvSpPr>
           <p:cNvPr id="9" name="TextBox 8"/>
-          <p:cNvSpPr txBox="1"/>
-          <p:nvPr/>
+          <p:cNvSpPr/>
+          <p:nvPr>
+            <p:ph type="body" idx="6"/>
+          </p:nvPr>
         </p:nvSpPr>
         <p:spPr>
           <a:xfrm>
@@ -3321,8 +3437,10 @@
       <p:sp>
         <p:nvSpPr>
           <p:cNvPr id="10" name="TextBox 9"/>
-          <p:cNvSpPr txBox="1"/>
-          <p:nvPr/>
+          <p:cNvSpPr/>
+          <p:nvPr>
+            <p:ph type="body" idx="7"/>
+          </p:nvPr>
         </p:nvSpPr>
         <p:spPr>
           <a:xfrm>
@@ -3356,8 +3474,10 @@
       <p:sp>
         <p:nvSpPr>
           <p:cNvPr id="11" name="TextBox 10"/>
-          <p:cNvSpPr txBox="1"/>
-          <p:nvPr/>
+          <p:cNvSpPr/>
+          <p:nvPr>
+            <p:ph type="body" idx="8"/>
+          </p:nvPr>
         </p:nvSpPr>
         <p:spPr>
           <a:xfrm>
@@ -3391,8 +3511,10 @@
       <p:sp>
         <p:nvSpPr>
           <p:cNvPr id="12" name="TextBox 11"/>
-          <p:cNvSpPr txBox="1"/>
-          <p:nvPr/>
+          <p:cNvSpPr/>
+          <p:nvPr>
+            <p:ph type="body" idx="9"/>
+          </p:nvPr>
         </p:nvSpPr>
         <p:spPr>
           <a:xfrm>
@@ -3426,8 +3548,10 @@
       <p:sp>
         <p:nvSpPr>
           <p:cNvPr id="13" name="TextBox 12"/>
-          <p:cNvSpPr txBox="1"/>
-          <p:nvPr/>
+          <p:cNvSpPr/>
+          <p:nvPr>
+            <p:ph type="body" idx="13"/>
+          </p:nvPr>
         </p:nvSpPr>
         <p:spPr>
           <a:xfrm>
@@ -3499,8 +3623,10 @@
       <p:sp>
         <p:nvSpPr>
           <p:cNvPr id="2" name="TextBox 1"/>
-          <p:cNvSpPr txBox="1"/>
-          <p:nvPr/>
+          <p:cNvSpPr/>
+          <p:nvPr>
+            <p:ph type="body" idx="1"/>
+          </p:nvPr>
         </p:nvSpPr>
         <p:spPr>
           <a:xfrm>
@@ -3578,8 +3704,10 @@
       <p:sp>
         <p:nvSpPr>
           <p:cNvPr id="4" name="TextBox 3"/>
-          <p:cNvSpPr txBox="1"/>
-          <p:nvPr/>
+          <p:cNvSpPr/>
+          <p:nvPr>
+            <p:ph type="body" idx="2"/>
+          </p:nvPr>
         </p:nvSpPr>
         <p:spPr>
           <a:xfrm>
@@ -3695,8 +3823,10 @@
       <p:sp>
         <p:nvSpPr>
           <p:cNvPr id="3" name="TextBox 2"/>
-          <p:cNvSpPr txBox="1"/>
-          <p:nvPr/>
+          <p:cNvSpPr/>
+          <p:nvPr>
+            <p:ph type="body" idx="1"/>
+          </p:nvPr>
         </p:nvSpPr>
         <p:spPr>
           <a:xfrm>
@@ -3730,8 +3860,10 @@
       <p:sp>
         <p:nvSpPr>
           <p:cNvPr id="4" name="TextBox 3"/>
-          <p:cNvSpPr txBox="1"/>
-          <p:nvPr/>
+          <p:cNvSpPr/>
+          <p:nvPr>
+            <p:ph type="body" idx="2"/>
+          </p:nvPr>
         </p:nvSpPr>
         <p:spPr>
           <a:xfrm>
@@ -3847,8 +3979,10 @@
       <p:sp>
         <p:nvSpPr>
           <p:cNvPr id="3" name="TextBox 2"/>
-          <p:cNvSpPr txBox="1"/>
-          <p:nvPr/>
+          <p:cNvSpPr/>
+          <p:nvPr>
+            <p:ph type="body" idx="1"/>
+          </p:nvPr>
         </p:nvSpPr>
         <p:spPr>
           <a:xfrm>
@@ -3882,8 +4016,10 @@
       <p:sp>
         <p:nvSpPr>
           <p:cNvPr id="4" name="TextBox 3"/>
-          <p:cNvSpPr txBox="1"/>
-          <p:nvPr/>
+          <p:cNvSpPr/>
+          <p:nvPr>
+            <p:ph type="body" idx="2"/>
+          </p:nvPr>
         </p:nvSpPr>
         <p:spPr>
           <a:xfrm>
@@ -3999,8 +4135,10 @@
       <p:sp>
         <p:nvSpPr>
           <p:cNvPr id="3" name="TextBox 2"/>
-          <p:cNvSpPr txBox="1"/>
-          <p:nvPr/>
+          <p:cNvSpPr/>
+          <p:nvPr>
+            <p:ph type="body" idx="1"/>
+          </p:nvPr>
         </p:nvSpPr>
         <p:spPr>
           <a:xfrm>
@@ -4072,8 +4210,10 @@
       <p:sp>
         <p:nvSpPr>
           <p:cNvPr id="2" name="TextBox 1"/>
-          <p:cNvSpPr txBox="1"/>
-          <p:nvPr/>
+          <p:cNvSpPr/>
+          <p:nvPr>
+            <p:ph type="title"/>
+          </p:nvPr>
         </p:nvSpPr>
         <p:spPr>
           <a:xfrm>
@@ -4107,8 +4247,10 @@
       <p:sp>
         <p:nvSpPr>
           <p:cNvPr id="3" name="TextBox 2"/>
-          <p:cNvSpPr txBox="1"/>
-          <p:nvPr/>
+          <p:cNvSpPr/>
+          <p:nvPr>
+            <p:ph type="body" idx="1"/>
+          </p:nvPr>
         </p:nvSpPr>
         <p:spPr>
           <a:xfrm>
@@ -4142,8 +4284,10 @@
       <p:sp>
         <p:nvSpPr>
           <p:cNvPr id="4" name="TextBox 3"/>
-          <p:cNvSpPr txBox="1"/>
-          <p:nvPr/>
+          <p:cNvSpPr/>
+          <p:nvPr>
+            <p:ph type="body" idx="2"/>
+          </p:nvPr>
         </p:nvSpPr>
         <p:spPr>
           <a:xfrm>
@@ -4177,8 +4321,10 @@
       <p:sp>
         <p:nvSpPr>
           <p:cNvPr id="5" name="TextBox 4"/>
-          <p:cNvSpPr txBox="1"/>
-          <p:nvPr/>
+          <p:cNvSpPr/>
+          <p:nvPr>
+            <p:ph type="body" idx="3"/>
+          </p:nvPr>
         </p:nvSpPr>
         <p:spPr>
           <a:xfrm>
@@ -4382,8 +4528,10 @@
       <p:sp>
         <p:nvSpPr>
           <p:cNvPr id="5" name="TextBox 4"/>
-          <p:cNvSpPr txBox="1"/>
-          <p:nvPr/>
+          <p:cNvSpPr/>
+          <p:nvPr>
+            <p:ph type="body" idx="1"/>
+          </p:nvPr>
         </p:nvSpPr>
         <p:spPr>
           <a:xfrm>
@@ -4417,8 +4565,10 @@
       <p:sp>
         <p:nvSpPr>
           <p:cNvPr id="6" name="TextBox 5"/>
-          <p:cNvSpPr txBox="1"/>
-          <p:nvPr/>
+          <p:cNvSpPr/>
+          <p:nvPr>
+            <p:ph type="body" idx="2"/>
+          </p:nvPr>
         </p:nvSpPr>
         <p:spPr>
           <a:xfrm>
@@ -4452,8 +4602,10 @@
       <p:sp>
         <p:nvSpPr>
           <p:cNvPr id="7" name="TextBox 6"/>
-          <p:cNvSpPr txBox="1"/>
-          <p:nvPr/>
+          <p:cNvSpPr/>
+          <p:nvPr>
+            <p:ph type="body" idx="3"/>
+          </p:nvPr>
         </p:nvSpPr>
         <p:spPr>
           <a:xfrm>
@@ -4487,8 +4639,10 @@
       <p:sp>
         <p:nvSpPr>
           <p:cNvPr id="8" name="TextBox 7"/>
-          <p:cNvSpPr txBox="1"/>
-          <p:nvPr/>
+          <p:cNvSpPr/>
+          <p:nvPr>
+            <p:ph type="body" idx="4"/>
+          </p:nvPr>
         </p:nvSpPr>
         <p:spPr>
           <a:xfrm>
@@ -4522,8 +4676,10 @@
       <p:sp>
         <p:nvSpPr>
           <p:cNvPr id="9" name="TextBox 8"/>
-          <p:cNvSpPr txBox="1"/>
-          <p:nvPr/>
+          <p:cNvSpPr/>
+          <p:nvPr>
+            <p:ph type="body" idx="5"/>
+          </p:nvPr>
         </p:nvSpPr>
         <p:spPr>
           <a:xfrm>
@@ -4557,8 +4713,10 @@
       <p:sp>
         <p:nvSpPr>
           <p:cNvPr id="10" name="TextBox 9"/>
-          <p:cNvSpPr txBox="1"/>
-          <p:nvPr/>
+          <p:cNvSpPr/>
+          <p:nvPr>
+            <p:ph type="body" idx="6"/>
+          </p:nvPr>
         </p:nvSpPr>
         <p:spPr>
           <a:xfrm>
@@ -4592,8 +4750,10 @@
       <p:sp>
         <p:nvSpPr>
           <p:cNvPr id="11" name="TextBox 10"/>
-          <p:cNvSpPr txBox="1"/>
-          <p:nvPr/>
+          <p:cNvSpPr/>
+          <p:nvPr>
+            <p:ph type="body" idx="7"/>
+          </p:nvPr>
         </p:nvSpPr>
         <p:spPr>
           <a:xfrm>
@@ -4627,8 +4787,10 @@
       <p:sp>
         <p:nvSpPr>
           <p:cNvPr id="12" name="TextBox 11"/>
-          <p:cNvSpPr txBox="1"/>
-          <p:nvPr/>
+          <p:cNvSpPr/>
+          <p:nvPr>
+            <p:ph type="body" idx="8"/>
+          </p:nvPr>
         </p:nvSpPr>
         <p:spPr>
           <a:xfrm>
@@ -4662,8 +4824,10 @@
       <p:sp>
         <p:nvSpPr>
           <p:cNvPr id="13" name="TextBox 12"/>
-          <p:cNvSpPr txBox="1"/>
-          <p:nvPr/>
+          <p:cNvSpPr/>
+          <p:nvPr>
+            <p:ph type="body" idx="9"/>
+          </p:nvPr>
         </p:nvSpPr>
         <p:spPr>
           <a:xfrm>
@@ -4697,8 +4861,10 @@
       <p:sp>
         <p:nvSpPr>
           <p:cNvPr id="14" name="TextBox 13"/>
-          <p:cNvSpPr txBox="1"/>
-          <p:nvPr/>
+          <p:cNvSpPr/>
+          <p:nvPr>
+            <p:ph type="body" idx="13"/>
+          </p:nvPr>
         </p:nvSpPr>
         <p:spPr>
           <a:xfrm>
@@ -4732,8 +4898,10 @@
       <p:sp>
         <p:nvSpPr>
           <p:cNvPr id="15" name="TextBox 14"/>
-          <p:cNvSpPr txBox="1"/>
-          <p:nvPr/>
+          <p:cNvSpPr/>
+          <p:nvPr>
+            <p:ph type="body" idx="14"/>
+          </p:nvPr>
         </p:nvSpPr>
         <p:spPr>
           <a:xfrm>
@@ -4767,8 +4935,10 @@
       <p:sp>
         <p:nvSpPr>
           <p:cNvPr id="16" name="TextBox 15"/>
-          <p:cNvSpPr txBox="1"/>
-          <p:nvPr/>
+          <p:cNvSpPr/>
+          <p:nvPr>
+            <p:ph type="body" idx="15"/>
+          </p:nvPr>
         </p:nvSpPr>
         <p:spPr>
           <a:xfrm>
@@ -4802,8 +4972,10 @@
       <p:sp>
         <p:nvSpPr>
           <p:cNvPr id="17" name="TextBox 16"/>
-          <p:cNvSpPr txBox="1"/>
-          <p:nvPr/>
+          <p:cNvSpPr/>
+          <p:nvPr>
+            <p:ph type="body" idx="16"/>
+          </p:nvPr>
         </p:nvSpPr>
         <p:spPr>
           <a:xfrm>
@@ -4837,8 +5009,10 @@
       <p:sp>
         <p:nvSpPr>
           <p:cNvPr id="18" name="TextBox 17"/>
-          <p:cNvSpPr txBox="1"/>
-          <p:nvPr/>
+          <p:cNvSpPr/>
+          <p:nvPr>
+            <p:ph type="body" idx="17"/>
+          </p:nvPr>
         </p:nvSpPr>
         <p:spPr>
           <a:xfrm>
@@ -4872,8 +5046,10 @@
       <p:sp>
         <p:nvSpPr>
           <p:cNvPr id="19" name="TextBox 18"/>
-          <p:cNvSpPr txBox="1"/>
-          <p:nvPr/>
+          <p:cNvSpPr/>
+          <p:nvPr>
+            <p:ph type="body" idx="18"/>
+          </p:nvPr>
         </p:nvSpPr>
         <p:spPr>
           <a:xfrm>
@@ -4907,8 +5083,10 @@
       <p:sp>
         <p:nvSpPr>
           <p:cNvPr id="20" name="TextBox 19"/>
-          <p:cNvSpPr txBox="1"/>
-          <p:nvPr/>
+          <p:cNvSpPr/>
+          <p:nvPr>
+            <p:ph type="body" idx="19"/>
+          </p:nvPr>
         </p:nvSpPr>
         <p:spPr>
           <a:xfrm>
@@ -4980,8 +5158,10 @@
       <p:sp>
         <p:nvSpPr>
           <p:cNvPr id="2" name="TextBox 1"/>
-          <p:cNvSpPr txBox="1"/>
-          <p:nvPr/>
+          <p:cNvSpPr/>
+          <p:nvPr>
+            <p:ph type="title"/>
+          </p:nvPr>
         </p:nvSpPr>
         <p:spPr>
           <a:xfrm>
@@ -5061,8 +5241,10 @@
       <p:sp>
         <p:nvSpPr>
           <p:cNvPr id="4" name="TextBox 3"/>
-          <p:cNvSpPr txBox="1"/>
-          <p:nvPr/>
+          <p:cNvSpPr/>
+          <p:nvPr>
+            <p:ph type="body" idx="1"/>
+          </p:nvPr>
         </p:nvSpPr>
         <p:spPr>
           <a:xfrm>
@@ -5096,8 +5278,10 @@
       <p:sp>
         <p:nvSpPr>
           <p:cNvPr id="5" name="TextBox 4"/>
-          <p:cNvSpPr txBox="1"/>
-          <p:nvPr/>
+          <p:cNvSpPr/>
+          <p:nvPr>
+            <p:ph type="body" idx="2"/>
+          </p:nvPr>
         </p:nvSpPr>
         <p:spPr>
           <a:xfrm>
@@ -5131,8 +5315,10 @@
       <p:sp>
         <p:nvSpPr>
           <p:cNvPr id="6" name="TextBox 5"/>
-          <p:cNvSpPr txBox="1"/>
-          <p:nvPr/>
+          <p:cNvSpPr/>
+          <p:nvPr>
+            <p:ph type="body" idx="3"/>
+          </p:nvPr>
         </p:nvSpPr>
         <p:spPr>
           <a:xfrm>
@@ -5166,8 +5352,10 @@
       <p:sp>
         <p:nvSpPr>
           <p:cNvPr id="7" name="TextBox 6"/>
-          <p:cNvSpPr txBox="1"/>
-          <p:nvPr/>
+          <p:cNvSpPr/>
+          <p:nvPr>
+            <p:ph type="body" idx="4"/>
+          </p:nvPr>
         </p:nvSpPr>
         <p:spPr>
           <a:xfrm>
@@ -5201,8 +5389,10 @@
       <p:sp>
         <p:nvSpPr>
           <p:cNvPr id="8" name="TextBox 7"/>
-          <p:cNvSpPr txBox="1"/>
-          <p:nvPr/>
+          <p:cNvSpPr/>
+          <p:nvPr>
+            <p:ph type="body" idx="5"/>
+          </p:nvPr>
         </p:nvSpPr>
         <p:spPr>
           <a:xfrm>
@@ -5236,8 +5426,10 @@
       <p:sp>
         <p:nvSpPr>
           <p:cNvPr id="9" name="TextBox 8"/>
-          <p:cNvSpPr txBox="1"/>
-          <p:nvPr/>
+          <p:cNvSpPr/>
+          <p:nvPr>
+            <p:ph type="body" idx="6"/>
+          </p:nvPr>
         </p:nvSpPr>
         <p:spPr>
           <a:xfrm>
@@ -5271,8 +5463,10 @@
       <p:sp>
         <p:nvSpPr>
           <p:cNvPr id="10" name="TextBox 9"/>
-          <p:cNvSpPr txBox="1"/>
-          <p:nvPr/>
+          <p:cNvSpPr/>
+          <p:nvPr>
+            <p:ph type="body" idx="7"/>
+          </p:nvPr>
         </p:nvSpPr>
         <p:spPr>
           <a:xfrm>
@@ -5306,8 +5500,10 @@
       <p:sp>
         <p:nvSpPr>
           <p:cNvPr id="11" name="TextBox 10"/>
-          <p:cNvSpPr txBox="1"/>
-          <p:nvPr/>
+          <p:cNvSpPr/>
+          <p:nvPr>
+            <p:ph type="body" idx="8"/>
+          </p:nvPr>
         </p:nvSpPr>
         <p:spPr>
           <a:xfrm>
@@ -5341,8 +5537,10 @@
       <p:sp>
         <p:nvSpPr>
           <p:cNvPr id="12" name="TextBox 11"/>
-          <p:cNvSpPr txBox="1"/>
-          <p:nvPr/>
+          <p:cNvSpPr/>
+          <p:nvPr>
+            <p:ph type="body" idx="9"/>
+          </p:nvPr>
         </p:nvSpPr>
         <p:spPr>
           <a:xfrm>
@@ -5376,8 +5574,10 @@
       <p:sp>
         <p:nvSpPr>
           <p:cNvPr id="13" name="TextBox 12"/>
-          <p:cNvSpPr txBox="1"/>
-          <p:nvPr/>
+          <p:cNvSpPr/>
+          <p:nvPr>
+            <p:ph type="body" idx="13"/>
+          </p:nvPr>
         </p:nvSpPr>
         <p:spPr>
           <a:xfrm>
@@ -5411,8 +5611,10 @@
       <p:sp>
         <p:nvSpPr>
           <p:cNvPr id="14" name="TextBox 13"/>
-          <p:cNvSpPr txBox="1"/>
-          <p:nvPr/>
+          <p:cNvSpPr/>
+          <p:nvPr>
+            <p:ph type="body" idx="14"/>
+          </p:nvPr>
         </p:nvSpPr>
         <p:spPr>
           <a:xfrm>
@@ -5446,8 +5648,10 @@
       <p:sp>
         <p:nvSpPr>
           <p:cNvPr id="15" name="TextBox 14"/>
-          <p:cNvSpPr txBox="1"/>
-          <p:nvPr/>
+          <p:cNvSpPr/>
+          <p:nvPr>
+            <p:ph type="body" idx="15"/>
+          </p:nvPr>
         </p:nvSpPr>
         <p:spPr>
           <a:xfrm>
@@ -5481,8 +5685,10 @@
       <p:sp>
         <p:nvSpPr>
           <p:cNvPr id="16" name="TextBox 15"/>
-          <p:cNvSpPr txBox="1"/>
-          <p:nvPr/>
+          <p:cNvSpPr/>
+          <p:nvPr>
+            <p:ph type="body" idx="16"/>
+          </p:nvPr>
         </p:nvSpPr>
         <p:spPr>
           <a:xfrm>
@@ -5516,8 +5722,10 @@
       <p:sp>
         <p:nvSpPr>
           <p:cNvPr id="17" name="TextBox 16"/>
-          <p:cNvSpPr txBox="1"/>
-          <p:nvPr/>
+          <p:cNvSpPr/>
+          <p:nvPr>
+            <p:ph type="body" idx="17"/>
+          </p:nvPr>
         </p:nvSpPr>
         <p:spPr>
           <a:xfrm>
@@ -5551,8 +5759,10 @@
       <p:sp>
         <p:nvSpPr>
           <p:cNvPr id="18" name="TextBox 17"/>
-          <p:cNvSpPr txBox="1"/>
-          <p:nvPr/>
+          <p:cNvSpPr/>
+          <p:nvPr>
+            <p:ph type="body" idx="18"/>
+          </p:nvPr>
         </p:nvSpPr>
         <p:spPr>
           <a:xfrm>
@@ -5624,8 +5834,10 @@
       <p:sp>
         <p:nvSpPr>
           <p:cNvPr id="2" name="TextBox 1"/>
-          <p:cNvSpPr txBox="1"/>
-          <p:nvPr/>
+          <p:cNvSpPr/>
+          <p:nvPr>
+            <p:ph type="title"/>
+          </p:nvPr>
         </p:nvSpPr>
         <p:spPr>
           <a:xfrm>
@@ -5659,8 +5871,10 @@
       <p:sp>
         <p:nvSpPr>
           <p:cNvPr id="3" name="TextBox 2"/>
-          <p:cNvSpPr txBox="1"/>
-          <p:nvPr/>
+          <p:cNvSpPr/>
+          <p:nvPr>
+            <p:ph type="body" idx="1"/>
+          </p:nvPr>
         </p:nvSpPr>
         <p:spPr>
           <a:xfrm>
@@ -5694,8 +5908,10 @@
       <p:sp>
         <p:nvSpPr>
           <p:cNvPr id="4" name="TextBox 3"/>
-          <p:cNvSpPr txBox="1"/>
-          <p:nvPr/>
+          <p:cNvSpPr/>
+          <p:nvPr>
+            <p:ph type="body" idx="2"/>
+          </p:nvPr>
         </p:nvSpPr>
         <p:spPr>
           <a:xfrm>
@@ -5729,8 +5945,10 @@
       <p:sp>
         <p:nvSpPr>
           <p:cNvPr id="5" name="TextBox 4"/>
-          <p:cNvSpPr txBox="1"/>
-          <p:nvPr/>
+          <p:cNvSpPr/>
+          <p:nvPr>
+            <p:ph type="body" idx="3"/>
+          </p:nvPr>
         </p:nvSpPr>
         <p:spPr>
           <a:xfrm>
@@ -5764,8 +5982,10 @@
       <p:sp>
         <p:nvSpPr>
           <p:cNvPr id="6" name="TextBox 5"/>
-          <p:cNvSpPr txBox="1"/>
-          <p:nvPr/>
+          <p:cNvSpPr/>
+          <p:nvPr>
+            <p:ph type="body" idx="4"/>
+          </p:nvPr>
         </p:nvSpPr>
         <p:spPr>
           <a:xfrm>
@@ -5799,8 +6019,10 @@
       <p:sp>
         <p:nvSpPr>
           <p:cNvPr id="7" name="TextBox 6"/>
-          <p:cNvSpPr txBox="1"/>
-          <p:nvPr/>
+          <p:cNvSpPr/>
+          <p:nvPr>
+            <p:ph type="body" idx="5"/>
+          </p:nvPr>
         </p:nvSpPr>
         <p:spPr>
           <a:xfrm>
@@ -5834,8 +6056,10 @@
       <p:sp>
         <p:nvSpPr>
           <p:cNvPr id="8" name="TextBox 7"/>
-          <p:cNvSpPr txBox="1"/>
-          <p:nvPr/>
+          <p:cNvSpPr/>
+          <p:nvPr>
+            <p:ph type="body" idx="6"/>
+          </p:nvPr>
         </p:nvSpPr>
         <p:spPr>
           <a:xfrm>
@@ -5869,8 +6093,10 @@
       <p:sp>
         <p:nvSpPr>
           <p:cNvPr id="9" name="TextBox 8"/>
-          <p:cNvSpPr txBox="1"/>
-          <p:nvPr/>
+          <p:cNvSpPr/>
+          <p:nvPr>
+            <p:ph type="body" idx="7"/>
+          </p:nvPr>
         </p:nvSpPr>
         <p:spPr>
           <a:xfrm>
@@ -5904,8 +6130,10 @@
       <p:sp>
         <p:nvSpPr>
           <p:cNvPr id="10" name="TextBox 9"/>
-          <p:cNvSpPr txBox="1"/>
-          <p:nvPr/>
+          <p:cNvSpPr/>
+          <p:nvPr>
+            <p:ph type="body" idx="8"/>
+          </p:nvPr>
         </p:nvSpPr>
         <p:spPr>
           <a:xfrm>
@@ -5939,8 +6167,10 @@
       <p:sp>
         <p:nvSpPr>
           <p:cNvPr id="11" name="TextBox 10"/>
-          <p:cNvSpPr txBox="1"/>
-          <p:nvPr/>
+          <p:cNvSpPr/>
+          <p:nvPr>
+            <p:ph type="body" idx="9"/>
+          </p:nvPr>
         </p:nvSpPr>
         <p:spPr>
           <a:xfrm>
@@ -6012,8 +6242,10 @@
       <p:sp>
         <p:nvSpPr>
           <p:cNvPr id="2" name="TextBox 1"/>
-          <p:cNvSpPr txBox="1"/>
-          <p:nvPr/>
+          <p:cNvSpPr/>
+          <p:nvPr>
+            <p:ph type="title"/>
+          </p:nvPr>
         </p:nvSpPr>
         <p:spPr>
           <a:xfrm>
@@ -6047,8 +6279,10 @@
       <p:sp>
         <p:nvSpPr>
           <p:cNvPr id="3" name="TextBox 2"/>
-          <p:cNvSpPr txBox="1"/>
-          <p:nvPr/>
+          <p:cNvSpPr/>
+          <p:nvPr>
+            <p:ph type="body" idx="1"/>
+          </p:nvPr>
         </p:nvSpPr>
         <p:spPr>
           <a:xfrm>
@@ -6126,8 +6360,10 @@
       <p:sp>
         <p:nvSpPr>
           <p:cNvPr id="5" name="TextBox 4"/>
-          <p:cNvSpPr txBox="1"/>
-          <p:nvPr/>
+          <p:cNvSpPr/>
+          <p:nvPr>
+            <p:ph type="body" idx="2"/>
+          </p:nvPr>
         </p:nvSpPr>
         <p:spPr>
           <a:xfrm>
@@ -6205,8 +6441,10 @@
       <p:sp>
         <p:nvSpPr>
           <p:cNvPr id="7" name="TextBox 6"/>
-          <p:cNvSpPr txBox="1"/>
-          <p:nvPr/>
+          <p:cNvSpPr/>
+          <p:nvPr>
+            <p:ph type="body" idx="3"/>
+          </p:nvPr>
         </p:nvSpPr>
         <p:spPr>
           <a:xfrm>
@@ -6240,8 +6478,10 @@
       <p:sp>
         <p:nvSpPr>
           <p:cNvPr id="8" name="TextBox 7"/>
-          <p:cNvSpPr txBox="1"/>
-          <p:nvPr/>
+          <p:cNvSpPr/>
+          <p:nvPr>
+            <p:ph type="body" idx="4"/>
+          </p:nvPr>
         </p:nvSpPr>
         <p:spPr>
           <a:xfrm>
@@ -6275,8 +6515,10 @@
       <p:sp>
         <p:nvSpPr>
           <p:cNvPr id="9" name="TextBox 8"/>
-          <p:cNvSpPr txBox="1"/>
-          <p:nvPr/>
+          <p:cNvSpPr/>
+          <p:nvPr>
+            <p:ph type="body" idx="5"/>
+          </p:nvPr>
         </p:nvSpPr>
         <p:spPr>
           <a:xfrm>
@@ -6310,8 +6552,10 @@
       <p:sp>
         <p:nvSpPr>
           <p:cNvPr id="10" name="TextBox 9"/>
-          <p:cNvSpPr txBox="1"/>
-          <p:nvPr/>
+          <p:cNvSpPr/>
+          <p:nvPr>
+            <p:ph type="body" idx="6"/>
+          </p:nvPr>
         </p:nvSpPr>
         <p:spPr>
           <a:xfrm>
@@ -6345,8 +6589,10 @@
       <p:sp>
         <p:nvSpPr>
           <p:cNvPr id="11" name="TextBox 10"/>
-          <p:cNvSpPr txBox="1"/>
-          <p:nvPr/>
+          <p:cNvSpPr/>
+          <p:nvPr>
+            <p:ph type="body" idx="7"/>
+          </p:nvPr>
         </p:nvSpPr>
         <p:spPr>
           <a:xfrm>
@@ -6380,8 +6626,10 @@
       <p:sp>
         <p:nvSpPr>
           <p:cNvPr id="12" name="TextBox 11"/>
-          <p:cNvSpPr txBox="1"/>
-          <p:nvPr/>
+          <p:cNvSpPr/>
+          <p:nvPr>
+            <p:ph type="body" idx="8"/>
+          </p:nvPr>
         </p:nvSpPr>
         <p:spPr>
           <a:xfrm>
@@ -6699,8 +6947,10 @@
       <p:sp>
         <p:nvSpPr>
           <p:cNvPr id="2" name="TextBox 1"/>
-          <p:cNvSpPr txBox="1"/>
-          <p:nvPr/>
+          <p:cNvSpPr/>
+          <p:nvPr>
+            <p:ph type="title"/>
+          </p:nvPr>
         </p:nvSpPr>
         <p:spPr>
           <a:xfrm>
@@ -6734,8 +6984,10 @@
       <p:sp>
         <p:nvSpPr>
           <p:cNvPr id="3" name="TextBox 2"/>
-          <p:cNvSpPr txBox="1"/>
-          <p:nvPr/>
+          <p:cNvSpPr/>
+          <p:nvPr>
+            <p:ph type="body" idx="1"/>
+          </p:nvPr>
         </p:nvSpPr>
         <p:spPr>
           <a:xfrm>
@@ -6769,8 +7021,10 @@
       <p:sp>
         <p:nvSpPr>
           <p:cNvPr id="4" name="TextBox 3"/>
-          <p:cNvSpPr txBox="1"/>
-          <p:nvPr/>
+          <p:cNvSpPr/>
+          <p:nvPr>
+            <p:ph type="body" idx="2"/>
+          </p:nvPr>
         </p:nvSpPr>
         <p:spPr>
           <a:xfrm>
@@ -6804,8 +7058,10 @@
       <p:sp>
         <p:nvSpPr>
           <p:cNvPr id="5" name="TextBox 4"/>
-          <p:cNvSpPr txBox="1"/>
-          <p:nvPr/>
+          <p:cNvSpPr/>
+          <p:nvPr>
+            <p:ph type="body" idx="3"/>
+          </p:nvPr>
         </p:nvSpPr>
         <p:spPr>
           <a:xfrm>
@@ -6839,8 +7095,10 @@
       <p:sp>
         <p:nvSpPr>
           <p:cNvPr id="6" name="TextBox 5"/>
-          <p:cNvSpPr txBox="1"/>
-          <p:nvPr/>
+          <p:cNvSpPr/>
+          <p:nvPr>
+            <p:ph type="body" idx="4"/>
+          </p:nvPr>
         </p:nvSpPr>
         <p:spPr>
           <a:xfrm>
@@ -6874,8 +7132,10 @@
       <p:sp>
         <p:nvSpPr>
           <p:cNvPr id="7" name="TextBox 6"/>
-          <p:cNvSpPr txBox="1"/>
-          <p:nvPr/>
+          <p:cNvSpPr/>
+          <p:nvPr>
+            <p:ph type="body" idx="5"/>
+          </p:nvPr>
         </p:nvSpPr>
         <p:spPr>
           <a:xfrm>
@@ -6947,8 +7207,10 @@
       <p:sp>
         <p:nvSpPr>
           <p:cNvPr id="2" name="TextBox 1"/>
-          <p:cNvSpPr txBox="1"/>
-          <p:nvPr/>
+          <p:cNvSpPr/>
+          <p:nvPr>
+            <p:ph type="title"/>
+          </p:nvPr>
         </p:nvSpPr>
         <p:spPr>
           <a:xfrm>
@@ -6982,8 +7244,10 @@
       <p:sp>
         <p:nvSpPr>
           <p:cNvPr id="3" name="TextBox 2"/>
-          <p:cNvSpPr txBox="1"/>
-          <p:nvPr/>
+          <p:cNvSpPr/>
+          <p:nvPr>
+            <p:ph type="body" idx="1"/>
+          </p:nvPr>
         </p:nvSpPr>
         <p:spPr>
           <a:xfrm>
@@ -7061,8 +7325,10 @@
       <p:sp>
         <p:nvSpPr>
           <p:cNvPr id="5" name="TextBox 4"/>
-          <p:cNvSpPr txBox="1"/>
-          <p:nvPr/>
+          <p:cNvSpPr/>
+          <p:nvPr>
+            <p:ph type="body" idx="2"/>
+          </p:nvPr>
         </p:nvSpPr>
         <p:spPr>
           <a:xfrm>
@@ -7096,8 +7362,10 @@
       <p:sp>
         <p:nvSpPr>
           <p:cNvPr id="6" name="TextBox 5"/>
-          <p:cNvSpPr txBox="1"/>
-          <p:nvPr/>
+          <p:cNvSpPr/>
+          <p:nvPr>
+            <p:ph type="body" idx="3"/>
+          </p:nvPr>
         </p:nvSpPr>
         <p:spPr>
           <a:xfrm>
@@ -7175,8 +7443,10 @@
       <p:sp>
         <p:nvSpPr>
           <p:cNvPr id="8" name="TextBox 7"/>
-          <p:cNvSpPr txBox="1"/>
-          <p:nvPr/>
+          <p:cNvSpPr/>
+          <p:nvPr>
+            <p:ph type="body" idx="4"/>
+          </p:nvPr>
         </p:nvSpPr>
         <p:spPr>
           <a:xfrm>
@@ -7210,8 +7480,10 @@
       <p:sp>
         <p:nvSpPr>
           <p:cNvPr id="9" name="TextBox 8"/>
-          <p:cNvSpPr txBox="1"/>
-          <p:nvPr/>
+          <p:cNvSpPr/>
+          <p:nvPr>
+            <p:ph type="body" idx="5"/>
+          </p:nvPr>
         </p:nvSpPr>
         <p:spPr>
           <a:xfrm>
@@ -7289,8 +7561,10 @@
       <p:sp>
         <p:nvSpPr>
           <p:cNvPr id="11" name="TextBox 10"/>
-          <p:cNvSpPr txBox="1"/>
-          <p:nvPr/>
+          <p:cNvSpPr/>
+          <p:nvPr>
+            <p:ph type="body" idx="6"/>
+          </p:nvPr>
         </p:nvSpPr>
         <p:spPr>
           <a:xfrm>
@@ -7324,8 +7598,10 @@
       <p:sp>
         <p:nvSpPr>
           <p:cNvPr id="12" name="TextBox 11"/>
-          <p:cNvSpPr txBox="1"/>
-          <p:nvPr/>
+          <p:cNvSpPr/>
+          <p:nvPr>
+            <p:ph type="body" idx="7"/>
+          </p:nvPr>
         </p:nvSpPr>
         <p:spPr>
           <a:xfrm>
@@ -7403,8 +7679,10 @@
       <p:sp>
         <p:nvSpPr>
           <p:cNvPr id="14" name="TextBox 13"/>
-          <p:cNvSpPr txBox="1"/>
-          <p:nvPr/>
+          <p:cNvSpPr/>
+          <p:nvPr>
+            <p:ph type="body" idx="8"/>
+          </p:nvPr>
         </p:nvSpPr>
         <p:spPr>
           <a:xfrm>
@@ -7438,8 +7716,10 @@
       <p:sp>
         <p:nvSpPr>
           <p:cNvPr id="15" name="TextBox 14"/>
-          <p:cNvSpPr txBox="1"/>
-          <p:nvPr/>
+          <p:cNvSpPr/>
+          <p:nvPr>
+            <p:ph type="body" idx="9"/>
+          </p:nvPr>
         </p:nvSpPr>
         <p:spPr>
           <a:xfrm>
@@ -7517,8 +7797,10 @@
       <p:sp>
         <p:nvSpPr>
           <p:cNvPr id="17" name="TextBox 16"/>
-          <p:cNvSpPr txBox="1"/>
-          <p:nvPr/>
+          <p:cNvSpPr/>
+          <p:nvPr>
+            <p:ph type="body" idx="13"/>
+          </p:nvPr>
         </p:nvSpPr>
         <p:spPr>
           <a:xfrm>
@@ -7552,8 +7834,10 @@
       <p:sp>
         <p:nvSpPr>
           <p:cNvPr id="18" name="TextBox 17"/>
-          <p:cNvSpPr txBox="1"/>
-          <p:nvPr/>
+          <p:cNvSpPr/>
+          <p:nvPr>
+            <p:ph type="body" idx="14"/>
+          </p:nvPr>
         </p:nvSpPr>
         <p:spPr>
           <a:xfrm>
@@ -7631,8 +7915,10 @@
       <p:sp>
         <p:nvSpPr>
           <p:cNvPr id="20" name="TextBox 19"/>
-          <p:cNvSpPr txBox="1"/>
-          <p:nvPr/>
+          <p:cNvSpPr/>
+          <p:nvPr>
+            <p:ph type="body" idx="15"/>
+          </p:nvPr>
         </p:nvSpPr>
         <p:spPr>
           <a:xfrm>
@@ -7704,8 +7990,10 @@
       <p:sp>
         <p:nvSpPr>
           <p:cNvPr id="2" name="TextBox 1"/>
-          <p:cNvSpPr txBox="1"/>
-          <p:nvPr/>
+          <p:cNvSpPr/>
+          <p:nvPr>
+            <p:ph type="title"/>
+          </p:nvPr>
         </p:nvSpPr>
         <p:spPr>
           <a:xfrm>
@@ -7739,8 +8027,10 @@
       <p:sp>
         <p:nvSpPr>
           <p:cNvPr id="3" name="TextBox 2"/>
-          <p:cNvSpPr txBox="1"/>
-          <p:nvPr/>
+          <p:cNvSpPr/>
+          <p:nvPr>
+            <p:ph type="body" idx="1"/>
+          </p:nvPr>
         </p:nvSpPr>
         <p:spPr>
           <a:xfrm>
@@ -7818,8 +8108,10 @@
       <p:sp>
         <p:nvSpPr>
           <p:cNvPr id="5" name="TextBox 4"/>
-          <p:cNvSpPr txBox="1"/>
-          <p:nvPr/>
+          <p:cNvSpPr/>
+          <p:nvPr>
+            <p:ph type="body" idx="2"/>
+          </p:nvPr>
         </p:nvSpPr>
         <p:spPr>
           <a:xfrm>
@@ -7853,8 +8145,10 @@
       <p:sp>
         <p:nvSpPr>
           <p:cNvPr id="6" name="TextBox 5"/>
-          <p:cNvSpPr txBox="1"/>
-          <p:nvPr/>
+          <p:cNvSpPr/>
+          <p:nvPr>
+            <p:ph type="body" idx="3"/>
+          </p:nvPr>
         </p:nvSpPr>
         <p:spPr>
           <a:xfrm>
@@ -7932,8 +8226,10 @@
       <p:sp>
         <p:nvSpPr>
           <p:cNvPr id="8" name="TextBox 7"/>
-          <p:cNvSpPr txBox="1"/>
-          <p:nvPr/>
+          <p:cNvSpPr/>
+          <p:nvPr>
+            <p:ph type="body" idx="4"/>
+          </p:nvPr>
         </p:nvSpPr>
         <p:spPr>
           <a:xfrm>
@@ -7967,8 +8263,10 @@
       <p:sp>
         <p:nvSpPr>
           <p:cNvPr id="9" name="TextBox 8"/>
-          <p:cNvSpPr txBox="1"/>
-          <p:nvPr/>
+          <p:cNvSpPr/>
+          <p:nvPr>
+            <p:ph type="body" idx="5"/>
+          </p:nvPr>
         </p:nvSpPr>
         <p:spPr>
           <a:xfrm>
@@ -8046,8 +8344,10 @@
       <p:sp>
         <p:nvSpPr>
           <p:cNvPr id="11" name="TextBox 10"/>
-          <p:cNvSpPr txBox="1"/>
-          <p:nvPr/>
+          <p:cNvSpPr/>
+          <p:nvPr>
+            <p:ph type="body" idx="6"/>
+          </p:nvPr>
         </p:nvSpPr>
         <p:spPr>
           <a:xfrm>
@@ -8081,8 +8381,10 @@
       <p:sp>
         <p:nvSpPr>
           <p:cNvPr id="12" name="TextBox 11"/>
-          <p:cNvSpPr txBox="1"/>
-          <p:nvPr/>
+          <p:cNvSpPr/>
+          <p:nvPr>
+            <p:ph type="body" idx="7"/>
+          </p:nvPr>
         </p:nvSpPr>
         <p:spPr>
           <a:xfrm>
@@ -8160,8 +8462,10 @@
       <p:sp>
         <p:nvSpPr>
           <p:cNvPr id="14" name="TextBox 13"/>
-          <p:cNvSpPr txBox="1"/>
-          <p:nvPr/>
+          <p:cNvSpPr/>
+          <p:nvPr>
+            <p:ph type="body" idx="8"/>
+          </p:nvPr>
         </p:nvSpPr>
         <p:spPr>
           <a:xfrm>
@@ -8239,8 +8543,10 @@
       <p:sp>
         <p:nvSpPr>
           <p:cNvPr id="16" name="TextBox 15"/>
-          <p:cNvSpPr txBox="1"/>
-          <p:nvPr/>
+          <p:cNvSpPr/>
+          <p:nvPr>
+            <p:ph type="body" idx="9"/>
+          </p:nvPr>
         </p:nvSpPr>
         <p:spPr>
           <a:xfrm>
@@ -8312,8 +8618,10 @@
       <p:sp>
         <p:nvSpPr>
           <p:cNvPr id="2" name="TextBox 1"/>
-          <p:cNvSpPr txBox="1"/>
-          <p:nvPr/>
+          <p:cNvSpPr/>
+          <p:nvPr>
+            <p:ph type="title"/>
+          </p:nvPr>
         </p:nvSpPr>
         <p:spPr>
           <a:xfrm>
@@ -8347,8 +8655,10 @@
       <p:sp>
         <p:nvSpPr>
           <p:cNvPr id="3" name="TextBox 2"/>
-          <p:cNvSpPr txBox="1"/>
-          <p:nvPr/>
+          <p:cNvSpPr/>
+          <p:nvPr>
+            <p:ph type="body" idx="1"/>
+          </p:nvPr>
         </p:nvSpPr>
         <p:spPr>
           <a:xfrm>
@@ -8382,8 +8692,10 @@
       <p:sp>
         <p:nvSpPr>
           <p:cNvPr id="4" name="TextBox 3"/>
-          <p:cNvSpPr txBox="1"/>
-          <p:nvPr/>
+          <p:cNvSpPr/>
+          <p:nvPr>
+            <p:ph type="body" idx="2"/>
+          </p:nvPr>
         </p:nvSpPr>
         <p:spPr>
           <a:xfrm>
@@ -8417,8 +8729,10 @@
       <p:sp>
         <p:nvSpPr>
           <p:cNvPr id="5" name="TextBox 4"/>
-          <p:cNvSpPr txBox="1"/>
-          <p:nvPr/>
+          <p:cNvSpPr/>
+          <p:nvPr>
+            <p:ph type="body" idx="3"/>
+          </p:nvPr>
         </p:nvSpPr>
         <p:spPr>
           <a:xfrm>
@@ -8496,8 +8810,10 @@
       <p:sp>
         <p:nvSpPr>
           <p:cNvPr id="7" name="TextBox 6"/>
-          <p:cNvSpPr txBox="1"/>
-          <p:nvPr/>
+          <p:cNvSpPr/>
+          <p:nvPr>
+            <p:ph type="body" idx="4"/>
+          </p:nvPr>
         </p:nvSpPr>
         <p:spPr>
           <a:xfrm>
@@ -8531,8 +8847,10 @@
       <p:sp>
         <p:nvSpPr>
           <p:cNvPr id="8" name="TextBox 7"/>
-          <p:cNvSpPr txBox="1"/>
-          <p:nvPr/>
+          <p:cNvSpPr/>
+          <p:nvPr>
+            <p:ph type="body" idx="5"/>
+          </p:nvPr>
         </p:nvSpPr>
         <p:spPr>
           <a:xfrm>
@@ -8566,8 +8884,10 @@
       <p:sp>
         <p:nvSpPr>
           <p:cNvPr id="9" name="TextBox 8"/>
-          <p:cNvSpPr txBox="1"/>
-          <p:nvPr/>
+          <p:cNvSpPr/>
+          <p:nvPr>
+            <p:ph type="body" idx="6"/>
+          </p:nvPr>
         </p:nvSpPr>
         <p:spPr>
           <a:xfrm>
@@ -8601,8 +8921,10 @@
       <p:sp>
         <p:nvSpPr>
           <p:cNvPr id="10" name="TextBox 9"/>
-          <p:cNvSpPr txBox="1"/>
-          <p:nvPr/>
+          <p:cNvSpPr/>
+          <p:nvPr>
+            <p:ph type="body" idx="7"/>
+          </p:nvPr>
         </p:nvSpPr>
         <p:spPr>
           <a:xfrm>
@@ -8636,8 +8958,10 @@
       <p:sp>
         <p:nvSpPr>
           <p:cNvPr id="11" name="TextBox 10"/>
-          <p:cNvSpPr txBox="1"/>
-          <p:nvPr/>
+          <p:cNvSpPr/>
+          <p:nvPr>
+            <p:ph type="body" idx="8"/>
+          </p:nvPr>
         </p:nvSpPr>
         <p:spPr>
           <a:xfrm>
@@ -8671,8 +8995,10 @@
       <p:sp>
         <p:nvSpPr>
           <p:cNvPr id="12" name="TextBox 11"/>
-          <p:cNvSpPr txBox="1"/>
-          <p:nvPr/>
+          <p:cNvSpPr/>
+          <p:nvPr>
+            <p:ph type="body" idx="9"/>
+          </p:nvPr>
         </p:nvSpPr>
         <p:spPr>
           <a:xfrm>
@@ -8706,8 +9032,10 @@
       <p:sp>
         <p:nvSpPr>
           <p:cNvPr id="13" name="TextBox 12"/>
-          <p:cNvSpPr txBox="1"/>
-          <p:nvPr/>
+          <p:cNvSpPr/>
+          <p:nvPr>
+            <p:ph type="body" idx="13"/>
+          </p:nvPr>
         </p:nvSpPr>
         <p:spPr>
           <a:xfrm>
@@ -8741,8 +9069,10 @@
       <p:sp>
         <p:nvSpPr>
           <p:cNvPr id="14" name="TextBox 13"/>
-          <p:cNvSpPr txBox="1"/>
-          <p:nvPr/>
+          <p:cNvSpPr/>
+          <p:nvPr>
+            <p:ph type="body" idx="14"/>
+          </p:nvPr>
         </p:nvSpPr>
         <p:spPr>
           <a:xfrm>
@@ -8776,8 +9106,10 @@
       <p:sp>
         <p:nvSpPr>
           <p:cNvPr id="15" name="TextBox 14"/>
-          <p:cNvSpPr txBox="1"/>
-          <p:nvPr/>
+          <p:cNvSpPr/>
+          <p:nvPr>
+            <p:ph type="body" idx="15"/>
+          </p:nvPr>
         </p:nvSpPr>
         <p:spPr>
           <a:xfrm>
@@ -8811,8 +9143,10 @@
       <p:sp>
         <p:nvSpPr>
           <p:cNvPr id="16" name="TextBox 15"/>
-          <p:cNvSpPr txBox="1"/>
-          <p:nvPr/>
+          <p:cNvSpPr/>
+          <p:nvPr>
+            <p:ph type="body" idx="16"/>
+          </p:nvPr>
         </p:nvSpPr>
         <p:spPr>
           <a:xfrm>
@@ -8846,8 +9180,10 @@
       <p:sp>
         <p:nvSpPr>
           <p:cNvPr id="17" name="TextBox 16"/>
-          <p:cNvSpPr txBox="1"/>
-          <p:nvPr/>
+          <p:cNvSpPr/>
+          <p:nvPr>
+            <p:ph type="body" idx="17"/>
+          </p:nvPr>
         </p:nvSpPr>
         <p:spPr>
           <a:xfrm>
@@ -8881,8 +9217,10 @@
       <p:sp>
         <p:nvSpPr>
           <p:cNvPr id="18" name="TextBox 17"/>
-          <p:cNvSpPr txBox="1"/>
-          <p:nvPr/>
+          <p:cNvSpPr/>
+          <p:nvPr>
+            <p:ph type="body" idx="18"/>
+          </p:nvPr>
         </p:nvSpPr>
         <p:spPr>
           <a:xfrm>
@@ -8954,8 +9292,10 @@
       <p:sp>
         <p:nvSpPr>
           <p:cNvPr id="2" name="TextBox 1"/>
-          <p:cNvSpPr txBox="1"/>
-          <p:nvPr/>
+          <p:cNvSpPr/>
+          <p:nvPr>
+            <p:ph type="title"/>
+          </p:nvPr>
         </p:nvSpPr>
         <p:spPr>
           <a:xfrm>
@@ -8989,8 +9329,10 @@
       <p:sp>
         <p:nvSpPr>
           <p:cNvPr id="3" name="TextBox 2"/>
-          <p:cNvSpPr txBox="1"/>
-          <p:nvPr/>
+          <p:cNvSpPr/>
+          <p:nvPr>
+            <p:ph type="body" idx="1"/>
+          </p:nvPr>
         </p:nvSpPr>
         <p:spPr>
           <a:xfrm>
@@ -9024,8 +9366,10 @@
       <p:sp>
         <p:nvSpPr>
           <p:cNvPr id="4" name="TextBox 3"/>
-          <p:cNvSpPr txBox="1"/>
-          <p:nvPr/>
+          <p:cNvSpPr/>
+          <p:nvPr>
+            <p:ph type="body" idx="2"/>
+          </p:nvPr>
         </p:nvSpPr>
         <p:spPr>
           <a:xfrm>
@@ -9103,8 +9447,10 @@
       <p:sp>
         <p:nvSpPr>
           <p:cNvPr id="6" name="TextBox 5"/>
-          <p:cNvSpPr txBox="1"/>
-          <p:nvPr/>
+          <p:cNvSpPr/>
+          <p:nvPr>
+            <p:ph type="body" idx="3"/>
+          </p:nvPr>
         </p:nvSpPr>
         <p:spPr>
           <a:xfrm>
@@ -9138,8 +9484,10 @@
       <p:sp>
         <p:nvSpPr>
           <p:cNvPr id="7" name="TextBox 6"/>
-          <p:cNvSpPr txBox="1"/>
-          <p:nvPr/>
+          <p:cNvSpPr/>
+          <p:nvPr>
+            <p:ph type="body" idx="4"/>
+          </p:nvPr>
         </p:nvSpPr>
         <p:spPr>
           <a:xfrm>
@@ -9173,8 +9521,10 @@
       <p:sp>
         <p:nvSpPr>
           <p:cNvPr id="8" name="TextBox 7"/>
-          <p:cNvSpPr txBox="1"/>
-          <p:nvPr/>
+          <p:cNvSpPr/>
+          <p:nvPr>
+            <p:ph type="body" idx="5"/>
+          </p:nvPr>
         </p:nvSpPr>
         <p:spPr>
           <a:xfrm>
@@ -9252,8 +9602,10 @@
       <p:sp>
         <p:nvSpPr>
           <p:cNvPr id="10" name="TextBox 9"/>
-          <p:cNvSpPr txBox="1"/>
-          <p:nvPr/>
+          <p:cNvSpPr/>
+          <p:nvPr>
+            <p:ph type="body" idx="6"/>
+          </p:nvPr>
         </p:nvSpPr>
         <p:spPr>
           <a:xfrm>
@@ -9287,8 +9639,10 @@
       <p:sp>
         <p:nvSpPr>
           <p:cNvPr id="11" name="TextBox 10"/>
-          <p:cNvSpPr txBox="1"/>
-          <p:nvPr/>
+          <p:cNvSpPr/>
+          <p:nvPr>
+            <p:ph type="body" idx="7"/>
+          </p:nvPr>
         </p:nvSpPr>
         <p:spPr>
           <a:xfrm>
@@ -9322,8 +9676,10 @@
       <p:sp>
         <p:nvSpPr>
           <p:cNvPr id="12" name="TextBox 11"/>
-          <p:cNvSpPr txBox="1"/>
-          <p:nvPr/>
+          <p:cNvSpPr/>
+          <p:nvPr>
+            <p:ph type="body" idx="8"/>
+          </p:nvPr>
         </p:nvSpPr>
         <p:spPr>
           <a:xfrm>
@@ -9401,8 +9757,10 @@
       <p:sp>
         <p:nvSpPr>
           <p:cNvPr id="14" name="TextBox 13"/>
-          <p:cNvSpPr txBox="1"/>
-          <p:nvPr/>
+          <p:cNvSpPr/>
+          <p:nvPr>
+            <p:ph type="body" idx="9"/>
+          </p:nvPr>
         </p:nvSpPr>
         <p:spPr>
           <a:xfrm>
@@ -9474,8 +9832,10 @@
       <p:sp>
         <p:nvSpPr>
           <p:cNvPr id="2" name="TextBox 1"/>
-          <p:cNvSpPr txBox="1"/>
-          <p:nvPr/>
+          <p:cNvSpPr/>
+          <p:nvPr>
+            <p:ph type="title"/>
+          </p:nvPr>
         </p:nvSpPr>
         <p:spPr>
           <a:xfrm>
@@ -9509,8 +9869,10 @@
       <p:sp>
         <p:nvSpPr>
           <p:cNvPr id="3" name="TextBox 2"/>
-          <p:cNvSpPr txBox="1"/>
-          <p:nvPr/>
+          <p:cNvSpPr/>
+          <p:nvPr>
+            <p:ph type="body" idx="1"/>
+          </p:nvPr>
         </p:nvSpPr>
         <p:spPr>
           <a:xfrm>
@@ -9588,8 +9950,10 @@
       <p:sp>
         <p:nvSpPr>
           <p:cNvPr id="5" name="TextBox 4"/>
-          <p:cNvSpPr txBox="1"/>
-          <p:nvPr/>
+          <p:cNvSpPr/>
+          <p:nvPr>
+            <p:ph type="body" idx="2"/>
+          </p:nvPr>
         </p:nvSpPr>
         <p:spPr>
           <a:xfrm>
@@ -9623,8 +9987,10 @@
       <p:sp>
         <p:nvSpPr>
           <p:cNvPr id="6" name="TextBox 5"/>
-          <p:cNvSpPr txBox="1"/>
-          <p:nvPr/>
+          <p:cNvSpPr/>
+          <p:nvPr>
+            <p:ph type="body" idx="3"/>
+          </p:nvPr>
         </p:nvSpPr>
         <p:spPr>
           <a:xfrm>
@@ -9658,8 +10024,10 @@
       <p:sp>
         <p:nvSpPr>
           <p:cNvPr id="7" name="TextBox 6"/>
-          <p:cNvSpPr txBox="1"/>
-          <p:nvPr/>
+          <p:cNvSpPr/>
+          <p:nvPr>
+            <p:ph type="body" idx="4"/>
+          </p:nvPr>
         </p:nvSpPr>
         <p:spPr>
           <a:xfrm>
@@ -9737,8 +10105,10 @@
       <p:sp>
         <p:nvSpPr>
           <p:cNvPr id="9" name="TextBox 8"/>
-          <p:cNvSpPr txBox="1"/>
-          <p:nvPr/>
+          <p:cNvSpPr/>
+          <p:nvPr>
+            <p:ph type="body" idx="5"/>
+          </p:nvPr>
         </p:nvSpPr>
         <p:spPr>
           <a:xfrm>
@@ -9772,8 +10142,10 @@
       <p:sp>
         <p:nvSpPr>
           <p:cNvPr id="10" name="TextBox 9"/>
-          <p:cNvSpPr txBox="1"/>
-          <p:nvPr/>
+          <p:cNvSpPr/>
+          <p:nvPr>
+            <p:ph type="body" idx="6"/>
+          </p:nvPr>
         </p:nvSpPr>
         <p:spPr>
           <a:xfrm>
@@ -9807,8 +10179,10 @@
       <p:sp>
         <p:nvSpPr>
           <p:cNvPr id="11" name="TextBox 10"/>
-          <p:cNvSpPr txBox="1"/>
-          <p:nvPr/>
+          <p:cNvSpPr/>
+          <p:nvPr>
+            <p:ph type="body" idx="7"/>
+          </p:nvPr>
         </p:nvSpPr>
         <p:spPr>
           <a:xfrm>
@@ -9886,8 +10260,10 @@
       <p:sp>
         <p:nvSpPr>
           <p:cNvPr id="13" name="TextBox 12"/>
-          <p:cNvSpPr txBox="1"/>
-          <p:nvPr/>
+          <p:cNvSpPr/>
+          <p:nvPr>
+            <p:ph type="body" idx="8"/>
+          </p:nvPr>
         </p:nvSpPr>
         <p:spPr>
           <a:xfrm>
@@ -9921,8 +10297,10 @@
       <p:sp>
         <p:nvSpPr>
           <p:cNvPr id="14" name="TextBox 13"/>
-          <p:cNvSpPr txBox="1"/>
-          <p:nvPr/>
+          <p:cNvSpPr/>
+          <p:nvPr>
+            <p:ph type="body" idx="9"/>
+          </p:nvPr>
         </p:nvSpPr>
         <p:spPr>
           <a:xfrm>
@@ -9956,8 +10334,10 @@
       <p:sp>
         <p:nvSpPr>
           <p:cNvPr id="15" name="TextBox 14"/>
-          <p:cNvSpPr txBox="1"/>
-          <p:nvPr/>
+          <p:cNvSpPr/>
+          <p:nvPr>
+            <p:ph type="body" idx="13"/>
+          </p:nvPr>
         </p:nvSpPr>
         <p:spPr>
           <a:xfrm>
@@ -10035,8 +10415,10 @@
       <p:sp>
         <p:nvSpPr>
           <p:cNvPr id="17" name="TextBox 16"/>
-          <p:cNvSpPr txBox="1"/>
-          <p:nvPr/>
+          <p:cNvSpPr/>
+          <p:nvPr>
+            <p:ph type="body" idx="14"/>
+          </p:nvPr>
         </p:nvSpPr>
         <p:spPr>
           <a:xfrm>
@@ -10070,8 +10452,10 @@
       <p:sp>
         <p:nvSpPr>
           <p:cNvPr id="18" name="TextBox 17"/>
-          <p:cNvSpPr txBox="1"/>
-          <p:nvPr/>
+          <p:cNvSpPr/>
+          <p:nvPr>
+            <p:ph type="body" idx="15"/>
+          </p:nvPr>
         </p:nvSpPr>
         <p:spPr>
           <a:xfrm>
@@ -10143,8 +10527,10 @@
       <p:sp>
         <p:nvSpPr>
           <p:cNvPr id="2" name="TextBox 1"/>
-          <p:cNvSpPr txBox="1"/>
-          <p:nvPr/>
+          <p:cNvSpPr/>
+          <p:nvPr>
+            <p:ph type="title"/>
+          </p:nvPr>
         </p:nvSpPr>
         <p:spPr>
           <a:xfrm>
@@ -10222,8 +10608,10 @@
       <p:sp>
         <p:nvSpPr>
           <p:cNvPr id="4" name="TextBox 3"/>
-          <p:cNvSpPr txBox="1"/>
-          <p:nvPr/>
+          <p:cNvSpPr/>
+          <p:nvPr>
+            <p:ph type="body" idx="1"/>
+          </p:nvPr>
         </p:nvSpPr>
         <p:spPr>
           <a:xfrm>
@@ -10257,8 +10645,10 @@
       <p:sp>
         <p:nvSpPr>
           <p:cNvPr id="5" name="TextBox 4"/>
-          <p:cNvSpPr txBox="1"/>
-          <p:nvPr/>
+          <p:cNvSpPr/>
+          <p:nvPr>
+            <p:ph type="body" idx="2"/>
+          </p:nvPr>
         </p:nvSpPr>
         <p:spPr>
           <a:xfrm>
@@ -10292,8 +10682,10 @@
       <p:sp>
         <p:nvSpPr>
           <p:cNvPr id="6" name="TextBox 5"/>
-          <p:cNvSpPr txBox="1"/>
-          <p:nvPr/>
+          <p:cNvSpPr/>
+          <p:nvPr>
+            <p:ph type="body" idx="3"/>
+          </p:nvPr>
         </p:nvSpPr>
         <p:spPr>
           <a:xfrm>
@@ -10371,8 +10763,10 @@
       <p:sp>
         <p:nvSpPr>
           <p:cNvPr id="8" name="TextBox 7"/>
-          <p:cNvSpPr txBox="1"/>
-          <p:nvPr/>
+          <p:cNvSpPr/>
+          <p:nvPr>
+            <p:ph type="body" idx="4"/>
+          </p:nvPr>
         </p:nvSpPr>
         <p:spPr>
           <a:xfrm>
@@ -10406,8 +10800,10 @@
       <p:sp>
         <p:nvSpPr>
           <p:cNvPr id="9" name="TextBox 8"/>
-          <p:cNvSpPr txBox="1"/>
-          <p:nvPr/>
+          <p:cNvSpPr/>
+          <p:nvPr>
+            <p:ph type="body" idx="5"/>
+          </p:nvPr>
         </p:nvSpPr>
         <p:spPr>
           <a:xfrm>
@@ -10441,8 +10837,10 @@
       <p:sp>
         <p:nvSpPr>
           <p:cNvPr id="10" name="TextBox 9"/>
-          <p:cNvSpPr txBox="1"/>
-          <p:nvPr/>
+          <p:cNvSpPr/>
+          <p:nvPr>
+            <p:ph type="body" idx="6"/>
+          </p:nvPr>
         </p:nvSpPr>
         <p:spPr>
           <a:xfrm>
@@ -10520,8 +10918,10 @@
       <p:sp>
         <p:nvSpPr>
           <p:cNvPr id="12" name="TextBox 11"/>
-          <p:cNvSpPr txBox="1"/>
-          <p:nvPr/>
+          <p:cNvSpPr/>
+          <p:nvPr>
+            <p:ph type="body" idx="7"/>
+          </p:nvPr>
         </p:nvSpPr>
         <p:spPr>
           <a:xfrm>
@@ -10555,8 +10955,10 @@
       <p:sp>
         <p:nvSpPr>
           <p:cNvPr id="13" name="TextBox 12"/>
-          <p:cNvSpPr txBox="1"/>
-          <p:nvPr/>
+          <p:cNvSpPr/>
+          <p:nvPr>
+            <p:ph type="body" idx="8"/>
+          </p:nvPr>
         </p:nvSpPr>
         <p:spPr>
           <a:xfrm>
@@ -10590,8 +10992,10 @@
       <p:sp>
         <p:nvSpPr>
           <p:cNvPr id="14" name="TextBox 13"/>
-          <p:cNvSpPr txBox="1"/>
-          <p:nvPr/>
+          <p:cNvSpPr/>
+          <p:nvPr>
+            <p:ph type="body" idx="9"/>
+          </p:nvPr>
         </p:nvSpPr>
         <p:spPr>
           <a:xfrm>
@@ -10663,8 +11067,10 @@
       <p:sp>
         <p:nvSpPr>
           <p:cNvPr id="2" name="TextBox 1"/>
-          <p:cNvSpPr txBox="1"/>
-          <p:nvPr/>
+          <p:cNvSpPr/>
+          <p:nvPr>
+            <p:ph type="title"/>
+          </p:nvPr>
         </p:nvSpPr>
         <p:spPr>
           <a:xfrm>
@@ -10742,8 +11148,10 @@
       <p:sp>
         <p:nvSpPr>
           <p:cNvPr id="4" name="TextBox 3"/>
-          <p:cNvSpPr txBox="1"/>
-          <p:nvPr/>
+          <p:cNvSpPr/>
+          <p:nvPr>
+            <p:ph type="body" idx="1"/>
+          </p:nvPr>
         </p:nvSpPr>
         <p:spPr>
           <a:xfrm>
@@ -10821,8 +11229,10 @@
       <p:sp>
         <p:nvSpPr>
           <p:cNvPr id="6" name="TextBox 5"/>
-          <p:cNvSpPr txBox="1"/>
-          <p:nvPr/>
+          <p:cNvSpPr/>
+          <p:nvPr>
+            <p:ph type="body" idx="2"/>
+          </p:nvPr>
         </p:nvSpPr>
         <p:spPr>
           <a:xfrm>
@@ -10900,8 +11310,10 @@
       <p:sp>
         <p:nvSpPr>
           <p:cNvPr id="8" name="TextBox 7"/>
-          <p:cNvSpPr txBox="1"/>
-          <p:nvPr/>
+          <p:cNvSpPr/>
+          <p:nvPr>
+            <p:ph type="body" idx="3"/>
+          </p:nvPr>
         </p:nvSpPr>
         <p:spPr>
           <a:xfrm>
@@ -10979,8 +11391,10 @@
       <p:sp>
         <p:nvSpPr>
           <p:cNvPr id="10" name="TextBox 9"/>
-          <p:cNvSpPr txBox="1"/>
-          <p:nvPr/>
+          <p:cNvSpPr/>
+          <p:nvPr>
+            <p:ph type="body" idx="4"/>
+          </p:nvPr>
         </p:nvSpPr>
         <p:spPr>
           <a:xfrm>
@@ -11052,8 +11466,10 @@
       <p:sp>
         <p:nvSpPr>
           <p:cNvPr id="2" name="TextBox 1"/>
-          <p:cNvSpPr txBox="1"/>
-          <p:nvPr/>
+          <p:cNvSpPr/>
+          <p:nvPr>
+            <p:ph type="title"/>
+          </p:nvPr>
         </p:nvSpPr>
         <p:spPr>
           <a:xfrm>
@@ -11219,8 +11635,10 @@
       <p:sp>
         <p:nvSpPr>
           <p:cNvPr id="6" name="TextBox 5"/>
-          <p:cNvSpPr txBox="1"/>
-          <p:nvPr/>
+          <p:cNvSpPr/>
+          <p:nvPr>
+            <p:ph type="body" idx="1"/>
+          </p:nvPr>
         </p:nvSpPr>
         <p:spPr>
           <a:xfrm>
@@ -11254,8 +11672,10 @@
       <p:sp>
         <p:nvSpPr>
           <p:cNvPr id="7" name="TextBox 6"/>
-          <p:cNvSpPr txBox="1"/>
-          <p:nvPr/>
+          <p:cNvSpPr/>
+          <p:nvPr>
+            <p:ph type="body" idx="2"/>
+          </p:nvPr>
         </p:nvSpPr>
         <p:spPr>
           <a:xfrm>
@@ -11289,8 +11709,10 @@
       <p:sp>
         <p:nvSpPr>
           <p:cNvPr id="8" name="TextBox 7"/>
-          <p:cNvSpPr txBox="1"/>
-          <p:nvPr/>
+          <p:cNvSpPr/>
+          <p:nvPr>
+            <p:ph type="body" idx="3"/>
+          </p:nvPr>
         </p:nvSpPr>
         <p:spPr>
           <a:xfrm>
@@ -11324,8 +11746,10 @@
       <p:sp>
         <p:nvSpPr>
           <p:cNvPr id="9" name="TextBox 8"/>
-          <p:cNvSpPr txBox="1"/>
-          <p:nvPr/>
+          <p:cNvSpPr/>
+          <p:nvPr>
+            <p:ph type="body" idx="4"/>
+          </p:nvPr>
         </p:nvSpPr>
         <p:spPr>
           <a:xfrm>
@@ -11359,8 +11783,10 @@
       <p:sp>
         <p:nvSpPr>
           <p:cNvPr id="10" name="TextBox 9"/>
-          <p:cNvSpPr txBox="1"/>
-          <p:nvPr/>
+          <p:cNvSpPr/>
+          <p:nvPr>
+            <p:ph type="body" idx="5"/>
+          </p:nvPr>
         </p:nvSpPr>
         <p:spPr>
           <a:xfrm>
@@ -11394,8 +11820,10 @@
       <p:sp>
         <p:nvSpPr>
           <p:cNvPr id="11" name="TextBox 10"/>
-          <p:cNvSpPr txBox="1"/>
-          <p:nvPr/>
+          <p:cNvSpPr/>
+          <p:nvPr>
+            <p:ph type="body" idx="6"/>
+          </p:nvPr>
         </p:nvSpPr>
         <p:spPr>
           <a:xfrm>
@@ -11467,8 +11895,10 @@
       <p:sp>
         <p:nvSpPr>
           <p:cNvPr id="2" name="TextBox 1"/>
-          <p:cNvSpPr txBox="1"/>
-          <p:nvPr/>
+          <p:cNvSpPr/>
+          <p:nvPr>
+            <p:ph type="title"/>
+          </p:nvPr>
         </p:nvSpPr>
         <p:spPr>
           <a:xfrm>
@@ -11546,8 +11976,10 @@
       <p:sp>
         <p:nvSpPr>
           <p:cNvPr id="4" name="TextBox 3"/>
-          <p:cNvSpPr txBox="1"/>
-          <p:nvPr/>
+          <p:cNvSpPr/>
+          <p:nvPr>
+            <p:ph type="body" idx="1"/>
+          </p:nvPr>
         </p:nvSpPr>
         <p:spPr>
           <a:xfrm>
@@ -11625,8 +12057,10 @@
       <p:sp>
         <p:nvSpPr>
           <p:cNvPr id="6" name="TextBox 5"/>
-          <p:cNvSpPr txBox="1"/>
-          <p:nvPr/>
+          <p:cNvSpPr/>
+          <p:nvPr>
+            <p:ph type="body" idx="2"/>
+          </p:nvPr>
         </p:nvSpPr>
         <p:spPr>
           <a:xfrm>
@@ -11704,8 +12138,10 @@
       <p:sp>
         <p:nvSpPr>
           <p:cNvPr id="8" name="TextBox 7"/>
-          <p:cNvSpPr txBox="1"/>
-          <p:nvPr/>
+          <p:cNvSpPr/>
+          <p:nvPr>
+            <p:ph type="body" idx="3"/>
+          </p:nvPr>
         </p:nvSpPr>
         <p:spPr>
           <a:xfrm>
@@ -11783,8 +12219,10 @@
       <p:sp>
         <p:nvSpPr>
           <p:cNvPr id="10" name="TextBox 9"/>
-          <p:cNvSpPr txBox="1"/>
-          <p:nvPr/>
+          <p:cNvSpPr/>
+          <p:nvPr>
+            <p:ph type="body" idx="4"/>
+          </p:nvPr>
         </p:nvSpPr>
         <p:spPr>
           <a:xfrm>
@@ -12144,8 +12582,10 @@
       <p:sp>
         <p:nvSpPr>
           <p:cNvPr id="2" name="TextBox 1"/>
-          <p:cNvSpPr txBox="1"/>
-          <p:nvPr/>
+          <p:cNvSpPr/>
+          <p:nvPr>
+            <p:ph type="title"/>
+          </p:nvPr>
         </p:nvSpPr>
         <p:spPr>
           <a:xfrm>
@@ -12179,8 +12619,10 @@
       <p:sp>
         <p:nvSpPr>
           <p:cNvPr id="3" name="TextBox 2"/>
-          <p:cNvSpPr txBox="1"/>
-          <p:nvPr/>
+          <p:cNvSpPr/>
+          <p:nvPr>
+            <p:ph type="body" idx="1"/>
+          </p:nvPr>
         </p:nvSpPr>
         <p:spPr>
           <a:xfrm>
@@ -12258,8 +12700,10 @@
       <p:sp>
         <p:nvSpPr>
           <p:cNvPr id="5" name="TextBox 4"/>
-          <p:cNvSpPr txBox="1"/>
-          <p:nvPr/>
+          <p:cNvSpPr/>
+          <p:nvPr>
+            <p:ph type="body" idx="2"/>
+          </p:nvPr>
         </p:nvSpPr>
         <p:spPr>
           <a:xfrm>
@@ -12293,8 +12737,10 @@
       <p:sp>
         <p:nvSpPr>
           <p:cNvPr id="6" name="TextBox 5"/>
-          <p:cNvSpPr txBox="1"/>
-          <p:nvPr/>
+          <p:cNvSpPr/>
+          <p:nvPr>
+            <p:ph type="body" idx="3"/>
+          </p:nvPr>
         </p:nvSpPr>
         <p:spPr>
           <a:xfrm>
@@ -12372,8 +12818,10 @@
       <p:sp>
         <p:nvSpPr>
           <p:cNvPr id="8" name="TextBox 7"/>
-          <p:cNvSpPr txBox="1"/>
-          <p:nvPr/>
+          <p:cNvSpPr/>
+          <p:nvPr>
+            <p:ph type="body" idx="4"/>
+          </p:nvPr>
         </p:nvSpPr>
         <p:spPr>
           <a:xfrm>
@@ -12407,8 +12855,10 @@
       <p:sp>
         <p:nvSpPr>
           <p:cNvPr id="9" name="TextBox 8"/>
-          <p:cNvSpPr txBox="1"/>
-          <p:nvPr/>
+          <p:cNvSpPr/>
+          <p:nvPr>
+            <p:ph type="body" idx="5"/>
+          </p:nvPr>
         </p:nvSpPr>
         <p:spPr>
           <a:xfrm>
@@ -12486,8 +12936,10 @@
       <p:sp>
         <p:nvSpPr>
           <p:cNvPr id="11" name="TextBox 10"/>
-          <p:cNvSpPr txBox="1"/>
-          <p:nvPr/>
+          <p:cNvSpPr/>
+          <p:nvPr>
+            <p:ph type="body" idx="6"/>
+          </p:nvPr>
         </p:nvSpPr>
         <p:spPr>
           <a:xfrm>
@@ -12521,8 +12973,10 @@
       <p:sp>
         <p:nvSpPr>
           <p:cNvPr id="12" name="TextBox 11"/>
-          <p:cNvSpPr txBox="1"/>
-          <p:nvPr/>
+          <p:cNvSpPr/>
+          <p:nvPr>
+            <p:ph type="body" idx="7"/>
+          </p:nvPr>
         </p:nvSpPr>
         <p:spPr>
           <a:xfrm>
@@ -12600,8 +13054,10 @@
       <p:sp>
         <p:nvSpPr>
           <p:cNvPr id="14" name="TextBox 13"/>
-          <p:cNvSpPr txBox="1"/>
-          <p:nvPr/>
+          <p:cNvSpPr/>
+          <p:nvPr>
+            <p:ph type="body" idx="8"/>
+          </p:nvPr>
         </p:nvSpPr>
         <p:spPr>
           <a:xfrm>
@@ -12673,8 +13129,10 @@
       <p:sp>
         <p:nvSpPr>
           <p:cNvPr id="2" name="TextBox 1"/>
-          <p:cNvSpPr txBox="1"/>
-          <p:nvPr/>
+          <p:cNvSpPr/>
+          <p:nvPr>
+            <p:ph type="title"/>
+          </p:nvPr>
         </p:nvSpPr>
         <p:spPr>
           <a:xfrm>
@@ -12708,8 +13166,10 @@
       <p:sp>
         <p:nvSpPr>
           <p:cNvPr id="3" name="TextBox 2"/>
-          <p:cNvSpPr txBox="1"/>
-          <p:nvPr/>
+          <p:cNvSpPr/>
+          <p:nvPr>
+            <p:ph type="body" idx="1"/>
+          </p:nvPr>
         </p:nvSpPr>
         <p:spPr>
           <a:xfrm>
@@ -12743,8 +13203,10 @@
       <p:sp>
         <p:nvSpPr>
           <p:cNvPr id="4" name="TextBox 3"/>
-          <p:cNvSpPr txBox="1"/>
-          <p:nvPr/>
+          <p:cNvSpPr/>
+          <p:nvPr>
+            <p:ph type="body" idx="2"/>
+          </p:nvPr>
         </p:nvSpPr>
         <p:spPr>
           <a:xfrm>
@@ -12778,8 +13240,10 @@
       <p:sp>
         <p:nvSpPr>
           <p:cNvPr id="5" name="TextBox 4"/>
-          <p:cNvSpPr txBox="1"/>
-          <p:nvPr/>
+          <p:cNvSpPr/>
+          <p:nvPr>
+            <p:ph type="body" idx="3"/>
+          </p:nvPr>
         </p:nvSpPr>
         <p:spPr>
           <a:xfrm>
@@ -12857,8 +13321,10 @@
       <p:sp>
         <p:nvSpPr>
           <p:cNvPr id="7" name="TextBox 6"/>
-          <p:cNvSpPr txBox="1"/>
-          <p:nvPr/>
+          <p:cNvSpPr/>
+          <p:nvPr>
+            <p:ph type="body" idx="4"/>
+          </p:nvPr>
         </p:nvSpPr>
         <p:spPr>
           <a:xfrm>
@@ -12936,8 +13402,10 @@
       <p:sp>
         <p:nvSpPr>
           <p:cNvPr id="9" name="TextBox 8"/>
-          <p:cNvSpPr txBox="1"/>
-          <p:nvPr/>
+          <p:cNvSpPr/>
+          <p:nvPr>
+            <p:ph type="body" idx="5"/>
+          </p:nvPr>
         </p:nvSpPr>
         <p:spPr>
           <a:xfrm>
@@ -12971,8 +13439,10 @@
       <p:sp>
         <p:nvSpPr>
           <p:cNvPr id="10" name="TextBox 9"/>
-          <p:cNvSpPr txBox="1"/>
-          <p:nvPr/>
+          <p:cNvSpPr/>
+          <p:nvPr>
+            <p:ph type="body" idx="6"/>
+          </p:nvPr>
         </p:nvSpPr>
         <p:spPr>
           <a:xfrm>
@@ -13006,8 +13476,10 @@
       <p:sp>
         <p:nvSpPr>
           <p:cNvPr id="11" name="TextBox 10"/>
-          <p:cNvSpPr txBox="1"/>
-          <p:nvPr/>
+          <p:cNvSpPr/>
+          <p:nvPr>
+            <p:ph type="body" idx="7"/>
+          </p:nvPr>
         </p:nvSpPr>
         <p:spPr>
           <a:xfrm>
@@ -13041,8 +13513,10 @@
       <p:sp>
         <p:nvSpPr>
           <p:cNvPr id="12" name="TextBox 11"/>
-          <p:cNvSpPr txBox="1"/>
-          <p:nvPr/>
+          <p:cNvSpPr/>
+          <p:nvPr>
+            <p:ph type="body" idx="8"/>
+          </p:nvPr>
         </p:nvSpPr>
         <p:spPr>
           <a:xfrm>
@@ -13076,8 +13550,10 @@
       <p:sp>
         <p:nvSpPr>
           <p:cNvPr id="13" name="TextBox 12"/>
-          <p:cNvSpPr txBox="1"/>
-          <p:nvPr/>
+          <p:cNvSpPr/>
+          <p:nvPr>
+            <p:ph type="body" idx="9"/>
+          </p:nvPr>
         </p:nvSpPr>
         <p:spPr>
           <a:xfrm>
@@ -13111,8 +13587,10 @@
       <p:sp>
         <p:nvSpPr>
           <p:cNvPr id="14" name="TextBox 13"/>
-          <p:cNvSpPr txBox="1"/>
-          <p:nvPr/>
+          <p:cNvSpPr/>
+          <p:nvPr>
+            <p:ph type="body" idx="13"/>
+          </p:nvPr>
         </p:nvSpPr>
         <p:spPr>
           <a:xfrm>
@@ -13146,8 +13624,10 @@
       <p:sp>
         <p:nvSpPr>
           <p:cNvPr id="15" name="TextBox 14"/>
-          <p:cNvSpPr txBox="1"/>
-          <p:nvPr/>
+          <p:cNvSpPr/>
+          <p:nvPr>
+            <p:ph type="body" idx="14"/>
+          </p:nvPr>
         </p:nvSpPr>
         <p:spPr>
           <a:xfrm>
@@ -13181,8 +13661,10 @@
       <p:sp>
         <p:nvSpPr>
           <p:cNvPr id="16" name="TextBox 15"/>
-          <p:cNvSpPr txBox="1"/>
-          <p:nvPr/>
+          <p:cNvSpPr/>
+          <p:nvPr>
+            <p:ph type="body" idx="15"/>
+          </p:nvPr>
         </p:nvSpPr>
         <p:spPr>
           <a:xfrm>
@@ -13260,8 +13742,10 @@
       <p:sp>
         <p:nvSpPr>
           <p:cNvPr id="18" name="TextBox 17"/>
-          <p:cNvSpPr txBox="1"/>
-          <p:nvPr/>
+          <p:cNvSpPr/>
+          <p:nvPr>
+            <p:ph type="body" idx="16"/>
+          </p:nvPr>
         </p:nvSpPr>
         <p:spPr>
           <a:xfrm>
@@ -13295,8 +13779,10 @@
       <p:sp>
         <p:nvSpPr>
           <p:cNvPr id="19" name="TextBox 18"/>
-          <p:cNvSpPr txBox="1"/>
-          <p:nvPr/>
+          <p:cNvSpPr/>
+          <p:nvPr>
+            <p:ph type="body" idx="17"/>
+          </p:nvPr>
         </p:nvSpPr>
         <p:spPr>
           <a:xfrm>
@@ -13330,8 +13816,10 @@
       <p:sp>
         <p:nvSpPr>
           <p:cNvPr id="20" name="TextBox 19"/>
-          <p:cNvSpPr txBox="1"/>
-          <p:nvPr/>
+          <p:cNvSpPr/>
+          <p:nvPr>
+            <p:ph type="body" idx="18"/>
+          </p:nvPr>
         </p:nvSpPr>
         <p:spPr>
           <a:xfrm>

--- a/examples/theme-layouts-demo/deck.pptx
+++ b/examples/theme-layouts-demo/deck.pptx
@@ -2809,7 +2809,9 @@
         <p:nvSpPr>
           <p:cNvPr id="2" name="Rectangle 1"/>
           <p:cNvSpPr/>
-          <p:nvPr/>
+          <p:nvPr>
+            <p:ph type="body" idx="1"/>
+          </p:nvPr>
         </p:nvSpPr>
         <p:spPr>
           <a:xfrm>
@@ -2827,20 +2829,6 @@
           </a:ln>
           <a:effectLst/>
         </p:spPr>
-        <p:style>
-          <a:lnRef idx="1">
-            <a:schemeClr val="accent1"/>
-          </a:lnRef>
-          <a:fillRef idx="3">
-            <a:schemeClr val="accent1"/>
-          </a:fillRef>
-          <a:effectRef idx="2">
-            <a:schemeClr val="accent1"/>
-          </a:effectRef>
-          <a:fontRef idx="minor">
-            <a:schemeClr val="lt1"/>
-          </a:fontRef>
-        </p:style>
         <p:txBody>
           <a:bodyPr rtlCol="0" anchor="ctr"/>
           <a:lstStyle/>
@@ -2854,7 +2842,7 @@
           <p:cNvPr id="3" name="TextBox 2"/>
           <p:cNvSpPr/>
           <p:nvPr>
-            <p:ph type="body" idx="1"/>
+            <p:ph type="body" idx="2"/>
           </p:nvPr>
         </p:nvSpPr>
         <p:spPr>
@@ -2891,7 +2879,7 @@
           <p:cNvPr id="4" name="TextBox 3"/>
           <p:cNvSpPr/>
           <p:nvPr>
-            <p:ph type="body" idx="2"/>
+            <p:ph type="body" idx="3"/>
           </p:nvPr>
         </p:nvSpPr>
         <p:spPr>
@@ -3172,7 +3160,9 @@
         <p:nvSpPr>
           <p:cNvPr id="3" name="Rectangle 2"/>
           <p:cNvSpPr/>
-          <p:nvPr/>
+          <p:nvPr>
+            <p:ph type="body" idx="1"/>
+          </p:nvPr>
         </p:nvSpPr>
         <p:spPr>
           <a:xfrm>
@@ -3190,20 +3180,6 @@
           </a:ln>
           <a:effectLst/>
         </p:spPr>
-        <p:style>
-          <a:lnRef idx="1">
-            <a:schemeClr val="accent1"/>
-          </a:lnRef>
-          <a:fillRef idx="3">
-            <a:schemeClr val="accent1"/>
-          </a:fillRef>
-          <a:effectRef idx="2">
-            <a:schemeClr val="accent1"/>
-          </a:effectRef>
-          <a:fontRef idx="minor">
-            <a:schemeClr val="lt1"/>
-          </a:fontRef>
-        </p:style>
         <p:txBody>
           <a:bodyPr rtlCol="0" anchor="ctr"/>
           <a:lstStyle/>
@@ -3217,7 +3193,7 @@
           <p:cNvPr id="4" name="TextBox 3"/>
           <p:cNvSpPr/>
           <p:nvPr>
-            <p:ph type="body" idx="1"/>
+            <p:ph type="body" idx="2"/>
           </p:nvPr>
         </p:nvSpPr>
         <p:spPr>
@@ -3254,7 +3230,7 @@
           <p:cNvPr id="5" name="TextBox 4"/>
           <p:cNvSpPr/>
           <p:nvPr>
-            <p:ph type="body" idx="2"/>
+            <p:ph type="body" idx="3"/>
           </p:nvPr>
         </p:nvSpPr>
         <p:spPr>
@@ -3291,7 +3267,7 @@
           <p:cNvPr id="6" name="TextBox 5"/>
           <p:cNvSpPr/>
           <p:nvPr>
-            <p:ph type="body" idx="3"/>
+            <p:ph type="body" idx="4"/>
           </p:nvPr>
         </p:nvSpPr>
         <p:spPr>
@@ -3328,7 +3304,7 @@
           <p:cNvPr id="7" name="TextBox 6"/>
           <p:cNvSpPr/>
           <p:nvPr>
-            <p:ph type="body" idx="4"/>
+            <p:ph type="body" idx="5"/>
           </p:nvPr>
         </p:nvSpPr>
         <p:spPr>
@@ -3365,7 +3341,7 @@
           <p:cNvPr id="8" name="TextBox 7"/>
           <p:cNvSpPr/>
           <p:nvPr>
-            <p:ph type="body" idx="5"/>
+            <p:ph type="body" idx="6"/>
           </p:nvPr>
         </p:nvSpPr>
         <p:spPr>
@@ -3402,7 +3378,7 @@
           <p:cNvPr id="9" name="TextBox 8"/>
           <p:cNvSpPr/>
           <p:nvPr>
-            <p:ph type="body" idx="6"/>
+            <p:ph type="body" idx="7"/>
           </p:nvPr>
         </p:nvSpPr>
         <p:spPr>
@@ -3439,7 +3415,7 @@
           <p:cNvPr id="10" name="TextBox 9"/>
           <p:cNvSpPr/>
           <p:nvPr>
-            <p:ph type="body" idx="7"/>
+            <p:ph type="body" idx="8"/>
           </p:nvPr>
         </p:nvSpPr>
         <p:spPr>
@@ -3476,7 +3452,7 @@
           <p:cNvPr id="11" name="TextBox 10"/>
           <p:cNvSpPr/>
           <p:nvPr>
-            <p:ph type="body" idx="8"/>
+            <p:ph type="body" idx="9"/>
           </p:nvPr>
         </p:nvSpPr>
         <p:spPr>
@@ -3513,7 +3489,7 @@
           <p:cNvPr id="12" name="TextBox 11"/>
           <p:cNvSpPr/>
           <p:nvPr>
-            <p:ph type="body" idx="9"/>
+            <p:ph type="body" idx="13"/>
           </p:nvPr>
         </p:nvSpPr>
         <p:spPr>
@@ -3550,7 +3526,7 @@
           <p:cNvPr id="13" name="TextBox 12"/>
           <p:cNvSpPr/>
           <p:nvPr>
-            <p:ph type="body" idx="13"/>
+            <p:ph type="body" idx="14"/>
           </p:nvPr>
         </p:nvSpPr>
         <p:spPr>
@@ -3661,7 +3637,9 @@
         <p:nvSpPr>
           <p:cNvPr id="3" name="Rectangle 2"/>
           <p:cNvSpPr/>
-          <p:nvPr/>
+          <p:nvPr>
+            <p:ph type="body" idx="2"/>
+          </p:nvPr>
         </p:nvSpPr>
         <p:spPr>
           <a:xfrm>
@@ -3679,20 +3657,6 @@
           </a:ln>
           <a:effectLst/>
         </p:spPr>
-        <p:style>
-          <a:lnRef idx="1">
-            <a:schemeClr val="accent1"/>
-          </a:lnRef>
-          <a:fillRef idx="3">
-            <a:schemeClr val="accent1"/>
-          </a:fillRef>
-          <a:effectRef idx="2">
-            <a:schemeClr val="accent1"/>
-          </a:effectRef>
-          <a:fontRef idx="minor">
-            <a:schemeClr val="lt1"/>
-          </a:fontRef>
-        </p:style>
         <p:txBody>
           <a:bodyPr rtlCol="0" anchor="ctr"/>
           <a:lstStyle/>
@@ -3706,7 +3670,7 @@
           <p:cNvPr id="4" name="TextBox 3"/>
           <p:cNvSpPr/>
           <p:nvPr>
-            <p:ph type="body" idx="2"/>
+            <p:ph type="body" idx="3"/>
           </p:nvPr>
         </p:nvSpPr>
         <p:spPr>
@@ -3780,7 +3744,9 @@
         <p:nvSpPr>
           <p:cNvPr id="2" name="Rectangle 1"/>
           <p:cNvSpPr/>
-          <p:nvPr/>
+          <p:nvPr>
+            <p:ph type="body" idx="1"/>
+          </p:nvPr>
         </p:nvSpPr>
         <p:spPr>
           <a:xfrm>
@@ -3798,20 +3764,6 @@
           </a:ln>
           <a:effectLst/>
         </p:spPr>
-        <p:style>
-          <a:lnRef idx="1">
-            <a:schemeClr val="accent1"/>
-          </a:lnRef>
-          <a:fillRef idx="3">
-            <a:schemeClr val="accent1"/>
-          </a:fillRef>
-          <a:effectRef idx="2">
-            <a:schemeClr val="accent1"/>
-          </a:effectRef>
-          <a:fontRef idx="minor">
-            <a:schemeClr val="lt1"/>
-          </a:fontRef>
-        </p:style>
         <p:txBody>
           <a:bodyPr rtlCol="0" anchor="ctr"/>
           <a:lstStyle/>
@@ -3825,7 +3777,7 @@
           <p:cNvPr id="3" name="TextBox 2"/>
           <p:cNvSpPr/>
           <p:nvPr>
-            <p:ph type="body" idx="1"/>
+            <p:ph type="body" idx="2"/>
           </p:nvPr>
         </p:nvSpPr>
         <p:spPr>
@@ -3862,7 +3814,7 @@
           <p:cNvPr id="4" name="TextBox 3"/>
           <p:cNvSpPr/>
           <p:nvPr>
-            <p:ph type="body" idx="2"/>
+            <p:ph type="body" idx="3"/>
           </p:nvPr>
         </p:nvSpPr>
         <p:spPr>
@@ -3936,7 +3888,9 @@
         <p:nvSpPr>
           <p:cNvPr id="2" name="Rectangle 1"/>
           <p:cNvSpPr/>
-          <p:nvPr/>
+          <p:nvPr>
+            <p:ph type="body" idx="1"/>
+          </p:nvPr>
         </p:nvSpPr>
         <p:spPr>
           <a:xfrm>
@@ -3954,20 +3908,6 @@
           </a:ln>
           <a:effectLst/>
         </p:spPr>
-        <p:style>
-          <a:lnRef idx="1">
-            <a:schemeClr val="accent1"/>
-          </a:lnRef>
-          <a:fillRef idx="3">
-            <a:schemeClr val="accent1"/>
-          </a:fillRef>
-          <a:effectRef idx="2">
-            <a:schemeClr val="accent1"/>
-          </a:effectRef>
-          <a:fontRef idx="minor">
-            <a:schemeClr val="lt1"/>
-          </a:fontRef>
-        </p:style>
         <p:txBody>
           <a:bodyPr rtlCol="0" anchor="ctr"/>
           <a:lstStyle/>
@@ -3981,7 +3921,7 @@
           <p:cNvPr id="3" name="TextBox 2"/>
           <p:cNvSpPr/>
           <p:nvPr>
-            <p:ph type="body" idx="1"/>
+            <p:ph type="body" idx="2"/>
           </p:nvPr>
         </p:nvSpPr>
         <p:spPr>
@@ -4018,7 +3958,7 @@
           <p:cNvPr id="4" name="TextBox 3"/>
           <p:cNvSpPr/>
           <p:nvPr>
-            <p:ph type="body" idx="2"/>
+            <p:ph type="body" idx="3"/>
           </p:nvPr>
         </p:nvSpPr>
         <p:spPr>
@@ -4092,7 +4032,9 @@
         <p:nvSpPr>
           <p:cNvPr id="2" name="Rectangle 1"/>
           <p:cNvSpPr/>
-          <p:nvPr/>
+          <p:nvPr>
+            <p:ph type="body" idx="1"/>
+          </p:nvPr>
         </p:nvSpPr>
         <p:spPr>
           <a:xfrm>
@@ -4110,20 +4052,6 @@
           </a:ln>
           <a:effectLst/>
         </p:spPr>
-        <p:style>
-          <a:lnRef idx="1">
-            <a:schemeClr val="accent1"/>
-          </a:lnRef>
-          <a:fillRef idx="3">
-            <a:schemeClr val="accent1"/>
-          </a:fillRef>
-          <a:effectRef idx="2">
-            <a:schemeClr val="accent1"/>
-          </a:effectRef>
-          <a:fontRef idx="minor">
-            <a:schemeClr val="lt1"/>
-          </a:fontRef>
-        </p:style>
         <p:txBody>
           <a:bodyPr rtlCol="0" anchor="ctr"/>
           <a:lstStyle/>
@@ -4137,7 +4065,7 @@
           <p:cNvPr id="3" name="TextBox 2"/>
           <p:cNvSpPr/>
           <p:nvPr>
-            <p:ph type="body" idx="1"/>
+            <p:ph type="body" idx="2"/>
           </p:nvPr>
         </p:nvSpPr>
         <p:spPr>
@@ -4397,7 +4325,9 @@
         <p:nvSpPr>
           <p:cNvPr id="2" name="Rectangle 1"/>
           <p:cNvSpPr/>
-          <p:nvPr/>
+          <p:nvPr>
+            <p:ph type="body" idx="1"/>
+          </p:nvPr>
         </p:nvSpPr>
         <p:spPr>
           <a:xfrm>
@@ -4415,20 +4345,6 @@
           </a:ln>
           <a:effectLst/>
         </p:spPr>
-        <p:style>
-          <a:lnRef idx="1">
-            <a:schemeClr val="accent1"/>
-          </a:lnRef>
-          <a:fillRef idx="3">
-            <a:schemeClr val="accent1"/>
-          </a:fillRef>
-          <a:effectRef idx="2">
-            <a:schemeClr val="accent1"/>
-          </a:effectRef>
-          <a:fontRef idx="minor">
-            <a:schemeClr val="lt1"/>
-          </a:fontRef>
-        </p:style>
         <p:txBody>
           <a:bodyPr rtlCol="0" anchor="ctr"/>
           <a:lstStyle/>
@@ -4441,7 +4357,9 @@
         <p:nvSpPr>
           <p:cNvPr id="3" name="Rectangle 2"/>
           <p:cNvSpPr/>
-          <p:nvPr/>
+          <p:nvPr>
+            <p:ph type="body" idx="2"/>
+          </p:nvPr>
         </p:nvSpPr>
         <p:spPr>
           <a:xfrm>
@@ -4459,20 +4377,6 @@
           </a:ln>
           <a:effectLst/>
         </p:spPr>
-        <p:style>
-          <a:lnRef idx="1">
-            <a:schemeClr val="accent1"/>
-          </a:lnRef>
-          <a:fillRef idx="3">
-            <a:schemeClr val="accent1"/>
-          </a:fillRef>
-          <a:effectRef idx="2">
-            <a:schemeClr val="accent1"/>
-          </a:effectRef>
-          <a:fontRef idx="minor">
-            <a:schemeClr val="lt1"/>
-          </a:fontRef>
-        </p:style>
         <p:txBody>
           <a:bodyPr rtlCol="0" anchor="ctr"/>
           <a:lstStyle/>
@@ -4485,7 +4389,9 @@
         <p:nvSpPr>
           <p:cNvPr id="4" name="Rectangle 3"/>
           <p:cNvSpPr/>
-          <p:nvPr/>
+          <p:nvPr>
+            <p:ph type="body" idx="3"/>
+          </p:nvPr>
         </p:nvSpPr>
         <p:spPr>
           <a:xfrm>
@@ -4503,20 +4409,6 @@
           </a:ln>
           <a:effectLst/>
         </p:spPr>
-        <p:style>
-          <a:lnRef idx="1">
-            <a:schemeClr val="accent1"/>
-          </a:lnRef>
-          <a:fillRef idx="3">
-            <a:schemeClr val="accent1"/>
-          </a:fillRef>
-          <a:effectRef idx="2">
-            <a:schemeClr val="accent1"/>
-          </a:effectRef>
-          <a:fontRef idx="minor">
-            <a:schemeClr val="lt1"/>
-          </a:fontRef>
-        </p:style>
         <p:txBody>
           <a:bodyPr rtlCol="0" anchor="ctr"/>
           <a:lstStyle/>
@@ -4530,7 +4422,7 @@
           <p:cNvPr id="5" name="TextBox 4"/>
           <p:cNvSpPr/>
           <p:nvPr>
-            <p:ph type="body" idx="1"/>
+            <p:ph type="body" idx="4"/>
           </p:nvPr>
         </p:nvSpPr>
         <p:spPr>
@@ -4567,7 +4459,7 @@
           <p:cNvPr id="6" name="TextBox 5"/>
           <p:cNvSpPr/>
           <p:nvPr>
-            <p:ph type="body" idx="2"/>
+            <p:ph type="body" idx="5"/>
           </p:nvPr>
         </p:nvSpPr>
         <p:spPr>
@@ -4604,7 +4496,7 @@
           <p:cNvPr id="7" name="TextBox 6"/>
           <p:cNvSpPr/>
           <p:nvPr>
-            <p:ph type="body" idx="3"/>
+            <p:ph type="body" idx="6"/>
           </p:nvPr>
         </p:nvSpPr>
         <p:spPr>
@@ -4641,7 +4533,7 @@
           <p:cNvPr id="8" name="TextBox 7"/>
           <p:cNvSpPr/>
           <p:nvPr>
-            <p:ph type="body" idx="4"/>
+            <p:ph type="body" idx="7"/>
           </p:nvPr>
         </p:nvSpPr>
         <p:spPr>
@@ -4678,7 +4570,7 @@
           <p:cNvPr id="9" name="TextBox 8"/>
           <p:cNvSpPr/>
           <p:nvPr>
-            <p:ph type="body" idx="5"/>
+            <p:ph type="body" idx="8"/>
           </p:nvPr>
         </p:nvSpPr>
         <p:spPr>
@@ -4715,7 +4607,7 @@
           <p:cNvPr id="10" name="TextBox 9"/>
           <p:cNvSpPr/>
           <p:nvPr>
-            <p:ph type="body" idx="6"/>
+            <p:ph type="body" idx="9"/>
           </p:nvPr>
         </p:nvSpPr>
         <p:spPr>
@@ -4752,7 +4644,7 @@
           <p:cNvPr id="11" name="TextBox 10"/>
           <p:cNvSpPr/>
           <p:nvPr>
-            <p:ph type="body" idx="7"/>
+            <p:ph type="body" idx="13"/>
           </p:nvPr>
         </p:nvSpPr>
         <p:spPr>
@@ -4789,7 +4681,7 @@
           <p:cNvPr id="12" name="TextBox 11"/>
           <p:cNvSpPr/>
           <p:nvPr>
-            <p:ph type="body" idx="8"/>
+            <p:ph type="body" idx="14"/>
           </p:nvPr>
         </p:nvSpPr>
         <p:spPr>
@@ -4826,7 +4718,7 @@
           <p:cNvPr id="13" name="TextBox 12"/>
           <p:cNvSpPr/>
           <p:nvPr>
-            <p:ph type="body" idx="9"/>
+            <p:ph type="body" idx="15"/>
           </p:nvPr>
         </p:nvSpPr>
         <p:spPr>
@@ -4863,7 +4755,7 @@
           <p:cNvPr id="14" name="TextBox 13"/>
           <p:cNvSpPr/>
           <p:nvPr>
-            <p:ph type="body" idx="13"/>
+            <p:ph type="body" idx="16"/>
           </p:nvPr>
         </p:nvSpPr>
         <p:spPr>
@@ -4900,7 +4792,7 @@
           <p:cNvPr id="15" name="TextBox 14"/>
           <p:cNvSpPr/>
           <p:nvPr>
-            <p:ph type="body" idx="14"/>
+            <p:ph type="body" idx="17"/>
           </p:nvPr>
         </p:nvSpPr>
         <p:spPr>
@@ -4937,7 +4829,7 @@
           <p:cNvPr id="16" name="TextBox 15"/>
           <p:cNvSpPr/>
           <p:nvPr>
-            <p:ph type="body" idx="15"/>
+            <p:ph type="body" idx="18"/>
           </p:nvPr>
         </p:nvSpPr>
         <p:spPr>
@@ -4974,7 +4866,7 @@
           <p:cNvPr id="17" name="TextBox 16"/>
           <p:cNvSpPr/>
           <p:nvPr>
-            <p:ph type="body" idx="16"/>
+            <p:ph type="body" idx="19"/>
           </p:nvPr>
         </p:nvSpPr>
         <p:spPr>
@@ -5011,7 +4903,7 @@
           <p:cNvPr id="18" name="TextBox 17"/>
           <p:cNvSpPr/>
           <p:nvPr>
-            <p:ph type="body" idx="17"/>
+            <p:ph type="body" idx="20"/>
           </p:nvPr>
         </p:nvSpPr>
         <p:spPr>
@@ -5048,7 +4940,7 @@
           <p:cNvPr id="19" name="TextBox 18"/>
           <p:cNvSpPr/>
           <p:nvPr>
-            <p:ph type="body" idx="18"/>
+            <p:ph type="body" idx="21"/>
           </p:nvPr>
         </p:nvSpPr>
         <p:spPr>
@@ -5085,7 +4977,7 @@
           <p:cNvPr id="20" name="TextBox 19"/>
           <p:cNvSpPr/>
           <p:nvPr>
-            <p:ph type="body" idx="19"/>
+            <p:ph type="body" idx="22"/>
           </p:nvPr>
         </p:nvSpPr>
         <p:spPr>
@@ -5196,7 +5088,9 @@
         <p:nvSpPr>
           <p:cNvPr id="3" name="Rounded Rectangle 2"/>
           <p:cNvSpPr/>
-          <p:nvPr/>
+          <p:nvPr>
+            <p:ph type="body" idx="1"/>
+          </p:nvPr>
         </p:nvSpPr>
         <p:spPr>
           <a:xfrm>
@@ -5216,20 +5110,6 @@
           </a:ln>
           <a:effectLst/>
         </p:spPr>
-        <p:style>
-          <a:lnRef idx="1">
-            <a:schemeClr val="accent1"/>
-          </a:lnRef>
-          <a:fillRef idx="3">
-            <a:schemeClr val="accent1"/>
-          </a:fillRef>
-          <a:effectRef idx="2">
-            <a:schemeClr val="accent1"/>
-          </a:effectRef>
-          <a:fontRef idx="minor">
-            <a:schemeClr val="lt1"/>
-          </a:fontRef>
-        </p:style>
         <p:txBody>
           <a:bodyPr rtlCol="0" anchor="ctr"/>
           <a:lstStyle/>
@@ -5243,7 +5123,7 @@
           <p:cNvPr id="4" name="TextBox 3"/>
           <p:cNvSpPr/>
           <p:nvPr>
-            <p:ph type="body" idx="1"/>
+            <p:ph type="body" idx="2"/>
           </p:nvPr>
         </p:nvSpPr>
         <p:spPr>
@@ -5280,7 +5160,7 @@
           <p:cNvPr id="5" name="TextBox 4"/>
           <p:cNvSpPr/>
           <p:nvPr>
-            <p:ph type="body" idx="2"/>
+            <p:ph type="body" idx="3"/>
           </p:nvPr>
         </p:nvSpPr>
         <p:spPr>
@@ -5317,7 +5197,7 @@
           <p:cNvPr id="6" name="TextBox 5"/>
           <p:cNvSpPr/>
           <p:nvPr>
-            <p:ph type="body" idx="3"/>
+            <p:ph type="body" idx="4"/>
           </p:nvPr>
         </p:nvSpPr>
         <p:spPr>
@@ -5354,7 +5234,7 @@
           <p:cNvPr id="7" name="TextBox 6"/>
           <p:cNvSpPr/>
           <p:nvPr>
-            <p:ph type="body" idx="4"/>
+            <p:ph type="body" idx="5"/>
           </p:nvPr>
         </p:nvSpPr>
         <p:spPr>
@@ -5391,7 +5271,7 @@
           <p:cNvPr id="8" name="TextBox 7"/>
           <p:cNvSpPr/>
           <p:nvPr>
-            <p:ph type="body" idx="5"/>
+            <p:ph type="body" idx="6"/>
           </p:nvPr>
         </p:nvSpPr>
         <p:spPr>
@@ -5428,7 +5308,7 @@
           <p:cNvPr id="9" name="TextBox 8"/>
           <p:cNvSpPr/>
           <p:nvPr>
-            <p:ph type="body" idx="6"/>
+            <p:ph type="body" idx="7"/>
           </p:nvPr>
         </p:nvSpPr>
         <p:spPr>
@@ -5465,7 +5345,7 @@
           <p:cNvPr id="10" name="TextBox 9"/>
           <p:cNvSpPr/>
           <p:nvPr>
-            <p:ph type="body" idx="7"/>
+            <p:ph type="body" idx="8"/>
           </p:nvPr>
         </p:nvSpPr>
         <p:spPr>
@@ -5502,7 +5382,7 @@
           <p:cNvPr id="11" name="TextBox 10"/>
           <p:cNvSpPr/>
           <p:nvPr>
-            <p:ph type="body" idx="8"/>
+            <p:ph type="body" idx="9"/>
           </p:nvPr>
         </p:nvSpPr>
         <p:spPr>
@@ -5539,7 +5419,7 @@
           <p:cNvPr id="12" name="TextBox 11"/>
           <p:cNvSpPr/>
           <p:nvPr>
-            <p:ph type="body" idx="9"/>
+            <p:ph type="body" idx="13"/>
           </p:nvPr>
         </p:nvSpPr>
         <p:spPr>
@@ -5576,7 +5456,7 @@
           <p:cNvPr id="13" name="TextBox 12"/>
           <p:cNvSpPr/>
           <p:nvPr>
-            <p:ph type="body" idx="13"/>
+            <p:ph type="body" idx="14"/>
           </p:nvPr>
         </p:nvSpPr>
         <p:spPr>
@@ -5613,7 +5493,7 @@
           <p:cNvPr id="14" name="TextBox 13"/>
           <p:cNvSpPr/>
           <p:nvPr>
-            <p:ph type="body" idx="14"/>
+            <p:ph type="body" idx="15"/>
           </p:nvPr>
         </p:nvSpPr>
         <p:spPr>
@@ -5650,7 +5530,7 @@
           <p:cNvPr id="15" name="TextBox 14"/>
           <p:cNvSpPr/>
           <p:nvPr>
-            <p:ph type="body" idx="15"/>
+            <p:ph type="body" idx="16"/>
           </p:nvPr>
         </p:nvSpPr>
         <p:spPr>
@@ -5687,7 +5567,7 @@
           <p:cNvPr id="16" name="TextBox 15"/>
           <p:cNvSpPr/>
           <p:nvPr>
-            <p:ph type="body" idx="16"/>
+            <p:ph type="body" idx="17"/>
           </p:nvPr>
         </p:nvSpPr>
         <p:spPr>
@@ -5724,7 +5604,7 @@
           <p:cNvPr id="17" name="TextBox 16"/>
           <p:cNvSpPr/>
           <p:nvPr>
-            <p:ph type="body" idx="17"/>
+            <p:ph type="body" idx="18"/>
           </p:nvPr>
         </p:nvSpPr>
         <p:spPr>
@@ -5761,7 +5641,7 @@
           <p:cNvPr id="18" name="TextBox 17"/>
           <p:cNvSpPr/>
           <p:nvPr>
-            <p:ph type="body" idx="18"/>
+            <p:ph type="body" idx="19"/>
           </p:nvPr>
         </p:nvSpPr>
         <p:spPr>
@@ -6317,7 +6197,9 @@
         <p:nvSpPr>
           <p:cNvPr id="4" name="Rectangle 3"/>
           <p:cNvSpPr/>
-          <p:nvPr/>
+          <p:nvPr>
+            <p:ph type="body" idx="2"/>
+          </p:nvPr>
         </p:nvSpPr>
         <p:spPr>
           <a:xfrm>
@@ -6335,20 +6217,6 @@
           </a:ln>
           <a:effectLst/>
         </p:spPr>
-        <p:style>
-          <a:lnRef idx="1">
-            <a:schemeClr val="accent1"/>
-          </a:lnRef>
-          <a:fillRef idx="3">
-            <a:schemeClr val="accent1"/>
-          </a:fillRef>
-          <a:effectRef idx="2">
-            <a:schemeClr val="accent1"/>
-          </a:effectRef>
-          <a:fontRef idx="minor">
-            <a:schemeClr val="lt1"/>
-          </a:fontRef>
-        </p:style>
         <p:txBody>
           <a:bodyPr rtlCol="0" anchor="ctr"/>
           <a:lstStyle/>
@@ -6362,7 +6230,7 @@
           <p:cNvPr id="5" name="TextBox 4"/>
           <p:cNvSpPr/>
           <p:nvPr>
-            <p:ph type="body" idx="2"/>
+            <p:ph type="body" idx="3"/>
           </p:nvPr>
         </p:nvSpPr>
         <p:spPr>
@@ -6398,7 +6266,9 @@
         <p:nvSpPr>
           <p:cNvPr id="6" name="Rectangle 5"/>
           <p:cNvSpPr/>
-          <p:nvPr/>
+          <p:nvPr>
+            <p:ph type="body" idx="4"/>
+          </p:nvPr>
         </p:nvSpPr>
         <p:spPr>
           <a:xfrm>
@@ -6416,20 +6286,6 @@
           </a:ln>
           <a:effectLst/>
         </p:spPr>
-        <p:style>
-          <a:lnRef idx="1">
-            <a:schemeClr val="accent1"/>
-          </a:lnRef>
-          <a:fillRef idx="3">
-            <a:schemeClr val="accent1"/>
-          </a:fillRef>
-          <a:effectRef idx="2">
-            <a:schemeClr val="accent1"/>
-          </a:effectRef>
-          <a:fontRef idx="minor">
-            <a:schemeClr val="lt1"/>
-          </a:fontRef>
-        </p:style>
         <p:txBody>
           <a:bodyPr rtlCol="0" anchor="ctr"/>
           <a:lstStyle/>
@@ -6443,7 +6299,7 @@
           <p:cNvPr id="7" name="TextBox 6"/>
           <p:cNvSpPr/>
           <p:nvPr>
-            <p:ph type="body" idx="3"/>
+            <p:ph type="body" idx="5"/>
           </p:nvPr>
         </p:nvSpPr>
         <p:spPr>
@@ -6480,7 +6336,7 @@
           <p:cNvPr id="8" name="TextBox 7"/>
           <p:cNvSpPr/>
           <p:nvPr>
-            <p:ph type="body" idx="4"/>
+            <p:ph type="body" idx="6"/>
           </p:nvPr>
         </p:nvSpPr>
         <p:spPr>
@@ -6517,7 +6373,7 @@
           <p:cNvPr id="9" name="TextBox 8"/>
           <p:cNvSpPr/>
           <p:nvPr>
-            <p:ph type="body" idx="5"/>
+            <p:ph type="body" idx="7"/>
           </p:nvPr>
         </p:nvSpPr>
         <p:spPr>
@@ -6554,7 +6410,7 @@
           <p:cNvPr id="10" name="TextBox 9"/>
           <p:cNvSpPr/>
           <p:nvPr>
-            <p:ph type="body" idx="6"/>
+            <p:ph type="body" idx="8"/>
           </p:nvPr>
         </p:nvSpPr>
         <p:spPr>
@@ -6591,7 +6447,7 @@
           <p:cNvPr id="11" name="TextBox 10"/>
           <p:cNvSpPr/>
           <p:nvPr>
-            <p:ph type="body" idx="7"/>
+            <p:ph type="body" idx="9"/>
           </p:nvPr>
         </p:nvSpPr>
         <p:spPr>
@@ -6628,7 +6484,7 @@
           <p:cNvPr id="12" name="TextBox 11"/>
           <p:cNvSpPr/>
           <p:nvPr>
-            <p:ph type="body" idx="8"/>
+            <p:ph type="body" idx="13"/>
           </p:nvPr>
         </p:nvSpPr>
         <p:spPr>
@@ -7282,7 +7138,9 @@
         <p:nvSpPr>
           <p:cNvPr id="4" name="Rectangle 3"/>
           <p:cNvSpPr/>
-          <p:nvPr/>
+          <p:nvPr>
+            <p:ph type="body" idx="2"/>
+          </p:nvPr>
         </p:nvSpPr>
         <p:spPr>
           <a:xfrm>
@@ -7300,20 +7158,6 @@
           </a:ln>
           <a:effectLst/>
         </p:spPr>
-        <p:style>
-          <a:lnRef idx="1">
-            <a:schemeClr val="accent1"/>
-          </a:lnRef>
-          <a:fillRef idx="3">
-            <a:schemeClr val="accent1"/>
-          </a:fillRef>
-          <a:effectRef idx="2">
-            <a:schemeClr val="accent1"/>
-          </a:effectRef>
-          <a:fontRef idx="minor">
-            <a:schemeClr val="lt1"/>
-          </a:fontRef>
-        </p:style>
         <p:txBody>
           <a:bodyPr rtlCol="0" anchor="ctr"/>
           <a:lstStyle/>
@@ -7327,7 +7171,7 @@
           <p:cNvPr id="5" name="TextBox 4"/>
           <p:cNvSpPr/>
           <p:nvPr>
-            <p:ph type="body" idx="2"/>
+            <p:ph type="body" idx="3"/>
           </p:nvPr>
         </p:nvSpPr>
         <p:spPr>
@@ -7364,7 +7208,7 @@
           <p:cNvPr id="6" name="TextBox 5"/>
           <p:cNvSpPr/>
           <p:nvPr>
-            <p:ph type="body" idx="3"/>
+            <p:ph type="body" idx="4"/>
           </p:nvPr>
         </p:nvSpPr>
         <p:spPr>
@@ -7400,7 +7244,9 @@
         <p:nvSpPr>
           <p:cNvPr id="7" name="Rectangle 6"/>
           <p:cNvSpPr/>
-          <p:nvPr/>
+          <p:nvPr>
+            <p:ph type="body" idx="5"/>
+          </p:nvPr>
         </p:nvSpPr>
         <p:spPr>
           <a:xfrm>
@@ -7418,20 +7264,6 @@
           </a:ln>
           <a:effectLst/>
         </p:spPr>
-        <p:style>
-          <a:lnRef idx="1">
-            <a:schemeClr val="accent1"/>
-          </a:lnRef>
-          <a:fillRef idx="3">
-            <a:schemeClr val="accent1"/>
-          </a:fillRef>
-          <a:effectRef idx="2">
-            <a:schemeClr val="accent1"/>
-          </a:effectRef>
-          <a:fontRef idx="minor">
-            <a:schemeClr val="lt1"/>
-          </a:fontRef>
-        </p:style>
         <p:txBody>
           <a:bodyPr rtlCol="0" anchor="ctr"/>
           <a:lstStyle/>
@@ -7445,7 +7277,7 @@
           <p:cNvPr id="8" name="TextBox 7"/>
           <p:cNvSpPr/>
           <p:nvPr>
-            <p:ph type="body" idx="4"/>
+            <p:ph type="body" idx="6"/>
           </p:nvPr>
         </p:nvSpPr>
         <p:spPr>
@@ -7482,7 +7314,7 @@
           <p:cNvPr id="9" name="TextBox 8"/>
           <p:cNvSpPr/>
           <p:nvPr>
-            <p:ph type="body" idx="5"/>
+            <p:ph type="body" idx="7"/>
           </p:nvPr>
         </p:nvSpPr>
         <p:spPr>
@@ -7518,7 +7350,9 @@
         <p:nvSpPr>
           <p:cNvPr id="10" name="Rectangle 9"/>
           <p:cNvSpPr/>
-          <p:nvPr/>
+          <p:nvPr>
+            <p:ph type="body" idx="8"/>
+          </p:nvPr>
         </p:nvSpPr>
         <p:spPr>
           <a:xfrm>
@@ -7536,20 +7370,6 @@
           </a:ln>
           <a:effectLst/>
         </p:spPr>
-        <p:style>
-          <a:lnRef idx="1">
-            <a:schemeClr val="accent1"/>
-          </a:lnRef>
-          <a:fillRef idx="3">
-            <a:schemeClr val="accent1"/>
-          </a:fillRef>
-          <a:effectRef idx="2">
-            <a:schemeClr val="accent1"/>
-          </a:effectRef>
-          <a:fontRef idx="minor">
-            <a:schemeClr val="lt1"/>
-          </a:fontRef>
-        </p:style>
         <p:txBody>
           <a:bodyPr rtlCol="0" anchor="ctr"/>
           <a:lstStyle/>
@@ -7563,7 +7383,7 @@
           <p:cNvPr id="11" name="TextBox 10"/>
           <p:cNvSpPr/>
           <p:nvPr>
-            <p:ph type="body" idx="6"/>
+            <p:ph type="body" idx="9"/>
           </p:nvPr>
         </p:nvSpPr>
         <p:spPr>
@@ -7600,7 +7420,7 @@
           <p:cNvPr id="12" name="TextBox 11"/>
           <p:cNvSpPr/>
           <p:nvPr>
-            <p:ph type="body" idx="7"/>
+            <p:ph type="body" idx="13"/>
           </p:nvPr>
         </p:nvSpPr>
         <p:spPr>
@@ -7636,7 +7456,9 @@
         <p:nvSpPr>
           <p:cNvPr id="13" name="Rectangle 12"/>
           <p:cNvSpPr/>
-          <p:nvPr/>
+          <p:nvPr>
+            <p:ph type="body" idx="14"/>
+          </p:nvPr>
         </p:nvSpPr>
         <p:spPr>
           <a:xfrm>
@@ -7654,20 +7476,6 @@
           </a:ln>
           <a:effectLst/>
         </p:spPr>
-        <p:style>
-          <a:lnRef idx="1">
-            <a:schemeClr val="accent1"/>
-          </a:lnRef>
-          <a:fillRef idx="3">
-            <a:schemeClr val="accent1"/>
-          </a:fillRef>
-          <a:effectRef idx="2">
-            <a:schemeClr val="accent1"/>
-          </a:effectRef>
-          <a:fontRef idx="minor">
-            <a:schemeClr val="lt1"/>
-          </a:fontRef>
-        </p:style>
         <p:txBody>
           <a:bodyPr rtlCol="0" anchor="ctr"/>
           <a:lstStyle/>
@@ -7681,7 +7489,7 @@
           <p:cNvPr id="14" name="TextBox 13"/>
           <p:cNvSpPr/>
           <p:nvPr>
-            <p:ph type="body" idx="8"/>
+            <p:ph type="body" idx="15"/>
           </p:nvPr>
         </p:nvSpPr>
         <p:spPr>
@@ -7718,7 +7526,7 @@
           <p:cNvPr id="15" name="TextBox 14"/>
           <p:cNvSpPr/>
           <p:nvPr>
-            <p:ph type="body" idx="9"/>
+            <p:ph type="body" idx="16"/>
           </p:nvPr>
         </p:nvSpPr>
         <p:spPr>
@@ -7754,7 +7562,9 @@
         <p:nvSpPr>
           <p:cNvPr id="16" name="Rectangle 15"/>
           <p:cNvSpPr/>
-          <p:nvPr/>
+          <p:nvPr>
+            <p:ph type="body" idx="17"/>
+          </p:nvPr>
         </p:nvSpPr>
         <p:spPr>
           <a:xfrm>
@@ -7772,20 +7582,6 @@
           </a:ln>
           <a:effectLst/>
         </p:spPr>
-        <p:style>
-          <a:lnRef idx="1">
-            <a:schemeClr val="accent1"/>
-          </a:lnRef>
-          <a:fillRef idx="3">
-            <a:schemeClr val="accent1"/>
-          </a:fillRef>
-          <a:effectRef idx="2">
-            <a:schemeClr val="accent1"/>
-          </a:effectRef>
-          <a:fontRef idx="minor">
-            <a:schemeClr val="lt1"/>
-          </a:fontRef>
-        </p:style>
         <p:txBody>
           <a:bodyPr rtlCol="0" anchor="ctr"/>
           <a:lstStyle/>
@@ -7799,7 +7595,7 @@
           <p:cNvPr id="17" name="TextBox 16"/>
           <p:cNvSpPr/>
           <p:nvPr>
-            <p:ph type="body" idx="13"/>
+            <p:ph type="body" idx="18"/>
           </p:nvPr>
         </p:nvSpPr>
         <p:spPr>
@@ -7836,7 +7632,7 @@
           <p:cNvPr id="18" name="TextBox 17"/>
           <p:cNvSpPr/>
           <p:nvPr>
-            <p:ph type="body" idx="14"/>
+            <p:ph type="body" idx="19"/>
           </p:nvPr>
         </p:nvSpPr>
         <p:spPr>
@@ -7872,7 +7668,9 @@
         <p:nvSpPr>
           <p:cNvPr id="19" name="Rectangle 18"/>
           <p:cNvSpPr/>
-          <p:nvPr/>
+          <p:nvPr>
+            <p:ph type="body" idx="20"/>
+          </p:nvPr>
         </p:nvSpPr>
         <p:spPr>
           <a:xfrm>
@@ -7890,20 +7688,6 @@
           </a:ln>
           <a:effectLst/>
         </p:spPr>
-        <p:style>
-          <a:lnRef idx="1">
-            <a:schemeClr val="accent1"/>
-          </a:lnRef>
-          <a:fillRef idx="3">
-            <a:schemeClr val="accent1"/>
-          </a:fillRef>
-          <a:effectRef idx="2">
-            <a:schemeClr val="accent1"/>
-          </a:effectRef>
-          <a:fontRef idx="minor">
-            <a:schemeClr val="lt1"/>
-          </a:fontRef>
-        </p:style>
         <p:txBody>
           <a:bodyPr rtlCol="0" anchor="ctr"/>
           <a:lstStyle/>
@@ -7917,7 +7701,7 @@
           <p:cNvPr id="20" name="TextBox 19"/>
           <p:cNvSpPr/>
           <p:nvPr>
-            <p:ph type="body" idx="15"/>
+            <p:ph type="body" idx="21"/>
           </p:nvPr>
         </p:nvSpPr>
         <p:spPr>
@@ -8065,7 +7849,9 @@
         <p:nvSpPr>
           <p:cNvPr id="4" name="Rectangle 3"/>
           <p:cNvSpPr/>
-          <p:nvPr/>
+          <p:nvPr>
+            <p:ph type="body" idx="2"/>
+          </p:nvPr>
         </p:nvSpPr>
         <p:spPr>
           <a:xfrm>
@@ -8083,20 +7869,6 @@
           </a:ln>
           <a:effectLst/>
         </p:spPr>
-        <p:style>
-          <a:lnRef idx="1">
-            <a:schemeClr val="accent1"/>
-          </a:lnRef>
-          <a:fillRef idx="3">
-            <a:schemeClr val="accent1"/>
-          </a:fillRef>
-          <a:effectRef idx="2">
-            <a:schemeClr val="accent1"/>
-          </a:effectRef>
-          <a:fontRef idx="minor">
-            <a:schemeClr val="lt1"/>
-          </a:fontRef>
-        </p:style>
         <p:txBody>
           <a:bodyPr rtlCol="0" anchor="ctr"/>
           <a:lstStyle/>
@@ -8110,7 +7882,7 @@
           <p:cNvPr id="5" name="TextBox 4"/>
           <p:cNvSpPr/>
           <p:nvPr>
-            <p:ph type="body" idx="2"/>
+            <p:ph type="body" idx="3"/>
           </p:nvPr>
         </p:nvSpPr>
         <p:spPr>
@@ -8147,7 +7919,7 @@
           <p:cNvPr id="6" name="TextBox 5"/>
           <p:cNvSpPr/>
           <p:nvPr>
-            <p:ph type="body" idx="3"/>
+            <p:ph type="body" idx="4"/>
           </p:nvPr>
         </p:nvSpPr>
         <p:spPr>
@@ -8183,7 +7955,9 @@
         <p:nvSpPr>
           <p:cNvPr id="7" name="Rectangle 6"/>
           <p:cNvSpPr/>
-          <p:nvPr/>
+          <p:nvPr>
+            <p:ph type="body" idx="5"/>
+          </p:nvPr>
         </p:nvSpPr>
         <p:spPr>
           <a:xfrm>
@@ -8201,20 +7975,6 @@
           </a:ln>
           <a:effectLst/>
         </p:spPr>
-        <p:style>
-          <a:lnRef idx="1">
-            <a:schemeClr val="accent1"/>
-          </a:lnRef>
-          <a:fillRef idx="3">
-            <a:schemeClr val="accent1"/>
-          </a:fillRef>
-          <a:effectRef idx="2">
-            <a:schemeClr val="accent1"/>
-          </a:effectRef>
-          <a:fontRef idx="minor">
-            <a:schemeClr val="lt1"/>
-          </a:fontRef>
-        </p:style>
         <p:txBody>
           <a:bodyPr rtlCol="0" anchor="ctr"/>
           <a:lstStyle/>
@@ -8228,7 +7988,7 @@
           <p:cNvPr id="8" name="TextBox 7"/>
           <p:cNvSpPr/>
           <p:nvPr>
-            <p:ph type="body" idx="4"/>
+            <p:ph type="body" idx="6"/>
           </p:nvPr>
         </p:nvSpPr>
         <p:spPr>
@@ -8265,7 +8025,7 @@
           <p:cNvPr id="9" name="TextBox 8"/>
           <p:cNvSpPr/>
           <p:nvPr>
-            <p:ph type="body" idx="5"/>
+            <p:ph type="body" idx="7"/>
           </p:nvPr>
         </p:nvSpPr>
         <p:spPr>
@@ -8301,7 +8061,9 @@
         <p:nvSpPr>
           <p:cNvPr id="10" name="Rectangle 9"/>
           <p:cNvSpPr/>
-          <p:nvPr/>
+          <p:nvPr>
+            <p:ph type="body" idx="8"/>
+          </p:nvPr>
         </p:nvSpPr>
         <p:spPr>
           <a:xfrm>
@@ -8319,20 +8081,6 @@
           </a:ln>
           <a:effectLst/>
         </p:spPr>
-        <p:style>
-          <a:lnRef idx="1">
-            <a:schemeClr val="accent1"/>
-          </a:lnRef>
-          <a:fillRef idx="3">
-            <a:schemeClr val="accent1"/>
-          </a:fillRef>
-          <a:effectRef idx="2">
-            <a:schemeClr val="accent1"/>
-          </a:effectRef>
-          <a:fontRef idx="minor">
-            <a:schemeClr val="lt1"/>
-          </a:fontRef>
-        </p:style>
         <p:txBody>
           <a:bodyPr rtlCol="0" anchor="ctr"/>
           <a:lstStyle/>
@@ -8346,7 +8094,7 @@
           <p:cNvPr id="11" name="TextBox 10"/>
           <p:cNvSpPr/>
           <p:nvPr>
-            <p:ph type="body" idx="6"/>
+            <p:ph type="body" idx="9"/>
           </p:nvPr>
         </p:nvSpPr>
         <p:spPr>
@@ -8383,7 +8131,7 @@
           <p:cNvPr id="12" name="TextBox 11"/>
           <p:cNvSpPr/>
           <p:nvPr>
-            <p:ph type="body" idx="7"/>
+            <p:ph type="body" idx="13"/>
           </p:nvPr>
         </p:nvSpPr>
         <p:spPr>
@@ -8419,7 +8167,9 @@
         <p:nvSpPr>
           <p:cNvPr id="13" name="Rectangle 12"/>
           <p:cNvSpPr/>
-          <p:nvPr/>
+          <p:nvPr>
+            <p:ph type="body" idx="14"/>
+          </p:nvPr>
         </p:nvSpPr>
         <p:spPr>
           <a:xfrm>
@@ -8437,20 +8187,6 @@
           </a:ln>
           <a:effectLst/>
         </p:spPr>
-        <p:style>
-          <a:lnRef idx="1">
-            <a:schemeClr val="accent1"/>
-          </a:lnRef>
-          <a:fillRef idx="3">
-            <a:schemeClr val="accent1"/>
-          </a:fillRef>
-          <a:effectRef idx="2">
-            <a:schemeClr val="accent1"/>
-          </a:effectRef>
-          <a:fontRef idx="minor">
-            <a:schemeClr val="lt1"/>
-          </a:fontRef>
-        </p:style>
         <p:txBody>
           <a:bodyPr rtlCol="0" anchor="ctr"/>
           <a:lstStyle/>
@@ -8464,7 +8200,7 @@
           <p:cNvPr id="14" name="TextBox 13"/>
           <p:cNvSpPr/>
           <p:nvPr>
-            <p:ph type="body" idx="8"/>
+            <p:ph type="body" idx="15"/>
           </p:nvPr>
         </p:nvSpPr>
         <p:spPr>
@@ -8500,7 +8236,9 @@
         <p:nvSpPr>
           <p:cNvPr id="15" name="Rectangle 14"/>
           <p:cNvSpPr/>
-          <p:nvPr/>
+          <p:nvPr>
+            <p:ph type="body" idx="16"/>
+          </p:nvPr>
         </p:nvSpPr>
         <p:spPr>
           <a:xfrm>
@@ -8518,20 +8256,6 @@
           </a:ln>
           <a:effectLst/>
         </p:spPr>
-        <p:style>
-          <a:lnRef idx="1">
-            <a:schemeClr val="accent1"/>
-          </a:lnRef>
-          <a:fillRef idx="3">
-            <a:schemeClr val="accent1"/>
-          </a:fillRef>
-          <a:effectRef idx="2">
-            <a:schemeClr val="accent1"/>
-          </a:effectRef>
-          <a:fontRef idx="minor">
-            <a:schemeClr val="lt1"/>
-          </a:fontRef>
-        </p:style>
         <p:txBody>
           <a:bodyPr rtlCol="0" anchor="ctr"/>
           <a:lstStyle/>
@@ -8545,7 +8269,7 @@
           <p:cNvPr id="16" name="TextBox 15"/>
           <p:cNvSpPr/>
           <p:nvPr>
-            <p:ph type="body" idx="9"/>
+            <p:ph type="body" idx="17"/>
           </p:nvPr>
         </p:nvSpPr>
         <p:spPr>
@@ -8767,7 +8491,9 @@
         <p:nvSpPr>
           <p:cNvPr id="6" name="Rectangle 5"/>
           <p:cNvSpPr/>
-          <p:nvPr/>
+          <p:nvPr>
+            <p:ph type="body" idx="4"/>
+          </p:nvPr>
         </p:nvSpPr>
         <p:spPr>
           <a:xfrm>
@@ -8785,20 +8511,6 @@
           </a:ln>
           <a:effectLst/>
         </p:spPr>
-        <p:style>
-          <a:lnRef idx="1">
-            <a:schemeClr val="accent1"/>
-          </a:lnRef>
-          <a:fillRef idx="3">
-            <a:schemeClr val="accent1"/>
-          </a:fillRef>
-          <a:effectRef idx="2">
-            <a:schemeClr val="accent1"/>
-          </a:effectRef>
-          <a:fontRef idx="minor">
-            <a:schemeClr val="lt1"/>
-          </a:fontRef>
-        </p:style>
         <p:txBody>
           <a:bodyPr rtlCol="0" anchor="ctr"/>
           <a:lstStyle/>
@@ -8812,7 +8524,7 @@
           <p:cNvPr id="7" name="TextBox 6"/>
           <p:cNvSpPr/>
           <p:nvPr>
-            <p:ph type="body" idx="4"/>
+            <p:ph type="body" idx="5"/>
           </p:nvPr>
         </p:nvSpPr>
         <p:spPr>
@@ -8849,7 +8561,7 @@
           <p:cNvPr id="8" name="TextBox 7"/>
           <p:cNvSpPr/>
           <p:nvPr>
-            <p:ph type="body" idx="5"/>
+            <p:ph type="body" idx="6"/>
           </p:nvPr>
         </p:nvSpPr>
         <p:spPr>
@@ -8886,7 +8598,7 @@
           <p:cNvPr id="9" name="TextBox 8"/>
           <p:cNvSpPr/>
           <p:nvPr>
-            <p:ph type="body" idx="6"/>
+            <p:ph type="body" idx="7"/>
           </p:nvPr>
         </p:nvSpPr>
         <p:spPr>
@@ -8923,7 +8635,7 @@
           <p:cNvPr id="10" name="TextBox 9"/>
           <p:cNvSpPr/>
           <p:nvPr>
-            <p:ph type="body" idx="7"/>
+            <p:ph type="body" idx="8"/>
           </p:nvPr>
         </p:nvSpPr>
         <p:spPr>
@@ -8960,7 +8672,7 @@
           <p:cNvPr id="11" name="TextBox 10"/>
           <p:cNvSpPr/>
           <p:nvPr>
-            <p:ph type="body" idx="8"/>
+            <p:ph type="body" idx="9"/>
           </p:nvPr>
         </p:nvSpPr>
         <p:spPr>
@@ -8997,7 +8709,7 @@
           <p:cNvPr id="12" name="TextBox 11"/>
           <p:cNvSpPr/>
           <p:nvPr>
-            <p:ph type="body" idx="9"/>
+            <p:ph type="body" idx="13"/>
           </p:nvPr>
         </p:nvSpPr>
         <p:spPr>
@@ -9034,7 +8746,7 @@
           <p:cNvPr id="13" name="TextBox 12"/>
           <p:cNvSpPr/>
           <p:nvPr>
-            <p:ph type="body" idx="13"/>
+            <p:ph type="body" idx="14"/>
           </p:nvPr>
         </p:nvSpPr>
         <p:spPr>
@@ -9071,7 +8783,7 @@
           <p:cNvPr id="14" name="TextBox 13"/>
           <p:cNvSpPr/>
           <p:nvPr>
-            <p:ph type="body" idx="14"/>
+            <p:ph type="body" idx="15"/>
           </p:nvPr>
         </p:nvSpPr>
         <p:spPr>
@@ -9108,7 +8820,7 @@
           <p:cNvPr id="15" name="TextBox 14"/>
           <p:cNvSpPr/>
           <p:nvPr>
-            <p:ph type="body" idx="15"/>
+            <p:ph type="body" idx="16"/>
           </p:nvPr>
         </p:nvSpPr>
         <p:spPr>
@@ -9145,7 +8857,7 @@
           <p:cNvPr id="16" name="TextBox 15"/>
           <p:cNvSpPr/>
           <p:nvPr>
-            <p:ph type="body" idx="16"/>
+            <p:ph type="body" idx="17"/>
           </p:nvPr>
         </p:nvSpPr>
         <p:spPr>
@@ -9182,7 +8894,7 @@
           <p:cNvPr id="17" name="TextBox 16"/>
           <p:cNvSpPr/>
           <p:nvPr>
-            <p:ph type="body" idx="17"/>
+            <p:ph type="body" idx="18"/>
           </p:nvPr>
         </p:nvSpPr>
         <p:spPr>
@@ -9219,7 +8931,7 @@
           <p:cNvPr id="18" name="TextBox 17"/>
           <p:cNvSpPr/>
           <p:nvPr>
-            <p:ph type="body" idx="18"/>
+            <p:ph type="body" idx="19"/>
           </p:nvPr>
         </p:nvSpPr>
         <p:spPr>
@@ -9404,7 +9116,9 @@
         <p:nvSpPr>
           <p:cNvPr id="5" name="Rectangle 4"/>
           <p:cNvSpPr/>
-          <p:nvPr/>
+          <p:nvPr>
+            <p:ph type="body" idx="3"/>
+          </p:nvPr>
         </p:nvSpPr>
         <p:spPr>
           <a:xfrm>
@@ -9422,20 +9136,6 @@
           </a:ln>
           <a:effectLst/>
         </p:spPr>
-        <p:style>
-          <a:lnRef idx="1">
-            <a:schemeClr val="accent1"/>
-          </a:lnRef>
-          <a:fillRef idx="3">
-            <a:schemeClr val="accent1"/>
-          </a:fillRef>
-          <a:effectRef idx="2">
-            <a:schemeClr val="accent1"/>
-          </a:effectRef>
-          <a:fontRef idx="minor">
-            <a:schemeClr val="lt1"/>
-          </a:fontRef>
-        </p:style>
         <p:txBody>
           <a:bodyPr rtlCol="0" anchor="ctr"/>
           <a:lstStyle/>
@@ -9449,7 +9149,7 @@
           <p:cNvPr id="6" name="TextBox 5"/>
           <p:cNvSpPr/>
           <p:nvPr>
-            <p:ph type="body" idx="3"/>
+            <p:ph type="body" idx="4"/>
           </p:nvPr>
         </p:nvSpPr>
         <p:spPr>
@@ -9486,7 +9186,7 @@
           <p:cNvPr id="7" name="TextBox 6"/>
           <p:cNvSpPr/>
           <p:nvPr>
-            <p:ph type="body" idx="4"/>
+            <p:ph type="body" idx="5"/>
           </p:nvPr>
         </p:nvSpPr>
         <p:spPr>
@@ -9523,7 +9223,7 @@
           <p:cNvPr id="8" name="TextBox 7"/>
           <p:cNvSpPr/>
           <p:nvPr>
-            <p:ph type="body" idx="5"/>
+            <p:ph type="body" idx="6"/>
           </p:nvPr>
         </p:nvSpPr>
         <p:spPr>
@@ -9559,7 +9259,9 @@
         <p:nvSpPr>
           <p:cNvPr id="9" name="Rectangle 8"/>
           <p:cNvSpPr/>
-          <p:nvPr/>
+          <p:nvPr>
+            <p:ph type="body" idx="7"/>
+          </p:nvPr>
         </p:nvSpPr>
         <p:spPr>
           <a:xfrm>
@@ -9577,20 +9279,6 @@
           </a:ln>
           <a:effectLst/>
         </p:spPr>
-        <p:style>
-          <a:lnRef idx="1">
-            <a:schemeClr val="accent1"/>
-          </a:lnRef>
-          <a:fillRef idx="3">
-            <a:schemeClr val="accent1"/>
-          </a:fillRef>
-          <a:effectRef idx="2">
-            <a:schemeClr val="accent1"/>
-          </a:effectRef>
-          <a:fontRef idx="minor">
-            <a:schemeClr val="lt1"/>
-          </a:fontRef>
-        </p:style>
         <p:txBody>
           <a:bodyPr rtlCol="0" anchor="ctr"/>
           <a:lstStyle/>
@@ -9604,7 +9292,7 @@
           <p:cNvPr id="10" name="TextBox 9"/>
           <p:cNvSpPr/>
           <p:nvPr>
-            <p:ph type="body" idx="6"/>
+            <p:ph type="body" idx="8"/>
           </p:nvPr>
         </p:nvSpPr>
         <p:spPr>
@@ -9641,7 +9329,7 @@
           <p:cNvPr id="11" name="TextBox 10"/>
           <p:cNvSpPr/>
           <p:nvPr>
-            <p:ph type="body" idx="7"/>
+            <p:ph type="body" idx="9"/>
           </p:nvPr>
         </p:nvSpPr>
         <p:spPr>
@@ -9678,7 +9366,7 @@
           <p:cNvPr id="12" name="TextBox 11"/>
           <p:cNvSpPr/>
           <p:nvPr>
-            <p:ph type="body" idx="8"/>
+            <p:ph type="body" idx="13"/>
           </p:nvPr>
         </p:nvSpPr>
         <p:spPr>
@@ -9714,7 +9402,9 @@
         <p:nvSpPr>
           <p:cNvPr id="13" name="Rectangle 12"/>
           <p:cNvSpPr/>
-          <p:nvPr/>
+          <p:nvPr>
+            <p:ph type="body" idx="14"/>
+          </p:nvPr>
         </p:nvSpPr>
         <p:spPr>
           <a:xfrm>
@@ -9732,20 +9422,6 @@
           </a:ln>
           <a:effectLst/>
         </p:spPr>
-        <p:style>
-          <a:lnRef idx="1">
-            <a:schemeClr val="accent1"/>
-          </a:lnRef>
-          <a:fillRef idx="3">
-            <a:schemeClr val="accent1"/>
-          </a:fillRef>
-          <a:effectRef idx="2">
-            <a:schemeClr val="accent1"/>
-          </a:effectRef>
-          <a:fontRef idx="minor">
-            <a:schemeClr val="lt1"/>
-          </a:fontRef>
-        </p:style>
         <p:txBody>
           <a:bodyPr rtlCol="0" anchor="ctr"/>
           <a:lstStyle/>
@@ -9759,7 +9435,7 @@
           <p:cNvPr id="14" name="TextBox 13"/>
           <p:cNvSpPr/>
           <p:nvPr>
-            <p:ph type="body" idx="9"/>
+            <p:ph type="body" idx="15"/>
           </p:nvPr>
         </p:nvSpPr>
         <p:spPr>
@@ -9907,7 +9583,9 @@
         <p:nvSpPr>
           <p:cNvPr id="4" name="Rectangle 3"/>
           <p:cNvSpPr/>
-          <p:nvPr/>
+          <p:nvPr>
+            <p:ph type="body" idx="2"/>
+          </p:nvPr>
         </p:nvSpPr>
         <p:spPr>
           <a:xfrm>
@@ -9925,20 +9603,6 @@
           </a:ln>
           <a:effectLst/>
         </p:spPr>
-        <p:style>
-          <a:lnRef idx="1">
-            <a:schemeClr val="accent1"/>
-          </a:lnRef>
-          <a:fillRef idx="3">
-            <a:schemeClr val="accent1"/>
-          </a:fillRef>
-          <a:effectRef idx="2">
-            <a:schemeClr val="accent1"/>
-          </a:effectRef>
-          <a:fontRef idx="minor">
-            <a:schemeClr val="lt1"/>
-          </a:fontRef>
-        </p:style>
         <p:txBody>
           <a:bodyPr rtlCol="0" anchor="ctr"/>
           <a:lstStyle/>
@@ -9952,7 +9616,7 @@
           <p:cNvPr id="5" name="TextBox 4"/>
           <p:cNvSpPr/>
           <p:nvPr>
-            <p:ph type="body" idx="2"/>
+            <p:ph type="body" idx="3"/>
           </p:nvPr>
         </p:nvSpPr>
         <p:spPr>
@@ -9989,7 +9653,7 @@
           <p:cNvPr id="6" name="TextBox 5"/>
           <p:cNvSpPr/>
           <p:nvPr>
-            <p:ph type="body" idx="3"/>
+            <p:ph type="body" idx="4"/>
           </p:nvPr>
         </p:nvSpPr>
         <p:spPr>
@@ -10026,7 +9690,7 @@
           <p:cNvPr id="7" name="TextBox 6"/>
           <p:cNvSpPr/>
           <p:nvPr>
-            <p:ph type="body" idx="4"/>
+            <p:ph type="body" idx="5"/>
           </p:nvPr>
         </p:nvSpPr>
         <p:spPr>
@@ -10062,7 +9726,9 @@
         <p:nvSpPr>
           <p:cNvPr id="8" name="Rectangle 7"/>
           <p:cNvSpPr/>
-          <p:nvPr/>
+          <p:nvPr>
+            <p:ph type="body" idx="6"/>
+          </p:nvPr>
         </p:nvSpPr>
         <p:spPr>
           <a:xfrm>
@@ -10080,20 +9746,6 @@
           </a:ln>
           <a:effectLst/>
         </p:spPr>
-        <p:style>
-          <a:lnRef idx="1">
-            <a:schemeClr val="accent1"/>
-          </a:lnRef>
-          <a:fillRef idx="3">
-            <a:schemeClr val="accent1"/>
-          </a:fillRef>
-          <a:effectRef idx="2">
-            <a:schemeClr val="accent1"/>
-          </a:effectRef>
-          <a:fontRef idx="minor">
-            <a:schemeClr val="lt1"/>
-          </a:fontRef>
-        </p:style>
         <p:txBody>
           <a:bodyPr rtlCol="0" anchor="ctr"/>
           <a:lstStyle/>
@@ -10107,7 +9759,7 @@
           <p:cNvPr id="9" name="TextBox 8"/>
           <p:cNvSpPr/>
           <p:nvPr>
-            <p:ph type="body" idx="5"/>
+            <p:ph type="body" idx="7"/>
           </p:nvPr>
         </p:nvSpPr>
         <p:spPr>
@@ -10144,7 +9796,7 @@
           <p:cNvPr id="10" name="TextBox 9"/>
           <p:cNvSpPr/>
           <p:nvPr>
-            <p:ph type="body" idx="6"/>
+            <p:ph type="body" idx="8"/>
           </p:nvPr>
         </p:nvSpPr>
         <p:spPr>
@@ -10181,7 +9833,7 @@
           <p:cNvPr id="11" name="TextBox 10"/>
           <p:cNvSpPr/>
           <p:nvPr>
-            <p:ph type="body" idx="7"/>
+            <p:ph type="body" idx="9"/>
           </p:nvPr>
         </p:nvSpPr>
         <p:spPr>
@@ -10217,7 +9869,9 @@
         <p:nvSpPr>
           <p:cNvPr id="12" name="Rectangle 11"/>
           <p:cNvSpPr/>
-          <p:nvPr/>
+          <p:nvPr>
+            <p:ph type="body" idx="13"/>
+          </p:nvPr>
         </p:nvSpPr>
         <p:spPr>
           <a:xfrm>
@@ -10235,20 +9889,6 @@
           </a:ln>
           <a:effectLst/>
         </p:spPr>
-        <p:style>
-          <a:lnRef idx="1">
-            <a:schemeClr val="accent1"/>
-          </a:lnRef>
-          <a:fillRef idx="3">
-            <a:schemeClr val="accent1"/>
-          </a:fillRef>
-          <a:effectRef idx="2">
-            <a:schemeClr val="accent1"/>
-          </a:effectRef>
-          <a:fontRef idx="minor">
-            <a:schemeClr val="lt1"/>
-          </a:fontRef>
-        </p:style>
         <p:txBody>
           <a:bodyPr rtlCol="0" anchor="ctr"/>
           <a:lstStyle/>
@@ -10262,7 +9902,7 @@
           <p:cNvPr id="13" name="TextBox 12"/>
           <p:cNvSpPr/>
           <p:nvPr>
-            <p:ph type="body" idx="8"/>
+            <p:ph type="body" idx="14"/>
           </p:nvPr>
         </p:nvSpPr>
         <p:spPr>
@@ -10299,7 +9939,7 @@
           <p:cNvPr id="14" name="TextBox 13"/>
           <p:cNvSpPr/>
           <p:nvPr>
-            <p:ph type="body" idx="9"/>
+            <p:ph type="body" idx="15"/>
           </p:nvPr>
         </p:nvSpPr>
         <p:spPr>
@@ -10336,7 +9976,7 @@
           <p:cNvPr id="15" name="TextBox 14"/>
           <p:cNvSpPr/>
           <p:nvPr>
-            <p:ph type="body" idx="13"/>
+            <p:ph type="body" idx="16"/>
           </p:nvPr>
         </p:nvSpPr>
         <p:spPr>
@@ -10372,7 +10012,9 @@
         <p:nvSpPr>
           <p:cNvPr id="16" name="Rectangle 15"/>
           <p:cNvSpPr/>
-          <p:nvPr/>
+          <p:nvPr>
+            <p:ph type="body" idx="17"/>
+          </p:nvPr>
         </p:nvSpPr>
         <p:spPr>
           <a:xfrm>
@@ -10390,20 +10032,6 @@
           </a:ln>
           <a:effectLst/>
         </p:spPr>
-        <p:style>
-          <a:lnRef idx="1">
-            <a:schemeClr val="accent1"/>
-          </a:lnRef>
-          <a:fillRef idx="3">
-            <a:schemeClr val="accent1"/>
-          </a:fillRef>
-          <a:effectRef idx="2">
-            <a:schemeClr val="accent1"/>
-          </a:effectRef>
-          <a:fontRef idx="minor">
-            <a:schemeClr val="lt1"/>
-          </a:fontRef>
-        </p:style>
         <p:txBody>
           <a:bodyPr rtlCol="0" anchor="ctr"/>
           <a:lstStyle/>
@@ -10417,7 +10045,7 @@
           <p:cNvPr id="17" name="TextBox 16"/>
           <p:cNvSpPr/>
           <p:nvPr>
-            <p:ph type="body" idx="14"/>
+            <p:ph type="body" idx="18"/>
           </p:nvPr>
         </p:nvSpPr>
         <p:spPr>
@@ -10454,7 +10082,7 @@
           <p:cNvPr id="18" name="TextBox 17"/>
           <p:cNvSpPr/>
           <p:nvPr>
-            <p:ph type="body" idx="15"/>
+            <p:ph type="body" idx="19"/>
           </p:nvPr>
         </p:nvSpPr>
         <p:spPr>
@@ -10565,7 +10193,9 @@
         <p:nvSpPr>
           <p:cNvPr id="3" name="Rectangle 2"/>
           <p:cNvSpPr/>
-          <p:nvPr/>
+          <p:nvPr>
+            <p:ph type="body" idx="1"/>
+          </p:nvPr>
         </p:nvSpPr>
         <p:spPr>
           <a:xfrm>
@@ -10583,20 +10213,6 @@
           </a:ln>
           <a:effectLst/>
         </p:spPr>
-        <p:style>
-          <a:lnRef idx="1">
-            <a:schemeClr val="accent1"/>
-          </a:lnRef>
-          <a:fillRef idx="3">
-            <a:schemeClr val="accent1"/>
-          </a:fillRef>
-          <a:effectRef idx="2">
-            <a:schemeClr val="accent1"/>
-          </a:effectRef>
-          <a:fontRef idx="minor">
-            <a:schemeClr val="lt1"/>
-          </a:fontRef>
-        </p:style>
         <p:txBody>
           <a:bodyPr rtlCol="0" anchor="ctr"/>
           <a:lstStyle/>
@@ -10610,7 +10226,7 @@
           <p:cNvPr id="4" name="TextBox 3"/>
           <p:cNvSpPr/>
           <p:nvPr>
-            <p:ph type="body" idx="1"/>
+            <p:ph type="body" idx="2"/>
           </p:nvPr>
         </p:nvSpPr>
         <p:spPr>
@@ -10647,7 +10263,7 @@
           <p:cNvPr id="5" name="TextBox 4"/>
           <p:cNvSpPr/>
           <p:nvPr>
-            <p:ph type="body" idx="2"/>
+            <p:ph type="body" idx="3"/>
           </p:nvPr>
         </p:nvSpPr>
         <p:spPr>
@@ -10684,7 +10300,7 @@
           <p:cNvPr id="6" name="TextBox 5"/>
           <p:cNvSpPr/>
           <p:nvPr>
-            <p:ph type="body" idx="3"/>
+            <p:ph type="body" idx="4"/>
           </p:nvPr>
         </p:nvSpPr>
         <p:spPr>
@@ -10720,7 +10336,9 @@
         <p:nvSpPr>
           <p:cNvPr id="7" name="Rectangle 6"/>
           <p:cNvSpPr/>
-          <p:nvPr/>
+          <p:nvPr>
+            <p:ph type="body" idx="5"/>
+          </p:nvPr>
         </p:nvSpPr>
         <p:spPr>
           <a:xfrm>
@@ -10738,20 +10356,6 @@
           </a:ln>
           <a:effectLst/>
         </p:spPr>
-        <p:style>
-          <a:lnRef idx="1">
-            <a:schemeClr val="accent1"/>
-          </a:lnRef>
-          <a:fillRef idx="3">
-            <a:schemeClr val="accent1"/>
-          </a:fillRef>
-          <a:effectRef idx="2">
-            <a:schemeClr val="accent1"/>
-          </a:effectRef>
-          <a:fontRef idx="minor">
-            <a:schemeClr val="lt1"/>
-          </a:fontRef>
-        </p:style>
         <p:txBody>
           <a:bodyPr rtlCol="0" anchor="ctr"/>
           <a:lstStyle/>
@@ -10765,7 +10369,7 @@
           <p:cNvPr id="8" name="TextBox 7"/>
           <p:cNvSpPr/>
           <p:nvPr>
-            <p:ph type="body" idx="4"/>
+            <p:ph type="body" idx="6"/>
           </p:nvPr>
         </p:nvSpPr>
         <p:spPr>
@@ -10802,7 +10406,7 @@
           <p:cNvPr id="9" name="TextBox 8"/>
           <p:cNvSpPr/>
           <p:nvPr>
-            <p:ph type="body" idx="5"/>
+            <p:ph type="body" idx="7"/>
           </p:nvPr>
         </p:nvSpPr>
         <p:spPr>
@@ -10839,7 +10443,7 @@
           <p:cNvPr id="10" name="TextBox 9"/>
           <p:cNvSpPr/>
           <p:nvPr>
-            <p:ph type="body" idx="6"/>
+            <p:ph type="body" idx="8"/>
           </p:nvPr>
         </p:nvSpPr>
         <p:spPr>
@@ -10875,7 +10479,9 @@
         <p:nvSpPr>
           <p:cNvPr id="11" name="Rectangle 10"/>
           <p:cNvSpPr/>
-          <p:nvPr/>
+          <p:nvPr>
+            <p:ph type="body" idx="9"/>
+          </p:nvPr>
         </p:nvSpPr>
         <p:spPr>
           <a:xfrm>
@@ -10893,20 +10499,6 @@
           </a:ln>
           <a:effectLst/>
         </p:spPr>
-        <p:style>
-          <a:lnRef idx="1">
-            <a:schemeClr val="accent1"/>
-          </a:lnRef>
-          <a:fillRef idx="3">
-            <a:schemeClr val="accent1"/>
-          </a:fillRef>
-          <a:effectRef idx="2">
-            <a:schemeClr val="accent1"/>
-          </a:effectRef>
-          <a:fontRef idx="minor">
-            <a:schemeClr val="lt1"/>
-          </a:fontRef>
-        </p:style>
         <p:txBody>
           <a:bodyPr rtlCol="0" anchor="ctr"/>
           <a:lstStyle/>
@@ -10920,7 +10512,7 @@
           <p:cNvPr id="12" name="TextBox 11"/>
           <p:cNvSpPr/>
           <p:nvPr>
-            <p:ph type="body" idx="7"/>
+            <p:ph type="body" idx="13"/>
           </p:nvPr>
         </p:nvSpPr>
         <p:spPr>
@@ -10957,7 +10549,7 @@
           <p:cNvPr id="13" name="TextBox 12"/>
           <p:cNvSpPr/>
           <p:nvPr>
-            <p:ph type="body" idx="8"/>
+            <p:ph type="body" idx="14"/>
           </p:nvPr>
         </p:nvSpPr>
         <p:spPr>
@@ -10994,7 +10586,7 @@
           <p:cNvPr id="14" name="TextBox 13"/>
           <p:cNvSpPr/>
           <p:nvPr>
-            <p:ph type="body" idx="9"/>
+            <p:ph type="body" idx="15"/>
           </p:nvPr>
         </p:nvSpPr>
         <p:spPr>
@@ -11105,7 +10697,9 @@
         <p:nvSpPr>
           <p:cNvPr id="3" name="Rectangle 2"/>
           <p:cNvSpPr/>
-          <p:nvPr/>
+          <p:nvPr>
+            <p:ph type="body" idx="1"/>
+          </p:nvPr>
         </p:nvSpPr>
         <p:spPr>
           <a:xfrm>
@@ -11123,20 +10717,6 @@
           </a:ln>
           <a:effectLst/>
         </p:spPr>
-        <p:style>
-          <a:lnRef idx="1">
-            <a:schemeClr val="accent1"/>
-          </a:lnRef>
-          <a:fillRef idx="3">
-            <a:schemeClr val="accent1"/>
-          </a:fillRef>
-          <a:effectRef idx="2">
-            <a:schemeClr val="accent1"/>
-          </a:effectRef>
-          <a:fontRef idx="minor">
-            <a:schemeClr val="lt1"/>
-          </a:fontRef>
-        </p:style>
         <p:txBody>
           <a:bodyPr rtlCol="0" anchor="ctr"/>
           <a:lstStyle/>
@@ -11150,7 +10730,7 @@
           <p:cNvPr id="4" name="TextBox 3"/>
           <p:cNvSpPr/>
           <p:nvPr>
-            <p:ph type="body" idx="1"/>
+            <p:ph type="body" idx="2"/>
           </p:nvPr>
         </p:nvSpPr>
         <p:spPr>
@@ -11186,7 +10766,9 @@
         <p:nvSpPr>
           <p:cNvPr id="5" name="Rectangle 4"/>
           <p:cNvSpPr/>
-          <p:nvPr/>
+          <p:nvPr>
+            <p:ph type="body" idx="3"/>
+          </p:nvPr>
         </p:nvSpPr>
         <p:spPr>
           <a:xfrm>
@@ -11204,20 +10786,6 @@
           </a:ln>
           <a:effectLst/>
         </p:spPr>
-        <p:style>
-          <a:lnRef idx="1">
-            <a:schemeClr val="accent1"/>
-          </a:lnRef>
-          <a:fillRef idx="3">
-            <a:schemeClr val="accent1"/>
-          </a:fillRef>
-          <a:effectRef idx="2">
-            <a:schemeClr val="accent1"/>
-          </a:effectRef>
-          <a:fontRef idx="minor">
-            <a:schemeClr val="lt1"/>
-          </a:fontRef>
-        </p:style>
         <p:txBody>
           <a:bodyPr rtlCol="0" anchor="ctr"/>
           <a:lstStyle/>
@@ -11231,7 +10799,7 @@
           <p:cNvPr id="6" name="TextBox 5"/>
           <p:cNvSpPr/>
           <p:nvPr>
-            <p:ph type="body" idx="2"/>
+            <p:ph type="body" idx="4"/>
           </p:nvPr>
         </p:nvSpPr>
         <p:spPr>
@@ -11267,7 +10835,9 @@
         <p:nvSpPr>
           <p:cNvPr id="7" name="Rectangle 6"/>
           <p:cNvSpPr/>
-          <p:nvPr/>
+          <p:nvPr>
+            <p:ph type="body" idx="5"/>
+          </p:nvPr>
         </p:nvSpPr>
         <p:spPr>
           <a:xfrm>
@@ -11285,20 +10855,6 @@
           </a:ln>
           <a:effectLst/>
         </p:spPr>
-        <p:style>
-          <a:lnRef idx="1">
-            <a:schemeClr val="accent1"/>
-          </a:lnRef>
-          <a:fillRef idx="3">
-            <a:schemeClr val="accent1"/>
-          </a:fillRef>
-          <a:effectRef idx="2">
-            <a:schemeClr val="accent1"/>
-          </a:effectRef>
-          <a:fontRef idx="minor">
-            <a:schemeClr val="lt1"/>
-          </a:fontRef>
-        </p:style>
         <p:txBody>
           <a:bodyPr rtlCol="0" anchor="ctr"/>
           <a:lstStyle/>
@@ -11312,7 +10868,7 @@
           <p:cNvPr id="8" name="TextBox 7"/>
           <p:cNvSpPr/>
           <p:nvPr>
-            <p:ph type="body" idx="3"/>
+            <p:ph type="body" idx="6"/>
           </p:nvPr>
         </p:nvSpPr>
         <p:spPr>
@@ -11348,7 +10904,9 @@
         <p:nvSpPr>
           <p:cNvPr id="9" name="Rectangle 8"/>
           <p:cNvSpPr/>
-          <p:nvPr/>
+          <p:nvPr>
+            <p:ph type="body" idx="7"/>
+          </p:nvPr>
         </p:nvSpPr>
         <p:spPr>
           <a:xfrm>
@@ -11366,20 +10924,6 @@
           </a:ln>
           <a:effectLst/>
         </p:spPr>
-        <p:style>
-          <a:lnRef idx="1">
-            <a:schemeClr val="accent1"/>
-          </a:lnRef>
-          <a:fillRef idx="3">
-            <a:schemeClr val="accent1"/>
-          </a:fillRef>
-          <a:effectRef idx="2">
-            <a:schemeClr val="accent1"/>
-          </a:effectRef>
-          <a:fontRef idx="minor">
-            <a:schemeClr val="lt1"/>
-          </a:fontRef>
-        </p:style>
         <p:txBody>
           <a:bodyPr rtlCol="0" anchor="ctr"/>
           <a:lstStyle/>
@@ -11393,7 +10937,7 @@
           <p:cNvPr id="10" name="TextBox 9"/>
           <p:cNvSpPr/>
           <p:nvPr>
-            <p:ph type="body" idx="4"/>
+            <p:ph type="body" idx="8"/>
           </p:nvPr>
         </p:nvSpPr>
         <p:spPr>
@@ -11504,7 +11048,9 @@
         <p:nvSpPr>
           <p:cNvPr id="3" name="Oval 2"/>
           <p:cNvSpPr/>
-          <p:nvPr/>
+          <p:nvPr>
+            <p:ph type="body" idx="1"/>
+          </p:nvPr>
         </p:nvSpPr>
         <p:spPr>
           <a:xfrm>
@@ -11522,20 +11068,6 @@
           </a:ln>
           <a:effectLst/>
         </p:spPr>
-        <p:style>
-          <a:lnRef idx="1">
-            <a:schemeClr val="accent1"/>
-          </a:lnRef>
-          <a:fillRef idx="3">
-            <a:schemeClr val="accent1"/>
-          </a:fillRef>
-          <a:effectRef idx="2">
-            <a:schemeClr val="accent1"/>
-          </a:effectRef>
-          <a:fontRef idx="minor">
-            <a:schemeClr val="lt1"/>
-          </a:fontRef>
-        </p:style>
         <p:txBody>
           <a:bodyPr rtlCol="0" anchor="ctr"/>
           <a:lstStyle/>
@@ -11548,7 +11080,9 @@
         <p:nvSpPr>
           <p:cNvPr id="4" name="Oval 3"/>
           <p:cNvSpPr/>
-          <p:nvPr/>
+          <p:nvPr>
+            <p:ph type="body" idx="2"/>
+          </p:nvPr>
         </p:nvSpPr>
         <p:spPr>
           <a:xfrm>
@@ -11566,20 +11100,6 @@
           </a:ln>
           <a:effectLst/>
         </p:spPr>
-        <p:style>
-          <a:lnRef idx="1">
-            <a:schemeClr val="accent1"/>
-          </a:lnRef>
-          <a:fillRef idx="3">
-            <a:schemeClr val="accent1"/>
-          </a:fillRef>
-          <a:effectRef idx="2">
-            <a:schemeClr val="accent1"/>
-          </a:effectRef>
-          <a:fontRef idx="minor">
-            <a:schemeClr val="lt1"/>
-          </a:fontRef>
-        </p:style>
         <p:txBody>
           <a:bodyPr rtlCol="0" anchor="ctr"/>
           <a:lstStyle/>
@@ -11592,7 +11112,9 @@
         <p:nvSpPr>
           <p:cNvPr id="5" name="Oval 4"/>
           <p:cNvSpPr/>
-          <p:nvPr/>
+          <p:nvPr>
+            <p:ph type="body" idx="3"/>
+          </p:nvPr>
         </p:nvSpPr>
         <p:spPr>
           <a:xfrm>
@@ -11610,20 +11132,6 @@
           </a:ln>
           <a:effectLst/>
         </p:spPr>
-        <p:style>
-          <a:lnRef idx="1">
-            <a:schemeClr val="accent1"/>
-          </a:lnRef>
-          <a:fillRef idx="3">
-            <a:schemeClr val="accent1"/>
-          </a:fillRef>
-          <a:effectRef idx="2">
-            <a:schemeClr val="accent1"/>
-          </a:effectRef>
-          <a:fontRef idx="minor">
-            <a:schemeClr val="lt1"/>
-          </a:fontRef>
-        </p:style>
         <p:txBody>
           <a:bodyPr rtlCol="0" anchor="ctr"/>
           <a:lstStyle/>
@@ -11637,7 +11145,7 @@
           <p:cNvPr id="6" name="TextBox 5"/>
           <p:cNvSpPr/>
           <p:nvPr>
-            <p:ph type="body" idx="1"/>
+            <p:ph type="body" idx="4"/>
           </p:nvPr>
         </p:nvSpPr>
         <p:spPr>
@@ -11674,7 +11182,7 @@
           <p:cNvPr id="7" name="TextBox 6"/>
           <p:cNvSpPr/>
           <p:nvPr>
-            <p:ph type="body" idx="2"/>
+            <p:ph type="body" idx="5"/>
           </p:nvPr>
         </p:nvSpPr>
         <p:spPr>
@@ -11711,7 +11219,7 @@
           <p:cNvPr id="8" name="TextBox 7"/>
           <p:cNvSpPr/>
           <p:nvPr>
-            <p:ph type="body" idx="3"/>
+            <p:ph type="body" idx="6"/>
           </p:nvPr>
         </p:nvSpPr>
         <p:spPr>
@@ -11748,7 +11256,7 @@
           <p:cNvPr id="9" name="TextBox 8"/>
           <p:cNvSpPr/>
           <p:nvPr>
-            <p:ph type="body" idx="4"/>
+            <p:ph type="body" idx="7"/>
           </p:nvPr>
         </p:nvSpPr>
         <p:spPr>
@@ -11785,7 +11293,7 @@
           <p:cNvPr id="10" name="TextBox 9"/>
           <p:cNvSpPr/>
           <p:nvPr>
-            <p:ph type="body" idx="5"/>
+            <p:ph type="body" idx="8"/>
           </p:nvPr>
         </p:nvSpPr>
         <p:spPr>
@@ -11822,7 +11330,7 @@
           <p:cNvPr id="11" name="TextBox 10"/>
           <p:cNvSpPr/>
           <p:nvPr>
-            <p:ph type="body" idx="6"/>
+            <p:ph type="body" idx="9"/>
           </p:nvPr>
         </p:nvSpPr>
         <p:spPr>
@@ -11933,7 +11441,9 @@
         <p:nvSpPr>
           <p:cNvPr id="3" name="Rectangle 2"/>
           <p:cNvSpPr/>
-          <p:nvPr/>
+          <p:nvPr>
+            <p:ph type="body" idx="1"/>
+          </p:nvPr>
         </p:nvSpPr>
         <p:spPr>
           <a:xfrm>
@@ -11951,20 +11461,6 @@
           </a:ln>
           <a:effectLst/>
         </p:spPr>
-        <p:style>
-          <a:lnRef idx="1">
-            <a:schemeClr val="accent1"/>
-          </a:lnRef>
-          <a:fillRef idx="3">
-            <a:schemeClr val="accent1"/>
-          </a:fillRef>
-          <a:effectRef idx="2">
-            <a:schemeClr val="accent1"/>
-          </a:effectRef>
-          <a:fontRef idx="minor">
-            <a:schemeClr val="lt1"/>
-          </a:fontRef>
-        </p:style>
         <p:txBody>
           <a:bodyPr rtlCol="0" anchor="ctr"/>
           <a:lstStyle/>
@@ -11978,7 +11474,7 @@
           <p:cNvPr id="4" name="TextBox 3"/>
           <p:cNvSpPr/>
           <p:nvPr>
-            <p:ph type="body" idx="1"/>
+            <p:ph type="body" idx="2"/>
           </p:nvPr>
         </p:nvSpPr>
         <p:spPr>
@@ -12014,7 +11510,9 @@
         <p:nvSpPr>
           <p:cNvPr id="5" name="Rectangle 4"/>
           <p:cNvSpPr/>
-          <p:nvPr/>
+          <p:nvPr>
+            <p:ph type="body" idx="3"/>
+          </p:nvPr>
         </p:nvSpPr>
         <p:spPr>
           <a:xfrm>
@@ -12032,20 +11530,6 @@
           </a:ln>
           <a:effectLst/>
         </p:spPr>
-        <p:style>
-          <a:lnRef idx="1">
-            <a:schemeClr val="accent1"/>
-          </a:lnRef>
-          <a:fillRef idx="3">
-            <a:schemeClr val="accent1"/>
-          </a:fillRef>
-          <a:effectRef idx="2">
-            <a:schemeClr val="accent1"/>
-          </a:effectRef>
-          <a:fontRef idx="minor">
-            <a:schemeClr val="lt1"/>
-          </a:fontRef>
-        </p:style>
         <p:txBody>
           <a:bodyPr rtlCol="0" anchor="ctr"/>
           <a:lstStyle/>
@@ -12059,7 +11543,7 @@
           <p:cNvPr id="6" name="TextBox 5"/>
           <p:cNvSpPr/>
           <p:nvPr>
-            <p:ph type="body" idx="2"/>
+            <p:ph type="body" idx="4"/>
           </p:nvPr>
         </p:nvSpPr>
         <p:spPr>
@@ -12095,7 +11579,9 @@
         <p:nvSpPr>
           <p:cNvPr id="7" name="Rectangle 6"/>
           <p:cNvSpPr/>
-          <p:nvPr/>
+          <p:nvPr>
+            <p:ph type="body" idx="5"/>
+          </p:nvPr>
         </p:nvSpPr>
         <p:spPr>
           <a:xfrm>
@@ -12113,20 +11599,6 @@
           </a:ln>
           <a:effectLst/>
         </p:spPr>
-        <p:style>
-          <a:lnRef idx="1">
-            <a:schemeClr val="accent1"/>
-          </a:lnRef>
-          <a:fillRef idx="3">
-            <a:schemeClr val="accent1"/>
-          </a:fillRef>
-          <a:effectRef idx="2">
-            <a:schemeClr val="accent1"/>
-          </a:effectRef>
-          <a:fontRef idx="minor">
-            <a:schemeClr val="lt1"/>
-          </a:fontRef>
-        </p:style>
         <p:txBody>
           <a:bodyPr rtlCol="0" anchor="ctr"/>
           <a:lstStyle/>
@@ -12140,7 +11612,7 @@
           <p:cNvPr id="8" name="TextBox 7"/>
           <p:cNvSpPr/>
           <p:nvPr>
-            <p:ph type="body" idx="3"/>
+            <p:ph type="body" idx="6"/>
           </p:nvPr>
         </p:nvSpPr>
         <p:spPr>
@@ -12176,7 +11648,9 @@
         <p:nvSpPr>
           <p:cNvPr id="9" name="Rectangle 8"/>
           <p:cNvSpPr/>
-          <p:nvPr/>
+          <p:nvPr>
+            <p:ph type="body" idx="7"/>
+          </p:nvPr>
         </p:nvSpPr>
         <p:spPr>
           <a:xfrm>
@@ -12194,20 +11668,6 @@
           </a:ln>
           <a:effectLst/>
         </p:spPr>
-        <p:style>
-          <a:lnRef idx="1">
-            <a:schemeClr val="accent1"/>
-          </a:lnRef>
-          <a:fillRef idx="3">
-            <a:schemeClr val="accent1"/>
-          </a:fillRef>
-          <a:effectRef idx="2">
-            <a:schemeClr val="accent1"/>
-          </a:effectRef>
-          <a:fontRef idx="minor">
-            <a:schemeClr val="lt1"/>
-          </a:fontRef>
-        </p:style>
         <p:txBody>
           <a:bodyPr rtlCol="0" anchor="ctr"/>
           <a:lstStyle/>
@@ -12221,7 +11681,7 @@
           <p:cNvPr id="10" name="TextBox 9"/>
           <p:cNvSpPr/>
           <p:nvPr>
-            <p:ph type="body" idx="4"/>
+            <p:ph type="body" idx="8"/>
           </p:nvPr>
         </p:nvSpPr>
         <p:spPr>
@@ -12657,7 +12117,9 @@
         <p:nvSpPr>
           <p:cNvPr id="4" name="Rectangle 3"/>
           <p:cNvSpPr/>
-          <p:nvPr/>
+          <p:nvPr>
+            <p:ph type="body" idx="2"/>
+          </p:nvPr>
         </p:nvSpPr>
         <p:spPr>
           <a:xfrm>
@@ -12675,20 +12137,6 @@
           </a:ln>
           <a:effectLst/>
         </p:spPr>
-        <p:style>
-          <a:lnRef idx="1">
-            <a:schemeClr val="accent1"/>
-          </a:lnRef>
-          <a:fillRef idx="3">
-            <a:schemeClr val="accent1"/>
-          </a:fillRef>
-          <a:effectRef idx="2">
-            <a:schemeClr val="accent1"/>
-          </a:effectRef>
-          <a:fontRef idx="minor">
-            <a:schemeClr val="lt1"/>
-          </a:fontRef>
-        </p:style>
         <p:txBody>
           <a:bodyPr rtlCol="0" anchor="ctr"/>
           <a:lstStyle/>
@@ -12702,7 +12150,7 @@
           <p:cNvPr id="5" name="TextBox 4"/>
           <p:cNvSpPr/>
           <p:nvPr>
-            <p:ph type="body" idx="2"/>
+            <p:ph type="body" idx="3"/>
           </p:nvPr>
         </p:nvSpPr>
         <p:spPr>
@@ -12739,7 +12187,7 @@
           <p:cNvPr id="6" name="TextBox 5"/>
           <p:cNvSpPr/>
           <p:nvPr>
-            <p:ph type="body" idx="3"/>
+            <p:ph type="body" idx="4"/>
           </p:nvPr>
         </p:nvSpPr>
         <p:spPr>
@@ -12775,7 +12223,9 @@
         <p:nvSpPr>
           <p:cNvPr id="7" name="Rectangle 6"/>
           <p:cNvSpPr/>
-          <p:nvPr/>
+          <p:nvPr>
+            <p:ph type="body" idx="5"/>
+          </p:nvPr>
         </p:nvSpPr>
         <p:spPr>
           <a:xfrm>
@@ -12793,20 +12243,6 @@
           </a:ln>
           <a:effectLst/>
         </p:spPr>
-        <p:style>
-          <a:lnRef idx="1">
-            <a:schemeClr val="accent1"/>
-          </a:lnRef>
-          <a:fillRef idx="3">
-            <a:schemeClr val="accent1"/>
-          </a:fillRef>
-          <a:effectRef idx="2">
-            <a:schemeClr val="accent1"/>
-          </a:effectRef>
-          <a:fontRef idx="minor">
-            <a:schemeClr val="lt1"/>
-          </a:fontRef>
-        </p:style>
         <p:txBody>
           <a:bodyPr rtlCol="0" anchor="ctr"/>
           <a:lstStyle/>
@@ -12820,7 +12256,7 @@
           <p:cNvPr id="8" name="TextBox 7"/>
           <p:cNvSpPr/>
           <p:nvPr>
-            <p:ph type="body" idx="4"/>
+            <p:ph type="body" idx="6"/>
           </p:nvPr>
         </p:nvSpPr>
         <p:spPr>
@@ -12857,7 +12293,7 @@
           <p:cNvPr id="9" name="TextBox 8"/>
           <p:cNvSpPr/>
           <p:nvPr>
-            <p:ph type="body" idx="5"/>
+            <p:ph type="body" idx="7"/>
           </p:nvPr>
         </p:nvSpPr>
         <p:spPr>
@@ -12893,7 +12329,9 @@
         <p:nvSpPr>
           <p:cNvPr id="10" name="Rectangle 9"/>
           <p:cNvSpPr/>
-          <p:nvPr/>
+          <p:nvPr>
+            <p:ph type="body" idx="8"/>
+          </p:nvPr>
         </p:nvSpPr>
         <p:spPr>
           <a:xfrm>
@@ -12911,20 +12349,6 @@
           </a:ln>
           <a:effectLst/>
         </p:spPr>
-        <p:style>
-          <a:lnRef idx="1">
-            <a:schemeClr val="accent1"/>
-          </a:lnRef>
-          <a:fillRef idx="3">
-            <a:schemeClr val="accent1"/>
-          </a:fillRef>
-          <a:effectRef idx="2">
-            <a:schemeClr val="accent1"/>
-          </a:effectRef>
-          <a:fontRef idx="minor">
-            <a:schemeClr val="lt1"/>
-          </a:fontRef>
-        </p:style>
         <p:txBody>
           <a:bodyPr rtlCol="0" anchor="ctr"/>
           <a:lstStyle/>
@@ -12938,7 +12362,7 @@
           <p:cNvPr id="11" name="TextBox 10"/>
           <p:cNvSpPr/>
           <p:nvPr>
-            <p:ph type="body" idx="6"/>
+            <p:ph type="body" idx="9"/>
           </p:nvPr>
         </p:nvSpPr>
         <p:spPr>
@@ -12975,7 +12399,7 @@
           <p:cNvPr id="12" name="TextBox 11"/>
           <p:cNvSpPr/>
           <p:nvPr>
-            <p:ph type="body" idx="7"/>
+            <p:ph type="body" idx="13"/>
           </p:nvPr>
         </p:nvSpPr>
         <p:spPr>
@@ -13011,7 +12435,9 @@
         <p:nvSpPr>
           <p:cNvPr id="13" name="Rectangle 12"/>
           <p:cNvSpPr/>
-          <p:nvPr/>
+          <p:nvPr>
+            <p:ph type="body" idx="14"/>
+          </p:nvPr>
         </p:nvSpPr>
         <p:spPr>
           <a:xfrm>
@@ -13029,20 +12455,6 @@
           </a:ln>
           <a:effectLst/>
         </p:spPr>
-        <p:style>
-          <a:lnRef idx="1">
-            <a:schemeClr val="accent1"/>
-          </a:lnRef>
-          <a:fillRef idx="3">
-            <a:schemeClr val="accent1"/>
-          </a:fillRef>
-          <a:effectRef idx="2">
-            <a:schemeClr val="accent1"/>
-          </a:effectRef>
-          <a:fontRef idx="minor">
-            <a:schemeClr val="lt1"/>
-          </a:fontRef>
-        </p:style>
         <p:txBody>
           <a:bodyPr rtlCol="0" anchor="ctr"/>
           <a:lstStyle/>
@@ -13056,7 +12468,7 @@
           <p:cNvPr id="14" name="TextBox 13"/>
           <p:cNvSpPr/>
           <p:nvPr>
-            <p:ph type="body" idx="8"/>
+            <p:ph type="body" idx="15"/>
           </p:nvPr>
         </p:nvSpPr>
         <p:spPr>
@@ -13278,7 +12690,9 @@
         <p:nvSpPr>
           <p:cNvPr id="6" name="Rectangle 5"/>
           <p:cNvSpPr/>
-          <p:nvPr/>
+          <p:nvPr>
+            <p:ph type="body" idx="4"/>
+          </p:nvPr>
         </p:nvSpPr>
         <p:spPr>
           <a:xfrm>
@@ -13296,20 +12710,6 @@
           </a:ln>
           <a:effectLst/>
         </p:spPr>
-        <p:style>
-          <a:lnRef idx="1">
-            <a:schemeClr val="accent1"/>
-          </a:lnRef>
-          <a:fillRef idx="3">
-            <a:schemeClr val="accent1"/>
-          </a:fillRef>
-          <a:effectRef idx="2">
-            <a:schemeClr val="accent1"/>
-          </a:effectRef>
-          <a:fontRef idx="minor">
-            <a:schemeClr val="lt1"/>
-          </a:fontRef>
-        </p:style>
         <p:txBody>
           <a:bodyPr rtlCol="0" anchor="ctr"/>
           <a:lstStyle/>
@@ -13323,7 +12723,7 @@
           <p:cNvPr id="7" name="TextBox 6"/>
           <p:cNvSpPr/>
           <p:nvPr>
-            <p:ph type="body" idx="4"/>
+            <p:ph type="body" idx="5"/>
           </p:nvPr>
         </p:nvSpPr>
         <p:spPr>
@@ -13359,7 +12759,9 @@
         <p:nvSpPr>
           <p:cNvPr id="8" name="Rectangle 7"/>
           <p:cNvSpPr/>
-          <p:nvPr/>
+          <p:nvPr>
+            <p:ph type="body" idx="6"/>
+          </p:nvPr>
         </p:nvSpPr>
         <p:spPr>
           <a:xfrm>
@@ -13377,20 +12779,6 @@
           </a:ln>
           <a:effectLst/>
         </p:spPr>
-        <p:style>
-          <a:lnRef idx="1">
-            <a:schemeClr val="accent1"/>
-          </a:lnRef>
-          <a:fillRef idx="3">
-            <a:schemeClr val="accent1"/>
-          </a:fillRef>
-          <a:effectRef idx="2">
-            <a:schemeClr val="accent1"/>
-          </a:effectRef>
-          <a:fontRef idx="minor">
-            <a:schemeClr val="lt1"/>
-          </a:fontRef>
-        </p:style>
         <p:txBody>
           <a:bodyPr rtlCol="0" anchor="ctr"/>
           <a:lstStyle/>
@@ -13404,7 +12792,7 @@
           <p:cNvPr id="9" name="TextBox 8"/>
           <p:cNvSpPr/>
           <p:nvPr>
-            <p:ph type="body" idx="5"/>
+            <p:ph type="body" idx="7"/>
           </p:nvPr>
         </p:nvSpPr>
         <p:spPr>
@@ -13441,7 +12829,7 @@
           <p:cNvPr id="10" name="TextBox 9"/>
           <p:cNvSpPr/>
           <p:nvPr>
-            <p:ph type="body" idx="6"/>
+            <p:ph type="body" idx="8"/>
           </p:nvPr>
         </p:nvSpPr>
         <p:spPr>
@@ -13478,7 +12866,7 @@
           <p:cNvPr id="11" name="TextBox 10"/>
           <p:cNvSpPr/>
           <p:nvPr>
-            <p:ph type="body" idx="7"/>
+            <p:ph type="body" idx="9"/>
           </p:nvPr>
         </p:nvSpPr>
         <p:spPr>
@@ -13515,7 +12903,7 @@
           <p:cNvPr id="12" name="TextBox 11"/>
           <p:cNvSpPr/>
           <p:nvPr>
-            <p:ph type="body" idx="8"/>
+            <p:ph type="body" idx="13"/>
           </p:nvPr>
         </p:nvSpPr>
         <p:spPr>
@@ -13552,7 +12940,7 @@
           <p:cNvPr id="13" name="TextBox 12"/>
           <p:cNvSpPr/>
           <p:nvPr>
-            <p:ph type="body" idx="9"/>
+            <p:ph type="body" idx="14"/>
           </p:nvPr>
         </p:nvSpPr>
         <p:spPr>
@@ -13589,7 +12977,7 @@
           <p:cNvPr id="14" name="TextBox 13"/>
           <p:cNvSpPr/>
           <p:nvPr>
-            <p:ph type="body" idx="13"/>
+            <p:ph type="body" idx="15"/>
           </p:nvPr>
         </p:nvSpPr>
         <p:spPr>
@@ -13626,7 +13014,7 @@
           <p:cNvPr id="15" name="TextBox 14"/>
           <p:cNvSpPr/>
           <p:nvPr>
-            <p:ph type="body" idx="14"/>
+            <p:ph type="body" idx="16"/>
           </p:nvPr>
         </p:nvSpPr>
         <p:spPr>
@@ -13663,7 +13051,7 @@
           <p:cNvPr id="16" name="TextBox 15"/>
           <p:cNvSpPr/>
           <p:nvPr>
-            <p:ph type="body" idx="15"/>
+            <p:ph type="body" idx="17"/>
           </p:nvPr>
         </p:nvSpPr>
         <p:spPr>
@@ -13699,7 +13087,9 @@
         <p:nvSpPr>
           <p:cNvPr id="17" name="Rectangle 16"/>
           <p:cNvSpPr/>
-          <p:nvPr/>
+          <p:nvPr>
+            <p:ph type="body" idx="18"/>
+          </p:nvPr>
         </p:nvSpPr>
         <p:spPr>
           <a:xfrm>
@@ -13717,20 +13107,6 @@
           </a:ln>
           <a:effectLst/>
         </p:spPr>
-        <p:style>
-          <a:lnRef idx="1">
-            <a:schemeClr val="accent1"/>
-          </a:lnRef>
-          <a:fillRef idx="3">
-            <a:schemeClr val="accent1"/>
-          </a:fillRef>
-          <a:effectRef idx="2">
-            <a:schemeClr val="accent1"/>
-          </a:effectRef>
-          <a:fontRef idx="minor">
-            <a:schemeClr val="lt1"/>
-          </a:fontRef>
-        </p:style>
         <p:txBody>
           <a:bodyPr rtlCol="0" anchor="ctr"/>
           <a:lstStyle/>
@@ -13744,7 +13120,7 @@
           <p:cNvPr id="18" name="TextBox 17"/>
           <p:cNvSpPr/>
           <p:nvPr>
-            <p:ph type="body" idx="16"/>
+            <p:ph type="body" idx="19"/>
           </p:nvPr>
         </p:nvSpPr>
         <p:spPr>
@@ -13781,7 +13157,7 @@
           <p:cNvPr id="19" name="TextBox 18"/>
           <p:cNvSpPr/>
           <p:nvPr>
-            <p:ph type="body" idx="17"/>
+            <p:ph type="body" idx="20"/>
           </p:nvPr>
         </p:nvSpPr>
         <p:spPr>
@@ -13818,7 +13194,7 @@
           <p:cNvPr id="20" name="TextBox 19"/>
           <p:cNvSpPr/>
           <p:nvPr>
-            <p:ph type="body" idx="18"/>
+            <p:ph type="body" idx="21"/>
           </p:nvPr>
         </p:nvSpPr>
         <p:spPr>
@@ -16321,7 +15697,7 @@
         <p:spPr>
           <a:xfrm>
             <a:off x="457200" y="2395727"/>
-            <a:ext cx="5501640" cy="1097281"/>
+            <a:ext cx="5501640" cy="609600"/>
           </a:xfrm>
           <a:prstGeom prst="rect">
             <a:avLst/>
@@ -16342,7 +15718,7 @@
                 </a:solidFill>
                 <a:latin typeface="Arial"/>
               </a:rPr>
-              <a:t>Designs are selectable, not just baked in</a:t>
+              <a:t>All designs are selectable</a:t>
             </a:r>
           </a:p>
         </p:txBody>
@@ -16435,7 +15811,7 @@
         <p:spPr>
           <a:xfrm>
             <a:off x="6233160" y="2395727"/>
-            <a:ext cx="5501640" cy="1097281"/>
+            <a:ext cx="5501640" cy="609600"/>
           </a:xfrm>
           <a:prstGeom prst="rect">
             <a:avLst/>
@@ -16456,7 +15832,7 @@
                 </a:solidFill>
                 <a:latin typeface="Arial"/>
               </a:rPr>
-              <a:t>Adds 30 layouts to every deck file</a:t>
+              <a:t>Adds 30 layouts per deck</a:t>
             </a:r>
           </a:p>
         </p:txBody>
@@ -16549,7 +15925,7 @@
         <p:spPr>
           <a:xfrm>
             <a:off x="457200" y="4663439"/>
-            <a:ext cx="5501640" cy="1097281"/>
+            <a:ext cx="5501640" cy="609600"/>
           </a:xfrm>
           <a:prstGeom prst="rect">
             <a:avLst/>
@@ -16570,7 +15946,7 @@
                 </a:solidFill>
                 <a:latin typeface="Arial"/>
               </a:rPr>
-              <a:t>Apply a design to brand-new slides</a:t>
+              <a:t>Apply designs to new slides</a:t>
             </a:r>
           </a:p>
         </p:txBody>
@@ -16663,7 +16039,7 @@
         <p:spPr>
           <a:xfrm>
             <a:off x="6233160" y="4663439"/>
-            <a:ext cx="5501640" cy="1097281"/>
+            <a:ext cx="5501640" cy="609600"/>
           </a:xfrm>
           <a:prstGeom prst="rect">
             <a:avLst/>
@@ -16684,7 +16060,7 @@
                 </a:solidFill>
                 <a:latin typeface="Arial"/>
               </a:rPr>
-              <a:t>Edited layouts can drift from the YAML</a:t>
+              <a:t>Edited layouts can drift</a:t>
             </a:r>
           </a:p>
         </p:txBody>

--- a/examples/theme-layouts-demo/deck.pptx
+++ b/examples/theme-layouts-demo/deck.pptx
@@ -728,7 +728,35 @@
       </p:grpSpPr>
       <p:sp>
         <p:nvSpPr>
-          <p:cNvPr id="2" name="TextBox 1"/>
+          <p:cNvPr id="4" name="Slide Number Placeholder 3"/>
+          <p:cNvSpPr>
+            <a:spLocks noGrp="1"/>
+          </p:cNvSpPr>
+          <p:nvPr>
+            <p:ph type="sldNum" sz="quarter" idx="12"/>
+          </p:nvPr>
+        </p:nvSpPr>
+        <p:spPr>
+          <a:xfrm>
+            <a:off x="10363200" y="6035040"/>
+            <a:ext cx="1371600" cy="365760"/>
+          </a:xfrm>
+        </p:spPr>
+        <p:txBody>
+          <a:bodyPr/>
+          <a:lstStyle/>
+          <a:p>
+            <a:fld id="{C1FF6DA9-008F-8B48-92A6-B652298478BF}" type="slidenum">
+              <a:rPr lang="en-US" smtClean="0"/>
+              <a:t>‹#›</a:t>
+            </a:fld>
+            <a:endParaRPr lang="en-US"/>
+          </a:p>
+        </p:txBody>
+      </p:sp>
+      <p:sp>
+        <p:nvSpPr>
+          <p:cNvPr id="5" name="TextBox 4"/>
           <p:cNvSpPr/>
           <p:nvPr>
             <p:ph type="title"/>
@@ -745,7 +773,7 @@
           <a:noFill/>
         </p:spPr>
         <p:txBody>
-          <a:bodyPr wrap="square">
+          <a:bodyPr wrap="square" lIns="0" rIns="0">
             <a:noAutofit/>
           </a:bodyPr>
           <a:lstStyle/>
@@ -803,7 +831,35 @@
       </p:grpSpPr>
       <p:sp>
         <p:nvSpPr>
-          <p:cNvPr id="2" name="TextBox 1"/>
+          <p:cNvPr id="4" name="Slide Number Placeholder 3"/>
+          <p:cNvSpPr>
+            <a:spLocks noGrp="1"/>
+          </p:cNvSpPr>
+          <p:nvPr>
+            <p:ph type="sldNum" sz="quarter" idx="12"/>
+          </p:nvPr>
+        </p:nvSpPr>
+        <p:spPr>
+          <a:xfrm>
+            <a:off x="10363200" y="6035040"/>
+            <a:ext cx="1371600" cy="365760"/>
+          </a:xfrm>
+        </p:spPr>
+        <p:txBody>
+          <a:bodyPr/>
+          <a:lstStyle/>
+          <a:p>
+            <a:fld id="{C1FF6DA9-008F-8B48-92A6-B652298478BF}" type="slidenum">
+              <a:rPr lang="en-US" smtClean="0"/>
+              <a:t>‹#›</a:t>
+            </a:fld>
+            <a:endParaRPr lang="en-US"/>
+          </a:p>
+        </p:txBody>
+      </p:sp>
+      <p:sp>
+        <p:nvSpPr>
+          <p:cNvPr id="5" name="TextBox 4"/>
           <p:cNvSpPr/>
           <p:nvPr>
             <p:ph type="title"/>
@@ -820,7 +876,7 @@
           <a:noFill/>
         </p:spPr>
         <p:txBody>
-          <a:bodyPr wrap="square">
+          <a:bodyPr wrap="square" lIns="0" rIns="0">
             <a:noAutofit/>
           </a:bodyPr>
           <a:lstStyle/>
@@ -840,7 +896,7 @@
       </p:sp>
       <p:sp>
         <p:nvSpPr>
-          <p:cNvPr id="3" name="TextBox 2"/>
+          <p:cNvPr id="6" name="TextBox 5"/>
           <p:cNvSpPr/>
           <p:nvPr>
             <p:ph type="body" idx="1"/>
@@ -857,7 +913,7 @@
           <a:noFill/>
         </p:spPr>
         <p:txBody>
-          <a:bodyPr wrap="square">
+          <a:bodyPr wrap="square" lIns="0" rIns="0">
             <a:noAutofit/>
           </a:bodyPr>
           <a:lstStyle/>
@@ -877,7 +933,7 @@
       </p:sp>
       <p:sp>
         <p:nvSpPr>
-          <p:cNvPr id="4" name="TextBox 3"/>
+          <p:cNvPr id="7" name="TextBox 6"/>
           <p:cNvSpPr/>
           <p:nvPr>
             <p:ph type="body" idx="2"/>
@@ -894,7 +950,7 @@
           <a:noFill/>
         </p:spPr>
         <p:txBody>
-          <a:bodyPr wrap="square">
+          <a:bodyPr wrap="square" lIns="0" rIns="0">
             <a:noAutofit/>
           </a:bodyPr>
           <a:lstStyle/>
@@ -914,7 +970,7 @@
       </p:sp>
       <p:sp>
         <p:nvSpPr>
-          <p:cNvPr id="5" name="TextBox 4"/>
+          <p:cNvPr id="8" name="TextBox 7"/>
           <p:cNvSpPr/>
           <p:nvPr>
             <p:ph type="body" idx="3"/>
@@ -931,7 +987,7 @@
           <a:noFill/>
         </p:spPr>
         <p:txBody>
-          <a:bodyPr wrap="square">
+          <a:bodyPr wrap="square" lIns="0" rIns="0">
             <a:noAutofit/>
           </a:bodyPr>
           <a:lstStyle/>
@@ -951,7 +1007,7 @@
       </p:sp>
       <p:sp>
         <p:nvSpPr>
-          <p:cNvPr id="6" name="TextBox 5"/>
+          <p:cNvPr id="9" name="TextBox 8"/>
           <p:cNvSpPr/>
           <p:nvPr>
             <p:ph type="body" idx="4"/>
@@ -968,7 +1024,7 @@
           <a:noFill/>
         </p:spPr>
         <p:txBody>
-          <a:bodyPr wrap="square">
+          <a:bodyPr wrap="square" lIns="0" rIns="0">
             <a:noAutofit/>
           </a:bodyPr>
           <a:lstStyle/>
@@ -988,7 +1044,7 @@
       </p:sp>
       <p:sp>
         <p:nvSpPr>
-          <p:cNvPr id="7" name="TextBox 6"/>
+          <p:cNvPr id="10" name="TextBox 9"/>
           <p:cNvSpPr/>
           <p:nvPr>
             <p:ph type="body" idx="5"/>
@@ -1005,7 +1061,7 @@
           <a:noFill/>
         </p:spPr>
         <p:txBody>
-          <a:bodyPr wrap="square">
+          <a:bodyPr wrap="square" lIns="0" rIns="0">
             <a:noAutofit/>
           </a:bodyPr>
           <a:lstStyle/>
@@ -1025,7 +1081,7 @@
       </p:sp>
       <p:sp>
         <p:nvSpPr>
-          <p:cNvPr id="8" name="TextBox 7"/>
+          <p:cNvPr id="11" name="TextBox 10"/>
           <p:cNvSpPr/>
           <p:nvPr>
             <p:ph type="body" idx="6"/>
@@ -1042,7 +1098,7 @@
           <a:noFill/>
         </p:spPr>
         <p:txBody>
-          <a:bodyPr wrap="square">
+          <a:bodyPr wrap="square" lIns="0" rIns="0">
             <a:noAutofit/>
           </a:bodyPr>
           <a:lstStyle/>
@@ -1100,7 +1156,35 @@
       </p:grpSpPr>
       <p:sp>
         <p:nvSpPr>
-          <p:cNvPr id="2" name="TextBox 1"/>
+          <p:cNvPr id="4" name="Slide Number Placeholder 3"/>
+          <p:cNvSpPr>
+            <a:spLocks noGrp="1"/>
+          </p:cNvSpPr>
+          <p:nvPr>
+            <p:ph type="sldNum" sz="quarter" idx="12"/>
+          </p:nvPr>
+        </p:nvSpPr>
+        <p:spPr>
+          <a:xfrm>
+            <a:off x="10363200" y="6035040"/>
+            <a:ext cx="1371600" cy="365760"/>
+          </a:xfrm>
+        </p:spPr>
+        <p:txBody>
+          <a:bodyPr/>
+          <a:lstStyle/>
+          <a:p>
+            <a:fld id="{C1FF6DA9-008F-8B48-92A6-B652298478BF}" type="slidenum">
+              <a:rPr lang="en-US" smtClean="0"/>
+              <a:t>‹#›</a:t>
+            </a:fld>
+            <a:endParaRPr lang="en-US"/>
+          </a:p>
+        </p:txBody>
+      </p:sp>
+      <p:sp>
+        <p:nvSpPr>
+          <p:cNvPr id="5" name="TextBox 4"/>
           <p:cNvSpPr/>
           <p:nvPr>
             <p:ph type="title"/>
@@ -1117,7 +1201,7 @@
           <a:noFill/>
         </p:spPr>
         <p:txBody>
-          <a:bodyPr wrap="square">
+          <a:bodyPr wrap="square" lIns="0" rIns="0">
             <a:noAutofit/>
           </a:bodyPr>
           <a:lstStyle/>
@@ -1137,7 +1221,7 @@
       </p:sp>
       <p:sp>
         <p:nvSpPr>
-          <p:cNvPr id="3" name="TextBox 2"/>
+          <p:cNvPr id="6" name="TextBox 5"/>
           <p:cNvSpPr/>
           <p:nvPr>
             <p:ph type="body" idx="1"/>
@@ -1154,7 +1238,7 @@
           <a:noFill/>
         </p:spPr>
         <p:txBody>
-          <a:bodyPr wrap="square">
+          <a:bodyPr wrap="square" lIns="0" rIns="0">
             <a:noAutofit/>
           </a:bodyPr>
           <a:lstStyle/>
@@ -1174,7 +1258,7 @@
       </p:sp>
       <p:sp>
         <p:nvSpPr>
-          <p:cNvPr id="4" name="TextBox 3"/>
+          <p:cNvPr id="7" name="TextBox 6"/>
           <p:cNvSpPr/>
           <p:nvPr>
             <p:ph type="body" idx="2"/>
@@ -1191,7 +1275,7 @@
           <a:noFill/>
         </p:spPr>
         <p:txBody>
-          <a:bodyPr wrap="square">
+          <a:bodyPr wrap="square" lIns="0" rIns="0">
             <a:noAutofit/>
           </a:bodyPr>
           <a:lstStyle/>
@@ -1211,7 +1295,7 @@
       </p:sp>
       <p:sp>
         <p:nvSpPr>
-          <p:cNvPr id="5" name="TextBox 4"/>
+          <p:cNvPr id="8" name="TextBox 7"/>
           <p:cNvSpPr/>
           <p:nvPr>
             <p:ph type="body" idx="3"/>
@@ -1228,7 +1312,7 @@
           <a:noFill/>
         </p:spPr>
         <p:txBody>
-          <a:bodyPr wrap="square">
+          <a:bodyPr wrap="square" lIns="0" rIns="0">
             <a:noAutofit/>
           </a:bodyPr>
           <a:lstStyle/>
@@ -1248,7 +1332,7 @@
       </p:sp>
       <p:sp>
         <p:nvSpPr>
-          <p:cNvPr id="6" name="TextBox 5"/>
+          <p:cNvPr id="9" name="TextBox 8"/>
           <p:cNvSpPr/>
           <p:nvPr>
             <p:ph type="body" idx="4"/>
@@ -1265,7 +1349,7 @@
           <a:noFill/>
         </p:spPr>
         <p:txBody>
-          <a:bodyPr wrap="square">
+          <a:bodyPr wrap="square" lIns="0" rIns="0">
             <a:noAutofit/>
           </a:bodyPr>
           <a:lstStyle/>
@@ -1285,7 +1369,7 @@
       </p:sp>
       <p:sp>
         <p:nvSpPr>
-          <p:cNvPr id="7" name="TextBox 6"/>
+          <p:cNvPr id="10" name="TextBox 9"/>
           <p:cNvSpPr/>
           <p:nvPr>
             <p:ph type="body" idx="5"/>
@@ -1302,7 +1386,7 @@
           <a:noFill/>
         </p:spPr>
         <p:txBody>
-          <a:bodyPr wrap="square">
+          <a:bodyPr wrap="square" lIns="0" rIns="0">
             <a:noAutofit/>
           </a:bodyPr>
           <a:lstStyle/>
@@ -1322,7 +1406,7 @@
       </p:sp>
       <p:sp>
         <p:nvSpPr>
-          <p:cNvPr id="8" name="TextBox 7"/>
+          <p:cNvPr id="11" name="TextBox 10"/>
           <p:cNvSpPr/>
           <p:nvPr>
             <p:ph type="body" idx="6"/>
@@ -1339,7 +1423,7 @@
           <a:noFill/>
         </p:spPr>
         <p:txBody>
-          <a:bodyPr wrap="square">
+          <a:bodyPr wrap="square" lIns="0" rIns="0">
             <a:noAutofit/>
           </a:bodyPr>
           <a:lstStyle/>
@@ -1397,7 +1481,35 @@
       </p:grpSpPr>
       <p:sp>
         <p:nvSpPr>
-          <p:cNvPr id="2" name="TextBox 1"/>
+          <p:cNvPr id="4" name="Slide Number Placeholder 3"/>
+          <p:cNvSpPr>
+            <a:spLocks noGrp="1"/>
+          </p:cNvSpPr>
+          <p:nvPr>
+            <p:ph type="sldNum" sz="quarter" idx="12"/>
+          </p:nvPr>
+        </p:nvSpPr>
+        <p:spPr>
+          <a:xfrm>
+            <a:off x="10363200" y="6035040"/>
+            <a:ext cx="1371600" cy="365760"/>
+          </a:xfrm>
+        </p:spPr>
+        <p:txBody>
+          <a:bodyPr/>
+          <a:lstStyle/>
+          <a:p>
+            <a:fld id="{C1FF6DA9-008F-8B48-92A6-B652298478BF}" type="slidenum">
+              <a:rPr lang="en-US" smtClean="0"/>
+              <a:t>‹#›</a:t>
+            </a:fld>
+            <a:endParaRPr lang="en-US"/>
+          </a:p>
+        </p:txBody>
+      </p:sp>
+      <p:sp>
+        <p:nvSpPr>
+          <p:cNvPr id="5" name="TextBox 4"/>
           <p:cNvSpPr/>
           <p:nvPr>
             <p:ph type="title"/>
@@ -1414,7 +1526,7 @@
           <a:noFill/>
         </p:spPr>
         <p:txBody>
-          <a:bodyPr wrap="square">
+          <a:bodyPr wrap="square" lIns="0" rIns="0">
             <a:noAutofit/>
           </a:bodyPr>
           <a:lstStyle/>
@@ -1434,7 +1546,7 @@
       </p:sp>
       <p:sp>
         <p:nvSpPr>
-          <p:cNvPr id="3" name="TextBox 2"/>
+          <p:cNvPr id="6" name="TextBox 5"/>
           <p:cNvSpPr/>
           <p:nvPr>
             <p:ph type="body" idx="1"/>
@@ -1451,7 +1563,7 @@
           <a:noFill/>
         </p:spPr>
         <p:txBody>
-          <a:bodyPr wrap="square">
+          <a:bodyPr wrap="square" lIns="0" rIns="0">
             <a:noAutofit/>
           </a:bodyPr>
           <a:lstStyle/>
@@ -1471,7 +1583,7 @@
       </p:sp>
       <p:sp>
         <p:nvSpPr>
-          <p:cNvPr id="4" name="TextBox 3"/>
+          <p:cNvPr id="7" name="TextBox 6"/>
           <p:cNvSpPr/>
           <p:nvPr>
             <p:ph type="body" idx="2"/>
@@ -1488,7 +1600,7 @@
           <a:noFill/>
         </p:spPr>
         <p:txBody>
-          <a:bodyPr wrap="square">
+          <a:bodyPr wrap="square" lIns="0" rIns="0">
             <a:noAutofit/>
           </a:bodyPr>
           <a:lstStyle/>
@@ -1508,7 +1620,7 @@
       </p:sp>
       <p:sp>
         <p:nvSpPr>
-          <p:cNvPr id="5" name="TextBox 4"/>
+          <p:cNvPr id="8" name="TextBox 7"/>
           <p:cNvSpPr/>
           <p:nvPr>
             <p:ph type="body" idx="3"/>
@@ -1525,7 +1637,7 @@
           <a:noFill/>
         </p:spPr>
         <p:txBody>
-          <a:bodyPr wrap="square">
+          <a:bodyPr wrap="square" lIns="0" rIns="0">
             <a:noAutofit/>
           </a:bodyPr>
           <a:lstStyle/>
@@ -1545,7 +1657,7 @@
       </p:sp>
       <p:sp>
         <p:nvSpPr>
-          <p:cNvPr id="6" name="TextBox 5"/>
+          <p:cNvPr id="9" name="TextBox 8"/>
           <p:cNvSpPr/>
           <p:nvPr>
             <p:ph type="body" idx="4"/>
@@ -1562,7 +1674,7 @@
           <a:noFill/>
         </p:spPr>
         <p:txBody>
-          <a:bodyPr wrap="square">
+          <a:bodyPr wrap="square" lIns="0" rIns="0">
             <a:noAutofit/>
           </a:bodyPr>
           <a:lstStyle/>
@@ -1582,7 +1694,7 @@
       </p:sp>
       <p:sp>
         <p:nvSpPr>
-          <p:cNvPr id="7" name="TextBox 6"/>
+          <p:cNvPr id="10" name="TextBox 9"/>
           <p:cNvSpPr/>
           <p:nvPr>
             <p:ph type="body" idx="5"/>
@@ -1599,7 +1711,7 @@
           <a:noFill/>
         </p:spPr>
         <p:txBody>
-          <a:bodyPr wrap="square">
+          <a:bodyPr wrap="square" lIns="0" rIns="0">
             <a:noAutofit/>
           </a:bodyPr>
           <a:lstStyle/>
@@ -1619,7 +1731,7 @@
       </p:sp>
       <p:sp>
         <p:nvSpPr>
-          <p:cNvPr id="8" name="TextBox 7"/>
+          <p:cNvPr id="11" name="TextBox 10"/>
           <p:cNvSpPr/>
           <p:nvPr>
             <p:ph type="body" idx="6"/>
@@ -1636,7 +1748,7 @@
           <a:noFill/>
         </p:spPr>
         <p:txBody>
-          <a:bodyPr wrap="square">
+          <a:bodyPr wrap="square" lIns="0" rIns="0">
             <a:noAutofit/>
           </a:bodyPr>
           <a:lstStyle/>
@@ -1656,7 +1768,7 @@
       </p:sp>
       <p:sp>
         <p:nvSpPr>
-          <p:cNvPr id="9" name="TextBox 8"/>
+          <p:cNvPr id="12" name="TextBox 11"/>
           <p:cNvSpPr/>
           <p:nvPr>
             <p:ph type="body" idx="7"/>
@@ -1673,7 +1785,7 @@
           <a:noFill/>
         </p:spPr>
         <p:txBody>
-          <a:bodyPr wrap="square">
+          <a:bodyPr wrap="square" lIns="0" rIns="0">
             <a:noAutofit/>
           </a:bodyPr>
           <a:lstStyle/>
@@ -1693,7 +1805,7 @@
       </p:sp>
       <p:sp>
         <p:nvSpPr>
-          <p:cNvPr id="10" name="TextBox 9"/>
+          <p:cNvPr id="13" name="TextBox 12"/>
           <p:cNvSpPr/>
           <p:nvPr>
             <p:ph type="body" idx="8"/>
@@ -1710,7 +1822,7 @@
           <a:noFill/>
         </p:spPr>
         <p:txBody>
-          <a:bodyPr wrap="square">
+          <a:bodyPr wrap="square" lIns="0" rIns="0">
             <a:noAutofit/>
           </a:bodyPr>
           <a:lstStyle/>
@@ -1768,7 +1880,35 @@
       </p:grpSpPr>
       <p:sp>
         <p:nvSpPr>
-          <p:cNvPr id="2" name="TextBox 1"/>
+          <p:cNvPr id="4" name="Slide Number Placeholder 3"/>
+          <p:cNvSpPr>
+            <a:spLocks noGrp="1"/>
+          </p:cNvSpPr>
+          <p:nvPr>
+            <p:ph type="sldNum" sz="quarter" idx="12"/>
+          </p:nvPr>
+        </p:nvSpPr>
+        <p:spPr>
+          <a:xfrm>
+            <a:off x="10363200" y="6035040"/>
+            <a:ext cx="1371600" cy="365760"/>
+          </a:xfrm>
+        </p:spPr>
+        <p:txBody>
+          <a:bodyPr/>
+          <a:lstStyle/>
+          <a:p>
+            <a:fld id="{C1FF6DA9-008F-8B48-92A6-B652298478BF}" type="slidenum">
+              <a:rPr lang="en-US" smtClean="0"/>
+              <a:t>‹#›</a:t>
+            </a:fld>
+            <a:endParaRPr lang="en-US"/>
+          </a:p>
+        </p:txBody>
+      </p:sp>
+      <p:sp>
+        <p:nvSpPr>
+          <p:cNvPr id="5" name="TextBox 4"/>
           <p:cNvSpPr/>
           <p:nvPr>
             <p:ph type="title"/>
@@ -1785,7 +1925,7 @@
           <a:noFill/>
         </p:spPr>
         <p:txBody>
-          <a:bodyPr wrap="square">
+          <a:bodyPr wrap="square" lIns="0" rIns="0">
             <a:noAutofit/>
           </a:bodyPr>
           <a:lstStyle/>
@@ -1805,7 +1945,7 @@
       </p:sp>
       <p:sp>
         <p:nvSpPr>
-          <p:cNvPr id="3" name="TextBox 2"/>
+          <p:cNvPr id="6" name="TextBox 5"/>
           <p:cNvSpPr/>
           <p:nvPr>
             <p:ph type="body" idx="1"/>
@@ -1822,7 +1962,7 @@
           <a:noFill/>
         </p:spPr>
         <p:txBody>
-          <a:bodyPr wrap="square">
+          <a:bodyPr wrap="square" lIns="0" rIns="0">
             <a:noAutofit/>
           </a:bodyPr>
           <a:lstStyle/>
@@ -1842,7 +1982,7 @@
       </p:sp>
       <p:sp>
         <p:nvSpPr>
-          <p:cNvPr id="4" name="TextBox 3"/>
+          <p:cNvPr id="7" name="TextBox 6"/>
           <p:cNvSpPr/>
           <p:nvPr>
             <p:ph type="body" idx="2"/>
@@ -1859,7 +1999,7 @@
           <a:noFill/>
         </p:spPr>
         <p:txBody>
-          <a:bodyPr wrap="square">
+          <a:bodyPr wrap="square" lIns="0" rIns="0">
             <a:noAutofit/>
           </a:bodyPr>
           <a:lstStyle/>
@@ -1879,7 +2019,7 @@
       </p:sp>
       <p:sp>
         <p:nvSpPr>
-          <p:cNvPr id="5" name="TextBox 4"/>
+          <p:cNvPr id="8" name="TextBox 7"/>
           <p:cNvSpPr/>
           <p:nvPr>
             <p:ph type="body" idx="3"/>
@@ -1896,7 +2036,7 @@
           <a:noFill/>
         </p:spPr>
         <p:txBody>
-          <a:bodyPr wrap="square">
+          <a:bodyPr wrap="square" lIns="0" rIns="0">
             <a:noAutofit/>
           </a:bodyPr>
           <a:lstStyle/>
@@ -1916,7 +2056,7 @@
       </p:sp>
       <p:sp>
         <p:nvSpPr>
-          <p:cNvPr id="6" name="TextBox 5"/>
+          <p:cNvPr id="9" name="TextBox 8"/>
           <p:cNvSpPr/>
           <p:nvPr>
             <p:ph type="body" idx="4"/>
@@ -1933,7 +2073,7 @@
           <a:noFill/>
         </p:spPr>
         <p:txBody>
-          <a:bodyPr wrap="square">
+          <a:bodyPr wrap="square" lIns="0" rIns="0">
             <a:noAutofit/>
           </a:bodyPr>
           <a:lstStyle/>
@@ -1953,7 +2093,7 @@
       </p:sp>
       <p:sp>
         <p:nvSpPr>
-          <p:cNvPr id="7" name="TextBox 6"/>
+          <p:cNvPr id="10" name="TextBox 9"/>
           <p:cNvSpPr/>
           <p:nvPr>
             <p:ph type="body" idx="5"/>
@@ -1970,7 +2110,7 @@
           <a:noFill/>
         </p:spPr>
         <p:txBody>
-          <a:bodyPr wrap="square">
+          <a:bodyPr wrap="square" lIns="0" rIns="0">
             <a:noAutofit/>
           </a:bodyPr>
           <a:lstStyle/>
@@ -1990,7 +2130,7 @@
       </p:sp>
       <p:sp>
         <p:nvSpPr>
-          <p:cNvPr id="8" name="TextBox 7"/>
+          <p:cNvPr id="11" name="TextBox 10"/>
           <p:cNvSpPr/>
           <p:nvPr>
             <p:ph type="body" idx="6"/>
@@ -2007,7 +2147,7 @@
           <a:noFill/>
         </p:spPr>
         <p:txBody>
-          <a:bodyPr wrap="square">
+          <a:bodyPr wrap="square" lIns="0" rIns="0">
             <a:noAutofit/>
           </a:bodyPr>
           <a:lstStyle/>
@@ -2027,7 +2167,7 @@
       </p:sp>
       <p:sp>
         <p:nvSpPr>
-          <p:cNvPr id="9" name="TextBox 8"/>
+          <p:cNvPr id="12" name="TextBox 11"/>
           <p:cNvSpPr/>
           <p:nvPr>
             <p:ph type="body" idx="7"/>
@@ -2044,7 +2184,7 @@
           <a:noFill/>
         </p:spPr>
         <p:txBody>
-          <a:bodyPr wrap="square">
+          <a:bodyPr wrap="square" lIns="0" rIns="0">
             <a:noAutofit/>
           </a:bodyPr>
           <a:lstStyle/>
@@ -2064,7 +2204,7 @@
       </p:sp>
       <p:sp>
         <p:nvSpPr>
-          <p:cNvPr id="10" name="TextBox 9"/>
+          <p:cNvPr id="13" name="TextBox 12"/>
           <p:cNvSpPr/>
           <p:nvPr>
             <p:ph type="body" idx="8"/>
@@ -2081,7 +2221,7 @@
           <a:noFill/>
         </p:spPr>
         <p:txBody>
-          <a:bodyPr wrap="square">
+          <a:bodyPr wrap="square" lIns="0" rIns="0">
             <a:noAutofit/>
           </a:bodyPr>
           <a:lstStyle/>
@@ -2101,7 +2241,7 @@
       </p:sp>
       <p:sp>
         <p:nvSpPr>
-          <p:cNvPr id="11" name="TextBox 10"/>
+          <p:cNvPr id="14" name="TextBox 13"/>
           <p:cNvSpPr/>
           <p:nvPr>
             <p:ph type="body" idx="9"/>
@@ -2118,7 +2258,7 @@
           <a:noFill/>
         </p:spPr>
         <p:txBody>
-          <a:bodyPr wrap="square">
+          <a:bodyPr wrap="square" lIns="0" rIns="0">
             <a:noAutofit/>
           </a:bodyPr>
           <a:lstStyle/>
@@ -2138,7 +2278,7 @@
       </p:sp>
       <p:sp>
         <p:nvSpPr>
-          <p:cNvPr id="12" name="TextBox 11"/>
+          <p:cNvPr id="15" name="TextBox 14"/>
           <p:cNvSpPr/>
           <p:nvPr>
             <p:ph type="body" idx="13"/>
@@ -2155,7 +2295,7 @@
           <a:noFill/>
         </p:spPr>
         <p:txBody>
-          <a:bodyPr wrap="square">
+          <a:bodyPr wrap="square" lIns="0" rIns="0">
             <a:noAutofit/>
           </a:bodyPr>
           <a:lstStyle/>
@@ -2175,7 +2315,7 @@
       </p:sp>
       <p:sp>
         <p:nvSpPr>
-          <p:cNvPr id="13" name="TextBox 12"/>
+          <p:cNvPr id="16" name="TextBox 15"/>
           <p:cNvSpPr/>
           <p:nvPr>
             <p:ph type="body" idx="14"/>
@@ -2192,7 +2332,7 @@
           <a:noFill/>
         </p:spPr>
         <p:txBody>
-          <a:bodyPr wrap="square">
+          <a:bodyPr wrap="square" lIns="0" rIns="0">
             <a:noAutofit/>
           </a:bodyPr>
           <a:lstStyle/>
@@ -2212,7 +2352,7 @@
       </p:sp>
       <p:sp>
         <p:nvSpPr>
-          <p:cNvPr id="14" name="TextBox 13"/>
+          <p:cNvPr id="17" name="TextBox 16"/>
           <p:cNvSpPr/>
           <p:nvPr>
             <p:ph type="body" idx="15"/>
@@ -2229,7 +2369,7 @@
           <a:noFill/>
         </p:spPr>
         <p:txBody>
-          <a:bodyPr wrap="square">
+          <a:bodyPr wrap="square" lIns="0" rIns="0">
             <a:noAutofit/>
           </a:bodyPr>
           <a:lstStyle/>
@@ -2287,7 +2427,35 @@
       </p:grpSpPr>
       <p:sp>
         <p:nvSpPr>
-          <p:cNvPr id="2" name="TextBox 1"/>
+          <p:cNvPr id="4" name="Slide Number Placeholder 3"/>
+          <p:cNvSpPr>
+            <a:spLocks noGrp="1"/>
+          </p:cNvSpPr>
+          <p:nvPr>
+            <p:ph type="sldNum" sz="quarter" idx="12"/>
+          </p:nvPr>
+        </p:nvSpPr>
+        <p:spPr>
+          <a:xfrm>
+            <a:off x="10363200" y="6035040"/>
+            <a:ext cx="1371600" cy="365760"/>
+          </a:xfrm>
+        </p:spPr>
+        <p:txBody>
+          <a:bodyPr/>
+          <a:lstStyle/>
+          <a:p>
+            <a:fld id="{C1FF6DA9-008F-8B48-92A6-B652298478BF}" type="slidenum">
+              <a:rPr lang="en-US" smtClean="0"/>
+              <a:t>‹#›</a:t>
+            </a:fld>
+            <a:endParaRPr lang="en-US"/>
+          </a:p>
+        </p:txBody>
+      </p:sp>
+      <p:sp>
+        <p:nvSpPr>
+          <p:cNvPr id="5" name="TextBox 4"/>
           <p:cNvSpPr/>
           <p:nvPr>
             <p:ph type="title"/>
@@ -2304,7 +2472,7 @@
           <a:noFill/>
         </p:spPr>
         <p:txBody>
-          <a:bodyPr wrap="square">
+          <a:bodyPr wrap="square" lIns="0" rIns="0">
             <a:noAutofit/>
           </a:bodyPr>
           <a:lstStyle/>
@@ -2324,7 +2492,7 @@
       </p:sp>
       <p:sp>
         <p:nvSpPr>
-          <p:cNvPr id="3" name="TextBox 2"/>
+          <p:cNvPr id="6" name="TextBox 5"/>
           <p:cNvSpPr/>
           <p:nvPr>
             <p:ph type="body" idx="1"/>
@@ -2341,7 +2509,7 @@
           <a:noFill/>
         </p:spPr>
         <p:txBody>
-          <a:bodyPr wrap="square">
+          <a:bodyPr wrap="square" lIns="0" rIns="0">
             <a:noAutofit/>
           </a:bodyPr>
           <a:lstStyle/>
@@ -2361,7 +2529,7 @@
       </p:sp>
       <p:sp>
         <p:nvSpPr>
-          <p:cNvPr id="4" name="TextBox 3"/>
+          <p:cNvPr id="7" name="TextBox 6"/>
           <p:cNvSpPr/>
           <p:nvPr>
             <p:ph type="body" idx="2"/>
@@ -2378,7 +2546,7 @@
           <a:noFill/>
         </p:spPr>
         <p:txBody>
-          <a:bodyPr wrap="square">
+          <a:bodyPr wrap="square" lIns="0" rIns="0">
             <a:noAutofit/>
           </a:bodyPr>
           <a:lstStyle/>
@@ -2436,7 +2604,35 @@
       </p:grpSpPr>
       <p:sp>
         <p:nvSpPr>
-          <p:cNvPr id="2" name="TextBox 1"/>
+          <p:cNvPr id="4" name="Slide Number Placeholder 3"/>
+          <p:cNvSpPr>
+            <a:spLocks noGrp="1"/>
+          </p:cNvSpPr>
+          <p:nvPr>
+            <p:ph type="sldNum" sz="quarter" idx="12"/>
+          </p:nvPr>
+        </p:nvSpPr>
+        <p:spPr>
+          <a:xfrm>
+            <a:off x="10363200" y="6035040"/>
+            <a:ext cx="1371600" cy="365760"/>
+          </a:xfrm>
+        </p:spPr>
+        <p:txBody>
+          <a:bodyPr/>
+          <a:lstStyle/>
+          <a:p>
+            <a:fld id="{C1FF6DA9-008F-8B48-92A6-B652298478BF}" type="slidenum">
+              <a:rPr lang="en-US" smtClean="0"/>
+              <a:t>‹#›</a:t>
+            </a:fld>
+            <a:endParaRPr lang="en-US"/>
+          </a:p>
+        </p:txBody>
+      </p:sp>
+      <p:sp>
+        <p:nvSpPr>
+          <p:cNvPr id="5" name="TextBox 4"/>
           <p:cNvSpPr/>
           <p:nvPr>
             <p:ph type="title"/>
@@ -2453,7 +2649,7 @@
           <a:noFill/>
         </p:spPr>
         <p:txBody>
-          <a:bodyPr wrap="square">
+          <a:bodyPr wrap="square" lIns="0" rIns="0">
             <a:noAutofit/>
           </a:bodyPr>
           <a:lstStyle/>
@@ -2473,7 +2669,7 @@
       </p:sp>
       <p:sp>
         <p:nvSpPr>
-          <p:cNvPr id="3" name="TextBox 2"/>
+          <p:cNvPr id="6" name="TextBox 5"/>
           <p:cNvSpPr/>
           <p:nvPr>
             <p:ph type="body" idx="1"/>
@@ -2490,7 +2686,7 @@
           <a:noFill/>
         </p:spPr>
         <p:txBody>
-          <a:bodyPr wrap="square">
+          <a:bodyPr wrap="square" lIns="0" rIns="0">
             <a:noAutofit/>
           </a:bodyPr>
           <a:lstStyle/>
@@ -2510,7 +2706,7 @@
       </p:sp>
       <p:sp>
         <p:nvSpPr>
-          <p:cNvPr id="4" name="TextBox 3"/>
+          <p:cNvPr id="7" name="TextBox 6"/>
           <p:cNvSpPr/>
           <p:nvPr>
             <p:ph type="body" idx="2"/>
@@ -2527,7 +2723,7 @@
           <a:noFill/>
         </p:spPr>
         <p:txBody>
-          <a:bodyPr wrap="square">
+          <a:bodyPr wrap="square" lIns="0" rIns="0">
             <a:noAutofit/>
           </a:bodyPr>
           <a:lstStyle/>
@@ -2547,7 +2743,7 @@
       </p:sp>
       <p:sp>
         <p:nvSpPr>
-          <p:cNvPr id="5" name="TextBox 4"/>
+          <p:cNvPr id="8" name="TextBox 7"/>
           <p:cNvSpPr/>
           <p:nvPr>
             <p:ph type="body" idx="3"/>
@@ -2564,7 +2760,7 @@
           <a:noFill/>
         </p:spPr>
         <p:txBody>
-          <a:bodyPr wrap="square">
+          <a:bodyPr wrap="square" lIns="0" rIns="0">
             <a:noAutofit/>
           </a:bodyPr>
           <a:lstStyle/>
@@ -2584,7 +2780,7 @@
       </p:sp>
       <p:sp>
         <p:nvSpPr>
-          <p:cNvPr id="6" name="TextBox 5"/>
+          <p:cNvPr id="9" name="TextBox 8"/>
           <p:cNvSpPr/>
           <p:nvPr>
             <p:ph type="body" idx="4"/>
@@ -2601,7 +2797,7 @@
           <a:noFill/>
         </p:spPr>
         <p:txBody>
-          <a:bodyPr wrap="square">
+          <a:bodyPr wrap="square" lIns="0" rIns="0">
             <a:noAutofit/>
           </a:bodyPr>
           <a:lstStyle/>
@@ -2621,7 +2817,7 @@
       </p:sp>
       <p:sp>
         <p:nvSpPr>
-          <p:cNvPr id="7" name="TextBox 6"/>
+          <p:cNvPr id="10" name="TextBox 9"/>
           <p:cNvSpPr/>
           <p:nvPr>
             <p:ph type="body" idx="5"/>
@@ -2638,7 +2834,7 @@
           <a:noFill/>
         </p:spPr>
         <p:txBody>
-          <a:bodyPr wrap="square">
+          <a:bodyPr wrap="square" lIns="0" rIns="0">
             <a:noAutofit/>
           </a:bodyPr>
           <a:lstStyle/>
@@ -2658,7 +2854,7 @@
       </p:sp>
       <p:sp>
         <p:nvSpPr>
-          <p:cNvPr id="8" name="TextBox 7"/>
+          <p:cNvPr id="11" name="TextBox 10"/>
           <p:cNvSpPr/>
           <p:nvPr>
             <p:ph type="body" idx="6"/>
@@ -2675,7 +2871,7 @@
           <a:noFill/>
         </p:spPr>
         <p:txBody>
-          <a:bodyPr wrap="square">
+          <a:bodyPr wrap="square" lIns="0" rIns="0">
             <a:noAutofit/>
           </a:bodyPr>
           <a:lstStyle/>
@@ -2695,7 +2891,7 @@
       </p:sp>
       <p:sp>
         <p:nvSpPr>
-          <p:cNvPr id="9" name="TextBox 8"/>
+          <p:cNvPr id="12" name="TextBox 11"/>
           <p:cNvSpPr/>
           <p:nvPr>
             <p:ph type="body" idx="7"/>
@@ -2712,7 +2908,7 @@
           <a:noFill/>
         </p:spPr>
         <p:txBody>
-          <a:bodyPr wrap="square">
+          <a:bodyPr wrap="square" lIns="0" rIns="0">
             <a:noAutofit/>
           </a:bodyPr>
           <a:lstStyle/>
@@ -2732,7 +2928,7 @@
       </p:sp>
       <p:sp>
         <p:nvSpPr>
-          <p:cNvPr id="10" name="TextBox 9"/>
+          <p:cNvPr id="13" name="TextBox 12"/>
           <p:cNvSpPr/>
           <p:nvPr>
             <p:ph type="body" idx="8"/>
@@ -2749,7 +2945,7 @@
           <a:noFill/>
         </p:spPr>
         <p:txBody>
-          <a:bodyPr wrap="square">
+          <a:bodyPr wrap="square" lIns="0" rIns="0">
             <a:noAutofit/>
           </a:bodyPr>
           <a:lstStyle/>
@@ -2807,7 +3003,35 @@
       </p:grpSpPr>
       <p:sp>
         <p:nvSpPr>
-          <p:cNvPr id="2" name="Rectangle 1"/>
+          <p:cNvPr id="4" name="Slide Number Placeholder 3"/>
+          <p:cNvSpPr>
+            <a:spLocks noGrp="1"/>
+          </p:cNvSpPr>
+          <p:nvPr>
+            <p:ph type="sldNum" sz="quarter" idx="12"/>
+          </p:nvPr>
+        </p:nvSpPr>
+        <p:spPr>
+          <a:xfrm>
+            <a:off x="10363200" y="6035040"/>
+            <a:ext cx="1371600" cy="365760"/>
+          </a:xfrm>
+        </p:spPr>
+        <p:txBody>
+          <a:bodyPr/>
+          <a:lstStyle/>
+          <a:p>
+            <a:fld id="{C1FF6DA9-008F-8B48-92A6-B652298478BF}" type="slidenum">
+              <a:rPr lang="en-US" smtClean="0"/>
+              <a:t>‹#›</a:t>
+            </a:fld>
+            <a:endParaRPr lang="en-US"/>
+          </a:p>
+        </p:txBody>
+      </p:sp>
+      <p:sp>
+        <p:nvSpPr>
+          <p:cNvPr id="5" name="Rectangle 4"/>
           <p:cNvSpPr/>
           <p:nvPr>
             <p:ph type="body" idx="1"/>
@@ -2839,7 +3063,7 @@
       </p:sp>
       <p:sp>
         <p:nvSpPr>
-          <p:cNvPr id="3" name="TextBox 2"/>
+          <p:cNvPr id="6" name="TextBox 5"/>
           <p:cNvSpPr/>
           <p:nvPr>
             <p:ph type="body" idx="2"/>
@@ -2856,7 +3080,7 @@
           <a:noFill/>
         </p:spPr>
         <p:txBody>
-          <a:bodyPr wrap="square">
+          <a:bodyPr wrap="square" lIns="0" rIns="0">
             <a:noAutofit/>
           </a:bodyPr>
           <a:lstStyle/>
@@ -2876,7 +3100,7 @@
       </p:sp>
       <p:sp>
         <p:nvSpPr>
-          <p:cNvPr id="4" name="TextBox 3"/>
+          <p:cNvPr id="7" name="TextBox 6"/>
           <p:cNvSpPr/>
           <p:nvPr>
             <p:ph type="body" idx="3"/>
@@ -2893,7 +3117,7 @@
           <a:noFill/>
         </p:spPr>
         <p:txBody>
-          <a:bodyPr wrap="square">
+          <a:bodyPr wrap="square" lIns="0" rIns="0">
             <a:noAutofit/>
           </a:bodyPr>
           <a:lstStyle/>
@@ -3121,7 +3345,35 @@
       </p:grpSpPr>
       <p:sp>
         <p:nvSpPr>
-          <p:cNvPr id="2" name="TextBox 1"/>
+          <p:cNvPr id="4" name="Slide Number Placeholder 3"/>
+          <p:cNvSpPr>
+            <a:spLocks noGrp="1"/>
+          </p:cNvSpPr>
+          <p:nvPr>
+            <p:ph type="sldNum" sz="quarter" idx="12"/>
+          </p:nvPr>
+        </p:nvSpPr>
+        <p:spPr>
+          <a:xfrm>
+            <a:off x="10363200" y="6035040"/>
+            <a:ext cx="1371600" cy="365760"/>
+          </a:xfrm>
+        </p:spPr>
+        <p:txBody>
+          <a:bodyPr/>
+          <a:lstStyle/>
+          <a:p>
+            <a:fld id="{C1FF6DA9-008F-8B48-92A6-B652298478BF}" type="slidenum">
+              <a:rPr lang="en-US" smtClean="0"/>
+              <a:t>‹#›</a:t>
+            </a:fld>
+            <a:endParaRPr lang="en-US"/>
+          </a:p>
+        </p:txBody>
+      </p:sp>
+      <p:sp>
+        <p:nvSpPr>
+          <p:cNvPr id="5" name="TextBox 4"/>
           <p:cNvSpPr/>
           <p:nvPr>
             <p:ph type="title"/>
@@ -3138,7 +3390,7 @@
           <a:noFill/>
         </p:spPr>
         <p:txBody>
-          <a:bodyPr wrap="square">
+          <a:bodyPr wrap="square" lIns="0" rIns="0">
             <a:noAutofit/>
           </a:bodyPr>
           <a:lstStyle/>
@@ -3158,7 +3410,7 @@
       </p:sp>
       <p:sp>
         <p:nvSpPr>
-          <p:cNvPr id="3" name="Rectangle 2"/>
+          <p:cNvPr id="6" name="Rectangle 5"/>
           <p:cNvSpPr/>
           <p:nvPr>
             <p:ph type="body" idx="1"/>
@@ -3190,7 +3442,7 @@
       </p:sp>
       <p:sp>
         <p:nvSpPr>
-          <p:cNvPr id="4" name="TextBox 3"/>
+          <p:cNvPr id="7" name="TextBox 6"/>
           <p:cNvSpPr/>
           <p:nvPr>
             <p:ph type="body" idx="2"/>
@@ -3207,7 +3459,7 @@
           <a:noFill/>
         </p:spPr>
         <p:txBody>
-          <a:bodyPr wrap="square">
+          <a:bodyPr wrap="square" lIns="0" rIns="0">
             <a:noAutofit/>
           </a:bodyPr>
           <a:lstStyle/>
@@ -3227,7 +3479,7 @@
       </p:sp>
       <p:sp>
         <p:nvSpPr>
-          <p:cNvPr id="5" name="TextBox 4"/>
+          <p:cNvPr id="8" name="TextBox 7"/>
           <p:cNvSpPr/>
           <p:nvPr>
             <p:ph type="body" idx="3"/>
@@ -3244,7 +3496,7 @@
           <a:noFill/>
         </p:spPr>
         <p:txBody>
-          <a:bodyPr wrap="square">
+          <a:bodyPr wrap="square" lIns="0" rIns="0">
             <a:noAutofit/>
           </a:bodyPr>
           <a:lstStyle/>
@@ -3264,7 +3516,7 @@
       </p:sp>
       <p:sp>
         <p:nvSpPr>
-          <p:cNvPr id="6" name="TextBox 5"/>
+          <p:cNvPr id="9" name="TextBox 8"/>
           <p:cNvSpPr/>
           <p:nvPr>
             <p:ph type="body" idx="4"/>
@@ -3281,7 +3533,7 @@
           <a:noFill/>
         </p:spPr>
         <p:txBody>
-          <a:bodyPr wrap="square">
+          <a:bodyPr wrap="square" lIns="0" rIns="0">
             <a:noAutofit/>
           </a:bodyPr>
           <a:lstStyle/>
@@ -3301,7 +3553,7 @@
       </p:sp>
       <p:sp>
         <p:nvSpPr>
-          <p:cNvPr id="7" name="TextBox 6"/>
+          <p:cNvPr id="10" name="TextBox 9"/>
           <p:cNvSpPr/>
           <p:nvPr>
             <p:ph type="body" idx="5"/>
@@ -3318,7 +3570,7 @@
           <a:noFill/>
         </p:spPr>
         <p:txBody>
-          <a:bodyPr wrap="square">
+          <a:bodyPr wrap="square" lIns="0" rIns="0">
             <a:noAutofit/>
           </a:bodyPr>
           <a:lstStyle/>
@@ -3338,7 +3590,7 @@
       </p:sp>
       <p:sp>
         <p:nvSpPr>
-          <p:cNvPr id="8" name="TextBox 7"/>
+          <p:cNvPr id="11" name="TextBox 10"/>
           <p:cNvSpPr/>
           <p:nvPr>
             <p:ph type="body" idx="6"/>
@@ -3355,7 +3607,7 @@
           <a:noFill/>
         </p:spPr>
         <p:txBody>
-          <a:bodyPr wrap="square">
+          <a:bodyPr wrap="square" lIns="0" rIns="0">
             <a:noAutofit/>
           </a:bodyPr>
           <a:lstStyle/>
@@ -3375,7 +3627,7 @@
       </p:sp>
       <p:sp>
         <p:nvSpPr>
-          <p:cNvPr id="9" name="TextBox 8"/>
+          <p:cNvPr id="12" name="TextBox 11"/>
           <p:cNvSpPr/>
           <p:nvPr>
             <p:ph type="body" idx="7"/>
@@ -3392,7 +3644,7 @@
           <a:noFill/>
         </p:spPr>
         <p:txBody>
-          <a:bodyPr wrap="square">
+          <a:bodyPr wrap="square" lIns="0" rIns="0">
             <a:noAutofit/>
           </a:bodyPr>
           <a:lstStyle/>
@@ -3412,7 +3664,7 @@
       </p:sp>
       <p:sp>
         <p:nvSpPr>
-          <p:cNvPr id="10" name="TextBox 9"/>
+          <p:cNvPr id="13" name="TextBox 12"/>
           <p:cNvSpPr/>
           <p:nvPr>
             <p:ph type="body" idx="8"/>
@@ -3429,7 +3681,7 @@
           <a:noFill/>
         </p:spPr>
         <p:txBody>
-          <a:bodyPr wrap="square">
+          <a:bodyPr wrap="square" lIns="0" rIns="0">
             <a:noAutofit/>
           </a:bodyPr>
           <a:lstStyle/>
@@ -3449,7 +3701,7 @@
       </p:sp>
       <p:sp>
         <p:nvSpPr>
-          <p:cNvPr id="11" name="TextBox 10"/>
+          <p:cNvPr id="14" name="TextBox 13"/>
           <p:cNvSpPr/>
           <p:nvPr>
             <p:ph type="body" idx="9"/>
@@ -3466,7 +3718,7 @@
           <a:noFill/>
         </p:spPr>
         <p:txBody>
-          <a:bodyPr wrap="square">
+          <a:bodyPr wrap="square" lIns="0" rIns="0">
             <a:noAutofit/>
           </a:bodyPr>
           <a:lstStyle/>
@@ -3486,7 +3738,7 @@
       </p:sp>
       <p:sp>
         <p:nvSpPr>
-          <p:cNvPr id="12" name="TextBox 11"/>
+          <p:cNvPr id="15" name="TextBox 14"/>
           <p:cNvSpPr/>
           <p:nvPr>
             <p:ph type="body" idx="13"/>
@@ -3503,7 +3755,7 @@
           <a:noFill/>
         </p:spPr>
         <p:txBody>
-          <a:bodyPr wrap="square">
+          <a:bodyPr wrap="square" lIns="0" rIns="0">
             <a:noAutofit/>
           </a:bodyPr>
           <a:lstStyle/>
@@ -3523,7 +3775,7 @@
       </p:sp>
       <p:sp>
         <p:nvSpPr>
-          <p:cNvPr id="13" name="TextBox 12"/>
+          <p:cNvPr id="16" name="TextBox 15"/>
           <p:cNvSpPr/>
           <p:nvPr>
             <p:ph type="body" idx="14"/>
@@ -3540,7 +3792,7 @@
           <a:noFill/>
         </p:spPr>
         <p:txBody>
-          <a:bodyPr wrap="square">
+          <a:bodyPr wrap="square" lIns="0" rIns="0">
             <a:noAutofit/>
           </a:bodyPr>
           <a:lstStyle/>
@@ -3598,7 +3850,35 @@
       </p:grpSpPr>
       <p:sp>
         <p:nvSpPr>
-          <p:cNvPr id="2" name="TextBox 1"/>
+          <p:cNvPr id="4" name="Slide Number Placeholder 3"/>
+          <p:cNvSpPr>
+            <a:spLocks noGrp="1"/>
+          </p:cNvSpPr>
+          <p:nvPr>
+            <p:ph type="sldNum" sz="quarter" idx="12"/>
+          </p:nvPr>
+        </p:nvSpPr>
+        <p:spPr>
+          <a:xfrm>
+            <a:off x="10363200" y="6035040"/>
+            <a:ext cx="1371600" cy="365760"/>
+          </a:xfrm>
+        </p:spPr>
+        <p:txBody>
+          <a:bodyPr/>
+          <a:lstStyle/>
+          <a:p>
+            <a:fld id="{C1FF6DA9-008F-8B48-92A6-B652298478BF}" type="slidenum">
+              <a:rPr lang="en-US" smtClean="0"/>
+              <a:t>‹#›</a:t>
+            </a:fld>
+            <a:endParaRPr lang="en-US"/>
+          </a:p>
+        </p:txBody>
+      </p:sp>
+      <p:sp>
+        <p:nvSpPr>
+          <p:cNvPr id="5" name="TextBox 4"/>
           <p:cNvSpPr/>
           <p:nvPr>
             <p:ph type="body" idx="1"/>
@@ -3615,7 +3895,7 @@
           <a:noFill/>
         </p:spPr>
         <p:txBody>
-          <a:bodyPr wrap="square">
+          <a:bodyPr wrap="square" lIns="0" rIns="0">
             <a:noAutofit/>
           </a:bodyPr>
           <a:lstStyle/>
@@ -3635,7 +3915,7 @@
       </p:sp>
       <p:sp>
         <p:nvSpPr>
-          <p:cNvPr id="3" name="Rectangle 2"/>
+          <p:cNvPr id="6" name="Rectangle 5"/>
           <p:cNvSpPr/>
           <p:nvPr>
             <p:ph type="body" idx="2"/>
@@ -3667,7 +3947,7 @@
       </p:sp>
       <p:sp>
         <p:nvSpPr>
-          <p:cNvPr id="4" name="TextBox 3"/>
+          <p:cNvPr id="7" name="TextBox 6"/>
           <p:cNvSpPr/>
           <p:nvPr>
             <p:ph type="body" idx="3"/>
@@ -3684,7 +3964,7 @@
           <a:noFill/>
         </p:spPr>
         <p:txBody>
-          <a:bodyPr wrap="square">
+          <a:bodyPr wrap="square" lIns="0" rIns="0">
             <a:noAutofit/>
           </a:bodyPr>
           <a:lstStyle/>
@@ -3742,7 +4022,35 @@
       </p:grpSpPr>
       <p:sp>
         <p:nvSpPr>
-          <p:cNvPr id="2" name="Rectangle 1"/>
+          <p:cNvPr id="4" name="Slide Number Placeholder 3"/>
+          <p:cNvSpPr>
+            <a:spLocks noGrp="1"/>
+          </p:cNvSpPr>
+          <p:nvPr>
+            <p:ph type="sldNum" sz="quarter" idx="12"/>
+          </p:nvPr>
+        </p:nvSpPr>
+        <p:spPr>
+          <a:xfrm>
+            <a:off x="10363200" y="6035040"/>
+            <a:ext cx="1371600" cy="365760"/>
+          </a:xfrm>
+        </p:spPr>
+        <p:txBody>
+          <a:bodyPr/>
+          <a:lstStyle/>
+          <a:p>
+            <a:fld id="{C1FF6DA9-008F-8B48-92A6-B652298478BF}" type="slidenum">
+              <a:rPr lang="en-US" smtClean="0"/>
+              <a:t>‹#›</a:t>
+            </a:fld>
+            <a:endParaRPr lang="en-US"/>
+          </a:p>
+        </p:txBody>
+      </p:sp>
+      <p:sp>
+        <p:nvSpPr>
+          <p:cNvPr id="5" name="Rectangle 4"/>
           <p:cNvSpPr/>
           <p:nvPr>
             <p:ph type="body" idx="1"/>
@@ -3774,7 +4082,7 @@
       </p:sp>
       <p:sp>
         <p:nvSpPr>
-          <p:cNvPr id="3" name="TextBox 2"/>
+          <p:cNvPr id="6" name="TextBox 5"/>
           <p:cNvSpPr/>
           <p:nvPr>
             <p:ph type="body" idx="2"/>
@@ -3791,7 +4099,7 @@
           <a:noFill/>
         </p:spPr>
         <p:txBody>
-          <a:bodyPr wrap="square">
+          <a:bodyPr wrap="square" lIns="0" rIns="0">
             <a:noAutofit/>
           </a:bodyPr>
           <a:lstStyle/>
@@ -3811,7 +4119,7 @@
       </p:sp>
       <p:sp>
         <p:nvSpPr>
-          <p:cNvPr id="4" name="TextBox 3"/>
+          <p:cNvPr id="7" name="TextBox 6"/>
           <p:cNvSpPr/>
           <p:nvPr>
             <p:ph type="body" idx="3"/>
@@ -3828,7 +4136,7 @@
           <a:noFill/>
         </p:spPr>
         <p:txBody>
-          <a:bodyPr wrap="square">
+          <a:bodyPr wrap="square" lIns="0" rIns="0">
             <a:noAutofit/>
           </a:bodyPr>
           <a:lstStyle/>
@@ -3886,7 +4194,35 @@
       </p:grpSpPr>
       <p:sp>
         <p:nvSpPr>
-          <p:cNvPr id="2" name="Rectangle 1"/>
+          <p:cNvPr id="4" name="Slide Number Placeholder 3"/>
+          <p:cNvSpPr>
+            <a:spLocks noGrp="1"/>
+          </p:cNvSpPr>
+          <p:nvPr>
+            <p:ph type="sldNum" sz="quarter" idx="12"/>
+          </p:nvPr>
+        </p:nvSpPr>
+        <p:spPr>
+          <a:xfrm>
+            <a:off x="10363200" y="6035040"/>
+            <a:ext cx="1371600" cy="365760"/>
+          </a:xfrm>
+        </p:spPr>
+        <p:txBody>
+          <a:bodyPr/>
+          <a:lstStyle/>
+          <a:p>
+            <a:fld id="{C1FF6DA9-008F-8B48-92A6-B652298478BF}" type="slidenum">
+              <a:rPr lang="en-US" smtClean="0"/>
+              <a:t>‹#›</a:t>
+            </a:fld>
+            <a:endParaRPr lang="en-US"/>
+          </a:p>
+        </p:txBody>
+      </p:sp>
+      <p:sp>
+        <p:nvSpPr>
+          <p:cNvPr id="5" name="Rectangle 4"/>
           <p:cNvSpPr/>
           <p:nvPr>
             <p:ph type="body" idx="1"/>
@@ -3918,7 +4254,7 @@
       </p:sp>
       <p:sp>
         <p:nvSpPr>
-          <p:cNvPr id="3" name="TextBox 2"/>
+          <p:cNvPr id="6" name="TextBox 5"/>
           <p:cNvSpPr/>
           <p:nvPr>
             <p:ph type="body" idx="2"/>
@@ -3935,7 +4271,7 @@
           <a:noFill/>
         </p:spPr>
         <p:txBody>
-          <a:bodyPr wrap="square">
+          <a:bodyPr wrap="square" lIns="0" rIns="0">
             <a:noAutofit/>
           </a:bodyPr>
           <a:lstStyle/>
@@ -3955,7 +4291,7 @@
       </p:sp>
       <p:sp>
         <p:nvSpPr>
-          <p:cNvPr id="4" name="TextBox 3"/>
+          <p:cNvPr id="7" name="TextBox 6"/>
           <p:cNvSpPr/>
           <p:nvPr>
             <p:ph type="body" idx="3"/>
@@ -3972,7 +4308,7 @@
           <a:noFill/>
         </p:spPr>
         <p:txBody>
-          <a:bodyPr wrap="square">
+          <a:bodyPr wrap="square" lIns="0" rIns="0">
             <a:noAutofit/>
           </a:bodyPr>
           <a:lstStyle/>
@@ -4030,7 +4366,35 @@
       </p:grpSpPr>
       <p:sp>
         <p:nvSpPr>
-          <p:cNvPr id="2" name="Rectangle 1"/>
+          <p:cNvPr id="4" name="Slide Number Placeholder 3"/>
+          <p:cNvSpPr>
+            <a:spLocks noGrp="1"/>
+          </p:cNvSpPr>
+          <p:nvPr>
+            <p:ph type="sldNum" sz="quarter" idx="12"/>
+          </p:nvPr>
+        </p:nvSpPr>
+        <p:spPr>
+          <a:xfrm>
+            <a:off x="10363200" y="6035040"/>
+            <a:ext cx="1371600" cy="365760"/>
+          </a:xfrm>
+        </p:spPr>
+        <p:txBody>
+          <a:bodyPr/>
+          <a:lstStyle/>
+          <a:p>
+            <a:fld id="{C1FF6DA9-008F-8B48-92A6-B652298478BF}" type="slidenum">
+              <a:rPr lang="en-US" smtClean="0"/>
+              <a:t>‹#›</a:t>
+            </a:fld>
+            <a:endParaRPr lang="en-US"/>
+          </a:p>
+        </p:txBody>
+      </p:sp>
+      <p:sp>
+        <p:nvSpPr>
+          <p:cNvPr id="5" name="Rectangle 4"/>
           <p:cNvSpPr/>
           <p:nvPr>
             <p:ph type="body" idx="1"/>
@@ -4062,7 +4426,7 @@
       </p:sp>
       <p:sp>
         <p:nvSpPr>
-          <p:cNvPr id="3" name="TextBox 2"/>
+          <p:cNvPr id="6" name="TextBox 5"/>
           <p:cNvSpPr/>
           <p:nvPr>
             <p:ph type="body" idx="2"/>
@@ -4079,7 +4443,7 @@
           <a:noFill/>
         </p:spPr>
         <p:txBody>
-          <a:bodyPr wrap="square">
+          <a:bodyPr wrap="square" lIns="0" rIns="0">
             <a:noAutofit/>
           </a:bodyPr>
           <a:lstStyle/>
@@ -4137,7 +4501,35 @@
       </p:grpSpPr>
       <p:sp>
         <p:nvSpPr>
-          <p:cNvPr id="2" name="TextBox 1"/>
+          <p:cNvPr id="4" name="Slide Number Placeholder 3"/>
+          <p:cNvSpPr>
+            <a:spLocks noGrp="1"/>
+          </p:cNvSpPr>
+          <p:nvPr>
+            <p:ph type="sldNum" sz="quarter" idx="12"/>
+          </p:nvPr>
+        </p:nvSpPr>
+        <p:spPr>
+          <a:xfrm>
+            <a:off x="10363200" y="6035040"/>
+            <a:ext cx="1371600" cy="365760"/>
+          </a:xfrm>
+        </p:spPr>
+        <p:txBody>
+          <a:bodyPr/>
+          <a:lstStyle/>
+          <a:p>
+            <a:fld id="{C1FF6DA9-008F-8B48-92A6-B652298478BF}" type="slidenum">
+              <a:rPr lang="en-US" smtClean="0"/>
+              <a:t>‹#›</a:t>
+            </a:fld>
+            <a:endParaRPr lang="en-US"/>
+          </a:p>
+        </p:txBody>
+      </p:sp>
+      <p:sp>
+        <p:nvSpPr>
+          <p:cNvPr id="5" name="TextBox 4"/>
           <p:cNvSpPr/>
           <p:nvPr>
             <p:ph type="title"/>
@@ -4154,7 +4546,7 @@
           <a:noFill/>
         </p:spPr>
         <p:txBody>
-          <a:bodyPr wrap="square">
+          <a:bodyPr wrap="square" lIns="0" rIns="0">
             <a:noAutofit/>
           </a:bodyPr>
           <a:lstStyle/>
@@ -4174,7 +4566,7 @@
       </p:sp>
       <p:sp>
         <p:nvSpPr>
-          <p:cNvPr id="3" name="TextBox 2"/>
+          <p:cNvPr id="6" name="TextBox 5"/>
           <p:cNvSpPr/>
           <p:nvPr>
             <p:ph type="body" idx="1"/>
@@ -4191,7 +4583,7 @@
           <a:noFill/>
         </p:spPr>
         <p:txBody>
-          <a:bodyPr wrap="square">
+          <a:bodyPr wrap="square" lIns="0" rIns="0">
             <a:noAutofit/>
           </a:bodyPr>
           <a:lstStyle/>
@@ -4211,7 +4603,7 @@
       </p:sp>
       <p:sp>
         <p:nvSpPr>
-          <p:cNvPr id="4" name="TextBox 3"/>
+          <p:cNvPr id="7" name="TextBox 6"/>
           <p:cNvSpPr/>
           <p:nvPr>
             <p:ph type="body" idx="2"/>
@@ -4228,7 +4620,7 @@
           <a:noFill/>
         </p:spPr>
         <p:txBody>
-          <a:bodyPr wrap="square">
+          <a:bodyPr wrap="square" lIns="0" rIns="0">
             <a:noAutofit/>
           </a:bodyPr>
           <a:lstStyle/>
@@ -4248,7 +4640,7 @@
       </p:sp>
       <p:sp>
         <p:nvSpPr>
-          <p:cNvPr id="5" name="TextBox 4"/>
+          <p:cNvPr id="8" name="TextBox 7"/>
           <p:cNvSpPr/>
           <p:nvPr>
             <p:ph type="body" idx="3"/>
@@ -4265,7 +4657,7 @@
           <a:noFill/>
         </p:spPr>
         <p:txBody>
-          <a:bodyPr wrap="square">
+          <a:bodyPr wrap="square" lIns="0" rIns="0">
             <a:noAutofit/>
           </a:bodyPr>
           <a:lstStyle/>
@@ -4323,7 +4715,35 @@
       </p:grpSpPr>
       <p:sp>
         <p:nvSpPr>
-          <p:cNvPr id="2" name="Rectangle 1"/>
+          <p:cNvPr id="4" name="Slide Number Placeholder 3"/>
+          <p:cNvSpPr>
+            <a:spLocks noGrp="1"/>
+          </p:cNvSpPr>
+          <p:nvPr>
+            <p:ph type="sldNum" sz="quarter" idx="12"/>
+          </p:nvPr>
+        </p:nvSpPr>
+        <p:spPr>
+          <a:xfrm>
+            <a:off x="10363200" y="6035040"/>
+            <a:ext cx="1371600" cy="365760"/>
+          </a:xfrm>
+        </p:spPr>
+        <p:txBody>
+          <a:bodyPr/>
+          <a:lstStyle/>
+          <a:p>
+            <a:fld id="{C1FF6DA9-008F-8B48-92A6-B652298478BF}" type="slidenum">
+              <a:rPr lang="en-US" smtClean="0"/>
+              <a:t>‹#›</a:t>
+            </a:fld>
+            <a:endParaRPr lang="en-US"/>
+          </a:p>
+        </p:txBody>
+      </p:sp>
+      <p:sp>
+        <p:nvSpPr>
+          <p:cNvPr id="5" name="Rectangle 4"/>
           <p:cNvSpPr/>
           <p:nvPr>
             <p:ph type="body" idx="1"/>
@@ -4355,7 +4775,7 @@
       </p:sp>
       <p:sp>
         <p:nvSpPr>
-          <p:cNvPr id="3" name="Rectangle 2"/>
+          <p:cNvPr id="6" name="Rectangle 5"/>
           <p:cNvSpPr/>
           <p:nvPr>
             <p:ph type="body" idx="2"/>
@@ -4387,7 +4807,7 @@
       </p:sp>
       <p:sp>
         <p:nvSpPr>
-          <p:cNvPr id="4" name="Rectangle 3"/>
+          <p:cNvPr id="7" name="Rectangle 6"/>
           <p:cNvSpPr/>
           <p:nvPr>
             <p:ph type="body" idx="3"/>
@@ -4419,7 +4839,7 @@
       </p:sp>
       <p:sp>
         <p:nvSpPr>
-          <p:cNvPr id="5" name="TextBox 4"/>
+          <p:cNvPr id="8" name="TextBox 7"/>
           <p:cNvSpPr/>
           <p:nvPr>
             <p:ph type="body" idx="4"/>
@@ -4436,7 +4856,7 @@
           <a:noFill/>
         </p:spPr>
         <p:txBody>
-          <a:bodyPr wrap="square">
+          <a:bodyPr wrap="square" lIns="0" rIns="0">
             <a:noAutofit/>
           </a:bodyPr>
           <a:lstStyle/>
@@ -4456,7 +4876,7 @@
       </p:sp>
       <p:sp>
         <p:nvSpPr>
-          <p:cNvPr id="6" name="TextBox 5"/>
+          <p:cNvPr id="9" name="TextBox 8"/>
           <p:cNvSpPr/>
           <p:nvPr>
             <p:ph type="body" idx="5"/>
@@ -4473,7 +4893,7 @@
           <a:noFill/>
         </p:spPr>
         <p:txBody>
-          <a:bodyPr wrap="square">
+          <a:bodyPr wrap="square" lIns="0" rIns="0">
             <a:noAutofit/>
           </a:bodyPr>
           <a:lstStyle/>
@@ -4493,7 +4913,7 @@
       </p:sp>
       <p:sp>
         <p:nvSpPr>
-          <p:cNvPr id="7" name="TextBox 6"/>
+          <p:cNvPr id="10" name="TextBox 9"/>
           <p:cNvSpPr/>
           <p:nvPr>
             <p:ph type="body" idx="6"/>
@@ -4510,7 +4930,7 @@
           <a:noFill/>
         </p:spPr>
         <p:txBody>
-          <a:bodyPr wrap="square">
+          <a:bodyPr wrap="square" lIns="0" rIns="0">
             <a:noAutofit/>
           </a:bodyPr>
           <a:lstStyle/>
@@ -4530,7 +4950,7 @@
       </p:sp>
       <p:sp>
         <p:nvSpPr>
-          <p:cNvPr id="8" name="TextBox 7"/>
+          <p:cNvPr id="11" name="TextBox 10"/>
           <p:cNvSpPr/>
           <p:nvPr>
             <p:ph type="body" idx="7"/>
@@ -4547,7 +4967,7 @@
           <a:noFill/>
         </p:spPr>
         <p:txBody>
-          <a:bodyPr wrap="square">
+          <a:bodyPr wrap="square" lIns="0" rIns="0">
             <a:noAutofit/>
           </a:bodyPr>
           <a:lstStyle/>
@@ -4567,7 +4987,7 @@
       </p:sp>
       <p:sp>
         <p:nvSpPr>
-          <p:cNvPr id="9" name="TextBox 8"/>
+          <p:cNvPr id="12" name="TextBox 11"/>
           <p:cNvSpPr/>
           <p:nvPr>
             <p:ph type="body" idx="8"/>
@@ -4584,7 +5004,7 @@
           <a:noFill/>
         </p:spPr>
         <p:txBody>
-          <a:bodyPr wrap="square">
+          <a:bodyPr wrap="square" lIns="0" rIns="0">
             <a:noAutofit/>
           </a:bodyPr>
           <a:lstStyle/>
@@ -4604,7 +5024,7 @@
       </p:sp>
       <p:sp>
         <p:nvSpPr>
-          <p:cNvPr id="10" name="TextBox 9"/>
+          <p:cNvPr id="13" name="TextBox 12"/>
           <p:cNvSpPr/>
           <p:nvPr>
             <p:ph type="body" idx="9"/>
@@ -4621,7 +5041,7 @@
           <a:noFill/>
         </p:spPr>
         <p:txBody>
-          <a:bodyPr wrap="square">
+          <a:bodyPr wrap="square" lIns="0" rIns="0">
             <a:noAutofit/>
           </a:bodyPr>
           <a:lstStyle/>
@@ -4641,7 +5061,7 @@
       </p:sp>
       <p:sp>
         <p:nvSpPr>
-          <p:cNvPr id="11" name="TextBox 10"/>
+          <p:cNvPr id="14" name="TextBox 13"/>
           <p:cNvSpPr/>
           <p:nvPr>
             <p:ph type="body" idx="13"/>
@@ -4658,7 +5078,7 @@
           <a:noFill/>
         </p:spPr>
         <p:txBody>
-          <a:bodyPr wrap="square">
+          <a:bodyPr wrap="square" lIns="0" rIns="0">
             <a:noAutofit/>
           </a:bodyPr>
           <a:lstStyle/>
@@ -4678,7 +5098,7 @@
       </p:sp>
       <p:sp>
         <p:nvSpPr>
-          <p:cNvPr id="12" name="TextBox 11"/>
+          <p:cNvPr id="15" name="TextBox 14"/>
           <p:cNvSpPr/>
           <p:nvPr>
             <p:ph type="body" idx="14"/>
@@ -4695,7 +5115,7 @@
           <a:noFill/>
         </p:spPr>
         <p:txBody>
-          <a:bodyPr wrap="square">
+          <a:bodyPr wrap="square" lIns="0" rIns="0">
             <a:noAutofit/>
           </a:bodyPr>
           <a:lstStyle/>
@@ -4715,7 +5135,7 @@
       </p:sp>
       <p:sp>
         <p:nvSpPr>
-          <p:cNvPr id="13" name="TextBox 12"/>
+          <p:cNvPr id="16" name="TextBox 15"/>
           <p:cNvSpPr/>
           <p:nvPr>
             <p:ph type="body" idx="15"/>
@@ -4732,7 +5152,7 @@
           <a:noFill/>
         </p:spPr>
         <p:txBody>
-          <a:bodyPr wrap="square">
+          <a:bodyPr wrap="square" lIns="0" rIns="0">
             <a:noAutofit/>
           </a:bodyPr>
           <a:lstStyle/>
@@ -4752,7 +5172,7 @@
       </p:sp>
       <p:sp>
         <p:nvSpPr>
-          <p:cNvPr id="14" name="TextBox 13"/>
+          <p:cNvPr id="17" name="TextBox 16"/>
           <p:cNvSpPr/>
           <p:nvPr>
             <p:ph type="body" idx="16"/>
@@ -4769,7 +5189,7 @@
           <a:noFill/>
         </p:spPr>
         <p:txBody>
-          <a:bodyPr wrap="square">
+          <a:bodyPr wrap="square" lIns="0" rIns="0">
             <a:noAutofit/>
           </a:bodyPr>
           <a:lstStyle/>
@@ -4789,7 +5209,7 @@
       </p:sp>
       <p:sp>
         <p:nvSpPr>
-          <p:cNvPr id="15" name="TextBox 14"/>
+          <p:cNvPr id="18" name="TextBox 17"/>
           <p:cNvSpPr/>
           <p:nvPr>
             <p:ph type="body" idx="17"/>
@@ -4806,7 +5226,7 @@
           <a:noFill/>
         </p:spPr>
         <p:txBody>
-          <a:bodyPr wrap="square">
+          <a:bodyPr wrap="square" lIns="0" rIns="0">
             <a:noAutofit/>
           </a:bodyPr>
           <a:lstStyle/>
@@ -4826,7 +5246,7 @@
       </p:sp>
       <p:sp>
         <p:nvSpPr>
-          <p:cNvPr id="16" name="TextBox 15"/>
+          <p:cNvPr id="19" name="TextBox 18"/>
           <p:cNvSpPr/>
           <p:nvPr>
             <p:ph type="body" idx="18"/>
@@ -4843,7 +5263,7 @@
           <a:noFill/>
         </p:spPr>
         <p:txBody>
-          <a:bodyPr wrap="square">
+          <a:bodyPr wrap="square" lIns="0" rIns="0">
             <a:noAutofit/>
           </a:bodyPr>
           <a:lstStyle/>
@@ -4863,7 +5283,7 @@
       </p:sp>
       <p:sp>
         <p:nvSpPr>
-          <p:cNvPr id="17" name="TextBox 16"/>
+          <p:cNvPr id="20" name="TextBox 19"/>
           <p:cNvSpPr/>
           <p:nvPr>
             <p:ph type="body" idx="19"/>
@@ -4880,7 +5300,7 @@
           <a:noFill/>
         </p:spPr>
         <p:txBody>
-          <a:bodyPr wrap="square">
+          <a:bodyPr wrap="square" lIns="0" rIns="0">
             <a:noAutofit/>
           </a:bodyPr>
           <a:lstStyle/>
@@ -4900,7 +5320,7 @@
       </p:sp>
       <p:sp>
         <p:nvSpPr>
-          <p:cNvPr id="18" name="TextBox 17"/>
+          <p:cNvPr id="21" name="TextBox 20"/>
           <p:cNvSpPr/>
           <p:nvPr>
             <p:ph type="body" idx="20"/>
@@ -4917,7 +5337,7 @@
           <a:noFill/>
         </p:spPr>
         <p:txBody>
-          <a:bodyPr wrap="square">
+          <a:bodyPr wrap="square" lIns="0" rIns="0">
             <a:noAutofit/>
           </a:bodyPr>
           <a:lstStyle/>
@@ -4937,7 +5357,7 @@
       </p:sp>
       <p:sp>
         <p:nvSpPr>
-          <p:cNvPr id="19" name="TextBox 18"/>
+          <p:cNvPr id="22" name="TextBox 21"/>
           <p:cNvSpPr/>
           <p:nvPr>
             <p:ph type="body" idx="21"/>
@@ -4954,7 +5374,7 @@
           <a:noFill/>
         </p:spPr>
         <p:txBody>
-          <a:bodyPr wrap="square">
+          <a:bodyPr wrap="square" lIns="0" rIns="0">
             <a:noAutofit/>
           </a:bodyPr>
           <a:lstStyle/>
@@ -4974,7 +5394,7 @@
       </p:sp>
       <p:sp>
         <p:nvSpPr>
-          <p:cNvPr id="20" name="TextBox 19"/>
+          <p:cNvPr id="23" name="TextBox 22"/>
           <p:cNvSpPr/>
           <p:nvPr>
             <p:ph type="body" idx="22"/>
@@ -4991,7 +5411,7 @@
           <a:noFill/>
         </p:spPr>
         <p:txBody>
-          <a:bodyPr wrap="square">
+          <a:bodyPr wrap="square" lIns="0" rIns="0">
             <a:noAutofit/>
           </a:bodyPr>
           <a:lstStyle/>
@@ -5049,7 +5469,35 @@
       </p:grpSpPr>
       <p:sp>
         <p:nvSpPr>
-          <p:cNvPr id="2" name="TextBox 1"/>
+          <p:cNvPr id="4" name="Slide Number Placeholder 3"/>
+          <p:cNvSpPr>
+            <a:spLocks noGrp="1"/>
+          </p:cNvSpPr>
+          <p:nvPr>
+            <p:ph type="sldNum" sz="quarter" idx="12"/>
+          </p:nvPr>
+        </p:nvSpPr>
+        <p:spPr>
+          <a:xfrm>
+            <a:off x="10363200" y="6035040"/>
+            <a:ext cx="1371600" cy="365760"/>
+          </a:xfrm>
+        </p:spPr>
+        <p:txBody>
+          <a:bodyPr/>
+          <a:lstStyle/>
+          <a:p>
+            <a:fld id="{C1FF6DA9-008F-8B48-92A6-B652298478BF}" type="slidenum">
+              <a:rPr lang="en-US" smtClean="0"/>
+              <a:t>‹#›</a:t>
+            </a:fld>
+            <a:endParaRPr lang="en-US"/>
+          </a:p>
+        </p:txBody>
+      </p:sp>
+      <p:sp>
+        <p:nvSpPr>
+          <p:cNvPr id="5" name="TextBox 4"/>
           <p:cNvSpPr/>
           <p:nvPr>
             <p:ph type="title"/>
@@ -5066,7 +5514,7 @@
           <a:noFill/>
         </p:spPr>
         <p:txBody>
-          <a:bodyPr wrap="square">
+          <a:bodyPr wrap="square" lIns="0" rIns="0">
             <a:noAutofit/>
           </a:bodyPr>
           <a:lstStyle/>
@@ -5086,7 +5534,7 @@
       </p:sp>
       <p:sp>
         <p:nvSpPr>
-          <p:cNvPr id="3" name="Rounded Rectangle 2"/>
+          <p:cNvPr id="6" name="Rounded Rectangle 5"/>
           <p:cNvSpPr/>
           <p:nvPr>
             <p:ph type="body" idx="1"/>
@@ -5120,7 +5568,7 @@
       </p:sp>
       <p:sp>
         <p:nvSpPr>
-          <p:cNvPr id="4" name="TextBox 3"/>
+          <p:cNvPr id="7" name="TextBox 6"/>
           <p:cNvSpPr/>
           <p:nvPr>
             <p:ph type="body" idx="2"/>
@@ -5137,7 +5585,7 @@
           <a:noFill/>
         </p:spPr>
         <p:txBody>
-          <a:bodyPr wrap="square">
+          <a:bodyPr wrap="square" lIns="0" rIns="0">
             <a:noAutofit/>
           </a:bodyPr>
           <a:lstStyle/>
@@ -5157,7 +5605,7 @@
       </p:sp>
       <p:sp>
         <p:nvSpPr>
-          <p:cNvPr id="5" name="TextBox 4"/>
+          <p:cNvPr id="8" name="TextBox 7"/>
           <p:cNvSpPr/>
           <p:nvPr>
             <p:ph type="body" idx="3"/>
@@ -5174,7 +5622,7 @@
           <a:noFill/>
         </p:spPr>
         <p:txBody>
-          <a:bodyPr wrap="square">
+          <a:bodyPr wrap="square" lIns="0" rIns="0">
             <a:noAutofit/>
           </a:bodyPr>
           <a:lstStyle/>
@@ -5194,7 +5642,7 @@
       </p:sp>
       <p:sp>
         <p:nvSpPr>
-          <p:cNvPr id="6" name="TextBox 5"/>
+          <p:cNvPr id="9" name="TextBox 8"/>
           <p:cNvSpPr/>
           <p:nvPr>
             <p:ph type="body" idx="4"/>
@@ -5211,7 +5659,7 @@
           <a:noFill/>
         </p:spPr>
         <p:txBody>
-          <a:bodyPr wrap="square">
+          <a:bodyPr wrap="square" lIns="0" rIns="0">
             <a:noAutofit/>
           </a:bodyPr>
           <a:lstStyle/>
@@ -5231,7 +5679,7 @@
       </p:sp>
       <p:sp>
         <p:nvSpPr>
-          <p:cNvPr id="7" name="TextBox 6"/>
+          <p:cNvPr id="10" name="TextBox 9"/>
           <p:cNvSpPr/>
           <p:nvPr>
             <p:ph type="body" idx="5"/>
@@ -5248,7 +5696,7 @@
           <a:noFill/>
         </p:spPr>
         <p:txBody>
-          <a:bodyPr wrap="square">
+          <a:bodyPr wrap="square" lIns="0" rIns="0">
             <a:noAutofit/>
           </a:bodyPr>
           <a:lstStyle/>
@@ -5268,7 +5716,7 @@
       </p:sp>
       <p:sp>
         <p:nvSpPr>
-          <p:cNvPr id="8" name="TextBox 7"/>
+          <p:cNvPr id="11" name="TextBox 10"/>
           <p:cNvSpPr/>
           <p:nvPr>
             <p:ph type="body" idx="6"/>
@@ -5285,7 +5733,7 @@
           <a:noFill/>
         </p:spPr>
         <p:txBody>
-          <a:bodyPr wrap="square">
+          <a:bodyPr wrap="square" lIns="0" rIns="0">
             <a:noAutofit/>
           </a:bodyPr>
           <a:lstStyle/>
@@ -5305,7 +5753,7 @@
       </p:sp>
       <p:sp>
         <p:nvSpPr>
-          <p:cNvPr id="9" name="TextBox 8"/>
+          <p:cNvPr id="12" name="TextBox 11"/>
           <p:cNvSpPr/>
           <p:nvPr>
             <p:ph type="body" idx="7"/>
@@ -5322,7 +5770,7 @@
           <a:noFill/>
         </p:spPr>
         <p:txBody>
-          <a:bodyPr wrap="square">
+          <a:bodyPr wrap="square" lIns="0" rIns="0">
             <a:noAutofit/>
           </a:bodyPr>
           <a:lstStyle/>
@@ -5342,7 +5790,7 @@
       </p:sp>
       <p:sp>
         <p:nvSpPr>
-          <p:cNvPr id="10" name="TextBox 9"/>
+          <p:cNvPr id="13" name="TextBox 12"/>
           <p:cNvSpPr/>
           <p:nvPr>
             <p:ph type="body" idx="8"/>
@@ -5359,7 +5807,7 @@
           <a:noFill/>
         </p:spPr>
         <p:txBody>
-          <a:bodyPr wrap="square">
+          <a:bodyPr wrap="square" lIns="0" rIns="0">
             <a:noAutofit/>
           </a:bodyPr>
           <a:lstStyle/>
@@ -5379,7 +5827,7 @@
       </p:sp>
       <p:sp>
         <p:nvSpPr>
-          <p:cNvPr id="11" name="TextBox 10"/>
+          <p:cNvPr id="14" name="TextBox 13"/>
           <p:cNvSpPr/>
           <p:nvPr>
             <p:ph type="body" idx="9"/>
@@ -5396,7 +5844,7 @@
           <a:noFill/>
         </p:spPr>
         <p:txBody>
-          <a:bodyPr wrap="square">
+          <a:bodyPr wrap="square" lIns="0" rIns="0">
             <a:noAutofit/>
           </a:bodyPr>
           <a:lstStyle/>
@@ -5416,7 +5864,7 @@
       </p:sp>
       <p:sp>
         <p:nvSpPr>
-          <p:cNvPr id="12" name="TextBox 11"/>
+          <p:cNvPr id="15" name="TextBox 14"/>
           <p:cNvSpPr/>
           <p:nvPr>
             <p:ph type="body" idx="13"/>
@@ -5433,7 +5881,7 @@
           <a:noFill/>
         </p:spPr>
         <p:txBody>
-          <a:bodyPr wrap="square">
+          <a:bodyPr wrap="square" lIns="0" rIns="0">
             <a:noAutofit/>
           </a:bodyPr>
           <a:lstStyle/>
@@ -5453,7 +5901,7 @@
       </p:sp>
       <p:sp>
         <p:nvSpPr>
-          <p:cNvPr id="13" name="TextBox 12"/>
+          <p:cNvPr id="16" name="TextBox 15"/>
           <p:cNvSpPr/>
           <p:nvPr>
             <p:ph type="body" idx="14"/>
@@ -5470,7 +5918,7 @@
           <a:noFill/>
         </p:spPr>
         <p:txBody>
-          <a:bodyPr wrap="square">
+          <a:bodyPr wrap="square" lIns="0" rIns="0">
             <a:noAutofit/>
           </a:bodyPr>
           <a:lstStyle/>
@@ -5490,7 +5938,7 @@
       </p:sp>
       <p:sp>
         <p:nvSpPr>
-          <p:cNvPr id="14" name="TextBox 13"/>
+          <p:cNvPr id="17" name="TextBox 16"/>
           <p:cNvSpPr/>
           <p:nvPr>
             <p:ph type="body" idx="15"/>
@@ -5507,7 +5955,7 @@
           <a:noFill/>
         </p:spPr>
         <p:txBody>
-          <a:bodyPr wrap="square">
+          <a:bodyPr wrap="square" lIns="0" rIns="0">
             <a:noAutofit/>
           </a:bodyPr>
           <a:lstStyle/>
@@ -5527,7 +5975,7 @@
       </p:sp>
       <p:sp>
         <p:nvSpPr>
-          <p:cNvPr id="15" name="TextBox 14"/>
+          <p:cNvPr id="18" name="TextBox 17"/>
           <p:cNvSpPr/>
           <p:nvPr>
             <p:ph type="body" idx="16"/>
@@ -5544,7 +5992,7 @@
           <a:noFill/>
         </p:spPr>
         <p:txBody>
-          <a:bodyPr wrap="square">
+          <a:bodyPr wrap="square" lIns="0" rIns="0">
             <a:noAutofit/>
           </a:bodyPr>
           <a:lstStyle/>
@@ -5564,7 +6012,7 @@
       </p:sp>
       <p:sp>
         <p:nvSpPr>
-          <p:cNvPr id="16" name="TextBox 15"/>
+          <p:cNvPr id="19" name="TextBox 18"/>
           <p:cNvSpPr/>
           <p:nvPr>
             <p:ph type="body" idx="17"/>
@@ -5581,7 +6029,7 @@
           <a:noFill/>
         </p:spPr>
         <p:txBody>
-          <a:bodyPr wrap="square">
+          <a:bodyPr wrap="square" lIns="0" rIns="0">
             <a:noAutofit/>
           </a:bodyPr>
           <a:lstStyle/>
@@ -5601,7 +6049,7 @@
       </p:sp>
       <p:sp>
         <p:nvSpPr>
-          <p:cNvPr id="17" name="TextBox 16"/>
+          <p:cNvPr id="20" name="TextBox 19"/>
           <p:cNvSpPr/>
           <p:nvPr>
             <p:ph type="body" idx="18"/>
@@ -5618,7 +6066,7 @@
           <a:noFill/>
         </p:spPr>
         <p:txBody>
-          <a:bodyPr wrap="square">
+          <a:bodyPr wrap="square" lIns="0" rIns="0">
             <a:noAutofit/>
           </a:bodyPr>
           <a:lstStyle/>
@@ -5638,7 +6086,7 @@
       </p:sp>
       <p:sp>
         <p:nvSpPr>
-          <p:cNvPr id="18" name="TextBox 17"/>
+          <p:cNvPr id="21" name="TextBox 20"/>
           <p:cNvSpPr/>
           <p:nvPr>
             <p:ph type="body" idx="19"/>
@@ -5655,7 +6103,7 @@
           <a:noFill/>
         </p:spPr>
         <p:txBody>
-          <a:bodyPr wrap="square">
+          <a:bodyPr wrap="square" lIns="0" rIns="0">
             <a:noAutofit/>
           </a:bodyPr>
           <a:lstStyle/>
@@ -5713,7 +6161,35 @@
       </p:grpSpPr>
       <p:sp>
         <p:nvSpPr>
-          <p:cNvPr id="2" name="TextBox 1"/>
+          <p:cNvPr id="4" name="Slide Number Placeholder 3"/>
+          <p:cNvSpPr>
+            <a:spLocks noGrp="1"/>
+          </p:cNvSpPr>
+          <p:nvPr>
+            <p:ph type="sldNum" sz="quarter" idx="12"/>
+          </p:nvPr>
+        </p:nvSpPr>
+        <p:spPr>
+          <a:xfrm>
+            <a:off x="10363200" y="6035040"/>
+            <a:ext cx="1371600" cy="365760"/>
+          </a:xfrm>
+        </p:spPr>
+        <p:txBody>
+          <a:bodyPr/>
+          <a:lstStyle/>
+          <a:p>
+            <a:fld id="{C1FF6DA9-008F-8B48-92A6-B652298478BF}" type="slidenum">
+              <a:rPr lang="en-US" smtClean="0"/>
+              <a:t>‹#›</a:t>
+            </a:fld>
+            <a:endParaRPr lang="en-US"/>
+          </a:p>
+        </p:txBody>
+      </p:sp>
+      <p:sp>
+        <p:nvSpPr>
+          <p:cNvPr id="5" name="TextBox 4"/>
           <p:cNvSpPr/>
           <p:nvPr>
             <p:ph type="title"/>
@@ -5730,7 +6206,7 @@
           <a:noFill/>
         </p:spPr>
         <p:txBody>
-          <a:bodyPr wrap="square">
+          <a:bodyPr wrap="square" lIns="0" rIns="0">
             <a:noAutofit/>
           </a:bodyPr>
           <a:lstStyle/>
@@ -5750,7 +6226,7 @@
       </p:sp>
       <p:sp>
         <p:nvSpPr>
-          <p:cNvPr id="3" name="TextBox 2"/>
+          <p:cNvPr id="6" name="TextBox 5"/>
           <p:cNvSpPr/>
           <p:nvPr>
             <p:ph type="body" idx="1"/>
@@ -5767,7 +6243,7 @@
           <a:noFill/>
         </p:spPr>
         <p:txBody>
-          <a:bodyPr wrap="square">
+          <a:bodyPr wrap="square" lIns="0" rIns="0">
             <a:noAutofit/>
           </a:bodyPr>
           <a:lstStyle/>
@@ -5787,7 +6263,7 @@
       </p:sp>
       <p:sp>
         <p:nvSpPr>
-          <p:cNvPr id="4" name="TextBox 3"/>
+          <p:cNvPr id="7" name="TextBox 6"/>
           <p:cNvSpPr/>
           <p:nvPr>
             <p:ph type="body" idx="2"/>
@@ -5804,7 +6280,7 @@
           <a:noFill/>
         </p:spPr>
         <p:txBody>
-          <a:bodyPr wrap="square">
+          <a:bodyPr wrap="square" lIns="0" rIns="0">
             <a:noAutofit/>
           </a:bodyPr>
           <a:lstStyle/>
@@ -5824,7 +6300,7 @@
       </p:sp>
       <p:sp>
         <p:nvSpPr>
-          <p:cNvPr id="5" name="TextBox 4"/>
+          <p:cNvPr id="8" name="TextBox 7"/>
           <p:cNvSpPr/>
           <p:nvPr>
             <p:ph type="body" idx="3"/>
@@ -5841,7 +6317,7 @@
           <a:noFill/>
         </p:spPr>
         <p:txBody>
-          <a:bodyPr wrap="square">
+          <a:bodyPr wrap="square" lIns="0" rIns="0">
             <a:noAutofit/>
           </a:bodyPr>
           <a:lstStyle/>
@@ -5861,7 +6337,7 @@
       </p:sp>
       <p:sp>
         <p:nvSpPr>
-          <p:cNvPr id="6" name="TextBox 5"/>
+          <p:cNvPr id="9" name="TextBox 8"/>
           <p:cNvSpPr/>
           <p:nvPr>
             <p:ph type="body" idx="4"/>
@@ -5878,7 +6354,7 @@
           <a:noFill/>
         </p:spPr>
         <p:txBody>
-          <a:bodyPr wrap="square">
+          <a:bodyPr wrap="square" lIns="0" rIns="0">
             <a:noAutofit/>
           </a:bodyPr>
           <a:lstStyle/>
@@ -5898,7 +6374,7 @@
       </p:sp>
       <p:sp>
         <p:nvSpPr>
-          <p:cNvPr id="7" name="TextBox 6"/>
+          <p:cNvPr id="10" name="TextBox 9"/>
           <p:cNvSpPr/>
           <p:nvPr>
             <p:ph type="body" idx="5"/>
@@ -5915,7 +6391,7 @@
           <a:noFill/>
         </p:spPr>
         <p:txBody>
-          <a:bodyPr wrap="square">
+          <a:bodyPr wrap="square" lIns="0" rIns="0">
             <a:noAutofit/>
           </a:bodyPr>
           <a:lstStyle/>
@@ -5935,7 +6411,7 @@
       </p:sp>
       <p:sp>
         <p:nvSpPr>
-          <p:cNvPr id="8" name="TextBox 7"/>
+          <p:cNvPr id="11" name="TextBox 10"/>
           <p:cNvSpPr/>
           <p:nvPr>
             <p:ph type="body" idx="6"/>
@@ -5952,7 +6428,7 @@
           <a:noFill/>
         </p:spPr>
         <p:txBody>
-          <a:bodyPr wrap="square">
+          <a:bodyPr wrap="square" lIns="0" rIns="0">
             <a:noAutofit/>
           </a:bodyPr>
           <a:lstStyle/>
@@ -5972,7 +6448,7 @@
       </p:sp>
       <p:sp>
         <p:nvSpPr>
-          <p:cNvPr id="9" name="TextBox 8"/>
+          <p:cNvPr id="12" name="TextBox 11"/>
           <p:cNvSpPr/>
           <p:nvPr>
             <p:ph type="body" idx="7"/>
@@ -5989,7 +6465,7 @@
           <a:noFill/>
         </p:spPr>
         <p:txBody>
-          <a:bodyPr wrap="square">
+          <a:bodyPr wrap="square" lIns="0" rIns="0">
             <a:noAutofit/>
           </a:bodyPr>
           <a:lstStyle/>
@@ -6009,7 +6485,7 @@
       </p:sp>
       <p:sp>
         <p:nvSpPr>
-          <p:cNvPr id="10" name="TextBox 9"/>
+          <p:cNvPr id="13" name="TextBox 12"/>
           <p:cNvSpPr/>
           <p:nvPr>
             <p:ph type="body" idx="8"/>
@@ -6026,7 +6502,7 @@
           <a:noFill/>
         </p:spPr>
         <p:txBody>
-          <a:bodyPr wrap="square">
+          <a:bodyPr wrap="square" lIns="0" rIns="0">
             <a:noAutofit/>
           </a:bodyPr>
           <a:lstStyle/>
@@ -6046,7 +6522,7 @@
       </p:sp>
       <p:sp>
         <p:nvSpPr>
-          <p:cNvPr id="11" name="TextBox 10"/>
+          <p:cNvPr id="14" name="TextBox 13"/>
           <p:cNvSpPr/>
           <p:nvPr>
             <p:ph type="body" idx="9"/>
@@ -6063,7 +6539,7 @@
           <a:noFill/>
         </p:spPr>
         <p:txBody>
-          <a:bodyPr wrap="square">
+          <a:bodyPr wrap="square" lIns="0" rIns="0">
             <a:noAutofit/>
           </a:bodyPr>
           <a:lstStyle/>
@@ -6121,7 +6597,35 @@
       </p:grpSpPr>
       <p:sp>
         <p:nvSpPr>
-          <p:cNvPr id="2" name="TextBox 1"/>
+          <p:cNvPr id="4" name="Slide Number Placeholder 3"/>
+          <p:cNvSpPr>
+            <a:spLocks noGrp="1"/>
+          </p:cNvSpPr>
+          <p:nvPr>
+            <p:ph type="sldNum" sz="quarter" idx="12"/>
+          </p:nvPr>
+        </p:nvSpPr>
+        <p:spPr>
+          <a:xfrm>
+            <a:off x="10363200" y="6035040"/>
+            <a:ext cx="1371600" cy="365760"/>
+          </a:xfrm>
+        </p:spPr>
+        <p:txBody>
+          <a:bodyPr/>
+          <a:lstStyle/>
+          <a:p>
+            <a:fld id="{C1FF6DA9-008F-8B48-92A6-B652298478BF}" type="slidenum">
+              <a:rPr lang="en-US" smtClean="0"/>
+              <a:t>‹#›</a:t>
+            </a:fld>
+            <a:endParaRPr lang="en-US"/>
+          </a:p>
+        </p:txBody>
+      </p:sp>
+      <p:sp>
+        <p:nvSpPr>
+          <p:cNvPr id="5" name="TextBox 4"/>
           <p:cNvSpPr/>
           <p:nvPr>
             <p:ph type="title"/>
@@ -6138,7 +6642,7 @@
           <a:noFill/>
         </p:spPr>
         <p:txBody>
-          <a:bodyPr wrap="square">
+          <a:bodyPr wrap="square" lIns="0" rIns="0">
             <a:noAutofit/>
           </a:bodyPr>
           <a:lstStyle/>
@@ -6158,7 +6662,7 @@
       </p:sp>
       <p:sp>
         <p:nvSpPr>
-          <p:cNvPr id="3" name="TextBox 2"/>
+          <p:cNvPr id="6" name="TextBox 5"/>
           <p:cNvSpPr/>
           <p:nvPr>
             <p:ph type="body" idx="1"/>
@@ -6175,7 +6679,7 @@
           <a:noFill/>
         </p:spPr>
         <p:txBody>
-          <a:bodyPr wrap="square">
+          <a:bodyPr wrap="square" lIns="0" rIns="0">
             <a:noAutofit/>
           </a:bodyPr>
           <a:lstStyle/>
@@ -6195,7 +6699,7 @@
       </p:sp>
       <p:sp>
         <p:nvSpPr>
-          <p:cNvPr id="4" name="Rectangle 3"/>
+          <p:cNvPr id="7" name="Rectangle 6"/>
           <p:cNvSpPr/>
           <p:nvPr>
             <p:ph type="body" idx="2"/>
@@ -6227,7 +6731,7 @@
       </p:sp>
       <p:sp>
         <p:nvSpPr>
-          <p:cNvPr id="5" name="TextBox 4"/>
+          <p:cNvPr id="8" name="TextBox 7"/>
           <p:cNvSpPr/>
           <p:nvPr>
             <p:ph type="body" idx="3"/>
@@ -6244,7 +6748,7 @@
           <a:noFill/>
         </p:spPr>
         <p:txBody>
-          <a:bodyPr wrap="square">
+          <a:bodyPr wrap="square" lIns="0" rIns="0">
             <a:noAutofit/>
           </a:bodyPr>
           <a:lstStyle/>
@@ -6264,7 +6768,7 @@
       </p:sp>
       <p:sp>
         <p:nvSpPr>
-          <p:cNvPr id="6" name="Rectangle 5"/>
+          <p:cNvPr id="9" name="Rectangle 8"/>
           <p:cNvSpPr/>
           <p:nvPr>
             <p:ph type="body" idx="4"/>
@@ -6296,7 +6800,7 @@
       </p:sp>
       <p:sp>
         <p:nvSpPr>
-          <p:cNvPr id="7" name="TextBox 6"/>
+          <p:cNvPr id="10" name="TextBox 9"/>
           <p:cNvSpPr/>
           <p:nvPr>
             <p:ph type="body" idx="5"/>
@@ -6313,7 +6817,7 @@
           <a:noFill/>
         </p:spPr>
         <p:txBody>
-          <a:bodyPr wrap="square">
+          <a:bodyPr wrap="square" lIns="0" rIns="0">
             <a:noAutofit/>
           </a:bodyPr>
           <a:lstStyle/>
@@ -6333,7 +6837,7 @@
       </p:sp>
       <p:sp>
         <p:nvSpPr>
-          <p:cNvPr id="8" name="TextBox 7"/>
+          <p:cNvPr id="11" name="TextBox 10"/>
           <p:cNvSpPr/>
           <p:nvPr>
             <p:ph type="body" idx="6"/>
@@ -6350,7 +6854,7 @@
           <a:noFill/>
         </p:spPr>
         <p:txBody>
-          <a:bodyPr wrap="square">
+          <a:bodyPr wrap="square" lIns="0" rIns="0">
             <a:noAutofit/>
           </a:bodyPr>
           <a:lstStyle/>
@@ -6370,7 +6874,7 @@
       </p:sp>
       <p:sp>
         <p:nvSpPr>
-          <p:cNvPr id="9" name="TextBox 8"/>
+          <p:cNvPr id="12" name="TextBox 11"/>
           <p:cNvSpPr/>
           <p:nvPr>
             <p:ph type="body" idx="7"/>
@@ -6387,7 +6891,7 @@
           <a:noFill/>
         </p:spPr>
         <p:txBody>
-          <a:bodyPr wrap="square">
+          <a:bodyPr wrap="square" lIns="0" rIns="0">
             <a:noAutofit/>
           </a:bodyPr>
           <a:lstStyle/>
@@ -6407,7 +6911,7 @@
       </p:sp>
       <p:sp>
         <p:nvSpPr>
-          <p:cNvPr id="10" name="TextBox 9"/>
+          <p:cNvPr id="13" name="TextBox 12"/>
           <p:cNvSpPr/>
           <p:nvPr>
             <p:ph type="body" idx="8"/>
@@ -6424,7 +6928,7 @@
           <a:noFill/>
         </p:spPr>
         <p:txBody>
-          <a:bodyPr wrap="square">
+          <a:bodyPr wrap="square" lIns="0" rIns="0">
             <a:noAutofit/>
           </a:bodyPr>
           <a:lstStyle/>
@@ -6444,7 +6948,7 @@
       </p:sp>
       <p:sp>
         <p:nvSpPr>
-          <p:cNvPr id="11" name="TextBox 10"/>
+          <p:cNvPr id="14" name="TextBox 13"/>
           <p:cNvSpPr/>
           <p:nvPr>
             <p:ph type="body" idx="9"/>
@@ -6461,7 +6965,7 @@
           <a:noFill/>
         </p:spPr>
         <p:txBody>
-          <a:bodyPr wrap="square">
+          <a:bodyPr wrap="square" lIns="0" rIns="0">
             <a:noAutofit/>
           </a:bodyPr>
           <a:lstStyle/>
@@ -6481,7 +6985,7 @@
       </p:sp>
       <p:sp>
         <p:nvSpPr>
-          <p:cNvPr id="12" name="TextBox 11"/>
+          <p:cNvPr id="15" name="TextBox 14"/>
           <p:cNvSpPr/>
           <p:nvPr>
             <p:ph type="body" idx="13"/>
@@ -6498,7 +7002,7 @@
           <a:noFill/>
         </p:spPr>
         <p:txBody>
-          <a:bodyPr wrap="square">
+          <a:bodyPr wrap="square" lIns="0" rIns="0">
             <a:noAutofit/>
           </a:bodyPr>
           <a:lstStyle/>
@@ -6802,7 +7306,35 @@
       </p:grpSpPr>
       <p:sp>
         <p:nvSpPr>
-          <p:cNvPr id="2" name="TextBox 1"/>
+          <p:cNvPr id="4" name="Slide Number Placeholder 3"/>
+          <p:cNvSpPr>
+            <a:spLocks noGrp="1"/>
+          </p:cNvSpPr>
+          <p:nvPr>
+            <p:ph type="sldNum" sz="quarter" idx="12"/>
+          </p:nvPr>
+        </p:nvSpPr>
+        <p:spPr>
+          <a:xfrm>
+            <a:off x="10363200" y="6035040"/>
+            <a:ext cx="1371600" cy="365760"/>
+          </a:xfrm>
+        </p:spPr>
+        <p:txBody>
+          <a:bodyPr/>
+          <a:lstStyle/>
+          <a:p>
+            <a:fld id="{C1FF6DA9-008F-8B48-92A6-B652298478BF}" type="slidenum">
+              <a:rPr lang="en-US" smtClean="0"/>
+              <a:t>‹#›</a:t>
+            </a:fld>
+            <a:endParaRPr lang="en-US"/>
+          </a:p>
+        </p:txBody>
+      </p:sp>
+      <p:sp>
+        <p:nvSpPr>
+          <p:cNvPr id="5" name="TextBox 4"/>
           <p:cNvSpPr/>
           <p:nvPr>
             <p:ph type="title"/>
@@ -6819,7 +7351,7 @@
           <a:noFill/>
         </p:spPr>
         <p:txBody>
-          <a:bodyPr wrap="square">
+          <a:bodyPr wrap="square" lIns="0" rIns="0">
             <a:noAutofit/>
           </a:bodyPr>
           <a:lstStyle/>
@@ -6839,7 +7371,7 @@
       </p:sp>
       <p:sp>
         <p:nvSpPr>
-          <p:cNvPr id="3" name="TextBox 2"/>
+          <p:cNvPr id="6" name="TextBox 5"/>
           <p:cNvSpPr/>
           <p:nvPr>
             <p:ph type="body" idx="1"/>
@@ -6856,7 +7388,7 @@
           <a:noFill/>
         </p:spPr>
         <p:txBody>
-          <a:bodyPr wrap="square">
+          <a:bodyPr wrap="square" lIns="0" rIns="0">
             <a:noAutofit/>
           </a:bodyPr>
           <a:lstStyle/>
@@ -6876,7 +7408,7 @@
       </p:sp>
       <p:sp>
         <p:nvSpPr>
-          <p:cNvPr id="4" name="TextBox 3"/>
+          <p:cNvPr id="7" name="TextBox 6"/>
           <p:cNvSpPr/>
           <p:nvPr>
             <p:ph type="body" idx="2"/>
@@ -6893,7 +7425,7 @@
           <a:noFill/>
         </p:spPr>
         <p:txBody>
-          <a:bodyPr wrap="square">
+          <a:bodyPr wrap="square" lIns="0" rIns="0">
             <a:noAutofit/>
           </a:bodyPr>
           <a:lstStyle/>
@@ -6913,7 +7445,7 @@
       </p:sp>
       <p:sp>
         <p:nvSpPr>
-          <p:cNvPr id="5" name="TextBox 4"/>
+          <p:cNvPr id="8" name="TextBox 7"/>
           <p:cNvSpPr/>
           <p:nvPr>
             <p:ph type="body" idx="3"/>
@@ -6930,7 +7462,7 @@
           <a:noFill/>
         </p:spPr>
         <p:txBody>
-          <a:bodyPr wrap="square">
+          <a:bodyPr wrap="square" lIns="0" rIns="0">
             <a:noAutofit/>
           </a:bodyPr>
           <a:lstStyle/>
@@ -6950,7 +7482,7 @@
       </p:sp>
       <p:sp>
         <p:nvSpPr>
-          <p:cNvPr id="6" name="TextBox 5"/>
+          <p:cNvPr id="9" name="TextBox 8"/>
           <p:cNvSpPr/>
           <p:nvPr>
             <p:ph type="body" idx="4"/>
@@ -6967,7 +7499,7 @@
           <a:noFill/>
         </p:spPr>
         <p:txBody>
-          <a:bodyPr wrap="square">
+          <a:bodyPr wrap="square" lIns="0" rIns="0">
             <a:noAutofit/>
           </a:bodyPr>
           <a:lstStyle/>
@@ -6987,7 +7519,7 @@
       </p:sp>
       <p:sp>
         <p:nvSpPr>
-          <p:cNvPr id="7" name="TextBox 6"/>
+          <p:cNvPr id="10" name="TextBox 9"/>
           <p:cNvSpPr/>
           <p:nvPr>
             <p:ph type="body" idx="5"/>
@@ -7004,7 +7536,7 @@
           <a:noFill/>
         </p:spPr>
         <p:txBody>
-          <a:bodyPr wrap="square">
+          <a:bodyPr wrap="square" lIns="0" rIns="0">
             <a:noAutofit/>
           </a:bodyPr>
           <a:lstStyle/>
@@ -7062,7 +7594,35 @@
       </p:grpSpPr>
       <p:sp>
         <p:nvSpPr>
-          <p:cNvPr id="2" name="TextBox 1"/>
+          <p:cNvPr id="4" name="Slide Number Placeholder 3"/>
+          <p:cNvSpPr>
+            <a:spLocks noGrp="1"/>
+          </p:cNvSpPr>
+          <p:nvPr>
+            <p:ph type="sldNum" sz="quarter" idx="12"/>
+          </p:nvPr>
+        </p:nvSpPr>
+        <p:spPr>
+          <a:xfrm>
+            <a:off x="10363200" y="6035040"/>
+            <a:ext cx="1371600" cy="365760"/>
+          </a:xfrm>
+        </p:spPr>
+        <p:txBody>
+          <a:bodyPr/>
+          <a:lstStyle/>
+          <a:p>
+            <a:fld id="{C1FF6DA9-008F-8B48-92A6-B652298478BF}" type="slidenum">
+              <a:rPr lang="en-US" smtClean="0"/>
+              <a:t>‹#›</a:t>
+            </a:fld>
+            <a:endParaRPr lang="en-US"/>
+          </a:p>
+        </p:txBody>
+      </p:sp>
+      <p:sp>
+        <p:nvSpPr>
+          <p:cNvPr id="5" name="TextBox 4"/>
           <p:cNvSpPr/>
           <p:nvPr>
             <p:ph type="title"/>
@@ -7079,7 +7639,7 @@
           <a:noFill/>
         </p:spPr>
         <p:txBody>
-          <a:bodyPr wrap="square">
+          <a:bodyPr wrap="square" lIns="0" rIns="0">
             <a:noAutofit/>
           </a:bodyPr>
           <a:lstStyle/>
@@ -7099,7 +7659,7 @@
       </p:sp>
       <p:sp>
         <p:nvSpPr>
-          <p:cNvPr id="3" name="TextBox 2"/>
+          <p:cNvPr id="6" name="TextBox 5"/>
           <p:cNvSpPr/>
           <p:nvPr>
             <p:ph type="body" idx="1"/>
@@ -7116,7 +7676,7 @@
           <a:noFill/>
         </p:spPr>
         <p:txBody>
-          <a:bodyPr wrap="square">
+          <a:bodyPr wrap="square" lIns="0" rIns="0">
             <a:noAutofit/>
           </a:bodyPr>
           <a:lstStyle/>
@@ -7136,7 +7696,7 @@
       </p:sp>
       <p:sp>
         <p:nvSpPr>
-          <p:cNvPr id="4" name="Rectangle 3"/>
+          <p:cNvPr id="7" name="Rectangle 6"/>
           <p:cNvSpPr/>
           <p:nvPr>
             <p:ph type="body" idx="2"/>
@@ -7168,7 +7728,7 @@
       </p:sp>
       <p:sp>
         <p:nvSpPr>
-          <p:cNvPr id="5" name="TextBox 4"/>
+          <p:cNvPr id="8" name="TextBox 7"/>
           <p:cNvSpPr/>
           <p:nvPr>
             <p:ph type="body" idx="3"/>
@@ -7185,7 +7745,7 @@
           <a:noFill/>
         </p:spPr>
         <p:txBody>
-          <a:bodyPr wrap="square">
+          <a:bodyPr wrap="square" lIns="0" rIns="0">
             <a:noAutofit/>
           </a:bodyPr>
           <a:lstStyle/>
@@ -7205,7 +7765,7 @@
       </p:sp>
       <p:sp>
         <p:nvSpPr>
-          <p:cNvPr id="6" name="TextBox 5"/>
+          <p:cNvPr id="9" name="TextBox 8"/>
           <p:cNvSpPr/>
           <p:nvPr>
             <p:ph type="body" idx="4"/>
@@ -7222,7 +7782,7 @@
           <a:noFill/>
         </p:spPr>
         <p:txBody>
-          <a:bodyPr wrap="square">
+          <a:bodyPr wrap="square" lIns="0" rIns="0">
             <a:noAutofit/>
           </a:bodyPr>
           <a:lstStyle/>
@@ -7242,7 +7802,7 @@
       </p:sp>
       <p:sp>
         <p:nvSpPr>
-          <p:cNvPr id="7" name="Rectangle 6"/>
+          <p:cNvPr id="10" name="Rectangle 9"/>
           <p:cNvSpPr/>
           <p:nvPr>
             <p:ph type="body" idx="5"/>
@@ -7274,7 +7834,7 @@
       </p:sp>
       <p:sp>
         <p:nvSpPr>
-          <p:cNvPr id="8" name="TextBox 7"/>
+          <p:cNvPr id="11" name="TextBox 10"/>
           <p:cNvSpPr/>
           <p:nvPr>
             <p:ph type="body" idx="6"/>
@@ -7291,7 +7851,7 @@
           <a:noFill/>
         </p:spPr>
         <p:txBody>
-          <a:bodyPr wrap="square">
+          <a:bodyPr wrap="square" lIns="0" rIns="0">
             <a:noAutofit/>
           </a:bodyPr>
           <a:lstStyle/>
@@ -7311,7 +7871,7 @@
       </p:sp>
       <p:sp>
         <p:nvSpPr>
-          <p:cNvPr id="9" name="TextBox 8"/>
+          <p:cNvPr id="12" name="TextBox 11"/>
           <p:cNvSpPr/>
           <p:nvPr>
             <p:ph type="body" idx="7"/>
@@ -7328,7 +7888,7 @@
           <a:noFill/>
         </p:spPr>
         <p:txBody>
-          <a:bodyPr wrap="square">
+          <a:bodyPr wrap="square" lIns="0" rIns="0">
             <a:noAutofit/>
           </a:bodyPr>
           <a:lstStyle/>
@@ -7348,7 +7908,7 @@
       </p:sp>
       <p:sp>
         <p:nvSpPr>
-          <p:cNvPr id="10" name="Rectangle 9"/>
+          <p:cNvPr id="13" name="Rectangle 12"/>
           <p:cNvSpPr/>
           <p:nvPr>
             <p:ph type="body" idx="8"/>
@@ -7380,7 +7940,7 @@
       </p:sp>
       <p:sp>
         <p:nvSpPr>
-          <p:cNvPr id="11" name="TextBox 10"/>
+          <p:cNvPr id="14" name="TextBox 13"/>
           <p:cNvSpPr/>
           <p:nvPr>
             <p:ph type="body" idx="9"/>
@@ -7397,7 +7957,7 @@
           <a:noFill/>
         </p:spPr>
         <p:txBody>
-          <a:bodyPr wrap="square">
+          <a:bodyPr wrap="square" lIns="0" rIns="0">
             <a:noAutofit/>
           </a:bodyPr>
           <a:lstStyle/>
@@ -7417,7 +7977,7 @@
       </p:sp>
       <p:sp>
         <p:nvSpPr>
-          <p:cNvPr id="12" name="TextBox 11"/>
+          <p:cNvPr id="15" name="TextBox 14"/>
           <p:cNvSpPr/>
           <p:nvPr>
             <p:ph type="body" idx="13"/>
@@ -7434,7 +7994,7 @@
           <a:noFill/>
         </p:spPr>
         <p:txBody>
-          <a:bodyPr wrap="square">
+          <a:bodyPr wrap="square" lIns="0" rIns="0">
             <a:noAutofit/>
           </a:bodyPr>
           <a:lstStyle/>
@@ -7454,7 +8014,7 @@
       </p:sp>
       <p:sp>
         <p:nvSpPr>
-          <p:cNvPr id="13" name="Rectangle 12"/>
+          <p:cNvPr id="16" name="Rectangle 15"/>
           <p:cNvSpPr/>
           <p:nvPr>
             <p:ph type="body" idx="14"/>
@@ -7486,7 +8046,7 @@
       </p:sp>
       <p:sp>
         <p:nvSpPr>
-          <p:cNvPr id="14" name="TextBox 13"/>
+          <p:cNvPr id="17" name="TextBox 16"/>
           <p:cNvSpPr/>
           <p:nvPr>
             <p:ph type="body" idx="15"/>
@@ -7503,7 +8063,7 @@
           <a:noFill/>
         </p:spPr>
         <p:txBody>
-          <a:bodyPr wrap="square">
+          <a:bodyPr wrap="square" lIns="0" rIns="0">
             <a:noAutofit/>
           </a:bodyPr>
           <a:lstStyle/>
@@ -7523,7 +8083,7 @@
       </p:sp>
       <p:sp>
         <p:nvSpPr>
-          <p:cNvPr id="15" name="TextBox 14"/>
+          <p:cNvPr id="18" name="TextBox 17"/>
           <p:cNvSpPr/>
           <p:nvPr>
             <p:ph type="body" idx="16"/>
@@ -7540,7 +8100,7 @@
           <a:noFill/>
         </p:spPr>
         <p:txBody>
-          <a:bodyPr wrap="square">
+          <a:bodyPr wrap="square" lIns="0" rIns="0">
             <a:noAutofit/>
           </a:bodyPr>
           <a:lstStyle/>
@@ -7560,7 +8120,7 @@
       </p:sp>
       <p:sp>
         <p:nvSpPr>
-          <p:cNvPr id="16" name="Rectangle 15"/>
+          <p:cNvPr id="19" name="Rectangle 18"/>
           <p:cNvSpPr/>
           <p:nvPr>
             <p:ph type="body" idx="17"/>
@@ -7592,7 +8152,7 @@
       </p:sp>
       <p:sp>
         <p:nvSpPr>
-          <p:cNvPr id="17" name="TextBox 16"/>
+          <p:cNvPr id="20" name="TextBox 19"/>
           <p:cNvSpPr/>
           <p:nvPr>
             <p:ph type="body" idx="18"/>
@@ -7609,7 +8169,7 @@
           <a:noFill/>
         </p:spPr>
         <p:txBody>
-          <a:bodyPr wrap="square">
+          <a:bodyPr wrap="square" lIns="0" rIns="0">
             <a:noAutofit/>
           </a:bodyPr>
           <a:lstStyle/>
@@ -7629,7 +8189,7 @@
       </p:sp>
       <p:sp>
         <p:nvSpPr>
-          <p:cNvPr id="18" name="TextBox 17"/>
+          <p:cNvPr id="21" name="TextBox 20"/>
           <p:cNvSpPr/>
           <p:nvPr>
             <p:ph type="body" idx="19"/>
@@ -7646,7 +8206,7 @@
           <a:noFill/>
         </p:spPr>
         <p:txBody>
-          <a:bodyPr wrap="square">
+          <a:bodyPr wrap="square" lIns="0" rIns="0">
             <a:noAutofit/>
           </a:bodyPr>
           <a:lstStyle/>
@@ -7666,7 +8226,7 @@
       </p:sp>
       <p:sp>
         <p:nvSpPr>
-          <p:cNvPr id="19" name="Rectangle 18"/>
+          <p:cNvPr id="22" name="Rectangle 21"/>
           <p:cNvSpPr/>
           <p:nvPr>
             <p:ph type="body" idx="20"/>
@@ -7698,7 +8258,7 @@
       </p:sp>
       <p:sp>
         <p:nvSpPr>
-          <p:cNvPr id="20" name="TextBox 19"/>
+          <p:cNvPr id="23" name="TextBox 22"/>
           <p:cNvSpPr/>
           <p:nvPr>
             <p:ph type="body" idx="21"/>
@@ -7715,7 +8275,7 @@
           <a:noFill/>
         </p:spPr>
         <p:txBody>
-          <a:bodyPr wrap="square">
+          <a:bodyPr wrap="square" lIns="0" rIns="0">
             <a:noAutofit/>
           </a:bodyPr>
           <a:lstStyle/>
@@ -7773,7 +8333,35 @@
       </p:grpSpPr>
       <p:sp>
         <p:nvSpPr>
-          <p:cNvPr id="2" name="TextBox 1"/>
+          <p:cNvPr id="4" name="Slide Number Placeholder 3"/>
+          <p:cNvSpPr>
+            <a:spLocks noGrp="1"/>
+          </p:cNvSpPr>
+          <p:nvPr>
+            <p:ph type="sldNum" sz="quarter" idx="12"/>
+          </p:nvPr>
+        </p:nvSpPr>
+        <p:spPr>
+          <a:xfrm>
+            <a:off x="10363200" y="6035040"/>
+            <a:ext cx="1371600" cy="365760"/>
+          </a:xfrm>
+        </p:spPr>
+        <p:txBody>
+          <a:bodyPr/>
+          <a:lstStyle/>
+          <a:p>
+            <a:fld id="{C1FF6DA9-008F-8B48-92A6-B652298478BF}" type="slidenum">
+              <a:rPr lang="en-US" smtClean="0"/>
+              <a:t>‹#›</a:t>
+            </a:fld>
+            <a:endParaRPr lang="en-US"/>
+          </a:p>
+        </p:txBody>
+      </p:sp>
+      <p:sp>
+        <p:nvSpPr>
+          <p:cNvPr id="5" name="TextBox 4"/>
           <p:cNvSpPr/>
           <p:nvPr>
             <p:ph type="title"/>
@@ -7790,7 +8378,7 @@
           <a:noFill/>
         </p:spPr>
         <p:txBody>
-          <a:bodyPr wrap="square">
+          <a:bodyPr wrap="square" lIns="0" rIns="0">
             <a:noAutofit/>
           </a:bodyPr>
           <a:lstStyle/>
@@ -7810,7 +8398,7 @@
       </p:sp>
       <p:sp>
         <p:nvSpPr>
-          <p:cNvPr id="3" name="TextBox 2"/>
+          <p:cNvPr id="6" name="TextBox 5"/>
           <p:cNvSpPr/>
           <p:nvPr>
             <p:ph type="body" idx="1"/>
@@ -7827,7 +8415,7 @@
           <a:noFill/>
         </p:spPr>
         <p:txBody>
-          <a:bodyPr wrap="square">
+          <a:bodyPr wrap="square" lIns="0" rIns="0">
             <a:noAutofit/>
           </a:bodyPr>
           <a:lstStyle/>
@@ -7847,7 +8435,7 @@
       </p:sp>
       <p:sp>
         <p:nvSpPr>
-          <p:cNvPr id="4" name="Rectangle 3"/>
+          <p:cNvPr id="7" name="Rectangle 6"/>
           <p:cNvSpPr/>
           <p:nvPr>
             <p:ph type="body" idx="2"/>
@@ -7879,7 +8467,7 @@
       </p:sp>
       <p:sp>
         <p:nvSpPr>
-          <p:cNvPr id="5" name="TextBox 4"/>
+          <p:cNvPr id="8" name="TextBox 7"/>
           <p:cNvSpPr/>
           <p:nvPr>
             <p:ph type="body" idx="3"/>
@@ -7896,7 +8484,7 @@
           <a:noFill/>
         </p:spPr>
         <p:txBody>
-          <a:bodyPr wrap="square">
+          <a:bodyPr wrap="square" lIns="0" rIns="0">
             <a:noAutofit/>
           </a:bodyPr>
           <a:lstStyle/>
@@ -7916,7 +8504,7 @@
       </p:sp>
       <p:sp>
         <p:nvSpPr>
-          <p:cNvPr id="6" name="TextBox 5"/>
+          <p:cNvPr id="9" name="TextBox 8"/>
           <p:cNvSpPr/>
           <p:nvPr>
             <p:ph type="body" idx="4"/>
@@ -7933,7 +8521,7 @@
           <a:noFill/>
         </p:spPr>
         <p:txBody>
-          <a:bodyPr wrap="square">
+          <a:bodyPr wrap="square" lIns="0" rIns="0">
             <a:noAutofit/>
           </a:bodyPr>
           <a:lstStyle/>
@@ -7953,7 +8541,7 @@
       </p:sp>
       <p:sp>
         <p:nvSpPr>
-          <p:cNvPr id="7" name="Rectangle 6"/>
+          <p:cNvPr id="10" name="Rectangle 9"/>
           <p:cNvSpPr/>
           <p:nvPr>
             <p:ph type="body" idx="5"/>
@@ -7985,7 +8573,7 @@
       </p:sp>
       <p:sp>
         <p:nvSpPr>
-          <p:cNvPr id="8" name="TextBox 7"/>
+          <p:cNvPr id="11" name="TextBox 10"/>
           <p:cNvSpPr/>
           <p:nvPr>
             <p:ph type="body" idx="6"/>
@@ -8002,7 +8590,7 @@
           <a:noFill/>
         </p:spPr>
         <p:txBody>
-          <a:bodyPr wrap="square">
+          <a:bodyPr wrap="square" lIns="0" rIns="0">
             <a:noAutofit/>
           </a:bodyPr>
           <a:lstStyle/>
@@ -8022,7 +8610,7 @@
       </p:sp>
       <p:sp>
         <p:nvSpPr>
-          <p:cNvPr id="9" name="TextBox 8"/>
+          <p:cNvPr id="12" name="TextBox 11"/>
           <p:cNvSpPr/>
           <p:nvPr>
             <p:ph type="body" idx="7"/>
@@ -8039,7 +8627,7 @@
           <a:noFill/>
         </p:spPr>
         <p:txBody>
-          <a:bodyPr wrap="square">
+          <a:bodyPr wrap="square" lIns="0" rIns="0">
             <a:noAutofit/>
           </a:bodyPr>
           <a:lstStyle/>
@@ -8059,7 +8647,7 @@
       </p:sp>
       <p:sp>
         <p:nvSpPr>
-          <p:cNvPr id="10" name="Rectangle 9"/>
+          <p:cNvPr id="13" name="Rectangle 12"/>
           <p:cNvSpPr/>
           <p:nvPr>
             <p:ph type="body" idx="8"/>
@@ -8091,7 +8679,7 @@
       </p:sp>
       <p:sp>
         <p:nvSpPr>
-          <p:cNvPr id="11" name="TextBox 10"/>
+          <p:cNvPr id="14" name="TextBox 13"/>
           <p:cNvSpPr/>
           <p:nvPr>
             <p:ph type="body" idx="9"/>
@@ -8108,7 +8696,7 @@
           <a:noFill/>
         </p:spPr>
         <p:txBody>
-          <a:bodyPr wrap="square">
+          <a:bodyPr wrap="square" lIns="0" rIns="0">
             <a:noAutofit/>
           </a:bodyPr>
           <a:lstStyle/>
@@ -8128,7 +8716,7 @@
       </p:sp>
       <p:sp>
         <p:nvSpPr>
-          <p:cNvPr id="12" name="TextBox 11"/>
+          <p:cNvPr id="15" name="TextBox 14"/>
           <p:cNvSpPr/>
           <p:nvPr>
             <p:ph type="body" idx="13"/>
@@ -8145,7 +8733,7 @@
           <a:noFill/>
         </p:spPr>
         <p:txBody>
-          <a:bodyPr wrap="square">
+          <a:bodyPr wrap="square" lIns="0" rIns="0">
             <a:noAutofit/>
           </a:bodyPr>
           <a:lstStyle/>
@@ -8165,7 +8753,7 @@
       </p:sp>
       <p:sp>
         <p:nvSpPr>
-          <p:cNvPr id="13" name="Rectangle 12"/>
+          <p:cNvPr id="16" name="Rectangle 15"/>
           <p:cNvSpPr/>
           <p:nvPr>
             <p:ph type="body" idx="14"/>
@@ -8197,7 +8785,7 @@
       </p:sp>
       <p:sp>
         <p:nvSpPr>
-          <p:cNvPr id="14" name="TextBox 13"/>
+          <p:cNvPr id="17" name="TextBox 16"/>
           <p:cNvSpPr/>
           <p:nvPr>
             <p:ph type="body" idx="15"/>
@@ -8214,7 +8802,7 @@
           <a:noFill/>
         </p:spPr>
         <p:txBody>
-          <a:bodyPr wrap="square">
+          <a:bodyPr wrap="square" lIns="0" rIns="0">
             <a:noAutofit/>
           </a:bodyPr>
           <a:lstStyle/>
@@ -8234,7 +8822,7 @@
       </p:sp>
       <p:sp>
         <p:nvSpPr>
-          <p:cNvPr id="15" name="Rectangle 14"/>
+          <p:cNvPr id="18" name="Rectangle 17"/>
           <p:cNvSpPr/>
           <p:nvPr>
             <p:ph type="body" idx="16"/>
@@ -8266,7 +8854,7 @@
       </p:sp>
       <p:sp>
         <p:nvSpPr>
-          <p:cNvPr id="16" name="TextBox 15"/>
+          <p:cNvPr id="19" name="TextBox 18"/>
           <p:cNvSpPr/>
           <p:nvPr>
             <p:ph type="body" idx="17"/>
@@ -8283,7 +8871,7 @@
           <a:noFill/>
         </p:spPr>
         <p:txBody>
-          <a:bodyPr wrap="square">
+          <a:bodyPr wrap="square" lIns="0" rIns="0">
             <a:noAutofit/>
           </a:bodyPr>
           <a:lstStyle/>
@@ -8341,7 +8929,35 @@
       </p:grpSpPr>
       <p:sp>
         <p:nvSpPr>
-          <p:cNvPr id="2" name="TextBox 1"/>
+          <p:cNvPr id="4" name="Slide Number Placeholder 3"/>
+          <p:cNvSpPr>
+            <a:spLocks noGrp="1"/>
+          </p:cNvSpPr>
+          <p:nvPr>
+            <p:ph type="sldNum" sz="quarter" idx="12"/>
+          </p:nvPr>
+        </p:nvSpPr>
+        <p:spPr>
+          <a:xfrm>
+            <a:off x="10363200" y="6035040"/>
+            <a:ext cx="1371600" cy="365760"/>
+          </a:xfrm>
+        </p:spPr>
+        <p:txBody>
+          <a:bodyPr/>
+          <a:lstStyle/>
+          <a:p>
+            <a:fld id="{C1FF6DA9-008F-8B48-92A6-B652298478BF}" type="slidenum">
+              <a:rPr lang="en-US" smtClean="0"/>
+              <a:t>‹#›</a:t>
+            </a:fld>
+            <a:endParaRPr lang="en-US"/>
+          </a:p>
+        </p:txBody>
+      </p:sp>
+      <p:sp>
+        <p:nvSpPr>
+          <p:cNvPr id="5" name="TextBox 4"/>
           <p:cNvSpPr/>
           <p:nvPr>
             <p:ph type="title"/>
@@ -8358,7 +8974,7 @@
           <a:noFill/>
         </p:spPr>
         <p:txBody>
-          <a:bodyPr wrap="square">
+          <a:bodyPr wrap="square" lIns="0" rIns="0">
             <a:noAutofit/>
           </a:bodyPr>
           <a:lstStyle/>
@@ -8378,7 +8994,7 @@
       </p:sp>
       <p:sp>
         <p:nvSpPr>
-          <p:cNvPr id="3" name="TextBox 2"/>
+          <p:cNvPr id="6" name="TextBox 5"/>
           <p:cNvSpPr/>
           <p:nvPr>
             <p:ph type="body" idx="1"/>
@@ -8395,7 +9011,7 @@
           <a:noFill/>
         </p:spPr>
         <p:txBody>
-          <a:bodyPr wrap="square">
+          <a:bodyPr wrap="square" lIns="0" rIns="0">
             <a:noAutofit/>
           </a:bodyPr>
           <a:lstStyle/>
@@ -8415,7 +9031,7 @@
       </p:sp>
       <p:sp>
         <p:nvSpPr>
-          <p:cNvPr id="4" name="TextBox 3"/>
+          <p:cNvPr id="7" name="TextBox 6"/>
           <p:cNvSpPr/>
           <p:nvPr>
             <p:ph type="body" idx="2"/>
@@ -8432,7 +9048,7 @@
           <a:noFill/>
         </p:spPr>
         <p:txBody>
-          <a:bodyPr wrap="square">
+          <a:bodyPr wrap="square" lIns="0" rIns="0">
             <a:noAutofit/>
           </a:bodyPr>
           <a:lstStyle/>
@@ -8452,7 +9068,7 @@
       </p:sp>
       <p:sp>
         <p:nvSpPr>
-          <p:cNvPr id="5" name="TextBox 4"/>
+          <p:cNvPr id="8" name="TextBox 7"/>
           <p:cNvSpPr/>
           <p:nvPr>
             <p:ph type="body" idx="3"/>
@@ -8469,7 +9085,7 @@
           <a:noFill/>
         </p:spPr>
         <p:txBody>
-          <a:bodyPr wrap="square">
+          <a:bodyPr wrap="square" lIns="0" rIns="0">
             <a:noAutofit/>
           </a:bodyPr>
           <a:lstStyle/>
@@ -8489,7 +9105,7 @@
       </p:sp>
       <p:sp>
         <p:nvSpPr>
-          <p:cNvPr id="6" name="Rectangle 5"/>
+          <p:cNvPr id="9" name="Rectangle 8"/>
           <p:cNvSpPr/>
           <p:nvPr>
             <p:ph type="body" idx="4"/>
@@ -8521,7 +9137,7 @@
       </p:sp>
       <p:sp>
         <p:nvSpPr>
-          <p:cNvPr id="7" name="TextBox 6"/>
+          <p:cNvPr id="10" name="TextBox 9"/>
           <p:cNvSpPr/>
           <p:nvPr>
             <p:ph type="body" idx="5"/>
@@ -8538,7 +9154,7 @@
           <a:noFill/>
         </p:spPr>
         <p:txBody>
-          <a:bodyPr wrap="square">
+          <a:bodyPr wrap="square" lIns="0" rIns="0">
             <a:noAutofit/>
           </a:bodyPr>
           <a:lstStyle/>
@@ -8558,7 +9174,7 @@
       </p:sp>
       <p:sp>
         <p:nvSpPr>
-          <p:cNvPr id="8" name="TextBox 7"/>
+          <p:cNvPr id="11" name="TextBox 10"/>
           <p:cNvSpPr/>
           <p:nvPr>
             <p:ph type="body" idx="6"/>
@@ -8575,7 +9191,7 @@
           <a:noFill/>
         </p:spPr>
         <p:txBody>
-          <a:bodyPr wrap="square">
+          <a:bodyPr wrap="square" lIns="0" rIns="0">
             <a:noAutofit/>
           </a:bodyPr>
           <a:lstStyle/>
@@ -8595,7 +9211,7 @@
       </p:sp>
       <p:sp>
         <p:nvSpPr>
-          <p:cNvPr id="9" name="TextBox 8"/>
+          <p:cNvPr id="12" name="TextBox 11"/>
           <p:cNvSpPr/>
           <p:nvPr>
             <p:ph type="body" idx="7"/>
@@ -8612,7 +9228,7 @@
           <a:noFill/>
         </p:spPr>
         <p:txBody>
-          <a:bodyPr wrap="square">
+          <a:bodyPr wrap="square" lIns="0" rIns="0">
             <a:noAutofit/>
           </a:bodyPr>
           <a:lstStyle/>
@@ -8632,7 +9248,7 @@
       </p:sp>
       <p:sp>
         <p:nvSpPr>
-          <p:cNvPr id="10" name="TextBox 9"/>
+          <p:cNvPr id="13" name="TextBox 12"/>
           <p:cNvSpPr/>
           <p:nvPr>
             <p:ph type="body" idx="8"/>
@@ -8649,7 +9265,7 @@
           <a:noFill/>
         </p:spPr>
         <p:txBody>
-          <a:bodyPr wrap="square">
+          <a:bodyPr wrap="square" lIns="0" rIns="0">
             <a:noAutofit/>
           </a:bodyPr>
           <a:lstStyle/>
@@ -8669,7 +9285,7 @@
       </p:sp>
       <p:sp>
         <p:nvSpPr>
-          <p:cNvPr id="11" name="TextBox 10"/>
+          <p:cNvPr id="14" name="TextBox 13"/>
           <p:cNvSpPr/>
           <p:nvPr>
             <p:ph type="body" idx="9"/>
@@ -8686,7 +9302,7 @@
           <a:noFill/>
         </p:spPr>
         <p:txBody>
-          <a:bodyPr wrap="square">
+          <a:bodyPr wrap="square" lIns="0" rIns="0">
             <a:noAutofit/>
           </a:bodyPr>
           <a:lstStyle/>
@@ -8706,7 +9322,7 @@
       </p:sp>
       <p:sp>
         <p:nvSpPr>
-          <p:cNvPr id="12" name="TextBox 11"/>
+          <p:cNvPr id="15" name="TextBox 14"/>
           <p:cNvSpPr/>
           <p:nvPr>
             <p:ph type="body" idx="13"/>
@@ -8723,7 +9339,7 @@
           <a:noFill/>
         </p:spPr>
         <p:txBody>
-          <a:bodyPr wrap="square">
+          <a:bodyPr wrap="square" lIns="0" rIns="0">
             <a:noAutofit/>
           </a:bodyPr>
           <a:lstStyle/>
@@ -8743,7 +9359,7 @@
       </p:sp>
       <p:sp>
         <p:nvSpPr>
-          <p:cNvPr id="13" name="TextBox 12"/>
+          <p:cNvPr id="16" name="TextBox 15"/>
           <p:cNvSpPr/>
           <p:nvPr>
             <p:ph type="body" idx="14"/>
@@ -8760,7 +9376,7 @@
           <a:noFill/>
         </p:spPr>
         <p:txBody>
-          <a:bodyPr wrap="square">
+          <a:bodyPr wrap="square" lIns="0" rIns="0">
             <a:noAutofit/>
           </a:bodyPr>
           <a:lstStyle/>
@@ -8780,7 +9396,7 @@
       </p:sp>
       <p:sp>
         <p:nvSpPr>
-          <p:cNvPr id="14" name="TextBox 13"/>
+          <p:cNvPr id="17" name="TextBox 16"/>
           <p:cNvSpPr/>
           <p:nvPr>
             <p:ph type="body" idx="15"/>
@@ -8797,7 +9413,7 @@
           <a:noFill/>
         </p:spPr>
         <p:txBody>
-          <a:bodyPr wrap="square">
+          <a:bodyPr wrap="square" lIns="0" rIns="0">
             <a:noAutofit/>
           </a:bodyPr>
           <a:lstStyle/>
@@ -8817,7 +9433,7 @@
       </p:sp>
       <p:sp>
         <p:nvSpPr>
-          <p:cNvPr id="15" name="TextBox 14"/>
+          <p:cNvPr id="18" name="TextBox 17"/>
           <p:cNvSpPr/>
           <p:nvPr>
             <p:ph type="body" idx="16"/>
@@ -8834,7 +9450,7 @@
           <a:noFill/>
         </p:spPr>
         <p:txBody>
-          <a:bodyPr wrap="square">
+          <a:bodyPr wrap="square" lIns="0" rIns="0">
             <a:noAutofit/>
           </a:bodyPr>
           <a:lstStyle/>
@@ -8854,7 +9470,7 @@
       </p:sp>
       <p:sp>
         <p:nvSpPr>
-          <p:cNvPr id="16" name="TextBox 15"/>
+          <p:cNvPr id="19" name="TextBox 18"/>
           <p:cNvSpPr/>
           <p:nvPr>
             <p:ph type="body" idx="17"/>
@@ -8871,7 +9487,7 @@
           <a:noFill/>
         </p:spPr>
         <p:txBody>
-          <a:bodyPr wrap="square">
+          <a:bodyPr wrap="square" lIns="0" rIns="0">
             <a:noAutofit/>
           </a:bodyPr>
           <a:lstStyle/>
@@ -8891,7 +9507,7 @@
       </p:sp>
       <p:sp>
         <p:nvSpPr>
-          <p:cNvPr id="17" name="TextBox 16"/>
+          <p:cNvPr id="20" name="TextBox 19"/>
           <p:cNvSpPr/>
           <p:nvPr>
             <p:ph type="body" idx="18"/>
@@ -8908,7 +9524,7 @@
           <a:noFill/>
         </p:spPr>
         <p:txBody>
-          <a:bodyPr wrap="square">
+          <a:bodyPr wrap="square" lIns="0" rIns="0">
             <a:noAutofit/>
           </a:bodyPr>
           <a:lstStyle/>
@@ -8928,7 +9544,7 @@
       </p:sp>
       <p:sp>
         <p:nvSpPr>
-          <p:cNvPr id="18" name="TextBox 17"/>
+          <p:cNvPr id="21" name="TextBox 20"/>
           <p:cNvSpPr/>
           <p:nvPr>
             <p:ph type="body" idx="19"/>
@@ -8945,7 +9561,7 @@
           <a:noFill/>
         </p:spPr>
         <p:txBody>
-          <a:bodyPr wrap="square">
+          <a:bodyPr wrap="square" lIns="0" rIns="0">
             <a:noAutofit/>
           </a:bodyPr>
           <a:lstStyle/>
@@ -9003,7 +9619,35 @@
       </p:grpSpPr>
       <p:sp>
         <p:nvSpPr>
-          <p:cNvPr id="2" name="TextBox 1"/>
+          <p:cNvPr id="4" name="Slide Number Placeholder 3"/>
+          <p:cNvSpPr>
+            <a:spLocks noGrp="1"/>
+          </p:cNvSpPr>
+          <p:nvPr>
+            <p:ph type="sldNum" sz="quarter" idx="12"/>
+          </p:nvPr>
+        </p:nvSpPr>
+        <p:spPr>
+          <a:xfrm>
+            <a:off x="10363200" y="6035040"/>
+            <a:ext cx="1371600" cy="365760"/>
+          </a:xfrm>
+        </p:spPr>
+        <p:txBody>
+          <a:bodyPr/>
+          <a:lstStyle/>
+          <a:p>
+            <a:fld id="{C1FF6DA9-008F-8B48-92A6-B652298478BF}" type="slidenum">
+              <a:rPr lang="en-US" smtClean="0"/>
+              <a:t>‹#›</a:t>
+            </a:fld>
+            <a:endParaRPr lang="en-US"/>
+          </a:p>
+        </p:txBody>
+      </p:sp>
+      <p:sp>
+        <p:nvSpPr>
+          <p:cNvPr id="5" name="TextBox 4"/>
           <p:cNvSpPr/>
           <p:nvPr>
             <p:ph type="title"/>
@@ -9020,7 +9664,7 @@
           <a:noFill/>
         </p:spPr>
         <p:txBody>
-          <a:bodyPr wrap="square">
+          <a:bodyPr wrap="square" lIns="0" rIns="0">
             <a:noAutofit/>
           </a:bodyPr>
           <a:lstStyle/>
@@ -9040,7 +9684,7 @@
       </p:sp>
       <p:sp>
         <p:nvSpPr>
-          <p:cNvPr id="3" name="TextBox 2"/>
+          <p:cNvPr id="6" name="TextBox 5"/>
           <p:cNvSpPr/>
           <p:nvPr>
             <p:ph type="body" idx="1"/>
@@ -9057,7 +9701,7 @@
           <a:noFill/>
         </p:spPr>
         <p:txBody>
-          <a:bodyPr wrap="square">
+          <a:bodyPr wrap="square" lIns="0" rIns="0">
             <a:noAutofit/>
           </a:bodyPr>
           <a:lstStyle/>
@@ -9077,7 +9721,7 @@
       </p:sp>
       <p:sp>
         <p:nvSpPr>
-          <p:cNvPr id="4" name="TextBox 3"/>
+          <p:cNvPr id="7" name="TextBox 6"/>
           <p:cNvSpPr/>
           <p:nvPr>
             <p:ph type="body" idx="2"/>
@@ -9094,7 +9738,7 @@
           <a:noFill/>
         </p:spPr>
         <p:txBody>
-          <a:bodyPr wrap="square">
+          <a:bodyPr wrap="square" lIns="0" rIns="0">
             <a:noAutofit/>
           </a:bodyPr>
           <a:lstStyle/>
@@ -9114,7 +9758,7 @@
       </p:sp>
       <p:sp>
         <p:nvSpPr>
-          <p:cNvPr id="5" name="Rectangle 4"/>
+          <p:cNvPr id="8" name="Rectangle 7"/>
           <p:cNvSpPr/>
           <p:nvPr>
             <p:ph type="body" idx="3"/>
@@ -9146,7 +9790,7 @@
       </p:sp>
       <p:sp>
         <p:nvSpPr>
-          <p:cNvPr id="6" name="TextBox 5"/>
+          <p:cNvPr id="9" name="TextBox 8"/>
           <p:cNvSpPr/>
           <p:nvPr>
             <p:ph type="body" idx="4"/>
@@ -9163,7 +9807,7 @@
           <a:noFill/>
         </p:spPr>
         <p:txBody>
-          <a:bodyPr wrap="square">
+          <a:bodyPr wrap="square" lIns="0" rIns="0">
             <a:noAutofit/>
           </a:bodyPr>
           <a:lstStyle/>
@@ -9183,7 +9827,7 @@
       </p:sp>
       <p:sp>
         <p:nvSpPr>
-          <p:cNvPr id="7" name="TextBox 6"/>
+          <p:cNvPr id="10" name="TextBox 9"/>
           <p:cNvSpPr/>
           <p:nvPr>
             <p:ph type="body" idx="5"/>
@@ -9200,7 +9844,7 @@
           <a:noFill/>
         </p:spPr>
         <p:txBody>
-          <a:bodyPr wrap="square">
+          <a:bodyPr wrap="square" lIns="0" rIns="0">
             <a:noAutofit/>
           </a:bodyPr>
           <a:lstStyle/>
@@ -9220,7 +9864,7 @@
       </p:sp>
       <p:sp>
         <p:nvSpPr>
-          <p:cNvPr id="8" name="TextBox 7"/>
+          <p:cNvPr id="11" name="TextBox 10"/>
           <p:cNvSpPr/>
           <p:nvPr>
             <p:ph type="body" idx="6"/>
@@ -9237,7 +9881,7 @@
           <a:noFill/>
         </p:spPr>
         <p:txBody>
-          <a:bodyPr wrap="square">
+          <a:bodyPr wrap="square" lIns="0" rIns="0">
             <a:noAutofit/>
           </a:bodyPr>
           <a:lstStyle/>
@@ -9257,7 +9901,7 @@
       </p:sp>
       <p:sp>
         <p:nvSpPr>
-          <p:cNvPr id="9" name="Rectangle 8"/>
+          <p:cNvPr id="12" name="Rectangle 11"/>
           <p:cNvSpPr/>
           <p:nvPr>
             <p:ph type="body" idx="7"/>
@@ -9289,7 +9933,7 @@
       </p:sp>
       <p:sp>
         <p:nvSpPr>
-          <p:cNvPr id="10" name="TextBox 9"/>
+          <p:cNvPr id="13" name="TextBox 12"/>
           <p:cNvSpPr/>
           <p:nvPr>
             <p:ph type="body" idx="8"/>
@@ -9306,7 +9950,7 @@
           <a:noFill/>
         </p:spPr>
         <p:txBody>
-          <a:bodyPr wrap="square">
+          <a:bodyPr wrap="square" lIns="0" rIns="0">
             <a:noAutofit/>
           </a:bodyPr>
           <a:lstStyle/>
@@ -9326,7 +9970,7 @@
       </p:sp>
       <p:sp>
         <p:nvSpPr>
-          <p:cNvPr id="11" name="TextBox 10"/>
+          <p:cNvPr id="14" name="TextBox 13"/>
           <p:cNvSpPr/>
           <p:nvPr>
             <p:ph type="body" idx="9"/>
@@ -9343,7 +9987,7 @@
           <a:noFill/>
         </p:spPr>
         <p:txBody>
-          <a:bodyPr wrap="square">
+          <a:bodyPr wrap="square" lIns="0" rIns="0">
             <a:noAutofit/>
           </a:bodyPr>
           <a:lstStyle/>
@@ -9363,7 +10007,7 @@
       </p:sp>
       <p:sp>
         <p:nvSpPr>
-          <p:cNvPr id="12" name="TextBox 11"/>
+          <p:cNvPr id="15" name="TextBox 14"/>
           <p:cNvSpPr/>
           <p:nvPr>
             <p:ph type="body" idx="13"/>
@@ -9380,7 +10024,7 @@
           <a:noFill/>
         </p:spPr>
         <p:txBody>
-          <a:bodyPr wrap="square">
+          <a:bodyPr wrap="square" lIns="0" rIns="0">
             <a:noAutofit/>
           </a:bodyPr>
           <a:lstStyle/>
@@ -9400,7 +10044,7 @@
       </p:sp>
       <p:sp>
         <p:nvSpPr>
-          <p:cNvPr id="13" name="Rectangle 12"/>
+          <p:cNvPr id="16" name="Rectangle 15"/>
           <p:cNvSpPr/>
           <p:nvPr>
             <p:ph type="body" idx="14"/>
@@ -9432,7 +10076,7 @@
       </p:sp>
       <p:sp>
         <p:nvSpPr>
-          <p:cNvPr id="14" name="TextBox 13"/>
+          <p:cNvPr id="17" name="TextBox 16"/>
           <p:cNvSpPr/>
           <p:nvPr>
             <p:ph type="body" idx="15"/>
@@ -9449,7 +10093,7 @@
           <a:noFill/>
         </p:spPr>
         <p:txBody>
-          <a:bodyPr wrap="square">
+          <a:bodyPr wrap="square" lIns="0" rIns="0">
             <a:noAutofit/>
           </a:bodyPr>
           <a:lstStyle/>
@@ -9507,7 +10151,35 @@
       </p:grpSpPr>
       <p:sp>
         <p:nvSpPr>
-          <p:cNvPr id="2" name="TextBox 1"/>
+          <p:cNvPr id="4" name="Slide Number Placeholder 3"/>
+          <p:cNvSpPr>
+            <a:spLocks noGrp="1"/>
+          </p:cNvSpPr>
+          <p:nvPr>
+            <p:ph type="sldNum" sz="quarter" idx="12"/>
+          </p:nvPr>
+        </p:nvSpPr>
+        <p:spPr>
+          <a:xfrm>
+            <a:off x="10363200" y="6035040"/>
+            <a:ext cx="1371600" cy="365760"/>
+          </a:xfrm>
+        </p:spPr>
+        <p:txBody>
+          <a:bodyPr/>
+          <a:lstStyle/>
+          <a:p>
+            <a:fld id="{C1FF6DA9-008F-8B48-92A6-B652298478BF}" type="slidenum">
+              <a:rPr lang="en-US" smtClean="0"/>
+              <a:t>‹#›</a:t>
+            </a:fld>
+            <a:endParaRPr lang="en-US"/>
+          </a:p>
+        </p:txBody>
+      </p:sp>
+      <p:sp>
+        <p:nvSpPr>
+          <p:cNvPr id="5" name="TextBox 4"/>
           <p:cNvSpPr/>
           <p:nvPr>
             <p:ph type="title"/>
@@ -9524,7 +10196,7 @@
           <a:noFill/>
         </p:spPr>
         <p:txBody>
-          <a:bodyPr wrap="square">
+          <a:bodyPr wrap="square" lIns="0" rIns="0">
             <a:noAutofit/>
           </a:bodyPr>
           <a:lstStyle/>
@@ -9544,7 +10216,7 @@
       </p:sp>
       <p:sp>
         <p:nvSpPr>
-          <p:cNvPr id="3" name="TextBox 2"/>
+          <p:cNvPr id="6" name="TextBox 5"/>
           <p:cNvSpPr/>
           <p:nvPr>
             <p:ph type="body" idx="1"/>
@@ -9561,7 +10233,7 @@
           <a:noFill/>
         </p:spPr>
         <p:txBody>
-          <a:bodyPr wrap="square">
+          <a:bodyPr wrap="square" lIns="0" rIns="0">
             <a:noAutofit/>
           </a:bodyPr>
           <a:lstStyle/>
@@ -9581,7 +10253,7 @@
       </p:sp>
       <p:sp>
         <p:nvSpPr>
-          <p:cNvPr id="4" name="Rectangle 3"/>
+          <p:cNvPr id="7" name="Rectangle 6"/>
           <p:cNvSpPr/>
           <p:nvPr>
             <p:ph type="body" idx="2"/>
@@ -9613,7 +10285,7 @@
       </p:sp>
       <p:sp>
         <p:nvSpPr>
-          <p:cNvPr id="5" name="TextBox 4"/>
+          <p:cNvPr id="8" name="TextBox 7"/>
           <p:cNvSpPr/>
           <p:nvPr>
             <p:ph type="body" idx="3"/>
@@ -9630,7 +10302,7 @@
           <a:noFill/>
         </p:spPr>
         <p:txBody>
-          <a:bodyPr wrap="square">
+          <a:bodyPr wrap="square" lIns="0" rIns="0">
             <a:noAutofit/>
           </a:bodyPr>
           <a:lstStyle/>
@@ -9650,7 +10322,7 @@
       </p:sp>
       <p:sp>
         <p:nvSpPr>
-          <p:cNvPr id="6" name="TextBox 5"/>
+          <p:cNvPr id="9" name="TextBox 8"/>
           <p:cNvSpPr/>
           <p:nvPr>
             <p:ph type="body" idx="4"/>
@@ -9667,7 +10339,7 @@
           <a:noFill/>
         </p:spPr>
         <p:txBody>
-          <a:bodyPr wrap="square">
+          <a:bodyPr wrap="square" lIns="0" rIns="0">
             <a:noAutofit/>
           </a:bodyPr>
           <a:lstStyle/>
@@ -9687,7 +10359,7 @@
       </p:sp>
       <p:sp>
         <p:nvSpPr>
-          <p:cNvPr id="7" name="TextBox 6"/>
+          <p:cNvPr id="10" name="TextBox 9"/>
           <p:cNvSpPr/>
           <p:nvPr>
             <p:ph type="body" idx="5"/>
@@ -9704,7 +10376,7 @@
           <a:noFill/>
         </p:spPr>
         <p:txBody>
-          <a:bodyPr wrap="square">
+          <a:bodyPr wrap="square" lIns="0" rIns="0">
             <a:noAutofit/>
           </a:bodyPr>
           <a:lstStyle/>
@@ -9724,7 +10396,7 @@
       </p:sp>
       <p:sp>
         <p:nvSpPr>
-          <p:cNvPr id="8" name="Rectangle 7"/>
+          <p:cNvPr id="11" name="Rectangle 10"/>
           <p:cNvSpPr/>
           <p:nvPr>
             <p:ph type="body" idx="6"/>
@@ -9756,7 +10428,7 @@
       </p:sp>
       <p:sp>
         <p:nvSpPr>
-          <p:cNvPr id="9" name="TextBox 8"/>
+          <p:cNvPr id="12" name="TextBox 11"/>
           <p:cNvSpPr/>
           <p:nvPr>
             <p:ph type="body" idx="7"/>
@@ -9773,7 +10445,7 @@
           <a:noFill/>
         </p:spPr>
         <p:txBody>
-          <a:bodyPr wrap="square">
+          <a:bodyPr wrap="square" lIns="0" rIns="0">
             <a:noAutofit/>
           </a:bodyPr>
           <a:lstStyle/>
@@ -9793,7 +10465,7 @@
       </p:sp>
       <p:sp>
         <p:nvSpPr>
-          <p:cNvPr id="10" name="TextBox 9"/>
+          <p:cNvPr id="13" name="TextBox 12"/>
           <p:cNvSpPr/>
           <p:nvPr>
             <p:ph type="body" idx="8"/>
@@ -9810,7 +10482,7 @@
           <a:noFill/>
         </p:spPr>
         <p:txBody>
-          <a:bodyPr wrap="square">
+          <a:bodyPr wrap="square" lIns="0" rIns="0">
             <a:noAutofit/>
           </a:bodyPr>
           <a:lstStyle/>
@@ -9830,7 +10502,7 @@
       </p:sp>
       <p:sp>
         <p:nvSpPr>
-          <p:cNvPr id="11" name="TextBox 10"/>
+          <p:cNvPr id="14" name="TextBox 13"/>
           <p:cNvSpPr/>
           <p:nvPr>
             <p:ph type="body" idx="9"/>
@@ -9847,7 +10519,7 @@
           <a:noFill/>
         </p:spPr>
         <p:txBody>
-          <a:bodyPr wrap="square">
+          <a:bodyPr wrap="square" lIns="0" rIns="0">
             <a:noAutofit/>
           </a:bodyPr>
           <a:lstStyle/>
@@ -9867,7 +10539,7 @@
       </p:sp>
       <p:sp>
         <p:nvSpPr>
-          <p:cNvPr id="12" name="Rectangle 11"/>
+          <p:cNvPr id="15" name="Rectangle 14"/>
           <p:cNvSpPr/>
           <p:nvPr>
             <p:ph type="body" idx="13"/>
@@ -9899,7 +10571,7 @@
       </p:sp>
       <p:sp>
         <p:nvSpPr>
-          <p:cNvPr id="13" name="TextBox 12"/>
+          <p:cNvPr id="16" name="TextBox 15"/>
           <p:cNvSpPr/>
           <p:nvPr>
             <p:ph type="body" idx="14"/>
@@ -9916,7 +10588,7 @@
           <a:noFill/>
         </p:spPr>
         <p:txBody>
-          <a:bodyPr wrap="square">
+          <a:bodyPr wrap="square" lIns="0" rIns="0">
             <a:noAutofit/>
           </a:bodyPr>
           <a:lstStyle/>
@@ -9936,7 +10608,7 @@
       </p:sp>
       <p:sp>
         <p:nvSpPr>
-          <p:cNvPr id="14" name="TextBox 13"/>
+          <p:cNvPr id="17" name="TextBox 16"/>
           <p:cNvSpPr/>
           <p:nvPr>
             <p:ph type="body" idx="15"/>
@@ -9953,7 +10625,7 @@
           <a:noFill/>
         </p:spPr>
         <p:txBody>
-          <a:bodyPr wrap="square">
+          <a:bodyPr wrap="square" lIns="0" rIns="0">
             <a:noAutofit/>
           </a:bodyPr>
           <a:lstStyle/>
@@ -9973,7 +10645,7 @@
       </p:sp>
       <p:sp>
         <p:nvSpPr>
-          <p:cNvPr id="15" name="TextBox 14"/>
+          <p:cNvPr id="18" name="TextBox 17"/>
           <p:cNvSpPr/>
           <p:nvPr>
             <p:ph type="body" idx="16"/>
@@ -9990,7 +10662,7 @@
           <a:noFill/>
         </p:spPr>
         <p:txBody>
-          <a:bodyPr wrap="square">
+          <a:bodyPr wrap="square" lIns="0" rIns="0">
             <a:noAutofit/>
           </a:bodyPr>
           <a:lstStyle/>
@@ -10010,7 +10682,7 @@
       </p:sp>
       <p:sp>
         <p:nvSpPr>
-          <p:cNvPr id="16" name="Rectangle 15"/>
+          <p:cNvPr id="19" name="Rectangle 18"/>
           <p:cNvSpPr/>
           <p:nvPr>
             <p:ph type="body" idx="17"/>
@@ -10042,7 +10714,7 @@
       </p:sp>
       <p:sp>
         <p:nvSpPr>
-          <p:cNvPr id="17" name="TextBox 16"/>
+          <p:cNvPr id="20" name="TextBox 19"/>
           <p:cNvSpPr/>
           <p:nvPr>
             <p:ph type="body" idx="18"/>
@@ -10059,7 +10731,7 @@
           <a:noFill/>
         </p:spPr>
         <p:txBody>
-          <a:bodyPr wrap="square">
+          <a:bodyPr wrap="square" lIns="0" rIns="0">
             <a:noAutofit/>
           </a:bodyPr>
           <a:lstStyle/>
@@ -10079,7 +10751,7 @@
       </p:sp>
       <p:sp>
         <p:nvSpPr>
-          <p:cNvPr id="18" name="TextBox 17"/>
+          <p:cNvPr id="21" name="TextBox 20"/>
           <p:cNvSpPr/>
           <p:nvPr>
             <p:ph type="body" idx="19"/>
@@ -10096,7 +10768,7 @@
           <a:noFill/>
         </p:spPr>
         <p:txBody>
-          <a:bodyPr wrap="square">
+          <a:bodyPr wrap="square" lIns="0" rIns="0">
             <a:noAutofit/>
           </a:bodyPr>
           <a:lstStyle/>
@@ -10154,7 +10826,35 @@
       </p:grpSpPr>
       <p:sp>
         <p:nvSpPr>
-          <p:cNvPr id="2" name="TextBox 1"/>
+          <p:cNvPr id="4" name="Slide Number Placeholder 3"/>
+          <p:cNvSpPr>
+            <a:spLocks noGrp="1"/>
+          </p:cNvSpPr>
+          <p:nvPr>
+            <p:ph type="sldNum" sz="quarter" idx="12"/>
+          </p:nvPr>
+        </p:nvSpPr>
+        <p:spPr>
+          <a:xfrm>
+            <a:off x="10363200" y="6035040"/>
+            <a:ext cx="1371600" cy="365760"/>
+          </a:xfrm>
+        </p:spPr>
+        <p:txBody>
+          <a:bodyPr/>
+          <a:lstStyle/>
+          <a:p>
+            <a:fld id="{C1FF6DA9-008F-8B48-92A6-B652298478BF}" type="slidenum">
+              <a:rPr lang="en-US" smtClean="0"/>
+              <a:t>‹#›</a:t>
+            </a:fld>
+            <a:endParaRPr lang="en-US"/>
+          </a:p>
+        </p:txBody>
+      </p:sp>
+      <p:sp>
+        <p:nvSpPr>
+          <p:cNvPr id="5" name="TextBox 4"/>
           <p:cNvSpPr/>
           <p:nvPr>
             <p:ph type="title"/>
@@ -10171,7 +10871,7 @@
           <a:noFill/>
         </p:spPr>
         <p:txBody>
-          <a:bodyPr wrap="square">
+          <a:bodyPr wrap="square" lIns="0" rIns="0">
             <a:noAutofit/>
           </a:bodyPr>
           <a:lstStyle/>
@@ -10191,7 +10891,7 @@
       </p:sp>
       <p:sp>
         <p:nvSpPr>
-          <p:cNvPr id="3" name="Rectangle 2"/>
+          <p:cNvPr id="6" name="Rectangle 5"/>
           <p:cNvSpPr/>
           <p:nvPr>
             <p:ph type="body" idx="1"/>
@@ -10223,7 +10923,7 @@
       </p:sp>
       <p:sp>
         <p:nvSpPr>
-          <p:cNvPr id="4" name="TextBox 3"/>
+          <p:cNvPr id="7" name="TextBox 6"/>
           <p:cNvSpPr/>
           <p:nvPr>
             <p:ph type="body" idx="2"/>
@@ -10240,7 +10940,7 @@
           <a:noFill/>
         </p:spPr>
         <p:txBody>
-          <a:bodyPr wrap="square">
+          <a:bodyPr wrap="square" lIns="0" rIns="0">
             <a:noAutofit/>
           </a:bodyPr>
           <a:lstStyle/>
@@ -10260,7 +10960,7 @@
       </p:sp>
       <p:sp>
         <p:nvSpPr>
-          <p:cNvPr id="5" name="TextBox 4"/>
+          <p:cNvPr id="8" name="TextBox 7"/>
           <p:cNvSpPr/>
           <p:nvPr>
             <p:ph type="body" idx="3"/>
@@ -10277,7 +10977,7 @@
           <a:noFill/>
         </p:spPr>
         <p:txBody>
-          <a:bodyPr wrap="square">
+          <a:bodyPr wrap="square" lIns="0" rIns="0">
             <a:noAutofit/>
           </a:bodyPr>
           <a:lstStyle/>
@@ -10297,7 +10997,7 @@
       </p:sp>
       <p:sp>
         <p:nvSpPr>
-          <p:cNvPr id="6" name="TextBox 5"/>
+          <p:cNvPr id="9" name="TextBox 8"/>
           <p:cNvSpPr/>
           <p:nvPr>
             <p:ph type="body" idx="4"/>
@@ -10314,7 +11014,7 @@
           <a:noFill/>
         </p:spPr>
         <p:txBody>
-          <a:bodyPr wrap="square">
+          <a:bodyPr wrap="square" lIns="0" rIns="0">
             <a:noAutofit/>
           </a:bodyPr>
           <a:lstStyle/>
@@ -10334,7 +11034,7 @@
       </p:sp>
       <p:sp>
         <p:nvSpPr>
-          <p:cNvPr id="7" name="Rectangle 6"/>
+          <p:cNvPr id="10" name="Rectangle 9"/>
           <p:cNvSpPr/>
           <p:nvPr>
             <p:ph type="body" idx="5"/>
@@ -10366,7 +11066,7 @@
       </p:sp>
       <p:sp>
         <p:nvSpPr>
-          <p:cNvPr id="8" name="TextBox 7"/>
+          <p:cNvPr id="11" name="TextBox 10"/>
           <p:cNvSpPr/>
           <p:nvPr>
             <p:ph type="body" idx="6"/>
@@ -10383,7 +11083,7 @@
           <a:noFill/>
         </p:spPr>
         <p:txBody>
-          <a:bodyPr wrap="square">
+          <a:bodyPr wrap="square" lIns="0" rIns="0">
             <a:noAutofit/>
           </a:bodyPr>
           <a:lstStyle/>
@@ -10403,7 +11103,7 @@
       </p:sp>
       <p:sp>
         <p:nvSpPr>
-          <p:cNvPr id="9" name="TextBox 8"/>
+          <p:cNvPr id="12" name="TextBox 11"/>
           <p:cNvSpPr/>
           <p:nvPr>
             <p:ph type="body" idx="7"/>
@@ -10420,7 +11120,7 @@
           <a:noFill/>
         </p:spPr>
         <p:txBody>
-          <a:bodyPr wrap="square">
+          <a:bodyPr wrap="square" lIns="0" rIns="0">
             <a:noAutofit/>
           </a:bodyPr>
           <a:lstStyle/>
@@ -10440,7 +11140,7 @@
       </p:sp>
       <p:sp>
         <p:nvSpPr>
-          <p:cNvPr id="10" name="TextBox 9"/>
+          <p:cNvPr id="13" name="TextBox 12"/>
           <p:cNvSpPr/>
           <p:nvPr>
             <p:ph type="body" idx="8"/>
@@ -10457,7 +11157,7 @@
           <a:noFill/>
         </p:spPr>
         <p:txBody>
-          <a:bodyPr wrap="square">
+          <a:bodyPr wrap="square" lIns="0" rIns="0">
             <a:noAutofit/>
           </a:bodyPr>
           <a:lstStyle/>
@@ -10477,7 +11177,7 @@
       </p:sp>
       <p:sp>
         <p:nvSpPr>
-          <p:cNvPr id="11" name="Rectangle 10"/>
+          <p:cNvPr id="14" name="Rectangle 13"/>
           <p:cNvSpPr/>
           <p:nvPr>
             <p:ph type="body" idx="9"/>
@@ -10509,7 +11209,7 @@
       </p:sp>
       <p:sp>
         <p:nvSpPr>
-          <p:cNvPr id="12" name="TextBox 11"/>
+          <p:cNvPr id="15" name="TextBox 14"/>
           <p:cNvSpPr/>
           <p:nvPr>
             <p:ph type="body" idx="13"/>
@@ -10526,7 +11226,7 @@
           <a:noFill/>
         </p:spPr>
         <p:txBody>
-          <a:bodyPr wrap="square">
+          <a:bodyPr wrap="square" lIns="0" rIns="0">
             <a:noAutofit/>
           </a:bodyPr>
           <a:lstStyle/>
@@ -10546,7 +11246,7 @@
       </p:sp>
       <p:sp>
         <p:nvSpPr>
-          <p:cNvPr id="13" name="TextBox 12"/>
+          <p:cNvPr id="16" name="TextBox 15"/>
           <p:cNvSpPr/>
           <p:nvPr>
             <p:ph type="body" idx="14"/>
@@ -10563,7 +11263,7 @@
           <a:noFill/>
         </p:spPr>
         <p:txBody>
-          <a:bodyPr wrap="square">
+          <a:bodyPr wrap="square" lIns="0" rIns="0">
             <a:noAutofit/>
           </a:bodyPr>
           <a:lstStyle/>
@@ -10583,7 +11283,7 @@
       </p:sp>
       <p:sp>
         <p:nvSpPr>
-          <p:cNvPr id="14" name="TextBox 13"/>
+          <p:cNvPr id="17" name="TextBox 16"/>
           <p:cNvSpPr/>
           <p:nvPr>
             <p:ph type="body" idx="15"/>
@@ -10600,7 +11300,7 @@
           <a:noFill/>
         </p:spPr>
         <p:txBody>
-          <a:bodyPr wrap="square">
+          <a:bodyPr wrap="square" lIns="0" rIns="0">
             <a:noAutofit/>
           </a:bodyPr>
           <a:lstStyle/>
@@ -10658,7 +11358,35 @@
       </p:grpSpPr>
       <p:sp>
         <p:nvSpPr>
-          <p:cNvPr id="2" name="TextBox 1"/>
+          <p:cNvPr id="4" name="Slide Number Placeholder 3"/>
+          <p:cNvSpPr>
+            <a:spLocks noGrp="1"/>
+          </p:cNvSpPr>
+          <p:nvPr>
+            <p:ph type="sldNum" sz="quarter" idx="12"/>
+          </p:nvPr>
+        </p:nvSpPr>
+        <p:spPr>
+          <a:xfrm>
+            <a:off x="10363200" y="6035040"/>
+            <a:ext cx="1371600" cy="365760"/>
+          </a:xfrm>
+        </p:spPr>
+        <p:txBody>
+          <a:bodyPr/>
+          <a:lstStyle/>
+          <a:p>
+            <a:fld id="{C1FF6DA9-008F-8B48-92A6-B652298478BF}" type="slidenum">
+              <a:rPr lang="en-US" smtClean="0"/>
+              <a:t>‹#›</a:t>
+            </a:fld>
+            <a:endParaRPr lang="en-US"/>
+          </a:p>
+        </p:txBody>
+      </p:sp>
+      <p:sp>
+        <p:nvSpPr>
+          <p:cNvPr id="5" name="TextBox 4"/>
           <p:cNvSpPr/>
           <p:nvPr>
             <p:ph type="title"/>
@@ -10675,7 +11403,7 @@
           <a:noFill/>
         </p:spPr>
         <p:txBody>
-          <a:bodyPr wrap="square">
+          <a:bodyPr wrap="square" lIns="0" rIns="0">
             <a:noAutofit/>
           </a:bodyPr>
           <a:lstStyle/>
@@ -10695,7 +11423,7 @@
       </p:sp>
       <p:sp>
         <p:nvSpPr>
-          <p:cNvPr id="3" name="Rectangle 2"/>
+          <p:cNvPr id="6" name="Rectangle 5"/>
           <p:cNvSpPr/>
           <p:nvPr>
             <p:ph type="body" idx="1"/>
@@ -10727,7 +11455,7 @@
       </p:sp>
       <p:sp>
         <p:nvSpPr>
-          <p:cNvPr id="4" name="TextBox 3"/>
+          <p:cNvPr id="7" name="TextBox 6"/>
           <p:cNvSpPr/>
           <p:nvPr>
             <p:ph type="body" idx="2"/>
@@ -10744,7 +11472,7 @@
           <a:noFill/>
         </p:spPr>
         <p:txBody>
-          <a:bodyPr wrap="square">
+          <a:bodyPr wrap="square" lIns="0" rIns="0">
             <a:noAutofit/>
           </a:bodyPr>
           <a:lstStyle/>
@@ -10764,7 +11492,7 @@
       </p:sp>
       <p:sp>
         <p:nvSpPr>
-          <p:cNvPr id="5" name="Rectangle 4"/>
+          <p:cNvPr id="8" name="Rectangle 7"/>
           <p:cNvSpPr/>
           <p:nvPr>
             <p:ph type="body" idx="3"/>
@@ -10796,7 +11524,7 @@
       </p:sp>
       <p:sp>
         <p:nvSpPr>
-          <p:cNvPr id="6" name="TextBox 5"/>
+          <p:cNvPr id="9" name="TextBox 8"/>
           <p:cNvSpPr/>
           <p:nvPr>
             <p:ph type="body" idx="4"/>
@@ -10813,7 +11541,7 @@
           <a:noFill/>
         </p:spPr>
         <p:txBody>
-          <a:bodyPr wrap="square">
+          <a:bodyPr wrap="square" lIns="0" rIns="0">
             <a:noAutofit/>
           </a:bodyPr>
           <a:lstStyle/>
@@ -10833,7 +11561,7 @@
       </p:sp>
       <p:sp>
         <p:nvSpPr>
-          <p:cNvPr id="7" name="Rectangle 6"/>
+          <p:cNvPr id="10" name="Rectangle 9"/>
           <p:cNvSpPr/>
           <p:nvPr>
             <p:ph type="body" idx="5"/>
@@ -10865,7 +11593,7 @@
       </p:sp>
       <p:sp>
         <p:nvSpPr>
-          <p:cNvPr id="8" name="TextBox 7"/>
+          <p:cNvPr id="11" name="TextBox 10"/>
           <p:cNvSpPr/>
           <p:nvPr>
             <p:ph type="body" idx="6"/>
@@ -10882,7 +11610,7 @@
           <a:noFill/>
         </p:spPr>
         <p:txBody>
-          <a:bodyPr wrap="square">
+          <a:bodyPr wrap="square" lIns="0" rIns="0">
             <a:noAutofit/>
           </a:bodyPr>
           <a:lstStyle/>
@@ -10902,7 +11630,7 @@
       </p:sp>
       <p:sp>
         <p:nvSpPr>
-          <p:cNvPr id="9" name="Rectangle 8"/>
+          <p:cNvPr id="12" name="Rectangle 11"/>
           <p:cNvSpPr/>
           <p:nvPr>
             <p:ph type="body" idx="7"/>
@@ -10934,7 +11662,7 @@
       </p:sp>
       <p:sp>
         <p:nvSpPr>
-          <p:cNvPr id="10" name="TextBox 9"/>
+          <p:cNvPr id="13" name="TextBox 12"/>
           <p:cNvSpPr/>
           <p:nvPr>
             <p:ph type="body" idx="8"/>
@@ -10951,7 +11679,7 @@
           <a:noFill/>
         </p:spPr>
         <p:txBody>
-          <a:bodyPr wrap="square">
+          <a:bodyPr wrap="square" lIns="0" rIns="0">
             <a:noAutofit/>
           </a:bodyPr>
           <a:lstStyle/>
@@ -11009,7 +11737,35 @@
       </p:grpSpPr>
       <p:sp>
         <p:nvSpPr>
-          <p:cNvPr id="2" name="TextBox 1"/>
+          <p:cNvPr id="4" name="Slide Number Placeholder 3"/>
+          <p:cNvSpPr>
+            <a:spLocks noGrp="1"/>
+          </p:cNvSpPr>
+          <p:nvPr>
+            <p:ph type="sldNum" sz="quarter" idx="12"/>
+          </p:nvPr>
+        </p:nvSpPr>
+        <p:spPr>
+          <a:xfrm>
+            <a:off x="10363200" y="6035040"/>
+            <a:ext cx="1371600" cy="365760"/>
+          </a:xfrm>
+        </p:spPr>
+        <p:txBody>
+          <a:bodyPr/>
+          <a:lstStyle/>
+          <a:p>
+            <a:fld id="{C1FF6DA9-008F-8B48-92A6-B652298478BF}" type="slidenum">
+              <a:rPr lang="en-US" smtClean="0"/>
+              <a:t>‹#›</a:t>
+            </a:fld>
+            <a:endParaRPr lang="en-US"/>
+          </a:p>
+        </p:txBody>
+      </p:sp>
+      <p:sp>
+        <p:nvSpPr>
+          <p:cNvPr id="5" name="TextBox 4"/>
           <p:cNvSpPr/>
           <p:nvPr>
             <p:ph type="title"/>
@@ -11026,7 +11782,7 @@
           <a:noFill/>
         </p:spPr>
         <p:txBody>
-          <a:bodyPr wrap="square">
+          <a:bodyPr wrap="square" lIns="0" rIns="0">
             <a:noAutofit/>
           </a:bodyPr>
           <a:lstStyle/>
@@ -11046,7 +11802,7 @@
       </p:sp>
       <p:sp>
         <p:nvSpPr>
-          <p:cNvPr id="3" name="Oval 2"/>
+          <p:cNvPr id="6" name="Oval 5"/>
           <p:cNvSpPr/>
           <p:nvPr>
             <p:ph type="body" idx="1"/>
@@ -11078,7 +11834,7 @@
       </p:sp>
       <p:sp>
         <p:nvSpPr>
-          <p:cNvPr id="4" name="Oval 3"/>
+          <p:cNvPr id="7" name="Oval 6"/>
           <p:cNvSpPr/>
           <p:nvPr>
             <p:ph type="body" idx="2"/>
@@ -11110,7 +11866,7 @@
       </p:sp>
       <p:sp>
         <p:nvSpPr>
-          <p:cNvPr id="5" name="Oval 4"/>
+          <p:cNvPr id="8" name="Oval 7"/>
           <p:cNvSpPr/>
           <p:nvPr>
             <p:ph type="body" idx="3"/>
@@ -11142,7 +11898,7 @@
       </p:sp>
       <p:sp>
         <p:nvSpPr>
-          <p:cNvPr id="6" name="TextBox 5"/>
+          <p:cNvPr id="9" name="TextBox 8"/>
           <p:cNvSpPr/>
           <p:nvPr>
             <p:ph type="body" idx="4"/>
@@ -11159,7 +11915,7 @@
           <a:noFill/>
         </p:spPr>
         <p:txBody>
-          <a:bodyPr wrap="square">
+          <a:bodyPr wrap="square" lIns="0" rIns="0">
             <a:noAutofit/>
           </a:bodyPr>
           <a:lstStyle/>
@@ -11179,7 +11935,7 @@
       </p:sp>
       <p:sp>
         <p:nvSpPr>
-          <p:cNvPr id="7" name="TextBox 6"/>
+          <p:cNvPr id="10" name="TextBox 9"/>
           <p:cNvSpPr/>
           <p:nvPr>
             <p:ph type="body" idx="5"/>
@@ -11196,7 +11952,7 @@
           <a:noFill/>
         </p:spPr>
         <p:txBody>
-          <a:bodyPr wrap="square">
+          <a:bodyPr wrap="square" lIns="0" rIns="0">
             <a:noAutofit/>
           </a:bodyPr>
           <a:lstStyle/>
@@ -11216,7 +11972,7 @@
       </p:sp>
       <p:sp>
         <p:nvSpPr>
-          <p:cNvPr id="8" name="TextBox 7"/>
+          <p:cNvPr id="11" name="TextBox 10"/>
           <p:cNvSpPr/>
           <p:nvPr>
             <p:ph type="body" idx="6"/>
@@ -11233,7 +11989,7 @@
           <a:noFill/>
         </p:spPr>
         <p:txBody>
-          <a:bodyPr wrap="square">
+          <a:bodyPr wrap="square" lIns="0" rIns="0">
             <a:noAutofit/>
           </a:bodyPr>
           <a:lstStyle/>
@@ -11253,7 +12009,7 @@
       </p:sp>
       <p:sp>
         <p:nvSpPr>
-          <p:cNvPr id="9" name="TextBox 8"/>
+          <p:cNvPr id="12" name="TextBox 11"/>
           <p:cNvSpPr/>
           <p:nvPr>
             <p:ph type="body" idx="7"/>
@@ -11270,7 +12026,7 @@
           <a:noFill/>
         </p:spPr>
         <p:txBody>
-          <a:bodyPr wrap="square">
+          <a:bodyPr wrap="square" lIns="0" rIns="0">
             <a:noAutofit/>
           </a:bodyPr>
           <a:lstStyle/>
@@ -11290,7 +12046,7 @@
       </p:sp>
       <p:sp>
         <p:nvSpPr>
-          <p:cNvPr id="10" name="TextBox 9"/>
+          <p:cNvPr id="13" name="TextBox 12"/>
           <p:cNvSpPr/>
           <p:nvPr>
             <p:ph type="body" idx="8"/>
@@ -11307,7 +12063,7 @@
           <a:noFill/>
         </p:spPr>
         <p:txBody>
-          <a:bodyPr wrap="square">
+          <a:bodyPr wrap="square" lIns="0" rIns="0">
             <a:noAutofit/>
           </a:bodyPr>
           <a:lstStyle/>
@@ -11327,7 +12083,7 @@
       </p:sp>
       <p:sp>
         <p:nvSpPr>
-          <p:cNvPr id="11" name="TextBox 10"/>
+          <p:cNvPr id="14" name="TextBox 13"/>
           <p:cNvSpPr/>
           <p:nvPr>
             <p:ph type="body" idx="9"/>
@@ -11344,7 +12100,7 @@
           <a:noFill/>
         </p:spPr>
         <p:txBody>
-          <a:bodyPr wrap="square">
+          <a:bodyPr wrap="square" lIns="0" rIns="0">
             <a:noAutofit/>
           </a:bodyPr>
           <a:lstStyle/>
@@ -11402,7 +12158,35 @@
       </p:grpSpPr>
       <p:sp>
         <p:nvSpPr>
-          <p:cNvPr id="2" name="TextBox 1"/>
+          <p:cNvPr id="4" name="Slide Number Placeholder 3"/>
+          <p:cNvSpPr>
+            <a:spLocks noGrp="1"/>
+          </p:cNvSpPr>
+          <p:nvPr>
+            <p:ph type="sldNum" sz="quarter" idx="12"/>
+          </p:nvPr>
+        </p:nvSpPr>
+        <p:spPr>
+          <a:xfrm>
+            <a:off x="10363200" y="6035040"/>
+            <a:ext cx="1371600" cy="365760"/>
+          </a:xfrm>
+        </p:spPr>
+        <p:txBody>
+          <a:bodyPr/>
+          <a:lstStyle/>
+          <a:p>
+            <a:fld id="{C1FF6DA9-008F-8B48-92A6-B652298478BF}" type="slidenum">
+              <a:rPr lang="en-US" smtClean="0"/>
+              <a:t>‹#›</a:t>
+            </a:fld>
+            <a:endParaRPr lang="en-US"/>
+          </a:p>
+        </p:txBody>
+      </p:sp>
+      <p:sp>
+        <p:nvSpPr>
+          <p:cNvPr id="5" name="TextBox 4"/>
           <p:cNvSpPr/>
           <p:nvPr>
             <p:ph type="title"/>
@@ -11419,7 +12203,7 @@
           <a:noFill/>
         </p:spPr>
         <p:txBody>
-          <a:bodyPr wrap="square">
+          <a:bodyPr wrap="square" lIns="0" rIns="0">
             <a:noAutofit/>
           </a:bodyPr>
           <a:lstStyle/>
@@ -11439,7 +12223,7 @@
       </p:sp>
       <p:sp>
         <p:nvSpPr>
-          <p:cNvPr id="3" name="Rectangle 2"/>
+          <p:cNvPr id="6" name="Rectangle 5"/>
           <p:cNvSpPr/>
           <p:nvPr>
             <p:ph type="body" idx="1"/>
@@ -11471,7 +12255,7 @@
       </p:sp>
       <p:sp>
         <p:nvSpPr>
-          <p:cNvPr id="4" name="TextBox 3"/>
+          <p:cNvPr id="7" name="TextBox 6"/>
           <p:cNvSpPr/>
           <p:nvPr>
             <p:ph type="body" idx="2"/>
@@ -11488,7 +12272,7 @@
           <a:noFill/>
         </p:spPr>
         <p:txBody>
-          <a:bodyPr wrap="square">
+          <a:bodyPr wrap="square" lIns="0" rIns="0">
             <a:noAutofit/>
           </a:bodyPr>
           <a:lstStyle/>
@@ -11508,7 +12292,7 @@
       </p:sp>
       <p:sp>
         <p:nvSpPr>
-          <p:cNvPr id="5" name="Rectangle 4"/>
+          <p:cNvPr id="8" name="Rectangle 7"/>
           <p:cNvSpPr/>
           <p:nvPr>
             <p:ph type="body" idx="3"/>
@@ -11540,7 +12324,7 @@
       </p:sp>
       <p:sp>
         <p:nvSpPr>
-          <p:cNvPr id="6" name="TextBox 5"/>
+          <p:cNvPr id="9" name="TextBox 8"/>
           <p:cNvSpPr/>
           <p:nvPr>
             <p:ph type="body" idx="4"/>
@@ -11557,7 +12341,7 @@
           <a:noFill/>
         </p:spPr>
         <p:txBody>
-          <a:bodyPr wrap="square">
+          <a:bodyPr wrap="square" lIns="0" rIns="0">
             <a:noAutofit/>
           </a:bodyPr>
           <a:lstStyle/>
@@ -11577,7 +12361,7 @@
       </p:sp>
       <p:sp>
         <p:nvSpPr>
-          <p:cNvPr id="7" name="Rectangle 6"/>
+          <p:cNvPr id="10" name="Rectangle 9"/>
           <p:cNvSpPr/>
           <p:nvPr>
             <p:ph type="body" idx="5"/>
@@ -11609,7 +12393,7 @@
       </p:sp>
       <p:sp>
         <p:nvSpPr>
-          <p:cNvPr id="8" name="TextBox 7"/>
+          <p:cNvPr id="11" name="TextBox 10"/>
           <p:cNvSpPr/>
           <p:nvPr>
             <p:ph type="body" idx="6"/>
@@ -11626,7 +12410,7 @@
           <a:noFill/>
         </p:spPr>
         <p:txBody>
-          <a:bodyPr wrap="square">
+          <a:bodyPr wrap="square" lIns="0" rIns="0">
             <a:noAutofit/>
           </a:bodyPr>
           <a:lstStyle/>
@@ -11646,7 +12430,7 @@
       </p:sp>
       <p:sp>
         <p:nvSpPr>
-          <p:cNvPr id="9" name="Rectangle 8"/>
+          <p:cNvPr id="12" name="Rectangle 11"/>
           <p:cNvSpPr/>
           <p:nvPr>
             <p:ph type="body" idx="7"/>
@@ -11678,7 +12462,7 @@
       </p:sp>
       <p:sp>
         <p:nvSpPr>
-          <p:cNvPr id="10" name="TextBox 9"/>
+          <p:cNvPr id="13" name="TextBox 12"/>
           <p:cNvSpPr/>
           <p:nvPr>
             <p:ph type="body" idx="8"/>
@@ -11695,7 +12479,7 @@
           <a:noFill/>
         </p:spPr>
         <p:txBody>
-          <a:bodyPr wrap="square">
+          <a:bodyPr wrap="square" lIns="0" rIns="0">
             <a:noAutofit/>
           </a:bodyPr>
           <a:lstStyle/>
@@ -12041,7 +12825,35 @@
       </p:grpSpPr>
       <p:sp>
         <p:nvSpPr>
-          <p:cNvPr id="2" name="TextBox 1"/>
+          <p:cNvPr id="4" name="Slide Number Placeholder 3"/>
+          <p:cNvSpPr>
+            <a:spLocks noGrp="1"/>
+          </p:cNvSpPr>
+          <p:nvPr>
+            <p:ph type="sldNum" sz="quarter" idx="12"/>
+          </p:nvPr>
+        </p:nvSpPr>
+        <p:spPr>
+          <a:xfrm>
+            <a:off x="10363200" y="6035040"/>
+            <a:ext cx="1371600" cy="365760"/>
+          </a:xfrm>
+        </p:spPr>
+        <p:txBody>
+          <a:bodyPr/>
+          <a:lstStyle/>
+          <a:p>
+            <a:fld id="{C1FF6DA9-008F-8B48-92A6-B652298478BF}" type="slidenum">
+              <a:rPr lang="en-US" smtClean="0"/>
+              <a:t>‹#›</a:t>
+            </a:fld>
+            <a:endParaRPr lang="en-US"/>
+          </a:p>
+        </p:txBody>
+      </p:sp>
+      <p:sp>
+        <p:nvSpPr>
+          <p:cNvPr id="5" name="TextBox 4"/>
           <p:cNvSpPr/>
           <p:nvPr>
             <p:ph type="title"/>
@@ -12058,7 +12870,7 @@
           <a:noFill/>
         </p:spPr>
         <p:txBody>
-          <a:bodyPr wrap="square">
+          <a:bodyPr wrap="square" lIns="0" rIns="0">
             <a:noAutofit/>
           </a:bodyPr>
           <a:lstStyle/>
@@ -12078,7 +12890,7 @@
       </p:sp>
       <p:sp>
         <p:nvSpPr>
-          <p:cNvPr id="3" name="TextBox 2"/>
+          <p:cNvPr id="6" name="TextBox 5"/>
           <p:cNvSpPr/>
           <p:nvPr>
             <p:ph type="body" idx="1"/>
@@ -12095,7 +12907,7 @@
           <a:noFill/>
         </p:spPr>
         <p:txBody>
-          <a:bodyPr wrap="square">
+          <a:bodyPr wrap="square" lIns="0" rIns="0">
             <a:noAutofit/>
           </a:bodyPr>
           <a:lstStyle/>
@@ -12115,7 +12927,7 @@
       </p:sp>
       <p:sp>
         <p:nvSpPr>
-          <p:cNvPr id="4" name="Rectangle 3"/>
+          <p:cNvPr id="7" name="Rectangle 6"/>
           <p:cNvSpPr/>
           <p:nvPr>
             <p:ph type="body" idx="2"/>
@@ -12147,7 +12959,7 @@
       </p:sp>
       <p:sp>
         <p:nvSpPr>
-          <p:cNvPr id="5" name="TextBox 4"/>
+          <p:cNvPr id="8" name="TextBox 7"/>
           <p:cNvSpPr/>
           <p:nvPr>
             <p:ph type="body" idx="3"/>
@@ -12164,7 +12976,7 @@
           <a:noFill/>
         </p:spPr>
         <p:txBody>
-          <a:bodyPr wrap="square">
+          <a:bodyPr wrap="square" lIns="0" rIns="0">
             <a:noAutofit/>
           </a:bodyPr>
           <a:lstStyle/>
@@ -12184,7 +12996,7 @@
       </p:sp>
       <p:sp>
         <p:nvSpPr>
-          <p:cNvPr id="6" name="TextBox 5"/>
+          <p:cNvPr id="9" name="TextBox 8"/>
           <p:cNvSpPr/>
           <p:nvPr>
             <p:ph type="body" idx="4"/>
@@ -12201,7 +13013,7 @@
           <a:noFill/>
         </p:spPr>
         <p:txBody>
-          <a:bodyPr wrap="square">
+          <a:bodyPr wrap="square" lIns="0" rIns="0">
             <a:noAutofit/>
           </a:bodyPr>
           <a:lstStyle/>
@@ -12221,7 +13033,7 @@
       </p:sp>
       <p:sp>
         <p:nvSpPr>
-          <p:cNvPr id="7" name="Rectangle 6"/>
+          <p:cNvPr id="10" name="Rectangle 9"/>
           <p:cNvSpPr/>
           <p:nvPr>
             <p:ph type="body" idx="5"/>
@@ -12253,7 +13065,7 @@
       </p:sp>
       <p:sp>
         <p:nvSpPr>
-          <p:cNvPr id="8" name="TextBox 7"/>
+          <p:cNvPr id="11" name="TextBox 10"/>
           <p:cNvSpPr/>
           <p:nvPr>
             <p:ph type="body" idx="6"/>
@@ -12270,7 +13082,7 @@
           <a:noFill/>
         </p:spPr>
         <p:txBody>
-          <a:bodyPr wrap="square">
+          <a:bodyPr wrap="square" lIns="0" rIns="0">
             <a:noAutofit/>
           </a:bodyPr>
           <a:lstStyle/>
@@ -12290,7 +13102,7 @@
       </p:sp>
       <p:sp>
         <p:nvSpPr>
-          <p:cNvPr id="9" name="TextBox 8"/>
+          <p:cNvPr id="12" name="TextBox 11"/>
           <p:cNvSpPr/>
           <p:nvPr>
             <p:ph type="body" idx="7"/>
@@ -12307,7 +13119,7 @@
           <a:noFill/>
         </p:spPr>
         <p:txBody>
-          <a:bodyPr wrap="square">
+          <a:bodyPr wrap="square" lIns="0" rIns="0">
             <a:noAutofit/>
           </a:bodyPr>
           <a:lstStyle/>
@@ -12327,7 +13139,7 @@
       </p:sp>
       <p:sp>
         <p:nvSpPr>
-          <p:cNvPr id="10" name="Rectangle 9"/>
+          <p:cNvPr id="13" name="Rectangle 12"/>
           <p:cNvSpPr/>
           <p:nvPr>
             <p:ph type="body" idx="8"/>
@@ -12359,7 +13171,7 @@
       </p:sp>
       <p:sp>
         <p:nvSpPr>
-          <p:cNvPr id="11" name="TextBox 10"/>
+          <p:cNvPr id="14" name="TextBox 13"/>
           <p:cNvSpPr/>
           <p:nvPr>
             <p:ph type="body" idx="9"/>
@@ -12376,7 +13188,7 @@
           <a:noFill/>
         </p:spPr>
         <p:txBody>
-          <a:bodyPr wrap="square">
+          <a:bodyPr wrap="square" lIns="0" rIns="0">
             <a:noAutofit/>
           </a:bodyPr>
           <a:lstStyle/>
@@ -12396,7 +13208,7 @@
       </p:sp>
       <p:sp>
         <p:nvSpPr>
-          <p:cNvPr id="12" name="TextBox 11"/>
+          <p:cNvPr id="15" name="TextBox 14"/>
           <p:cNvSpPr/>
           <p:nvPr>
             <p:ph type="body" idx="13"/>
@@ -12413,7 +13225,7 @@
           <a:noFill/>
         </p:spPr>
         <p:txBody>
-          <a:bodyPr wrap="square">
+          <a:bodyPr wrap="square" lIns="0" rIns="0">
             <a:noAutofit/>
           </a:bodyPr>
           <a:lstStyle/>
@@ -12433,7 +13245,7 @@
       </p:sp>
       <p:sp>
         <p:nvSpPr>
-          <p:cNvPr id="13" name="Rectangle 12"/>
+          <p:cNvPr id="16" name="Rectangle 15"/>
           <p:cNvSpPr/>
           <p:nvPr>
             <p:ph type="body" idx="14"/>
@@ -12465,7 +13277,7 @@
       </p:sp>
       <p:sp>
         <p:nvSpPr>
-          <p:cNvPr id="14" name="TextBox 13"/>
+          <p:cNvPr id="17" name="TextBox 16"/>
           <p:cNvSpPr/>
           <p:nvPr>
             <p:ph type="body" idx="15"/>
@@ -12482,7 +13294,7 @@
           <a:noFill/>
         </p:spPr>
         <p:txBody>
-          <a:bodyPr wrap="square">
+          <a:bodyPr wrap="square" lIns="0" rIns="0">
             <a:noAutofit/>
           </a:bodyPr>
           <a:lstStyle/>
@@ -12540,7 +13352,35 @@
       </p:grpSpPr>
       <p:sp>
         <p:nvSpPr>
-          <p:cNvPr id="2" name="TextBox 1"/>
+          <p:cNvPr id="4" name="Slide Number Placeholder 3"/>
+          <p:cNvSpPr>
+            <a:spLocks noGrp="1"/>
+          </p:cNvSpPr>
+          <p:nvPr>
+            <p:ph type="sldNum" sz="quarter" idx="12"/>
+          </p:nvPr>
+        </p:nvSpPr>
+        <p:spPr>
+          <a:xfrm>
+            <a:off x="10363200" y="6035040"/>
+            <a:ext cx="1371600" cy="365760"/>
+          </a:xfrm>
+        </p:spPr>
+        <p:txBody>
+          <a:bodyPr/>
+          <a:lstStyle/>
+          <a:p>
+            <a:fld id="{C1FF6DA9-008F-8B48-92A6-B652298478BF}" type="slidenum">
+              <a:rPr lang="en-US" smtClean="0"/>
+              <a:t>‹#›</a:t>
+            </a:fld>
+            <a:endParaRPr lang="en-US"/>
+          </a:p>
+        </p:txBody>
+      </p:sp>
+      <p:sp>
+        <p:nvSpPr>
+          <p:cNvPr id="5" name="TextBox 4"/>
           <p:cNvSpPr/>
           <p:nvPr>
             <p:ph type="title"/>
@@ -12557,7 +13397,7 @@
           <a:noFill/>
         </p:spPr>
         <p:txBody>
-          <a:bodyPr wrap="square">
+          <a:bodyPr wrap="square" lIns="0" rIns="0">
             <a:noAutofit/>
           </a:bodyPr>
           <a:lstStyle/>
@@ -12577,7 +13417,7 @@
       </p:sp>
       <p:sp>
         <p:nvSpPr>
-          <p:cNvPr id="3" name="TextBox 2"/>
+          <p:cNvPr id="6" name="TextBox 5"/>
           <p:cNvSpPr/>
           <p:nvPr>
             <p:ph type="body" idx="1"/>
@@ -12594,7 +13434,7 @@
           <a:noFill/>
         </p:spPr>
         <p:txBody>
-          <a:bodyPr wrap="square">
+          <a:bodyPr wrap="square" lIns="0" rIns="0">
             <a:noAutofit/>
           </a:bodyPr>
           <a:lstStyle/>
@@ -12614,7 +13454,7 @@
       </p:sp>
       <p:sp>
         <p:nvSpPr>
-          <p:cNvPr id="4" name="TextBox 3"/>
+          <p:cNvPr id="7" name="TextBox 6"/>
           <p:cNvSpPr/>
           <p:nvPr>
             <p:ph type="body" idx="2"/>
@@ -12631,7 +13471,7 @@
           <a:noFill/>
         </p:spPr>
         <p:txBody>
-          <a:bodyPr wrap="square">
+          <a:bodyPr wrap="square" lIns="0" rIns="0">
             <a:noAutofit/>
           </a:bodyPr>
           <a:lstStyle/>
@@ -12651,7 +13491,7 @@
       </p:sp>
       <p:sp>
         <p:nvSpPr>
-          <p:cNvPr id="5" name="TextBox 4"/>
+          <p:cNvPr id="8" name="TextBox 7"/>
           <p:cNvSpPr/>
           <p:nvPr>
             <p:ph type="body" idx="3"/>
@@ -12668,7 +13508,7 @@
           <a:noFill/>
         </p:spPr>
         <p:txBody>
-          <a:bodyPr wrap="square">
+          <a:bodyPr wrap="square" lIns="0" rIns="0">
             <a:noAutofit/>
           </a:bodyPr>
           <a:lstStyle/>
@@ -12688,7 +13528,7 @@
       </p:sp>
       <p:sp>
         <p:nvSpPr>
-          <p:cNvPr id="6" name="Rectangle 5"/>
+          <p:cNvPr id="9" name="Rectangle 8"/>
           <p:cNvSpPr/>
           <p:nvPr>
             <p:ph type="body" idx="4"/>
@@ -12720,7 +13560,7 @@
       </p:sp>
       <p:sp>
         <p:nvSpPr>
-          <p:cNvPr id="7" name="TextBox 6"/>
+          <p:cNvPr id="10" name="TextBox 9"/>
           <p:cNvSpPr/>
           <p:nvPr>
             <p:ph type="body" idx="5"/>
@@ -12737,7 +13577,7 @@
           <a:noFill/>
         </p:spPr>
         <p:txBody>
-          <a:bodyPr wrap="square">
+          <a:bodyPr wrap="square" lIns="0" rIns="0">
             <a:noAutofit/>
           </a:bodyPr>
           <a:lstStyle/>
@@ -12757,7 +13597,7 @@
       </p:sp>
       <p:sp>
         <p:nvSpPr>
-          <p:cNvPr id="8" name="Rectangle 7"/>
+          <p:cNvPr id="11" name="Rectangle 10"/>
           <p:cNvSpPr/>
           <p:nvPr>
             <p:ph type="body" idx="6"/>
@@ -12789,7 +13629,7 @@
       </p:sp>
       <p:sp>
         <p:nvSpPr>
-          <p:cNvPr id="9" name="TextBox 8"/>
+          <p:cNvPr id="12" name="TextBox 11"/>
           <p:cNvSpPr/>
           <p:nvPr>
             <p:ph type="body" idx="7"/>
@@ -12806,7 +13646,7 @@
           <a:noFill/>
         </p:spPr>
         <p:txBody>
-          <a:bodyPr wrap="square">
+          <a:bodyPr wrap="square" lIns="0" rIns="0">
             <a:noAutofit/>
           </a:bodyPr>
           <a:lstStyle/>
@@ -12826,7 +13666,7 @@
       </p:sp>
       <p:sp>
         <p:nvSpPr>
-          <p:cNvPr id="10" name="TextBox 9"/>
+          <p:cNvPr id="13" name="TextBox 12"/>
           <p:cNvSpPr/>
           <p:nvPr>
             <p:ph type="body" idx="8"/>
@@ -12843,7 +13683,7 @@
           <a:noFill/>
         </p:spPr>
         <p:txBody>
-          <a:bodyPr wrap="square">
+          <a:bodyPr wrap="square" lIns="0" rIns="0">
             <a:noAutofit/>
           </a:bodyPr>
           <a:lstStyle/>
@@ -12863,7 +13703,7 @@
       </p:sp>
       <p:sp>
         <p:nvSpPr>
-          <p:cNvPr id="11" name="TextBox 10"/>
+          <p:cNvPr id="14" name="TextBox 13"/>
           <p:cNvSpPr/>
           <p:nvPr>
             <p:ph type="body" idx="9"/>
@@ -12880,7 +13720,7 @@
           <a:noFill/>
         </p:spPr>
         <p:txBody>
-          <a:bodyPr wrap="square">
+          <a:bodyPr wrap="square" lIns="0" rIns="0">
             <a:noAutofit/>
           </a:bodyPr>
           <a:lstStyle/>
@@ -12900,7 +13740,7 @@
       </p:sp>
       <p:sp>
         <p:nvSpPr>
-          <p:cNvPr id="12" name="TextBox 11"/>
+          <p:cNvPr id="15" name="TextBox 14"/>
           <p:cNvSpPr/>
           <p:nvPr>
             <p:ph type="body" idx="13"/>
@@ -12917,7 +13757,7 @@
           <a:noFill/>
         </p:spPr>
         <p:txBody>
-          <a:bodyPr wrap="square">
+          <a:bodyPr wrap="square" lIns="0" rIns="0">
             <a:noAutofit/>
           </a:bodyPr>
           <a:lstStyle/>
@@ -12937,7 +13777,7 @@
       </p:sp>
       <p:sp>
         <p:nvSpPr>
-          <p:cNvPr id="13" name="TextBox 12"/>
+          <p:cNvPr id="16" name="TextBox 15"/>
           <p:cNvSpPr/>
           <p:nvPr>
             <p:ph type="body" idx="14"/>
@@ -12954,7 +13794,7 @@
           <a:noFill/>
         </p:spPr>
         <p:txBody>
-          <a:bodyPr wrap="square">
+          <a:bodyPr wrap="square" lIns="0" rIns="0">
             <a:noAutofit/>
           </a:bodyPr>
           <a:lstStyle/>
@@ -12974,7 +13814,7 @@
       </p:sp>
       <p:sp>
         <p:nvSpPr>
-          <p:cNvPr id="14" name="TextBox 13"/>
+          <p:cNvPr id="17" name="TextBox 16"/>
           <p:cNvSpPr/>
           <p:nvPr>
             <p:ph type="body" idx="15"/>
@@ -12991,7 +13831,7 @@
           <a:noFill/>
         </p:spPr>
         <p:txBody>
-          <a:bodyPr wrap="square">
+          <a:bodyPr wrap="square" lIns="0" rIns="0">
             <a:noAutofit/>
           </a:bodyPr>
           <a:lstStyle/>
@@ -13011,7 +13851,7 @@
       </p:sp>
       <p:sp>
         <p:nvSpPr>
-          <p:cNvPr id="15" name="TextBox 14"/>
+          <p:cNvPr id="18" name="TextBox 17"/>
           <p:cNvSpPr/>
           <p:nvPr>
             <p:ph type="body" idx="16"/>
@@ -13028,7 +13868,7 @@
           <a:noFill/>
         </p:spPr>
         <p:txBody>
-          <a:bodyPr wrap="square">
+          <a:bodyPr wrap="square" lIns="0" rIns="0">
             <a:noAutofit/>
           </a:bodyPr>
           <a:lstStyle/>
@@ -13048,7 +13888,7 @@
       </p:sp>
       <p:sp>
         <p:nvSpPr>
-          <p:cNvPr id="16" name="TextBox 15"/>
+          <p:cNvPr id="19" name="TextBox 18"/>
           <p:cNvSpPr/>
           <p:nvPr>
             <p:ph type="body" idx="17"/>
@@ -13065,7 +13905,7 @@
           <a:noFill/>
         </p:spPr>
         <p:txBody>
-          <a:bodyPr wrap="square">
+          <a:bodyPr wrap="square" lIns="0" rIns="0">
             <a:noAutofit/>
           </a:bodyPr>
           <a:lstStyle/>
@@ -13085,7 +13925,7 @@
       </p:sp>
       <p:sp>
         <p:nvSpPr>
-          <p:cNvPr id="17" name="Rectangle 16"/>
+          <p:cNvPr id="20" name="Rectangle 19"/>
           <p:cNvSpPr/>
           <p:nvPr>
             <p:ph type="body" idx="18"/>
@@ -13117,7 +13957,7 @@
       </p:sp>
       <p:sp>
         <p:nvSpPr>
-          <p:cNvPr id="18" name="TextBox 17"/>
+          <p:cNvPr id="21" name="TextBox 20"/>
           <p:cNvSpPr/>
           <p:nvPr>
             <p:ph type="body" idx="19"/>
@@ -13134,7 +13974,7 @@
           <a:noFill/>
         </p:spPr>
         <p:txBody>
-          <a:bodyPr wrap="square">
+          <a:bodyPr wrap="square" lIns="0" rIns="0">
             <a:noAutofit/>
           </a:bodyPr>
           <a:lstStyle/>
@@ -13154,7 +13994,7 @@
       </p:sp>
       <p:sp>
         <p:nvSpPr>
-          <p:cNvPr id="19" name="TextBox 18"/>
+          <p:cNvPr id="22" name="TextBox 21"/>
           <p:cNvSpPr/>
           <p:nvPr>
             <p:ph type="body" idx="20"/>
@@ -13171,7 +14011,7 @@
           <a:noFill/>
         </p:spPr>
         <p:txBody>
-          <a:bodyPr wrap="square">
+          <a:bodyPr wrap="square" lIns="0" rIns="0">
             <a:noAutofit/>
           </a:bodyPr>
           <a:lstStyle/>
@@ -13191,7 +14031,7 @@
       </p:sp>
       <p:sp>
         <p:nvSpPr>
-          <p:cNvPr id="20" name="TextBox 19"/>
+          <p:cNvPr id="23" name="TextBox 22"/>
           <p:cNvSpPr/>
           <p:nvPr>
             <p:ph type="body" idx="21"/>
@@ -13208,7 +14048,7 @@
           <a:noFill/>
         </p:spPr>
         <p:txBody>
-          <a:bodyPr wrap="square">
+          <a:bodyPr wrap="square" lIns="0" rIns="0">
             <a:noAutofit/>
           </a:bodyPr>
           <a:lstStyle/>
@@ -14979,7 +15819,7 @@
           <a:noFill/>
         </p:spPr>
         <p:txBody>
-          <a:bodyPr wrap="square">
+          <a:bodyPr wrap="square" lIns="0" rIns="0">
             <a:noAutofit/>
           </a:bodyPr>
           <a:lstStyle/>
@@ -15014,7 +15854,7 @@
           <a:noFill/>
         </p:spPr>
         <p:txBody>
-          <a:bodyPr wrap="square">
+          <a:bodyPr wrap="square" lIns="0" rIns="0">
             <a:noAutofit/>
           </a:bodyPr>
           <a:lstStyle/>
@@ -15075,7 +15915,7 @@
           <a:noFill/>
         </p:spPr>
         <p:txBody>
-          <a:bodyPr wrap="square">
+          <a:bodyPr wrap="square" lIns="0" rIns="0">
             <a:noAutofit/>
           </a:bodyPr>
           <a:lstStyle/>
@@ -15110,7 +15950,7 @@
           <a:noFill/>
         </p:spPr>
         <p:txBody>
-          <a:bodyPr wrap="square">
+          <a:bodyPr wrap="square" lIns="0" rIns="0">
             <a:noAutofit/>
           </a:bodyPr>
           <a:lstStyle/>
@@ -15145,7 +15985,7 @@
           <a:noFill/>
         </p:spPr>
         <p:txBody>
-          <a:bodyPr wrap="square">
+          <a:bodyPr wrap="square" lIns="0" rIns="0">
             <a:noAutofit/>
           </a:bodyPr>
           <a:lstStyle/>
@@ -15180,7 +16020,7 @@
           <a:noFill/>
         </p:spPr>
         <p:txBody>
-          <a:bodyPr wrap="square">
+          <a:bodyPr wrap="square" lIns="0" rIns="0">
             <a:noAutofit/>
           </a:bodyPr>
           <a:lstStyle/>
@@ -15215,7 +16055,7 @@
           <a:noFill/>
         </p:spPr>
         <p:txBody>
-          <a:bodyPr wrap="square">
+          <a:bodyPr wrap="square" lIns="0" rIns="0">
             <a:noAutofit/>
           </a:bodyPr>
           <a:lstStyle/>
@@ -15250,7 +16090,7 @@
           <a:noFill/>
         </p:spPr>
         <p:txBody>
-          <a:bodyPr wrap="square">
+          <a:bodyPr wrap="square" lIns="0" rIns="0">
             <a:noAutofit/>
           </a:bodyPr>
           <a:lstStyle/>
@@ -15285,7 +16125,7 @@
           <a:noFill/>
         </p:spPr>
         <p:txBody>
-          <a:bodyPr wrap="square">
+          <a:bodyPr wrap="square" lIns="0" rIns="0">
             <a:noAutofit/>
           </a:bodyPr>
           <a:lstStyle/>
@@ -15320,7 +16160,7 @@
           <a:noFill/>
         </p:spPr>
         <p:txBody>
-          <a:bodyPr wrap="square">
+          <a:bodyPr wrap="square" lIns="0" rIns="0">
             <a:noAutofit/>
           </a:bodyPr>
           <a:lstStyle/>
@@ -15355,7 +16195,7 @@
           <a:noFill/>
         </p:spPr>
         <p:txBody>
-          <a:bodyPr wrap="square">
+          <a:bodyPr wrap="square" lIns="0" rIns="0">
             <a:noAutofit/>
           </a:bodyPr>
           <a:lstStyle/>
@@ -15390,7 +16230,7 @@
           <a:noFill/>
         </p:spPr>
         <p:txBody>
-          <a:bodyPr wrap="square">
+          <a:bodyPr wrap="square" lIns="0" rIns="0">
             <a:noAutofit/>
           </a:bodyPr>
           <a:lstStyle/>
@@ -15425,7 +16265,7 @@
           <a:noFill/>
         </p:spPr>
         <p:txBody>
-          <a:bodyPr wrap="square">
+          <a:bodyPr wrap="square" lIns="0" rIns="0">
             <a:noAutofit/>
           </a:bodyPr>
           <a:lstStyle/>
@@ -15460,7 +16300,7 @@
           <a:noFill/>
         </p:spPr>
         <p:txBody>
-          <a:bodyPr wrap="square">
+          <a:bodyPr wrap="square" lIns="0" rIns="0">
             <a:noAutofit/>
           </a:bodyPr>
           <a:lstStyle/>
@@ -15495,7 +16335,7 @@
           <a:noFill/>
         </p:spPr>
         <p:txBody>
-          <a:bodyPr wrap="square">
+          <a:bodyPr wrap="square" lIns="0" rIns="0">
             <a:noAutofit/>
           </a:bodyPr>
           <a:lstStyle/>
@@ -15516,8 +16356,10 @@
       <p:sp>
         <p:nvSpPr>
           <p:cNvPr id="15" name="TextBox 14"/>
-          <p:cNvSpPr txBox="1"/>
-          <p:nvPr/>
+          <p:cNvSpPr/>
+          <p:nvPr>
+            <p:ph type="sldNum" idx="12"/>
+          </p:nvPr>
         </p:nvSpPr>
         <p:spPr>
           <a:xfrm>
@@ -15530,13 +16372,13 @@
           <a:noFill/>
         </p:spPr>
         <p:txBody>
-          <a:bodyPr wrap="square">
-            <a:noAutofit/>
-          </a:bodyPr>
-          <a:lstStyle/>
-          <a:p>
-            <a:pPr algn="l"/>
-            <a:r>
+          <a:bodyPr wrap="square" lIns="0" rIns="0">
+            <a:noAutofit/>
+          </a:bodyPr>
+          <a:lstStyle/>
+          <a:p>
+            <a:pPr algn="l"/>
+            <a:fld id="{1F2E3D4C-5B6A-4978-8765-43210FEDCBA9}" type="slidenum">
               <a:rPr sz="1600" b="0" i="0">
                 <a:solidFill>
                   <a:srgbClr val="7A8590"/>
@@ -15544,7 +16386,7 @@
                 <a:latin typeface="Arial"/>
               </a:rPr>
               <a:t>2</a:t>
-            </a:r>
+            </a:fld>
           </a:p>
         </p:txBody>
       </p:sp>
@@ -15591,7 +16433,7 @@
           <a:noFill/>
         </p:spPr>
         <p:txBody>
-          <a:bodyPr wrap="square">
+          <a:bodyPr wrap="square" lIns="0" rIns="0">
             <a:noAutofit/>
           </a:bodyPr>
           <a:lstStyle/>
@@ -15626,7 +16468,7 @@
           <a:noFill/>
         </p:spPr>
         <p:txBody>
-          <a:bodyPr wrap="square">
+          <a:bodyPr wrap="square" lIns="0" rIns="0">
             <a:noAutofit/>
           </a:bodyPr>
           <a:lstStyle/>
@@ -15705,7 +16547,7 @@
           <a:noFill/>
         </p:spPr>
         <p:txBody>
-          <a:bodyPr wrap="square">
+          <a:bodyPr wrap="square" lIns="0" rIns="0">
             <a:noAutofit/>
           </a:bodyPr>
           <a:lstStyle/>
@@ -15740,7 +16582,7 @@
           <a:noFill/>
         </p:spPr>
         <p:txBody>
-          <a:bodyPr wrap="square">
+          <a:bodyPr wrap="square" lIns="0" rIns="0">
             <a:noAutofit/>
           </a:bodyPr>
           <a:lstStyle/>
@@ -15819,7 +16661,7 @@
           <a:noFill/>
         </p:spPr>
         <p:txBody>
-          <a:bodyPr wrap="square">
+          <a:bodyPr wrap="square" lIns="0" rIns="0">
             <a:noAutofit/>
           </a:bodyPr>
           <a:lstStyle/>
@@ -15854,7 +16696,7 @@
           <a:noFill/>
         </p:spPr>
         <p:txBody>
-          <a:bodyPr wrap="square">
+          <a:bodyPr wrap="square" lIns="0" rIns="0">
             <a:noAutofit/>
           </a:bodyPr>
           <a:lstStyle/>
@@ -15933,7 +16775,7 @@
           <a:noFill/>
         </p:spPr>
         <p:txBody>
-          <a:bodyPr wrap="square">
+          <a:bodyPr wrap="square" lIns="0" rIns="0">
             <a:noAutofit/>
           </a:bodyPr>
           <a:lstStyle/>
@@ -15968,7 +16810,7 @@
           <a:noFill/>
         </p:spPr>
         <p:txBody>
-          <a:bodyPr wrap="square">
+          <a:bodyPr wrap="square" lIns="0" rIns="0">
             <a:noAutofit/>
           </a:bodyPr>
           <a:lstStyle/>
@@ -16047,7 +16889,7 @@
           <a:noFill/>
         </p:spPr>
         <p:txBody>
-          <a:bodyPr wrap="square">
+          <a:bodyPr wrap="square" lIns="0" rIns="0">
             <a:noAutofit/>
           </a:bodyPr>
           <a:lstStyle/>
@@ -16068,8 +16910,10 @@
       <p:sp>
         <p:nvSpPr>
           <p:cNvPr id="15" name="TextBox 14"/>
-          <p:cNvSpPr txBox="1"/>
-          <p:nvPr/>
+          <p:cNvSpPr/>
+          <p:nvPr>
+            <p:ph type="sldNum" idx="12"/>
+          </p:nvPr>
         </p:nvSpPr>
         <p:spPr>
           <a:xfrm>
@@ -16082,13 +16926,13 @@
           <a:noFill/>
         </p:spPr>
         <p:txBody>
-          <a:bodyPr wrap="square">
-            <a:noAutofit/>
-          </a:bodyPr>
-          <a:lstStyle/>
-          <a:p>
-            <a:pPr algn="l"/>
-            <a:r>
+          <a:bodyPr wrap="square" lIns="0" rIns="0">
+            <a:noAutofit/>
+          </a:bodyPr>
+          <a:lstStyle/>
+          <a:p>
+            <a:pPr algn="l"/>
+            <a:fld id="{1F2E3D4C-5B6A-4978-8765-43210FEDCBA9}" type="slidenum">
               <a:rPr sz="1600" b="0" i="0">
                 <a:solidFill>
                   <a:srgbClr val="7A8590"/>
@@ -16096,7 +16940,7 @@
                 <a:latin typeface="Arial"/>
               </a:rPr>
               <a:t>3</a:t>
-            </a:r>
+            </a:fld>
           </a:p>
         </p:txBody>
       </p:sp>

--- a/examples/theme-layouts-demo/deck.pptx
+++ b/examples/theme-layouts-demo/deck.pptx
@@ -7417,7 +7417,7 @@
         <p:spPr>
           <a:xfrm>
             <a:off x="0" y="3965448"/>
-            <a:ext cx="6557328" cy="518159"/>
+            <a:ext cx="5707380" cy="518159"/>
           </a:xfrm>
           <a:prstGeom prst="rect">
             <a:avLst/>
@@ -7490,8 +7490,8 @@
         </p:nvSpPr>
         <p:spPr>
           <a:xfrm>
-            <a:off x="5599341" y="3965448"/>
-            <a:ext cx="6592659" cy="518159"/>
+            <a:off x="6484620" y="3965448"/>
+            <a:ext cx="5707380" cy="518159"/>
           </a:xfrm>
           <a:prstGeom prst="rect">
             <a:avLst/>
@@ -7528,7 +7528,7 @@
         <p:spPr>
           <a:xfrm>
             <a:off x="5435323" y="3310127"/>
-            <a:ext cx="1321355" cy="640080"/>
+            <a:ext cx="1321354" cy="640080"/>
           </a:xfrm>
           <a:prstGeom prst="rect">
             <a:avLst/>
@@ -7948,8 +7948,8 @@
         </p:nvSpPr>
         <p:spPr>
           <a:xfrm>
-            <a:off x="7685236" y="2593848"/>
-            <a:ext cx="4506764" cy="609600"/>
+            <a:off x="7701280" y="2593848"/>
+            <a:ext cx="4490720" cy="609600"/>
           </a:xfrm>
           <a:prstGeom prst="rect">
             <a:avLst/>
@@ -8055,7 +8055,7 @@
         <p:spPr>
           <a:xfrm>
             <a:off x="0" y="4861560"/>
-            <a:ext cx="5405972" cy="609600"/>
+            <a:ext cx="4490720" cy="609600"/>
           </a:xfrm>
           <a:prstGeom prst="rect">
             <a:avLst/>
@@ -8266,8 +8266,8 @@
         </p:nvSpPr>
         <p:spPr>
           <a:xfrm>
-            <a:off x="7550805" y="4861560"/>
-            <a:ext cx="4641195" cy="609600"/>
+            <a:off x="7701280" y="4861560"/>
+            <a:ext cx="4490720" cy="609600"/>
           </a:xfrm>
           <a:prstGeom prst="rect">
             <a:avLst/>
@@ -9942,7 +9942,7 @@
         <p:spPr>
           <a:xfrm>
             <a:off x="4795183" y="4666488"/>
-            <a:ext cx="2601635" cy="518159"/>
+            <a:ext cx="2601634" cy="518159"/>
           </a:xfrm>
           <a:prstGeom prst="rect">
             <a:avLst/>
@@ -10085,7 +10085,7 @@
         <p:spPr>
           <a:xfrm>
             <a:off x="9288294" y="4666488"/>
-            <a:ext cx="1316692" cy="518159"/>
+            <a:ext cx="1316691" cy="518159"/>
           </a:xfrm>
           <a:prstGeom prst="rect">
             <a:avLst/>
@@ -12092,7 +12092,7 @@
         <p:spPr>
           <a:xfrm>
             <a:off x="5235159" y="5583935"/>
-            <a:ext cx="1721683" cy="426720"/>
+            <a:ext cx="1721682" cy="426720"/>
           </a:xfrm>
           <a:prstGeom prst="rect">
             <a:avLst/>
@@ -13463,7 +13463,7 @@
         <p:spPr>
           <a:xfrm>
             <a:off x="5973987" y="1499616"/>
-            <a:ext cx="3676075" cy="518159"/>
+            <a:ext cx="3676074" cy="518159"/>
           </a:xfrm>
           <a:prstGeom prst="rect">
             <a:avLst/>
@@ -13499,8 +13499,8 @@
         </p:nvSpPr>
         <p:spPr>
           <a:xfrm>
-            <a:off x="8680611" y="1499616"/>
-            <a:ext cx="3511389" cy="518159"/>
+            <a:off x="8845296" y="1499616"/>
+            <a:ext cx="3346704" cy="518159"/>
           </a:xfrm>
           <a:prstGeom prst="rect">
             <a:avLst/>
@@ -13675,7 +13675,7 @@
         <p:spPr>
           <a:xfrm>
             <a:off x="6491979" y="2401823"/>
-            <a:ext cx="2640091" cy="936752"/>
+            <a:ext cx="2640090" cy="936752"/>
           </a:xfrm>
           <a:prstGeom prst="rect">
             <a:avLst/>
@@ -13786,7 +13786,7 @@
         <p:spPr>
           <a:xfrm>
             <a:off x="3785355" y="3612895"/>
-            <a:ext cx="2640091" cy="936752"/>
+            <a:ext cx="2640090" cy="936752"/>
           </a:xfrm>
           <a:prstGeom prst="rect">
             <a:avLst/>
@@ -13860,7 +13860,7 @@
         <p:spPr>
           <a:xfrm>
             <a:off x="9198603" y="3612895"/>
-            <a:ext cx="2640091" cy="936752"/>
+            <a:ext cx="2640090" cy="936752"/>
           </a:xfrm>
           <a:prstGeom prst="rect">
             <a:avLst/>
@@ -14040,7 +14040,7 @@
         <p:spPr>
           <a:xfrm>
             <a:off x="9198603" y="4823967"/>
-            <a:ext cx="2640091" cy="936752"/>
+            <a:ext cx="2640090" cy="936752"/>
           </a:xfrm>
           <a:prstGeom prst="rect">
             <a:avLst/>

--- a/examples/theme-layouts-demo/deck.pptx
+++ b/examples/theme-layouts-demo/deck.pptx
@@ -738,8 +738,8 @@
         </p:nvSpPr>
         <p:spPr>
           <a:xfrm>
-            <a:off x="10363200" y="6035040"/>
-            <a:ext cx="1371600" cy="365760"/>
+            <a:off x="11186160" y="6035040"/>
+            <a:ext cx="548640" cy="365760"/>
           </a:xfrm>
         </p:spPr>
         <p:txBody>
@@ -782,7 +782,7 @@
             <a:r>
               <a:rPr sz="6000" b="1" i="0">
                 <a:solidFill>
-                  <a:srgbClr val="1B3A5C"/>
+                  <a:srgbClr val="D97706"/>
                 </a:solidFill>
                 <a:latin typeface="Arial"/>
               </a:rPr>
@@ -841,8 +841,8 @@
         </p:nvSpPr>
         <p:spPr>
           <a:xfrm>
-            <a:off x="10363200" y="6035040"/>
-            <a:ext cx="1371600" cy="365760"/>
+            <a:off x="11186160" y="6035040"/>
+            <a:ext cx="548640" cy="365760"/>
           </a:xfrm>
         </p:spPr>
         <p:txBody>
@@ -885,7 +885,7 @@
             <a:r>
               <a:rPr sz="4200" b="1" i="0">
                 <a:solidFill>
-                  <a:srgbClr val="1B3A5C"/>
+                  <a:srgbClr val="D97706"/>
                 </a:solidFill>
                 <a:latin typeface="Arial"/>
               </a:rPr>
@@ -1166,8 +1166,8 @@
         </p:nvSpPr>
         <p:spPr>
           <a:xfrm>
-            <a:off x="10363200" y="6035040"/>
-            <a:ext cx="1371600" cy="365760"/>
+            <a:off x="11186160" y="6035040"/>
+            <a:ext cx="548640" cy="365760"/>
           </a:xfrm>
         </p:spPr>
         <p:txBody>
@@ -1210,7 +1210,7 @@
             <a:r>
               <a:rPr sz="4200" b="1" i="0">
                 <a:solidFill>
-                  <a:srgbClr val="1B3A5C"/>
+                  <a:srgbClr val="D97706"/>
                 </a:solidFill>
                 <a:latin typeface="Arial"/>
               </a:rPr>
@@ -1491,8 +1491,8 @@
         </p:nvSpPr>
         <p:spPr>
           <a:xfrm>
-            <a:off x="10363200" y="6035040"/>
-            <a:ext cx="1371600" cy="365760"/>
+            <a:off x="11186160" y="6035040"/>
+            <a:ext cx="548640" cy="365760"/>
           </a:xfrm>
         </p:spPr>
         <p:txBody>
@@ -1535,7 +1535,7 @@
             <a:r>
               <a:rPr sz="4200" b="1" i="0">
                 <a:solidFill>
-                  <a:srgbClr val="1B3A5C"/>
+                  <a:srgbClr val="D97706"/>
                 </a:solidFill>
                 <a:latin typeface="Arial"/>
               </a:rPr>
@@ -1572,7 +1572,7 @@
             <a:r>
               <a:rPr sz="3400" b="1" i="0">
                 <a:solidFill>
-                  <a:srgbClr val="1B3A5C"/>
+                  <a:srgbClr val="D97706"/>
                 </a:solidFill>
                 <a:latin typeface="Arial"/>
               </a:rPr>
@@ -1609,7 +1609,7 @@
             <a:r>
               <a:rPr sz="3400" b="1" i="0">
                 <a:solidFill>
-                  <a:srgbClr val="1B3A5C"/>
+                  <a:srgbClr val="D97706"/>
                 </a:solidFill>
                 <a:latin typeface="Arial"/>
               </a:rPr>
@@ -1890,8 +1890,8 @@
         </p:nvSpPr>
         <p:spPr>
           <a:xfrm>
-            <a:off x="10363200" y="6035040"/>
-            <a:ext cx="1371600" cy="365760"/>
+            <a:off x="11186160" y="6035040"/>
+            <a:ext cx="548640" cy="365760"/>
           </a:xfrm>
         </p:spPr>
         <p:txBody>
@@ -1934,7 +1934,7 @@
             <a:r>
               <a:rPr sz="4200" b="1" i="0">
                 <a:solidFill>
-                  <a:srgbClr val="1B3A5C"/>
+                  <a:srgbClr val="D97706"/>
                 </a:solidFill>
                 <a:latin typeface="Arial"/>
               </a:rPr>
@@ -2437,8 +2437,8 @@
         </p:nvSpPr>
         <p:spPr>
           <a:xfrm>
-            <a:off x="10363200" y="6035040"/>
-            <a:ext cx="1371600" cy="365760"/>
+            <a:off x="11186160" y="6035040"/>
+            <a:ext cx="548640" cy="365760"/>
           </a:xfrm>
         </p:spPr>
         <p:txBody>
@@ -2481,7 +2481,7 @@
             <a:r>
               <a:rPr sz="4200" b="1" i="0">
                 <a:solidFill>
-                  <a:srgbClr val="1B3A5C"/>
+                  <a:srgbClr val="D97706"/>
                 </a:solidFill>
                 <a:latin typeface="Arial"/>
               </a:rPr>
@@ -2501,6 +2501,43 @@
         <p:spPr>
           <a:xfrm>
             <a:off x="6233160" y="1499616"/>
+            <a:ext cx="5958840" cy="609600"/>
+          </a:xfrm>
+          <a:prstGeom prst="rect">
+            <a:avLst/>
+          </a:prstGeom>
+          <a:noFill/>
+        </p:spPr>
+        <p:txBody>
+          <a:bodyPr wrap="none" lIns="0" rIns="0">
+            <a:noAutofit/>
+          </a:bodyPr>
+          <a:lstStyle/>
+          <a:p>
+            <a:pPr algn="l"/>
+            <a:r>
+              <a:rPr sz="3400" b="0" i="0">
+                <a:solidFill>
+                  <a:srgbClr val="1A1A2E"/>
+                </a:solidFill>
+                <a:latin typeface="Arial"/>
+              </a:rPr>
+              <a:t>Built with customers.</a:t>
+            </a:r>
+          </a:p>
+        </p:txBody>
+      </p:sp>
+      <p:sp>
+        <p:nvSpPr>
+          <p:cNvPr id="7" name="TextBox 6"/>
+          <p:cNvSpPr/>
+          <p:nvPr>
+            <p:ph type="body" idx="2"/>
+          </p:nvPr>
+        </p:nvSpPr>
+        <p:spPr>
+          <a:xfrm>
+            <a:off x="6233160" y="2383536"/>
             <a:ext cx="5501640" cy="1127760"/>
           </a:xfrm>
           <a:prstGeom prst="rect">
@@ -2522,44 +2559,7 @@
                 </a:solidFill>
                 <a:latin typeface="Arial"/>
               </a:rPr>
-              <a:t>Built with customers, not just for them.</a:t>
-            </a:r>
-          </a:p>
-        </p:txBody>
-      </p:sp>
-      <p:sp>
-        <p:nvSpPr>
-          <p:cNvPr id="7" name="TextBox 6"/>
-          <p:cNvSpPr/>
-          <p:nvPr>
-            <p:ph type="body" idx="2"/>
-          </p:nvPr>
-        </p:nvSpPr>
-        <p:spPr>
-          <a:xfrm>
-            <a:off x="6233160" y="2901696"/>
-            <a:ext cx="5501640" cy="1127760"/>
-          </a:xfrm>
-          <a:prstGeom prst="rect">
-            <a:avLst/>
-          </a:prstGeom>
-          <a:noFill/>
-        </p:spPr>
-        <p:txBody>
-          <a:bodyPr wrap="square" lIns="0" rIns="0">
-            <a:noAutofit/>
-          </a:bodyPr>
-          <a:lstStyle/>
-          <a:p>
-            <a:pPr algn="l"/>
-            <a:r>
-              <a:rPr sz="3400" b="0" i="0">
-                <a:solidFill>
-                  <a:srgbClr val="1A1A2E"/>
-                </a:solidFill>
-                <a:latin typeface="Arial"/>
-              </a:rPr>
-              <a:t>60% faster rollout; 50% fewer tickets.</a:t>
+              <a:t>60% faster; 50% fewer tickets</a:t>
             </a:r>
           </a:p>
         </p:txBody>
@@ -2578,405 +2578,6 @@
 </file>
 
 <file path=ppt/slideLayouts/slideLayout18.xml><?xml version="1.0" encoding="utf-8"?>
-<p:sldLayout xmlns:a="http://schemas.openxmlformats.org/drawingml/2006/main" xmlns:r="http://schemas.openxmlformats.org/officeDocument/2006/relationships" xmlns:p="http://schemas.openxmlformats.org/presentationml/2006/main" type="blank" preserve="1">
-  <p:cSld name="slidekit · Card Grid">
-    <p:bg>
-      <p:bgPr>
-        <a:solidFill>
-          <a:srgbClr val="FFFFFF"/>
-        </a:solidFill>
-        <a:effectLst/>
-      </p:bgPr>
-    </p:bg>
-    <p:spTree>
-      <p:nvGrpSpPr>
-        <p:cNvPr id="1" name=""/>
-        <p:cNvGrpSpPr/>
-        <p:nvPr/>
-      </p:nvGrpSpPr>
-      <p:grpSpPr>
-        <a:xfrm>
-          <a:off x="0" y="0"/>
-          <a:ext cx="0" cy="0"/>
-          <a:chOff x="0" y="0"/>
-          <a:chExt cx="0" cy="0"/>
-        </a:xfrm>
-      </p:grpSpPr>
-      <p:sp>
-        <p:nvSpPr>
-          <p:cNvPr id="4" name="Slide Number Placeholder 3"/>
-          <p:cNvSpPr>
-            <a:spLocks noGrp="1"/>
-          </p:cNvSpPr>
-          <p:nvPr>
-            <p:ph type="sldNum" sz="quarter" idx="12"/>
-          </p:nvPr>
-        </p:nvSpPr>
-        <p:spPr>
-          <a:xfrm>
-            <a:off x="10363200" y="6035040"/>
-            <a:ext cx="1371600" cy="365760"/>
-          </a:xfrm>
-        </p:spPr>
-        <p:txBody>
-          <a:bodyPr/>
-          <a:lstStyle/>
-          <a:p>
-            <a:fld id="{C1FF6DA9-008F-8B48-92A6-B652298478BF}" type="slidenum">
-              <a:rPr lang="en-US" smtClean="0"/>
-              <a:t>‹#›</a:t>
-            </a:fld>
-            <a:endParaRPr lang="en-US"/>
-          </a:p>
-        </p:txBody>
-      </p:sp>
-      <p:sp>
-        <p:nvSpPr>
-          <p:cNvPr id="5" name="TextBox 4"/>
-          <p:cNvSpPr/>
-          <p:nvPr>
-            <p:ph type="title"/>
-          </p:nvPr>
-        </p:nvSpPr>
-        <p:spPr>
-          <a:xfrm>
-            <a:off x="457200" y="457200"/>
-            <a:ext cx="11277600" cy="768096"/>
-          </a:xfrm>
-          <a:prstGeom prst="rect">
-            <a:avLst/>
-          </a:prstGeom>
-          <a:noFill/>
-        </p:spPr>
-        <p:txBody>
-          <a:bodyPr wrap="none" lIns="0" rIns="0">
-            <a:noAutofit/>
-          </a:bodyPr>
-          <a:lstStyle/>
-          <a:p>
-            <a:pPr algn="l"/>
-            <a:r>
-              <a:rPr sz="4200" b="1" i="0">
-                <a:solidFill>
-                  <a:srgbClr val="1B3A5C"/>
-                </a:solidFill>
-                <a:latin typeface="Arial"/>
-              </a:rPr>
-              <a:t>What We Offer</a:t>
-            </a:r>
-          </a:p>
-        </p:txBody>
-      </p:sp>
-      <p:sp>
-        <p:nvSpPr>
-          <p:cNvPr id="6" name="TextBox 5"/>
-          <p:cNvSpPr/>
-          <p:nvPr>
-            <p:ph type="body" idx="1"/>
-          </p:nvPr>
-        </p:nvSpPr>
-        <p:spPr>
-          <a:xfrm>
-            <a:off x="457200" y="1499616"/>
-            <a:ext cx="2831366" cy="518159"/>
-          </a:xfrm>
-          <a:prstGeom prst="rect">
-            <a:avLst/>
-          </a:prstGeom>
-          <a:noFill/>
-        </p:spPr>
-        <p:txBody>
-          <a:bodyPr wrap="none" lIns="0" rIns="0">
-            <a:noAutofit/>
-          </a:bodyPr>
-          <a:lstStyle/>
-          <a:p>
-            <a:pPr algn="l"/>
-            <a:r>
-              <a:rPr sz="3400" b="1" i="0">
-                <a:solidFill>
-                  <a:srgbClr val="1A1A2E"/>
-                </a:solidFill>
-                <a:latin typeface="Arial"/>
-              </a:rPr>
-              <a:t>Insights</a:t>
-            </a:r>
-          </a:p>
-        </p:txBody>
-      </p:sp>
-      <p:sp>
-        <p:nvSpPr>
-          <p:cNvPr id="7" name="TextBox 6"/>
-          <p:cNvSpPr/>
-          <p:nvPr>
-            <p:ph type="body" idx="2"/>
-          </p:nvPr>
-        </p:nvSpPr>
-        <p:spPr>
-          <a:xfrm>
-            <a:off x="457200" y="2154935"/>
-            <a:ext cx="2613660" cy="3605785"/>
-          </a:xfrm>
-          <a:prstGeom prst="rect">
-            <a:avLst/>
-          </a:prstGeom>
-          <a:noFill/>
-        </p:spPr>
-        <p:txBody>
-          <a:bodyPr wrap="square" lIns="0" rIns="0">
-            <a:noAutofit/>
-          </a:bodyPr>
-          <a:lstStyle/>
-          <a:p>
-            <a:pPr algn="l"/>
-            <a:r>
-              <a:rPr sz="3400" b="0" i="0">
-                <a:solidFill>
-                  <a:srgbClr val="1A1A2E"/>
-                </a:solidFill>
-                <a:latin typeface="Arial"/>
-              </a:rPr>
-              <a:t>Live data and AI analytics.</a:t>
-            </a:r>
-          </a:p>
-        </p:txBody>
-      </p:sp>
-      <p:sp>
-        <p:nvSpPr>
-          <p:cNvPr id="8" name="TextBox 7"/>
-          <p:cNvSpPr/>
-          <p:nvPr>
-            <p:ph type="body" idx="3"/>
-          </p:nvPr>
-        </p:nvSpPr>
-        <p:spPr>
-          <a:xfrm>
-            <a:off x="3345180" y="1499616"/>
-            <a:ext cx="2909292" cy="518159"/>
-          </a:xfrm>
-          <a:prstGeom prst="rect">
-            <a:avLst/>
-          </a:prstGeom>
-          <a:noFill/>
-        </p:spPr>
-        <p:txBody>
-          <a:bodyPr wrap="none" lIns="0" rIns="0">
-            <a:noAutofit/>
-          </a:bodyPr>
-          <a:lstStyle/>
-          <a:p>
-            <a:pPr algn="l"/>
-            <a:r>
-              <a:rPr sz="3400" b="1" i="0">
-                <a:solidFill>
-                  <a:srgbClr val="1A1A2E"/>
-                </a:solidFill>
-                <a:latin typeface="Arial"/>
-              </a:rPr>
-              <a:t>Security</a:t>
-            </a:r>
-          </a:p>
-        </p:txBody>
-      </p:sp>
-      <p:sp>
-        <p:nvSpPr>
-          <p:cNvPr id="9" name="TextBox 8"/>
-          <p:cNvSpPr/>
-          <p:nvPr>
-            <p:ph type="body" idx="4"/>
-          </p:nvPr>
-        </p:nvSpPr>
-        <p:spPr>
-          <a:xfrm>
-            <a:off x="3345180" y="2154935"/>
-            <a:ext cx="2613660" cy="3605785"/>
-          </a:xfrm>
-          <a:prstGeom prst="rect">
-            <a:avLst/>
-          </a:prstGeom>
-          <a:noFill/>
-        </p:spPr>
-        <p:txBody>
-          <a:bodyPr wrap="square" lIns="0" rIns="0">
-            <a:noAutofit/>
-          </a:bodyPr>
-          <a:lstStyle/>
-          <a:p>
-            <a:pPr algn="l"/>
-            <a:r>
-              <a:rPr sz="3400" b="0" i="0">
-                <a:solidFill>
-                  <a:srgbClr val="1A1A2E"/>
-                </a:solidFill>
-                <a:latin typeface="Arial"/>
-              </a:rPr>
-              <a:t>Zero-trust, SOC 2 ready.</a:t>
-            </a:r>
-          </a:p>
-        </p:txBody>
-      </p:sp>
-      <p:sp>
-        <p:nvSpPr>
-          <p:cNvPr id="10" name="TextBox 9"/>
-          <p:cNvSpPr/>
-          <p:nvPr>
-            <p:ph type="body" idx="5"/>
-          </p:nvPr>
-        </p:nvSpPr>
-        <p:spPr>
-          <a:xfrm>
-            <a:off x="6233160" y="1499616"/>
-            <a:ext cx="2613660" cy="518159"/>
-          </a:xfrm>
-          <a:prstGeom prst="rect">
-            <a:avLst/>
-          </a:prstGeom>
-          <a:noFill/>
-        </p:spPr>
-        <p:txBody>
-          <a:bodyPr wrap="none" lIns="0" rIns="0">
-            <a:noAutofit/>
-          </a:bodyPr>
-          <a:lstStyle/>
-          <a:p>
-            <a:pPr algn="l"/>
-            <a:r>
-              <a:rPr sz="3400" b="1" i="0">
-                <a:solidFill>
-                  <a:srgbClr val="1A1A2E"/>
-                </a:solidFill>
-                <a:latin typeface="Arial"/>
-              </a:rPr>
-              <a:t>Speed</a:t>
-            </a:r>
-          </a:p>
-        </p:txBody>
-      </p:sp>
-      <p:sp>
-        <p:nvSpPr>
-          <p:cNvPr id="11" name="TextBox 10"/>
-          <p:cNvSpPr/>
-          <p:nvPr>
-            <p:ph type="body" idx="6"/>
-          </p:nvPr>
-        </p:nvSpPr>
-        <p:spPr>
-          <a:xfrm>
-            <a:off x="6233160" y="2154935"/>
-            <a:ext cx="2613660" cy="3605785"/>
-          </a:xfrm>
-          <a:prstGeom prst="rect">
-            <a:avLst/>
-          </a:prstGeom>
-          <a:noFill/>
-        </p:spPr>
-        <p:txBody>
-          <a:bodyPr wrap="square" lIns="0" rIns="0">
-            <a:noAutofit/>
-          </a:bodyPr>
-          <a:lstStyle/>
-          <a:p>
-            <a:pPr algn="l"/>
-            <a:r>
-              <a:rPr sz="3400" b="0" i="0">
-                <a:solidFill>
-                  <a:srgbClr val="1A1A2E"/>
-                </a:solidFill>
-                <a:latin typeface="Arial"/>
-              </a:rPr>
-              <a:t>Sub-100ms p99 latency.</a:t>
-            </a:r>
-          </a:p>
-        </p:txBody>
-      </p:sp>
-      <p:sp>
-        <p:nvSpPr>
-          <p:cNvPr id="12" name="TextBox 11"/>
-          <p:cNvSpPr/>
-          <p:nvPr>
-            <p:ph type="body" idx="7"/>
-          </p:nvPr>
-        </p:nvSpPr>
-        <p:spPr>
-          <a:xfrm>
-            <a:off x="9121140" y="1499616"/>
-            <a:ext cx="2613660" cy="518159"/>
-          </a:xfrm>
-          <a:prstGeom prst="rect">
-            <a:avLst/>
-          </a:prstGeom>
-          <a:noFill/>
-        </p:spPr>
-        <p:txBody>
-          <a:bodyPr wrap="none" lIns="0" rIns="0">
-            <a:noAutofit/>
-          </a:bodyPr>
-          <a:lstStyle/>
-          <a:p>
-            <a:pPr algn="l"/>
-            <a:r>
-              <a:rPr sz="3400" b="1" i="0">
-                <a:solidFill>
-                  <a:srgbClr val="1A1A2E"/>
-                </a:solidFill>
-                <a:latin typeface="Arial"/>
-              </a:rPr>
-              <a:t>APIs</a:t>
-            </a:r>
-          </a:p>
-        </p:txBody>
-      </p:sp>
-      <p:sp>
-        <p:nvSpPr>
-          <p:cNvPr id="13" name="TextBox 12"/>
-          <p:cNvSpPr/>
-          <p:nvPr>
-            <p:ph type="body" idx="8"/>
-          </p:nvPr>
-        </p:nvSpPr>
-        <p:spPr>
-          <a:xfrm>
-            <a:off x="9121140" y="2154935"/>
-            <a:ext cx="2613660" cy="3605785"/>
-          </a:xfrm>
-          <a:prstGeom prst="rect">
-            <a:avLst/>
-          </a:prstGeom>
-          <a:noFill/>
-        </p:spPr>
-        <p:txBody>
-          <a:bodyPr wrap="square" lIns="0" rIns="0">
-            <a:noAutofit/>
-          </a:bodyPr>
-          <a:lstStyle/>
-          <a:p>
-            <a:pPr algn="l"/>
-            <a:r>
-              <a:rPr sz="3400" b="0" i="0">
-                <a:solidFill>
-                  <a:srgbClr val="1A1A2E"/>
-                </a:solidFill>
-                <a:latin typeface="Arial"/>
-              </a:rPr>
-              <a:t>300+ open connectors.</a:t>
-            </a:r>
-          </a:p>
-        </p:txBody>
-      </p:sp>
-    </p:spTree>
-    <p:extLst>
-      <p:ext uri="{BB962C8B-B14F-4D97-AF65-F5344CB8AC3E}">
-        <p14:creationId xmlns:p14="http://schemas.microsoft.com/office/powerpoint/2010/main" val="1212999818"/>
-      </p:ext>
-    </p:extLst>
-  </p:cSld>
-  <p:clrMapOvr>
-    <a:masterClrMapping/>
-  </p:clrMapOvr>
-</p:sldLayout>
-</file>
-
-<file path=ppt/slideLayouts/slideLayout19.xml><?xml version="1.0" encoding="utf-8"?>
 <p:sldLayout xmlns:a="http://schemas.openxmlformats.org/drawingml/2006/main" xmlns:r="http://schemas.openxmlformats.org/officeDocument/2006/relationships" xmlns:p="http://schemas.openxmlformats.org/presentationml/2006/main" type="blank" preserve="1">
   <p:cSld name="slidekit · Section Divider">
     <p:bg>
@@ -3013,8 +2614,8 @@
         </p:nvSpPr>
         <p:spPr>
           <a:xfrm>
-            <a:off x="10363200" y="6035040"/>
-            <a:ext cx="1371600" cy="365760"/>
+            <a:off x="11186160" y="6035040"/>
+            <a:ext cx="548640" cy="365760"/>
           </a:xfrm>
         </p:spPr>
         <p:txBody>
@@ -3126,11 +2727,516 @@
             <a:r>
               <a:rPr sz="4200" b="1" i="0">
                 <a:solidFill>
+                  <a:srgbClr val="D97706"/>
+                </a:solidFill>
+                <a:latin typeface="Arial"/>
+              </a:rPr>
+              <a:t>Where We Stand Today</a:t>
+            </a:r>
+          </a:p>
+        </p:txBody>
+      </p:sp>
+    </p:spTree>
+    <p:extLst>
+      <p:ext uri="{BB962C8B-B14F-4D97-AF65-F5344CB8AC3E}">
+        <p14:creationId xmlns:p14="http://schemas.microsoft.com/office/powerpoint/2010/main" val="1212999818"/>
+      </p:ext>
+    </p:extLst>
+  </p:cSld>
+  <p:clrMapOvr>
+    <a:masterClrMapping/>
+  </p:clrMapOvr>
+</p:sldLayout>
+</file>
+
+<file path=ppt/slideLayouts/slideLayout19.xml><?xml version="1.0" encoding="utf-8"?>
+<p:sldLayout xmlns:a="http://schemas.openxmlformats.org/drawingml/2006/main" xmlns:r="http://schemas.openxmlformats.org/officeDocument/2006/relationships" xmlns:p="http://schemas.openxmlformats.org/presentationml/2006/main" type="blank" preserve="1">
+  <p:cSld name="slidekit · Agenda">
+    <p:bg>
+      <p:bgPr>
+        <a:solidFill>
+          <a:srgbClr val="FFFFFF"/>
+        </a:solidFill>
+        <a:effectLst/>
+      </p:bgPr>
+    </p:bg>
+    <p:spTree>
+      <p:nvGrpSpPr>
+        <p:cNvPr id="1" name=""/>
+        <p:cNvGrpSpPr/>
+        <p:nvPr/>
+      </p:nvGrpSpPr>
+      <p:grpSpPr>
+        <a:xfrm>
+          <a:off x="0" y="0"/>
+          <a:ext cx="0" cy="0"/>
+          <a:chOff x="0" y="0"/>
+          <a:chExt cx="0" cy="0"/>
+        </a:xfrm>
+      </p:grpSpPr>
+      <p:sp>
+        <p:nvSpPr>
+          <p:cNvPr id="4" name="Slide Number Placeholder 3"/>
+          <p:cNvSpPr>
+            <a:spLocks noGrp="1"/>
+          </p:cNvSpPr>
+          <p:nvPr>
+            <p:ph type="sldNum" sz="quarter" idx="12"/>
+          </p:nvPr>
+        </p:nvSpPr>
+        <p:spPr>
+          <a:xfrm>
+            <a:off x="11186160" y="6035040"/>
+            <a:ext cx="548640" cy="365760"/>
+          </a:xfrm>
+        </p:spPr>
+        <p:txBody>
+          <a:bodyPr/>
+          <a:lstStyle/>
+          <a:p>
+            <a:fld id="{C1FF6DA9-008F-8B48-92A6-B652298478BF}" type="slidenum">
+              <a:rPr lang="en-US" smtClean="0"/>
+              <a:t>‹#›</a:t>
+            </a:fld>
+            <a:endParaRPr lang="en-US"/>
+          </a:p>
+        </p:txBody>
+      </p:sp>
+      <p:sp>
+        <p:nvSpPr>
+          <p:cNvPr id="5" name="TextBox 4"/>
+          <p:cNvSpPr/>
+          <p:nvPr>
+            <p:ph type="title"/>
+          </p:nvPr>
+        </p:nvSpPr>
+        <p:spPr>
+          <a:xfrm>
+            <a:off x="457200" y="457200"/>
+            <a:ext cx="11277600" cy="768096"/>
+          </a:xfrm>
+          <a:prstGeom prst="rect">
+            <a:avLst/>
+          </a:prstGeom>
+          <a:noFill/>
+        </p:spPr>
+        <p:txBody>
+          <a:bodyPr wrap="none" lIns="0" rIns="0">
+            <a:noAutofit/>
+          </a:bodyPr>
+          <a:lstStyle/>
+          <a:p>
+            <a:pPr algn="l"/>
+            <a:r>
+              <a:rPr sz="4200" b="1" i="0">
+                <a:solidFill>
+                  <a:srgbClr val="D97706"/>
+                </a:solidFill>
+                <a:latin typeface="Arial"/>
+              </a:rPr>
+              <a:t>What We Will Cover</a:t>
+            </a:r>
+          </a:p>
+        </p:txBody>
+      </p:sp>
+      <p:sp>
+        <p:nvSpPr>
+          <p:cNvPr id="6" name="Rectangle 5"/>
+          <p:cNvSpPr/>
+          <p:nvPr>
+            <p:ph type="body" idx="1"/>
+          </p:nvPr>
+        </p:nvSpPr>
+        <p:spPr>
+          <a:xfrm>
+            <a:off x="457200" y="1280160"/>
+            <a:ext cx="11277600" cy="64008"/>
+          </a:xfrm>
+          <a:prstGeom prst="rect">
+            <a:avLst/>
+          </a:prstGeom>
+          <a:solidFill>
+            <a:srgbClr val="D97706"/>
+          </a:solidFill>
+          <a:ln>
+            <a:noFill/>
+          </a:ln>
+          <a:effectLst/>
+        </p:spPr>
+        <p:txBody>
+          <a:bodyPr rtlCol="0" anchor="ctr"/>
+          <a:lstStyle/>
+          <a:p>
+            <a:pPr algn="ctr"/>
+          </a:p>
+        </p:txBody>
+      </p:sp>
+      <p:sp>
+        <p:nvSpPr>
+          <p:cNvPr id="7" name="TextBox 6"/>
+          <p:cNvSpPr/>
+          <p:nvPr>
+            <p:ph type="body" idx="2"/>
+          </p:nvPr>
+        </p:nvSpPr>
+        <p:spPr>
+          <a:xfrm>
+            <a:off x="457200" y="1618488"/>
+            <a:ext cx="951348" cy="518159"/>
+          </a:xfrm>
+          <a:prstGeom prst="rect">
+            <a:avLst/>
+          </a:prstGeom>
+          <a:noFill/>
+        </p:spPr>
+        <p:txBody>
+          <a:bodyPr wrap="none" lIns="0" rIns="0">
+            <a:noAutofit/>
+          </a:bodyPr>
+          <a:lstStyle/>
+          <a:p>
+            <a:pPr algn="l"/>
+            <a:r>
+              <a:rPr sz="3400" b="1" i="0">
+                <a:solidFill>
+                  <a:srgbClr val="D97706"/>
+                </a:solidFill>
+                <a:latin typeface="Arial"/>
+              </a:rPr>
+              <a:t>01</a:t>
+            </a:r>
+          </a:p>
+        </p:txBody>
+      </p:sp>
+      <p:sp>
+        <p:nvSpPr>
+          <p:cNvPr id="8" name="TextBox 7"/>
+          <p:cNvSpPr/>
+          <p:nvPr>
+            <p:ph type="body" idx="3"/>
+          </p:nvPr>
+        </p:nvSpPr>
+        <p:spPr>
+          <a:xfrm>
+            <a:off x="1371600" y="1618488"/>
+            <a:ext cx="10363200" cy="518159"/>
+          </a:xfrm>
+          <a:prstGeom prst="rect">
+            <a:avLst/>
+          </a:prstGeom>
+          <a:noFill/>
+        </p:spPr>
+        <p:txBody>
+          <a:bodyPr wrap="none" lIns="0" rIns="0">
+            <a:noAutofit/>
+          </a:bodyPr>
+          <a:lstStyle/>
+          <a:p>
+            <a:pPr algn="l"/>
+            <a:r>
+              <a:rPr sz="3400" b="0" i="0">
+                <a:solidFill>
                   <a:srgbClr val="1A1A2E"/>
                 </a:solidFill>
                 <a:latin typeface="Arial"/>
               </a:rPr>
-              <a:t>Where We Stand Today</a:t>
+              <a:t>Performance against targets</a:t>
+            </a:r>
+          </a:p>
+        </p:txBody>
+      </p:sp>
+      <p:sp>
+        <p:nvSpPr>
+          <p:cNvPr id="9" name="TextBox 8"/>
+          <p:cNvSpPr/>
+          <p:nvPr>
+            <p:ph type="body" idx="4"/>
+          </p:nvPr>
+        </p:nvSpPr>
+        <p:spPr>
+          <a:xfrm>
+            <a:off x="457200" y="2501798"/>
+            <a:ext cx="951348" cy="518159"/>
+          </a:xfrm>
+          <a:prstGeom prst="rect">
+            <a:avLst/>
+          </a:prstGeom>
+          <a:noFill/>
+        </p:spPr>
+        <p:txBody>
+          <a:bodyPr wrap="none" lIns="0" rIns="0">
+            <a:noAutofit/>
+          </a:bodyPr>
+          <a:lstStyle/>
+          <a:p>
+            <a:pPr algn="l"/>
+            <a:r>
+              <a:rPr sz="3400" b="1" i="0">
+                <a:solidFill>
+                  <a:srgbClr val="D97706"/>
+                </a:solidFill>
+                <a:latin typeface="Arial"/>
+              </a:rPr>
+              <a:t>02</a:t>
+            </a:r>
+          </a:p>
+        </p:txBody>
+      </p:sp>
+      <p:sp>
+        <p:nvSpPr>
+          <p:cNvPr id="10" name="TextBox 9"/>
+          <p:cNvSpPr/>
+          <p:nvPr>
+            <p:ph type="body" idx="5"/>
+          </p:nvPr>
+        </p:nvSpPr>
+        <p:spPr>
+          <a:xfrm>
+            <a:off x="1371600" y="2501798"/>
+            <a:ext cx="10363200" cy="518159"/>
+          </a:xfrm>
+          <a:prstGeom prst="rect">
+            <a:avLst/>
+          </a:prstGeom>
+          <a:noFill/>
+        </p:spPr>
+        <p:txBody>
+          <a:bodyPr wrap="none" lIns="0" rIns="0">
+            <a:noAutofit/>
+          </a:bodyPr>
+          <a:lstStyle/>
+          <a:p>
+            <a:pPr algn="l"/>
+            <a:r>
+              <a:rPr sz="3400" b="0" i="0">
+                <a:solidFill>
+                  <a:srgbClr val="1A1A2E"/>
+                </a:solidFill>
+                <a:latin typeface="Arial"/>
+              </a:rPr>
+              <a:t>Customer and market signals</a:t>
+            </a:r>
+          </a:p>
+        </p:txBody>
+      </p:sp>
+      <p:sp>
+        <p:nvSpPr>
+          <p:cNvPr id="11" name="TextBox 10"/>
+          <p:cNvSpPr/>
+          <p:nvPr>
+            <p:ph type="body" idx="6"/>
+          </p:nvPr>
+        </p:nvSpPr>
+        <p:spPr>
+          <a:xfrm>
+            <a:off x="457200" y="3385108"/>
+            <a:ext cx="951348" cy="518159"/>
+          </a:xfrm>
+          <a:prstGeom prst="rect">
+            <a:avLst/>
+          </a:prstGeom>
+          <a:noFill/>
+        </p:spPr>
+        <p:txBody>
+          <a:bodyPr wrap="none" lIns="0" rIns="0">
+            <a:noAutofit/>
+          </a:bodyPr>
+          <a:lstStyle/>
+          <a:p>
+            <a:pPr algn="l"/>
+            <a:r>
+              <a:rPr sz="3400" b="1" i="0">
+                <a:solidFill>
+                  <a:srgbClr val="D97706"/>
+                </a:solidFill>
+                <a:latin typeface="Arial"/>
+              </a:rPr>
+              <a:t>03</a:t>
+            </a:r>
+          </a:p>
+        </p:txBody>
+      </p:sp>
+      <p:sp>
+        <p:nvSpPr>
+          <p:cNvPr id="12" name="TextBox 11"/>
+          <p:cNvSpPr/>
+          <p:nvPr>
+            <p:ph type="body" idx="7"/>
+          </p:nvPr>
+        </p:nvSpPr>
+        <p:spPr>
+          <a:xfrm>
+            <a:off x="1371600" y="3385108"/>
+            <a:ext cx="10363200" cy="518159"/>
+          </a:xfrm>
+          <a:prstGeom prst="rect">
+            <a:avLst/>
+          </a:prstGeom>
+          <a:noFill/>
+        </p:spPr>
+        <p:txBody>
+          <a:bodyPr wrap="none" lIns="0" rIns="0">
+            <a:noAutofit/>
+          </a:bodyPr>
+          <a:lstStyle/>
+          <a:p>
+            <a:pPr algn="l"/>
+            <a:r>
+              <a:rPr sz="3400" b="0" i="0">
+                <a:solidFill>
+                  <a:srgbClr val="1A1A2E"/>
+                </a:solidFill>
+                <a:latin typeface="Arial"/>
+              </a:rPr>
+              <a:t>Operational health and risks</a:t>
+            </a:r>
+          </a:p>
+        </p:txBody>
+      </p:sp>
+      <p:sp>
+        <p:nvSpPr>
+          <p:cNvPr id="13" name="TextBox 12"/>
+          <p:cNvSpPr/>
+          <p:nvPr>
+            <p:ph type="body" idx="8"/>
+          </p:nvPr>
+        </p:nvSpPr>
+        <p:spPr>
+          <a:xfrm>
+            <a:off x="457200" y="4268418"/>
+            <a:ext cx="951348" cy="518159"/>
+          </a:xfrm>
+          <a:prstGeom prst="rect">
+            <a:avLst/>
+          </a:prstGeom>
+          <a:noFill/>
+        </p:spPr>
+        <p:txBody>
+          <a:bodyPr wrap="none" lIns="0" rIns="0">
+            <a:noAutofit/>
+          </a:bodyPr>
+          <a:lstStyle/>
+          <a:p>
+            <a:pPr algn="l"/>
+            <a:r>
+              <a:rPr sz="3400" b="1" i="0">
+                <a:solidFill>
+                  <a:srgbClr val="D97706"/>
+                </a:solidFill>
+                <a:latin typeface="Arial"/>
+              </a:rPr>
+              <a:t>04</a:t>
+            </a:r>
+          </a:p>
+        </p:txBody>
+      </p:sp>
+      <p:sp>
+        <p:nvSpPr>
+          <p:cNvPr id="14" name="TextBox 13"/>
+          <p:cNvSpPr/>
+          <p:nvPr>
+            <p:ph type="body" idx="9"/>
+          </p:nvPr>
+        </p:nvSpPr>
+        <p:spPr>
+          <a:xfrm>
+            <a:off x="1371600" y="4268418"/>
+            <a:ext cx="10363200" cy="518159"/>
+          </a:xfrm>
+          <a:prstGeom prst="rect">
+            <a:avLst/>
+          </a:prstGeom>
+          <a:noFill/>
+        </p:spPr>
+        <p:txBody>
+          <a:bodyPr wrap="none" lIns="0" rIns="0">
+            <a:noAutofit/>
+          </a:bodyPr>
+          <a:lstStyle/>
+          <a:p>
+            <a:pPr algn="l"/>
+            <a:r>
+              <a:rPr sz="3400" b="0" i="0">
+                <a:solidFill>
+                  <a:srgbClr val="1A1A2E"/>
+                </a:solidFill>
+                <a:latin typeface="Arial"/>
+              </a:rPr>
+              <a:t>Roadmap for next quarter</a:t>
+            </a:r>
+          </a:p>
+        </p:txBody>
+      </p:sp>
+      <p:sp>
+        <p:nvSpPr>
+          <p:cNvPr id="15" name="TextBox 14"/>
+          <p:cNvSpPr/>
+          <p:nvPr>
+            <p:ph type="body" idx="13"/>
+          </p:nvPr>
+        </p:nvSpPr>
+        <p:spPr>
+          <a:xfrm>
+            <a:off x="457200" y="5151728"/>
+            <a:ext cx="951348" cy="518159"/>
+          </a:xfrm>
+          <a:prstGeom prst="rect">
+            <a:avLst/>
+          </a:prstGeom>
+          <a:noFill/>
+        </p:spPr>
+        <p:txBody>
+          <a:bodyPr wrap="none" lIns="0" rIns="0">
+            <a:noAutofit/>
+          </a:bodyPr>
+          <a:lstStyle/>
+          <a:p>
+            <a:pPr algn="l"/>
+            <a:r>
+              <a:rPr sz="3400" b="1" i="0">
+                <a:solidFill>
+                  <a:srgbClr val="D97706"/>
+                </a:solidFill>
+                <a:latin typeface="Arial"/>
+              </a:rPr>
+              <a:t>05</a:t>
+            </a:r>
+          </a:p>
+        </p:txBody>
+      </p:sp>
+      <p:sp>
+        <p:nvSpPr>
+          <p:cNvPr id="16" name="TextBox 15"/>
+          <p:cNvSpPr/>
+          <p:nvPr>
+            <p:ph type="body" idx="14"/>
+          </p:nvPr>
+        </p:nvSpPr>
+        <p:spPr>
+          <a:xfrm>
+            <a:off x="1371600" y="5151728"/>
+            <a:ext cx="10363200" cy="518159"/>
+          </a:xfrm>
+          <a:prstGeom prst="rect">
+            <a:avLst/>
+          </a:prstGeom>
+          <a:noFill/>
+        </p:spPr>
+        <p:txBody>
+          <a:bodyPr wrap="none" lIns="0" rIns="0">
+            <a:noAutofit/>
+          </a:bodyPr>
+          <a:lstStyle/>
+          <a:p>
+            <a:pPr algn="l"/>
+            <a:r>
+              <a:rPr sz="3400" b="0" i="0">
+                <a:solidFill>
+                  <a:srgbClr val="1A1A2E"/>
+                </a:solidFill>
+                <a:latin typeface="Arial"/>
+              </a:rPr>
+              <a:t>Decisions we need today</a:t>
             </a:r>
           </a:p>
         </p:txBody>
@@ -3320,511 +3426,6 @@
 
 <file path=ppt/slideLayouts/slideLayout20.xml><?xml version="1.0" encoding="utf-8"?>
 <p:sldLayout xmlns:a="http://schemas.openxmlformats.org/drawingml/2006/main" xmlns:r="http://schemas.openxmlformats.org/officeDocument/2006/relationships" xmlns:p="http://schemas.openxmlformats.org/presentationml/2006/main" type="blank" preserve="1">
-  <p:cSld name="slidekit · Agenda">
-    <p:bg>
-      <p:bgPr>
-        <a:solidFill>
-          <a:srgbClr val="FFFFFF"/>
-        </a:solidFill>
-        <a:effectLst/>
-      </p:bgPr>
-    </p:bg>
-    <p:spTree>
-      <p:nvGrpSpPr>
-        <p:cNvPr id="1" name=""/>
-        <p:cNvGrpSpPr/>
-        <p:nvPr/>
-      </p:nvGrpSpPr>
-      <p:grpSpPr>
-        <a:xfrm>
-          <a:off x="0" y="0"/>
-          <a:ext cx="0" cy="0"/>
-          <a:chOff x="0" y="0"/>
-          <a:chExt cx="0" cy="0"/>
-        </a:xfrm>
-      </p:grpSpPr>
-      <p:sp>
-        <p:nvSpPr>
-          <p:cNvPr id="4" name="Slide Number Placeholder 3"/>
-          <p:cNvSpPr>
-            <a:spLocks noGrp="1"/>
-          </p:cNvSpPr>
-          <p:nvPr>
-            <p:ph type="sldNum" sz="quarter" idx="12"/>
-          </p:nvPr>
-        </p:nvSpPr>
-        <p:spPr>
-          <a:xfrm>
-            <a:off x="10363200" y="6035040"/>
-            <a:ext cx="1371600" cy="365760"/>
-          </a:xfrm>
-        </p:spPr>
-        <p:txBody>
-          <a:bodyPr/>
-          <a:lstStyle/>
-          <a:p>
-            <a:fld id="{C1FF6DA9-008F-8B48-92A6-B652298478BF}" type="slidenum">
-              <a:rPr lang="en-US" smtClean="0"/>
-              <a:t>‹#›</a:t>
-            </a:fld>
-            <a:endParaRPr lang="en-US"/>
-          </a:p>
-        </p:txBody>
-      </p:sp>
-      <p:sp>
-        <p:nvSpPr>
-          <p:cNvPr id="5" name="TextBox 4"/>
-          <p:cNvSpPr/>
-          <p:nvPr>
-            <p:ph type="title"/>
-          </p:nvPr>
-        </p:nvSpPr>
-        <p:spPr>
-          <a:xfrm>
-            <a:off x="457200" y="457200"/>
-            <a:ext cx="11277600" cy="768096"/>
-          </a:xfrm>
-          <a:prstGeom prst="rect">
-            <a:avLst/>
-          </a:prstGeom>
-          <a:noFill/>
-        </p:spPr>
-        <p:txBody>
-          <a:bodyPr wrap="none" lIns="0" rIns="0">
-            <a:noAutofit/>
-          </a:bodyPr>
-          <a:lstStyle/>
-          <a:p>
-            <a:pPr algn="l"/>
-            <a:r>
-              <a:rPr sz="4200" b="1" i="0">
-                <a:solidFill>
-                  <a:srgbClr val="1A1A2E"/>
-                </a:solidFill>
-                <a:latin typeface="Arial"/>
-              </a:rPr>
-              <a:t>What We Will Cover</a:t>
-            </a:r>
-          </a:p>
-        </p:txBody>
-      </p:sp>
-      <p:sp>
-        <p:nvSpPr>
-          <p:cNvPr id="6" name="Rectangle 5"/>
-          <p:cNvSpPr/>
-          <p:nvPr>
-            <p:ph type="body" idx="1"/>
-          </p:nvPr>
-        </p:nvSpPr>
-        <p:spPr>
-          <a:xfrm>
-            <a:off x="457200" y="1280160"/>
-            <a:ext cx="11277600" cy="64008"/>
-          </a:xfrm>
-          <a:prstGeom prst="rect">
-            <a:avLst/>
-          </a:prstGeom>
-          <a:solidFill>
-            <a:srgbClr val="D97706"/>
-          </a:solidFill>
-          <a:ln>
-            <a:noFill/>
-          </a:ln>
-          <a:effectLst/>
-        </p:spPr>
-        <p:txBody>
-          <a:bodyPr rtlCol="0" anchor="ctr"/>
-          <a:lstStyle/>
-          <a:p>
-            <a:pPr algn="ctr"/>
-          </a:p>
-        </p:txBody>
-      </p:sp>
-      <p:sp>
-        <p:nvSpPr>
-          <p:cNvPr id="7" name="TextBox 6"/>
-          <p:cNvSpPr/>
-          <p:nvPr>
-            <p:ph type="body" idx="2"/>
-          </p:nvPr>
-        </p:nvSpPr>
-        <p:spPr>
-          <a:xfrm>
-            <a:off x="457200" y="1618488"/>
-            <a:ext cx="951348" cy="518159"/>
-          </a:xfrm>
-          <a:prstGeom prst="rect">
-            <a:avLst/>
-          </a:prstGeom>
-          <a:noFill/>
-        </p:spPr>
-        <p:txBody>
-          <a:bodyPr wrap="none" lIns="0" rIns="0">
-            <a:noAutofit/>
-          </a:bodyPr>
-          <a:lstStyle/>
-          <a:p>
-            <a:pPr algn="l"/>
-            <a:r>
-              <a:rPr sz="3400" b="1" i="0">
-                <a:solidFill>
-                  <a:srgbClr val="D97706"/>
-                </a:solidFill>
-                <a:latin typeface="Arial"/>
-              </a:rPr>
-              <a:t>01</a:t>
-            </a:r>
-          </a:p>
-        </p:txBody>
-      </p:sp>
-      <p:sp>
-        <p:nvSpPr>
-          <p:cNvPr id="8" name="TextBox 7"/>
-          <p:cNvSpPr/>
-          <p:nvPr>
-            <p:ph type="body" idx="3"/>
-          </p:nvPr>
-        </p:nvSpPr>
-        <p:spPr>
-          <a:xfrm>
-            <a:off x="1371600" y="1618488"/>
-            <a:ext cx="10363200" cy="518159"/>
-          </a:xfrm>
-          <a:prstGeom prst="rect">
-            <a:avLst/>
-          </a:prstGeom>
-          <a:noFill/>
-        </p:spPr>
-        <p:txBody>
-          <a:bodyPr wrap="none" lIns="0" rIns="0">
-            <a:noAutofit/>
-          </a:bodyPr>
-          <a:lstStyle/>
-          <a:p>
-            <a:pPr algn="l"/>
-            <a:r>
-              <a:rPr sz="3400" b="0" i="0">
-                <a:solidFill>
-                  <a:srgbClr val="1A1A2E"/>
-                </a:solidFill>
-                <a:latin typeface="Arial"/>
-              </a:rPr>
-              <a:t>Performance against targets</a:t>
-            </a:r>
-          </a:p>
-        </p:txBody>
-      </p:sp>
-      <p:sp>
-        <p:nvSpPr>
-          <p:cNvPr id="9" name="TextBox 8"/>
-          <p:cNvSpPr/>
-          <p:nvPr>
-            <p:ph type="body" idx="4"/>
-          </p:nvPr>
-        </p:nvSpPr>
-        <p:spPr>
-          <a:xfrm>
-            <a:off x="457200" y="2501798"/>
-            <a:ext cx="951348" cy="518159"/>
-          </a:xfrm>
-          <a:prstGeom prst="rect">
-            <a:avLst/>
-          </a:prstGeom>
-          <a:noFill/>
-        </p:spPr>
-        <p:txBody>
-          <a:bodyPr wrap="none" lIns="0" rIns="0">
-            <a:noAutofit/>
-          </a:bodyPr>
-          <a:lstStyle/>
-          <a:p>
-            <a:pPr algn="l"/>
-            <a:r>
-              <a:rPr sz="3400" b="1" i="0">
-                <a:solidFill>
-                  <a:srgbClr val="D97706"/>
-                </a:solidFill>
-                <a:latin typeface="Arial"/>
-              </a:rPr>
-              <a:t>02</a:t>
-            </a:r>
-          </a:p>
-        </p:txBody>
-      </p:sp>
-      <p:sp>
-        <p:nvSpPr>
-          <p:cNvPr id="10" name="TextBox 9"/>
-          <p:cNvSpPr/>
-          <p:nvPr>
-            <p:ph type="body" idx="5"/>
-          </p:nvPr>
-        </p:nvSpPr>
-        <p:spPr>
-          <a:xfrm>
-            <a:off x="1371600" y="2501798"/>
-            <a:ext cx="10363200" cy="518159"/>
-          </a:xfrm>
-          <a:prstGeom prst="rect">
-            <a:avLst/>
-          </a:prstGeom>
-          <a:noFill/>
-        </p:spPr>
-        <p:txBody>
-          <a:bodyPr wrap="none" lIns="0" rIns="0">
-            <a:noAutofit/>
-          </a:bodyPr>
-          <a:lstStyle/>
-          <a:p>
-            <a:pPr algn="l"/>
-            <a:r>
-              <a:rPr sz="3400" b="0" i="0">
-                <a:solidFill>
-                  <a:srgbClr val="1A1A2E"/>
-                </a:solidFill>
-                <a:latin typeface="Arial"/>
-              </a:rPr>
-              <a:t>Customer and market signals</a:t>
-            </a:r>
-          </a:p>
-        </p:txBody>
-      </p:sp>
-      <p:sp>
-        <p:nvSpPr>
-          <p:cNvPr id="11" name="TextBox 10"/>
-          <p:cNvSpPr/>
-          <p:nvPr>
-            <p:ph type="body" idx="6"/>
-          </p:nvPr>
-        </p:nvSpPr>
-        <p:spPr>
-          <a:xfrm>
-            <a:off x="457200" y="3385108"/>
-            <a:ext cx="951348" cy="518159"/>
-          </a:xfrm>
-          <a:prstGeom prst="rect">
-            <a:avLst/>
-          </a:prstGeom>
-          <a:noFill/>
-        </p:spPr>
-        <p:txBody>
-          <a:bodyPr wrap="none" lIns="0" rIns="0">
-            <a:noAutofit/>
-          </a:bodyPr>
-          <a:lstStyle/>
-          <a:p>
-            <a:pPr algn="l"/>
-            <a:r>
-              <a:rPr sz="3400" b="1" i="0">
-                <a:solidFill>
-                  <a:srgbClr val="D97706"/>
-                </a:solidFill>
-                <a:latin typeface="Arial"/>
-              </a:rPr>
-              <a:t>03</a:t>
-            </a:r>
-          </a:p>
-        </p:txBody>
-      </p:sp>
-      <p:sp>
-        <p:nvSpPr>
-          <p:cNvPr id="12" name="TextBox 11"/>
-          <p:cNvSpPr/>
-          <p:nvPr>
-            <p:ph type="body" idx="7"/>
-          </p:nvPr>
-        </p:nvSpPr>
-        <p:spPr>
-          <a:xfrm>
-            <a:off x="1371600" y="3385108"/>
-            <a:ext cx="10363200" cy="518159"/>
-          </a:xfrm>
-          <a:prstGeom prst="rect">
-            <a:avLst/>
-          </a:prstGeom>
-          <a:noFill/>
-        </p:spPr>
-        <p:txBody>
-          <a:bodyPr wrap="none" lIns="0" rIns="0">
-            <a:noAutofit/>
-          </a:bodyPr>
-          <a:lstStyle/>
-          <a:p>
-            <a:pPr algn="l"/>
-            <a:r>
-              <a:rPr sz="3400" b="0" i="0">
-                <a:solidFill>
-                  <a:srgbClr val="1A1A2E"/>
-                </a:solidFill>
-                <a:latin typeface="Arial"/>
-              </a:rPr>
-              <a:t>Operational health and risks</a:t>
-            </a:r>
-          </a:p>
-        </p:txBody>
-      </p:sp>
-      <p:sp>
-        <p:nvSpPr>
-          <p:cNvPr id="13" name="TextBox 12"/>
-          <p:cNvSpPr/>
-          <p:nvPr>
-            <p:ph type="body" idx="8"/>
-          </p:nvPr>
-        </p:nvSpPr>
-        <p:spPr>
-          <a:xfrm>
-            <a:off x="457200" y="4268418"/>
-            <a:ext cx="951348" cy="518159"/>
-          </a:xfrm>
-          <a:prstGeom prst="rect">
-            <a:avLst/>
-          </a:prstGeom>
-          <a:noFill/>
-        </p:spPr>
-        <p:txBody>
-          <a:bodyPr wrap="none" lIns="0" rIns="0">
-            <a:noAutofit/>
-          </a:bodyPr>
-          <a:lstStyle/>
-          <a:p>
-            <a:pPr algn="l"/>
-            <a:r>
-              <a:rPr sz="3400" b="1" i="0">
-                <a:solidFill>
-                  <a:srgbClr val="D97706"/>
-                </a:solidFill>
-                <a:latin typeface="Arial"/>
-              </a:rPr>
-              <a:t>04</a:t>
-            </a:r>
-          </a:p>
-        </p:txBody>
-      </p:sp>
-      <p:sp>
-        <p:nvSpPr>
-          <p:cNvPr id="14" name="TextBox 13"/>
-          <p:cNvSpPr/>
-          <p:nvPr>
-            <p:ph type="body" idx="9"/>
-          </p:nvPr>
-        </p:nvSpPr>
-        <p:spPr>
-          <a:xfrm>
-            <a:off x="1371600" y="4268418"/>
-            <a:ext cx="10363200" cy="518159"/>
-          </a:xfrm>
-          <a:prstGeom prst="rect">
-            <a:avLst/>
-          </a:prstGeom>
-          <a:noFill/>
-        </p:spPr>
-        <p:txBody>
-          <a:bodyPr wrap="none" lIns="0" rIns="0">
-            <a:noAutofit/>
-          </a:bodyPr>
-          <a:lstStyle/>
-          <a:p>
-            <a:pPr algn="l"/>
-            <a:r>
-              <a:rPr sz="3400" b="0" i="0">
-                <a:solidFill>
-                  <a:srgbClr val="1A1A2E"/>
-                </a:solidFill>
-                <a:latin typeface="Arial"/>
-              </a:rPr>
-              <a:t>Roadmap for next quarter</a:t>
-            </a:r>
-          </a:p>
-        </p:txBody>
-      </p:sp>
-      <p:sp>
-        <p:nvSpPr>
-          <p:cNvPr id="15" name="TextBox 14"/>
-          <p:cNvSpPr/>
-          <p:nvPr>
-            <p:ph type="body" idx="13"/>
-          </p:nvPr>
-        </p:nvSpPr>
-        <p:spPr>
-          <a:xfrm>
-            <a:off x="457200" y="5151728"/>
-            <a:ext cx="951348" cy="518159"/>
-          </a:xfrm>
-          <a:prstGeom prst="rect">
-            <a:avLst/>
-          </a:prstGeom>
-          <a:noFill/>
-        </p:spPr>
-        <p:txBody>
-          <a:bodyPr wrap="none" lIns="0" rIns="0">
-            <a:noAutofit/>
-          </a:bodyPr>
-          <a:lstStyle/>
-          <a:p>
-            <a:pPr algn="l"/>
-            <a:r>
-              <a:rPr sz="3400" b="1" i="0">
-                <a:solidFill>
-                  <a:srgbClr val="D97706"/>
-                </a:solidFill>
-                <a:latin typeface="Arial"/>
-              </a:rPr>
-              <a:t>05</a:t>
-            </a:r>
-          </a:p>
-        </p:txBody>
-      </p:sp>
-      <p:sp>
-        <p:nvSpPr>
-          <p:cNvPr id="16" name="TextBox 15"/>
-          <p:cNvSpPr/>
-          <p:nvPr>
-            <p:ph type="body" idx="14"/>
-          </p:nvPr>
-        </p:nvSpPr>
-        <p:spPr>
-          <a:xfrm>
-            <a:off x="1371600" y="5151728"/>
-            <a:ext cx="10363200" cy="518159"/>
-          </a:xfrm>
-          <a:prstGeom prst="rect">
-            <a:avLst/>
-          </a:prstGeom>
-          <a:noFill/>
-        </p:spPr>
-        <p:txBody>
-          <a:bodyPr wrap="none" lIns="0" rIns="0">
-            <a:noAutofit/>
-          </a:bodyPr>
-          <a:lstStyle/>
-          <a:p>
-            <a:pPr algn="l"/>
-            <a:r>
-              <a:rPr sz="3400" b="0" i="0">
-                <a:solidFill>
-                  <a:srgbClr val="1A1A2E"/>
-                </a:solidFill>
-                <a:latin typeface="Arial"/>
-              </a:rPr>
-              <a:t>Decisions we need today</a:t>
-            </a:r>
-          </a:p>
-        </p:txBody>
-      </p:sp>
-    </p:spTree>
-    <p:extLst>
-      <p:ext uri="{BB962C8B-B14F-4D97-AF65-F5344CB8AC3E}">
-        <p14:creationId xmlns:p14="http://schemas.microsoft.com/office/powerpoint/2010/main" val="1212999818"/>
-      </p:ext>
-    </p:extLst>
-  </p:cSld>
-  <p:clrMapOvr>
-    <a:masterClrMapping/>
-  </p:clrMapOvr>
-</p:sldLayout>
-</file>
-
-<file path=ppt/slideLayouts/slideLayout21.xml><?xml version="1.0" encoding="utf-8"?>
-<p:sldLayout xmlns:a="http://schemas.openxmlformats.org/drawingml/2006/main" xmlns:r="http://schemas.openxmlformats.org/officeDocument/2006/relationships" xmlns:p="http://schemas.openxmlformats.org/presentationml/2006/main" type="blank" preserve="1">
   <p:cSld name="slidekit · Big Number">
     <p:bg>
       <p:bgPr>
@@ -3860,8 +3461,8 @@
         </p:nvSpPr>
         <p:spPr>
           <a:xfrm>
-            <a:off x="10363200" y="6035040"/>
-            <a:ext cx="1371600" cy="365760"/>
+            <a:off x="11186160" y="6035040"/>
+            <a:ext cx="548640" cy="365760"/>
           </a:xfrm>
         </p:spPr>
         <p:txBody>
@@ -3995,7 +3596,7 @@
 </p:sldLayout>
 </file>
 
-<file path=ppt/slideLayouts/slideLayout22.xml><?xml version="1.0" encoding="utf-8"?>
+<file path=ppt/slideLayouts/slideLayout21.xml><?xml version="1.0" encoding="utf-8"?>
 <p:sldLayout xmlns:a="http://schemas.openxmlformats.org/drawingml/2006/main" xmlns:r="http://schemas.openxmlformats.org/officeDocument/2006/relationships" xmlns:p="http://schemas.openxmlformats.org/presentationml/2006/main" type="blank" preserve="1">
   <p:cSld name="slidekit · Pull Quote">
     <p:bg>
@@ -4032,8 +3633,8 @@
         </p:nvSpPr>
         <p:spPr>
           <a:xfrm>
-            <a:off x="10363200" y="6035040"/>
-            <a:ext cx="1371600" cy="365760"/>
+            <a:off x="11186160" y="6035040"/>
+            <a:ext cx="548640" cy="365760"/>
           </a:xfrm>
         </p:spPr>
         <p:txBody>
@@ -4058,8 +3659,8 @@
         </p:nvSpPr>
         <p:spPr>
           <a:xfrm>
-            <a:off x="457200" y="2301240"/>
-            <a:ext cx="128016" cy="2255520"/>
+            <a:off x="457200" y="2621280"/>
+            <a:ext cx="128016" cy="1615440"/>
           </a:xfrm>
           <a:prstGeom prst="rect">
             <a:avLst/>
@@ -4090,16 +3691,16 @@
         </p:nvSpPr>
         <p:spPr>
           <a:xfrm>
-            <a:off x="996696" y="2301240"/>
-            <a:ext cx="10738104" cy="1371600"/>
-          </a:xfrm>
-          <a:prstGeom prst="rect">
-            <a:avLst/>
-          </a:prstGeom>
-          <a:noFill/>
-        </p:spPr>
-        <p:txBody>
-          <a:bodyPr wrap="square" lIns="0" rIns="0">
+            <a:off x="996696" y="2621280"/>
+            <a:ext cx="11195304" cy="731520"/>
+          </a:xfrm>
+          <a:prstGeom prst="rect">
+            <a:avLst/>
+          </a:prstGeom>
+          <a:noFill/>
+        </p:spPr>
+        <p:txBody>
+          <a:bodyPr wrap="none" lIns="0" rIns="0">
             <a:noAutofit/>
           </a:bodyPr>
           <a:lstStyle/>
@@ -4112,7 +3713,7 @@
                 </a:solidFill>
                 <a:latin typeface="Arial"/>
               </a:rPr>
-              <a:t>"We stopped buying tools and started buying outcomes."</a:t>
+              <a:t>"We buy outcomes, not tools."</a:t>
             </a:r>
           </a:p>
         </p:txBody>
@@ -4127,7 +3728,7 @@
         </p:nvSpPr>
         <p:spPr>
           <a:xfrm>
-            <a:off x="996696" y="3947160"/>
+            <a:off x="996696" y="3627120"/>
             <a:ext cx="11195304" cy="609600"/>
           </a:xfrm>
           <a:prstGeom prst="rect">
@@ -4145,7 +3746,7 @@
             <a:r>
               <a:rPr sz="3400" b="0" i="0">
                 <a:solidFill>
-                  <a:srgbClr val="7A8590"/>
+                  <a:srgbClr val="1A1A2E"/>
                 </a:solidFill>
                 <a:latin typeface="Arial"/>
               </a:rPr>
@@ -4167,7 +3768,7 @@
 </p:sldLayout>
 </file>
 
-<file path=ppt/slideLayouts/slideLayout23.xml><?xml version="1.0" encoding="utf-8"?>
+<file path=ppt/slideLayouts/slideLayout22.xml><?xml version="1.0" encoding="utf-8"?>
 <p:sldLayout xmlns:a="http://schemas.openxmlformats.org/drawingml/2006/main" xmlns:r="http://schemas.openxmlformats.org/officeDocument/2006/relationships" xmlns:p="http://schemas.openxmlformats.org/presentationml/2006/main" type="blank" preserve="1">
   <p:cSld name="slidekit · Definition">
     <p:bg>
@@ -4204,8 +3805,8 @@
         </p:nvSpPr>
         <p:spPr>
           <a:xfrm>
-            <a:off x="10363200" y="6035040"/>
-            <a:ext cx="1371600" cy="365760"/>
+            <a:off x="11186160" y="6035040"/>
+            <a:ext cx="548640" cy="365760"/>
           </a:xfrm>
         </p:spPr>
         <p:txBody>
@@ -4230,8 +3831,8 @@
         </p:nvSpPr>
         <p:spPr>
           <a:xfrm>
-            <a:off x="457200" y="1965960"/>
-            <a:ext cx="128016" cy="2926080"/>
+            <a:off x="457200" y="2484120"/>
+            <a:ext cx="128016" cy="1889760"/>
           </a:xfrm>
           <a:prstGeom prst="rect">
             <a:avLst/>
@@ -4262,7 +3863,7 @@
         </p:nvSpPr>
         <p:spPr>
           <a:xfrm>
-            <a:off x="996696" y="1965960"/>
+            <a:off x="996696" y="2484120"/>
             <a:ext cx="11195304" cy="1005840"/>
           </a:xfrm>
           <a:prstGeom prst="rect">
@@ -4299,16 +3900,16 @@
         </p:nvSpPr>
         <p:spPr>
           <a:xfrm>
-            <a:off x="996696" y="3246120"/>
-            <a:ext cx="10738104" cy="1645920"/>
-          </a:xfrm>
-          <a:prstGeom prst="rect">
-            <a:avLst/>
-          </a:prstGeom>
-          <a:noFill/>
-        </p:spPr>
-        <p:txBody>
-          <a:bodyPr wrap="square" lIns="0" rIns="0">
+            <a:off x="996696" y="3764280"/>
+            <a:ext cx="11195304" cy="609600"/>
+          </a:xfrm>
+          <a:prstGeom prst="rect">
+            <a:avLst/>
+          </a:prstGeom>
+          <a:noFill/>
+        </p:spPr>
+        <p:txBody>
+          <a:bodyPr wrap="none" lIns="0" rIns="0">
             <a:noAutofit/>
           </a:bodyPr>
           <a:lstStyle/>
@@ -4321,7 +3922,7 @@
                 </a:solidFill>
                 <a:latin typeface="Arial"/>
               </a:rPr>
-              <a:t>The percentage of recurring revenue retained from existing customers over a period, including expansion and after churn.</a:t>
+              <a:t>Revenue kept from existing customers.</a:t>
             </a:r>
           </a:p>
         </p:txBody>
@@ -4339,7 +3940,7 @@
 </p:sldLayout>
 </file>
 
-<file path=ppt/slideLayouts/slideLayout24.xml><?xml version="1.0" encoding="utf-8"?>
+<file path=ppt/slideLayouts/slideLayout23.xml><?xml version="1.0" encoding="utf-8"?>
 <p:sldLayout xmlns:a="http://schemas.openxmlformats.org/drawingml/2006/main" xmlns:r="http://schemas.openxmlformats.org/officeDocument/2006/relationships" xmlns:p="http://schemas.openxmlformats.org/presentationml/2006/main" type="blank" preserve="1">
   <p:cSld name="slidekit · Question">
     <p:bg>
@@ -4376,8 +3977,8 @@
         </p:nvSpPr>
         <p:spPr>
           <a:xfrm>
-            <a:off x="10363200" y="6035040"/>
-            <a:ext cx="1371600" cy="365760"/>
+            <a:off x="11186160" y="6035040"/>
+            <a:ext cx="548640" cy="365760"/>
           </a:xfrm>
         </p:spPr>
         <p:txBody>
@@ -4402,8 +4003,8 @@
         </p:nvSpPr>
         <p:spPr>
           <a:xfrm>
-            <a:off x="457200" y="2011680"/>
-            <a:ext cx="128016" cy="2834640"/>
+            <a:off x="457200" y="2926080"/>
+            <a:ext cx="128016" cy="1005840"/>
           </a:xfrm>
           <a:prstGeom prst="rect">
             <a:avLst/>
@@ -4434,16 +4035,16 @@
         </p:nvSpPr>
         <p:spPr>
           <a:xfrm>
-            <a:off x="996696" y="2011680"/>
-            <a:ext cx="10738104" cy="2834640"/>
-          </a:xfrm>
-          <a:prstGeom prst="rect">
-            <a:avLst/>
-          </a:prstGeom>
-          <a:noFill/>
-        </p:spPr>
-        <p:txBody>
-          <a:bodyPr wrap="square" lIns="0" rIns="0">
+            <a:off x="996696" y="2926080"/>
+            <a:ext cx="11195304" cy="1005840"/>
+          </a:xfrm>
+          <a:prstGeom prst="rect">
+            <a:avLst/>
+          </a:prstGeom>
+          <a:noFill/>
+        </p:spPr>
+        <p:txBody>
+          <a:bodyPr wrap="none" lIns="0" rIns="0">
             <a:noAutofit/>
           </a:bodyPr>
           <a:lstStyle/>
@@ -4456,7 +4057,7 @@
                 </a:solidFill>
                 <a:latin typeface="Arial"/>
               </a:rPr>
-              <a:t>What would we build if we trusted our customers completely?</a:t>
+              <a:t>What if we trusted users?</a:t>
             </a:r>
           </a:p>
         </p:txBody>
@@ -4474,7 +4075,7 @@
 </p:sldLayout>
 </file>
 
-<file path=ppt/slideLayouts/slideLayout25.xml><?xml version="1.0" encoding="utf-8"?>
+<file path=ppt/slideLayouts/slideLayout24.xml><?xml version="1.0" encoding="utf-8"?>
 <p:sldLayout xmlns:a="http://schemas.openxmlformats.org/drawingml/2006/main" xmlns:r="http://schemas.openxmlformats.org/officeDocument/2006/relationships" xmlns:p="http://schemas.openxmlformats.org/presentationml/2006/main" type="blank" preserve="1">
   <p:cSld name="slidekit · Bullet List">
     <p:bg>
@@ -4511,8 +4112,8 @@
         </p:nvSpPr>
         <p:spPr>
           <a:xfrm>
-            <a:off x="10363200" y="6035040"/>
-            <a:ext cx="1371600" cy="365760"/>
+            <a:off x="11186160" y="6035040"/>
+            <a:ext cx="548640" cy="365760"/>
           </a:xfrm>
         </p:spPr>
         <p:txBody>
@@ -4555,7 +4156,7 @@
             <a:r>
               <a:rPr sz="4200" b="1" i="0">
                 <a:solidFill>
-                  <a:srgbClr val="1A1A2E"/>
+                  <a:srgbClr val="D97706"/>
                 </a:solidFill>
                 <a:latin typeface="Arial"/>
               </a:rPr>
@@ -4688,7 +4289,7 @@
 </p:sldLayout>
 </file>
 
-<file path=ppt/slideLayouts/slideLayout26.xml><?xml version="1.0" encoding="utf-8"?>
+<file path=ppt/slideLayouts/slideLayout25.xml><?xml version="1.0" encoding="utf-8"?>
 <p:sldLayout xmlns:a="http://schemas.openxmlformats.org/drawingml/2006/main" xmlns:r="http://schemas.openxmlformats.org/officeDocument/2006/relationships" xmlns:p="http://schemas.openxmlformats.org/presentationml/2006/main" type="blank" preserve="1">
   <p:cSld name="slidekit · Code Block">
     <p:bg>
@@ -4725,8 +4326,8 @@
         </p:nvSpPr>
         <p:spPr>
           <a:xfrm>
-            <a:off x="10363200" y="6035040"/>
-            <a:ext cx="1371600" cy="365760"/>
+            <a:off x="11186160" y="6035040"/>
+            <a:ext cx="548640" cy="365760"/>
           </a:xfrm>
         </p:spPr>
         <p:txBody>
@@ -4758,7 +4359,7 @@
             <a:avLst/>
           </a:prstGeom>
           <a:solidFill>
-            <a:srgbClr val="FF5F56"/>
+            <a:srgbClr val="FFFFFF"/>
           </a:solidFill>
           <a:ln>
             <a:noFill/>
@@ -4790,7 +4391,7 @@
             <a:avLst/>
           </a:prstGeom>
           <a:solidFill>
-            <a:srgbClr val="FFBD2E"/>
+            <a:srgbClr val="FFFFFF"/>
           </a:solidFill>
           <a:ln>
             <a:noFill/>
@@ -4822,7 +4423,7 @@
             <a:avLst/>
           </a:prstGeom>
           <a:solidFill>
-            <a:srgbClr val="27C93F"/>
+            <a:srgbClr val="FFFFFF"/>
           </a:solidFill>
           <a:ln>
             <a:noFill/>
@@ -4865,7 +4466,7 @@
             <a:r>
               <a:rPr sz="4200" b="0" i="0">
                 <a:solidFill>
-                  <a:srgbClr val="D4D4D4"/>
+                  <a:srgbClr val="FFFFFF"/>
                 </a:solidFill>
                 <a:latin typeface="Arial"/>
               </a:rPr>
@@ -4902,7 +4503,7 @@
             <a:r>
               <a:rPr sz="3400" b="0" i="0">
                 <a:solidFill>
-                  <a:srgbClr val="6A9955"/>
+                  <a:srgbClr val="FFFFFF"/>
                 </a:solidFill>
                 <a:latin typeface="Arial"/>
               </a:rPr>
@@ -4959,7 +4560,7 @@
         <p:spPr>
           <a:xfrm>
             <a:off x="1057461" y="2356103"/>
-            <a:ext cx="302848" cy="518159"/>
+            <a:ext cx="2524382" cy="518159"/>
           </a:xfrm>
           <a:prstGeom prst="rect">
             <a:avLst/>
@@ -4976,11 +4577,11 @@
             <a:r>
               <a:rPr sz="3400" b="0" i="0">
                 <a:solidFill>
-                  <a:srgbClr val="D4D4D4"/>
-                </a:solidFill>
-                <a:latin typeface="Arial"/>
-              </a:rPr>
-              <a:t> </a:t>
+                  <a:srgbClr val="FFFFFF"/>
+                </a:solidFill>
+                <a:latin typeface="Arial"/>
+              </a:rPr>
+              <a:t> main():</a:t>
             </a:r>
           </a:p>
         </p:txBody>
@@ -4995,8 +4596,8 @@
         </p:nvSpPr>
         <p:spPr>
           <a:xfrm>
-            <a:off x="1177429" y="2356103"/>
-            <a:ext cx="1680348" cy="518159"/>
+            <a:off x="457200" y="2874262"/>
+            <a:ext cx="7046475" cy="518159"/>
           </a:xfrm>
           <a:prstGeom prst="rect">
             <a:avLst/>
@@ -5013,11 +4614,11 @@
             <a:r>
               <a:rPr sz="3400" b="0" i="0">
                 <a:solidFill>
-                  <a:srgbClr val="DCDCAA"/>
-                </a:solidFill>
-                <a:latin typeface="Arial"/>
-              </a:rPr>
-              <a:t>main</a:t>
+                  <a:srgbClr val="FFFFFF"/>
+                </a:solidFill>
+                <a:latin typeface="Arial"/>
+              </a:rPr>
+              <a:t>    print("Hello, world!")</a:t>
             </a:r>
           </a:p>
         </p:txBody>
@@ -5032,8 +4633,8 @@
         </p:nvSpPr>
         <p:spPr>
           <a:xfrm>
-            <a:off x="2113347" y="2356103"/>
-            <a:ext cx="834964" cy="518159"/>
+            <a:off x="457200" y="3910580"/>
+            <a:ext cx="2140486" cy="518159"/>
           </a:xfrm>
           <a:prstGeom prst="rect">
             <a:avLst/>
@@ -5050,11 +4651,11 @@
             <a:r>
               <a:rPr sz="3400" b="0" i="0">
                 <a:solidFill>
-                  <a:srgbClr val="D4D4D4"/>
-                </a:solidFill>
-                <a:latin typeface="Arial"/>
-              </a:rPr>
-              <a:t>():</a:t>
+                  <a:srgbClr val="FFFFFF"/>
+                </a:solidFill>
+                <a:latin typeface="Arial"/>
+              </a:rPr>
+              <a:t>main()</a:t>
             </a:r>
           </a:p>
         </p:txBody>
@@ -5065,265 +4666,6 @@
           <p:cNvSpPr/>
           <p:nvPr>
             <p:ph type="body" idx="13"/>
-          </p:nvPr>
-        </p:nvSpPr>
-        <p:spPr>
-          <a:xfrm>
-            <a:off x="457200" y="2874262"/>
-            <a:ext cx="662751" cy="518159"/>
-          </a:xfrm>
-          <a:prstGeom prst="rect">
-            <a:avLst/>
-          </a:prstGeom>
-          <a:noFill/>
-        </p:spPr>
-        <p:txBody>
-          <a:bodyPr wrap="none" lIns="0" rIns="0">
-            <a:noAutofit/>
-          </a:bodyPr>
-          <a:lstStyle/>
-          <a:p>
-            <a:pPr algn="l"/>
-            <a:r>
-              <a:rPr sz="3400" b="0" i="0">
-                <a:solidFill>
-                  <a:srgbClr val="D4D4D4"/>
-                </a:solidFill>
-                <a:latin typeface="Arial"/>
-              </a:rPr>
-              <a:t>    </a:t>
-            </a:r>
-          </a:p>
-        </p:txBody>
-      </p:sp>
-      <p:sp>
-        <p:nvSpPr>
-          <p:cNvPr id="15" name="TextBox 14"/>
-          <p:cNvSpPr/>
-          <p:nvPr>
-            <p:ph type="body" idx="14"/>
-          </p:nvPr>
-        </p:nvSpPr>
-        <p:spPr>
-          <a:xfrm>
-            <a:off x="937071" y="2874262"/>
-            <a:ext cx="1526857" cy="518159"/>
-          </a:xfrm>
-          <a:prstGeom prst="rect">
-            <a:avLst/>
-          </a:prstGeom>
-          <a:noFill/>
-        </p:spPr>
-        <p:txBody>
-          <a:bodyPr wrap="none" lIns="0" rIns="0">
-            <a:noAutofit/>
-          </a:bodyPr>
-          <a:lstStyle/>
-          <a:p>
-            <a:pPr algn="l"/>
-            <a:r>
-              <a:rPr sz="3400" b="0" i="0">
-                <a:solidFill>
-                  <a:srgbClr val="DCDCAA"/>
-                </a:solidFill>
-                <a:latin typeface="Arial"/>
-              </a:rPr>
-              <a:t>print</a:t>
-            </a:r>
-          </a:p>
-        </p:txBody>
-      </p:sp>
-      <p:sp>
-        <p:nvSpPr>
-          <p:cNvPr id="16" name="TextBox 15"/>
-          <p:cNvSpPr/>
-          <p:nvPr>
-            <p:ph type="body" idx="15"/>
-          </p:nvPr>
-        </p:nvSpPr>
-        <p:spPr>
-          <a:xfrm>
-            <a:off x="1777057" y="2874262"/>
-            <a:ext cx="412948" cy="518159"/>
-          </a:xfrm>
-          <a:prstGeom prst="rect">
-            <a:avLst/>
-          </a:prstGeom>
-          <a:noFill/>
-        </p:spPr>
-        <p:txBody>
-          <a:bodyPr wrap="none" lIns="0" rIns="0">
-            <a:noAutofit/>
-          </a:bodyPr>
-          <a:lstStyle/>
-          <a:p>
-            <a:pPr algn="l"/>
-            <a:r>
-              <a:rPr sz="3400" b="0" i="0">
-                <a:solidFill>
-                  <a:srgbClr val="D4D4D4"/>
-                </a:solidFill>
-                <a:latin typeface="Arial"/>
-              </a:rPr>
-              <a:t>(</a:t>
-            </a:r>
-          </a:p>
-        </p:txBody>
-      </p:sp>
-      <p:sp>
-        <p:nvSpPr>
-          <p:cNvPr id="17" name="TextBox 16"/>
-          <p:cNvSpPr/>
-          <p:nvPr>
-            <p:ph type="body" idx="16"/>
-          </p:nvPr>
-        </p:nvSpPr>
-        <p:spPr>
-          <a:xfrm>
-            <a:off x="1920850" y="2874262"/>
-            <a:ext cx="4474566" cy="518159"/>
-          </a:xfrm>
-          <a:prstGeom prst="rect">
-            <a:avLst/>
-          </a:prstGeom>
-          <a:noFill/>
-        </p:spPr>
-        <p:txBody>
-          <a:bodyPr wrap="none" lIns="0" rIns="0">
-            <a:noAutofit/>
-          </a:bodyPr>
-          <a:lstStyle/>
-          <a:p>
-            <a:pPr algn="l"/>
-            <a:r>
-              <a:rPr sz="3400" b="0" i="0">
-                <a:solidFill>
-                  <a:srgbClr val="CE9178"/>
-                </a:solidFill>
-                <a:latin typeface="Arial"/>
-              </a:rPr>
-              <a:t>"Hello, world!"</a:t>
-            </a:r>
-          </a:p>
-        </p:txBody>
-      </p:sp>
-      <p:sp>
-        <p:nvSpPr>
-          <p:cNvPr id="18" name="TextBox 17"/>
-          <p:cNvSpPr/>
-          <p:nvPr>
-            <p:ph type="body" idx="17"/>
-          </p:nvPr>
-        </p:nvSpPr>
-        <p:spPr>
-          <a:xfrm>
-            <a:off x="4603155" y="2874262"/>
-            <a:ext cx="412948" cy="518159"/>
-          </a:xfrm>
-          <a:prstGeom prst="rect">
-            <a:avLst/>
-          </a:prstGeom>
-          <a:noFill/>
-        </p:spPr>
-        <p:txBody>
-          <a:bodyPr wrap="none" lIns="0" rIns="0">
-            <a:noAutofit/>
-          </a:bodyPr>
-          <a:lstStyle/>
-          <a:p>
-            <a:pPr algn="l"/>
-            <a:r>
-              <a:rPr sz="3400" b="0" i="0">
-                <a:solidFill>
-                  <a:srgbClr val="D4D4D4"/>
-                </a:solidFill>
-                <a:latin typeface="Arial"/>
-              </a:rPr>
-              <a:t>)</a:t>
-            </a:r>
-          </a:p>
-        </p:txBody>
-      </p:sp>
-      <p:sp>
-        <p:nvSpPr>
-          <p:cNvPr id="19" name="TextBox 18"/>
-          <p:cNvSpPr/>
-          <p:nvPr>
-            <p:ph type="body" idx="18"/>
-          </p:nvPr>
-        </p:nvSpPr>
-        <p:spPr>
-          <a:xfrm>
-            <a:off x="457200" y="3910580"/>
-            <a:ext cx="1680348" cy="518159"/>
-          </a:xfrm>
-          <a:prstGeom prst="rect">
-            <a:avLst/>
-          </a:prstGeom>
-          <a:noFill/>
-        </p:spPr>
-        <p:txBody>
-          <a:bodyPr wrap="none" lIns="0" rIns="0">
-            <a:noAutofit/>
-          </a:bodyPr>
-          <a:lstStyle/>
-          <a:p>
-            <a:pPr algn="l"/>
-            <a:r>
-              <a:rPr sz="3400" b="0" i="0">
-                <a:solidFill>
-                  <a:srgbClr val="DCDCAA"/>
-                </a:solidFill>
-                <a:latin typeface="Arial"/>
-              </a:rPr>
-              <a:t>main</a:t>
-            </a:r>
-          </a:p>
-        </p:txBody>
-      </p:sp>
-      <p:sp>
-        <p:nvSpPr>
-          <p:cNvPr id="20" name="TextBox 19"/>
-          <p:cNvSpPr/>
-          <p:nvPr>
-            <p:ph type="body" idx="19"/>
-          </p:nvPr>
-        </p:nvSpPr>
-        <p:spPr>
-          <a:xfrm>
-            <a:off x="1393118" y="3910580"/>
-            <a:ext cx="643017" cy="518159"/>
-          </a:xfrm>
-          <a:prstGeom prst="rect">
-            <a:avLst/>
-          </a:prstGeom>
-          <a:noFill/>
-        </p:spPr>
-        <p:txBody>
-          <a:bodyPr wrap="none" lIns="0" rIns="0">
-            <a:noAutofit/>
-          </a:bodyPr>
-          <a:lstStyle/>
-          <a:p>
-            <a:pPr algn="l"/>
-            <a:r>
-              <a:rPr sz="3400" b="0" i="0">
-                <a:solidFill>
-                  <a:srgbClr val="D4D4D4"/>
-                </a:solidFill>
-                <a:latin typeface="Arial"/>
-              </a:rPr>
-              <a:t>()</a:t>
-            </a:r>
-          </a:p>
-        </p:txBody>
-      </p:sp>
-      <p:sp>
-        <p:nvSpPr>
-          <p:cNvPr id="21" name="TextBox 20"/>
-          <p:cNvSpPr/>
-          <p:nvPr>
-            <p:ph type="body" idx="20"/>
           </p:nvPr>
         </p:nvSpPr>
         <p:spPr>
@@ -5346,7 +4688,7 @@
             <a:r>
               <a:rPr sz="3400" b="0" i="0">
                 <a:solidFill>
-                  <a:srgbClr val="4EC9B0"/>
+                  <a:srgbClr val="569CD6"/>
                 </a:solidFill>
                 <a:latin typeface="Arial"/>
               </a:rPr>
@@ -5357,10 +4699,10 @@
       </p:sp>
       <p:sp>
         <p:nvSpPr>
-          <p:cNvPr id="22" name="TextBox 21"/>
-          <p:cNvSpPr/>
-          <p:nvPr>
-            <p:ph type="body" idx="21"/>
+          <p:cNvPr id="15" name="TextBox 14"/>
+          <p:cNvSpPr/>
+          <p:nvPr>
+            <p:ph type="body" idx="14"/>
           </p:nvPr>
         </p:nvSpPr>
         <p:spPr>
@@ -5383,7 +4725,7 @@
             <a:r>
               <a:rPr sz="3400" b="0" i="0">
                 <a:solidFill>
-                  <a:srgbClr val="D4D4D4"/>
+                  <a:srgbClr val="FFFFFF"/>
                 </a:solidFill>
                 <a:latin typeface="Arial"/>
               </a:rPr>
@@ -5394,10 +4736,10 @@
       </p:sp>
       <p:sp>
         <p:nvSpPr>
-          <p:cNvPr id="23" name="TextBox 22"/>
-          <p:cNvSpPr/>
-          <p:nvPr>
-            <p:ph type="body" idx="22"/>
+          <p:cNvPr id="16" name="TextBox 15"/>
+          <p:cNvSpPr/>
+          <p:nvPr>
+            <p:ph type="body" idx="15"/>
           </p:nvPr>
         </p:nvSpPr>
         <p:spPr>
@@ -5420,7 +4762,7 @@
             <a:r>
               <a:rPr sz="3400" b="0" i="0">
                 <a:solidFill>
-                  <a:srgbClr val="D4D4D4"/>
+                  <a:srgbClr val="FFFFFF"/>
                 </a:solidFill>
                 <a:latin typeface="Arial"/>
               </a:rPr>
@@ -5442,7 +4784,7 @@
 </p:sldLayout>
 </file>
 
-<file path=ppt/slideLayouts/slideLayout27.xml><?xml version="1.0" encoding="utf-8"?>
+<file path=ppt/slideLayouts/slideLayout26.xml><?xml version="1.0" encoding="utf-8"?>
 <p:sldLayout xmlns:a="http://schemas.openxmlformats.org/drawingml/2006/main" xmlns:r="http://schemas.openxmlformats.org/officeDocument/2006/relationships" xmlns:p="http://schemas.openxmlformats.org/presentationml/2006/main" type="blank" preserve="1">
   <p:cSld name="slidekit · File Tree">
     <p:bg>
@@ -5479,8 +4821,8 @@
         </p:nvSpPr>
         <p:spPr>
           <a:xfrm>
-            <a:off x="10363200" y="6035040"/>
-            <a:ext cx="1371600" cy="365760"/>
+            <a:off x="11186160" y="6035040"/>
+            <a:ext cx="548640" cy="365760"/>
           </a:xfrm>
         </p:spPr>
         <p:txBody>
@@ -5523,7 +4865,7 @@
             <a:r>
               <a:rPr sz="4200" b="1" i="0">
                 <a:solidFill>
-                  <a:srgbClr val="1B3A5C"/>
+                  <a:srgbClr val="D97706"/>
                 </a:solidFill>
                 <a:latin typeface="Arial"/>
               </a:rPr>
@@ -5551,7 +4893,7 @@
             </a:avLst>
           </a:prstGeom>
           <a:solidFill>
-            <a:srgbClr val="0C1A1C"/>
+            <a:srgbClr val="1A1A2E"/>
           </a:solidFill>
           <a:ln>
             <a:noFill/>
@@ -5594,7 +4936,7 @@
             <a:r>
               <a:rPr sz="2600" b="1" i="0">
                 <a:solidFill>
-                  <a:srgbClr val="569CD6"/>
+                  <a:srgbClr val="D97706"/>
                 </a:solidFill>
                 <a:latin typeface="Courier New"/>
               </a:rPr>
@@ -5631,7 +4973,7 @@
             <a:r>
               <a:rPr sz="2600" b="0" i="0">
                 <a:solidFill>
-                  <a:srgbClr val="55707A"/>
+                  <a:srgbClr val="D97706"/>
                 </a:solidFill>
                 <a:latin typeface="Courier New"/>
               </a:rPr>
@@ -5668,7 +5010,7 @@
             <a:r>
               <a:rPr sz="2600" b="1" i="0">
                 <a:solidFill>
-                  <a:srgbClr val="569CD6"/>
+                  <a:srgbClr val="D97706"/>
                 </a:solidFill>
                 <a:latin typeface="Courier New"/>
               </a:rPr>
@@ -5705,7 +5047,7 @@
             <a:r>
               <a:rPr sz="2600" b="0" i="0">
                 <a:solidFill>
-                  <a:srgbClr val="55707A"/>
+                  <a:srgbClr val="D97706"/>
                 </a:solidFill>
                 <a:latin typeface="Courier New"/>
               </a:rPr>
@@ -5742,7 +5084,7 @@
             <a:r>
               <a:rPr sz="2600" b="1" i="0">
                 <a:solidFill>
-                  <a:srgbClr val="569CD6"/>
+                  <a:srgbClr val="D97706"/>
                 </a:solidFill>
                 <a:latin typeface="Courier New"/>
               </a:rPr>
@@ -5779,7 +5121,7 @@
             <a:r>
               <a:rPr sz="2600" b="0" i="0">
                 <a:solidFill>
-                  <a:srgbClr val="55707A"/>
+                  <a:srgbClr val="D97706"/>
                 </a:solidFill>
                 <a:latin typeface="Courier New"/>
               </a:rPr>
@@ -5816,7 +5158,7 @@
             <a:r>
               <a:rPr sz="2600" b="0" i="0">
                 <a:solidFill>
-                  <a:srgbClr val="D4D4D4"/>
+                  <a:srgbClr val="FFFFFF"/>
                 </a:solidFill>
                 <a:latin typeface="Courier New"/>
               </a:rPr>
@@ -5853,7 +5195,7 @@
             <a:r>
               <a:rPr sz="2600" b="0" i="0">
                 <a:solidFill>
-                  <a:srgbClr val="55707A"/>
+                  <a:srgbClr val="D97706"/>
                 </a:solidFill>
                 <a:latin typeface="Courier New"/>
               </a:rPr>
@@ -5890,7 +5232,7 @@
             <a:r>
               <a:rPr sz="2600" b="0" i="0">
                 <a:solidFill>
-                  <a:srgbClr val="D4D4D4"/>
+                  <a:srgbClr val="FFFFFF"/>
                 </a:solidFill>
                 <a:latin typeface="Courier New"/>
               </a:rPr>
@@ -5927,7 +5269,7 @@
             <a:r>
               <a:rPr sz="2600" b="0" i="0">
                 <a:solidFill>
-                  <a:srgbClr val="55707A"/>
+                  <a:srgbClr val="D97706"/>
                 </a:solidFill>
                 <a:latin typeface="Courier New"/>
               </a:rPr>
@@ -5964,7 +5306,7 @@
             <a:r>
               <a:rPr sz="2600" b="0" i="0">
                 <a:solidFill>
-                  <a:srgbClr val="D4D4D4"/>
+                  <a:srgbClr val="FFFFFF"/>
                 </a:solidFill>
                 <a:latin typeface="Courier New"/>
               </a:rPr>
@@ -6001,7 +5343,7 @@
             <a:r>
               <a:rPr sz="2600" b="0" i="0">
                 <a:solidFill>
-                  <a:srgbClr val="55707A"/>
+                  <a:srgbClr val="D97706"/>
                 </a:solidFill>
                 <a:latin typeface="Courier New"/>
               </a:rPr>
@@ -6038,7 +5380,7 @@
             <a:r>
               <a:rPr sz="2600" b="0" i="0">
                 <a:solidFill>
-                  <a:srgbClr val="D4D4D4"/>
+                  <a:srgbClr val="FFFFFF"/>
                 </a:solidFill>
                 <a:latin typeface="Courier New"/>
               </a:rPr>
@@ -6075,7 +5417,7 @@
             <a:r>
               <a:rPr sz="2600" b="0" i="0">
                 <a:solidFill>
-                  <a:srgbClr val="55707A"/>
+                  <a:srgbClr val="D97706"/>
                 </a:solidFill>
                 <a:latin typeface="Courier New"/>
               </a:rPr>
@@ -6112,7 +5454,7 @@
             <a:r>
               <a:rPr sz="2600" b="0" i="0">
                 <a:solidFill>
-                  <a:srgbClr val="D4D4D4"/>
+                  <a:srgbClr val="FFFFFF"/>
                 </a:solidFill>
                 <a:latin typeface="Courier New"/>
               </a:rPr>
@@ -6134,7 +5476,7 @@
 </p:sldLayout>
 </file>
 
-<file path=ppt/slideLayouts/slideLayout28.xml><?xml version="1.0" encoding="utf-8"?>
+<file path=ppt/slideLayouts/slideLayout27.xml><?xml version="1.0" encoding="utf-8"?>
 <p:sldLayout xmlns:a="http://schemas.openxmlformats.org/drawingml/2006/main" xmlns:r="http://schemas.openxmlformats.org/officeDocument/2006/relationships" xmlns:p="http://schemas.openxmlformats.org/presentationml/2006/main" type="blank" preserve="1">
   <p:cSld name="slidekit · Numbered Steps">
     <p:bg>
@@ -6171,8 +5513,8 @@
         </p:nvSpPr>
         <p:spPr>
           <a:xfrm>
-            <a:off x="10363200" y="6035040"/>
-            <a:ext cx="1371600" cy="365760"/>
+            <a:off x="11186160" y="6035040"/>
+            <a:ext cx="548640" cy="365760"/>
           </a:xfrm>
         </p:spPr>
         <p:txBody>
@@ -6215,7 +5557,7 @@
             <a:r>
               <a:rPr sz="4200" b="1" i="0">
                 <a:solidFill>
-                  <a:srgbClr val="1A1A2E"/>
+                  <a:srgbClr val="D97706"/>
                 </a:solidFill>
                 <a:latin typeface="Arial"/>
               </a:rPr>
@@ -6252,7 +5594,7 @@
             <a:r>
               <a:rPr sz="4200" b="1" i="0">
                 <a:solidFill>
-                  <a:srgbClr val="1B3A5C"/>
+                  <a:srgbClr val="D97706"/>
                 </a:solidFill>
                 <a:latin typeface="Arial"/>
               </a:rPr>
@@ -6289,7 +5631,7 @@
             <a:r>
               <a:rPr sz="4200" b="1" i="0">
                 <a:solidFill>
-                  <a:srgbClr val="1B3A5C"/>
+                  <a:srgbClr val="D97706"/>
                 </a:solidFill>
                 <a:latin typeface="Arial"/>
               </a:rPr>
@@ -6363,7 +5705,7 @@
             <a:r>
               <a:rPr sz="4200" b="1" i="0">
                 <a:solidFill>
-                  <a:srgbClr val="1B3A5C"/>
+                  <a:srgbClr val="D97706"/>
                 </a:solidFill>
                 <a:latin typeface="Arial"/>
               </a:rPr>
@@ -6400,7 +5742,7 @@
             <a:r>
               <a:rPr sz="4200" b="1" i="0">
                 <a:solidFill>
-                  <a:srgbClr val="1B3A5C"/>
+                  <a:srgbClr val="D97706"/>
                 </a:solidFill>
                 <a:latin typeface="Arial"/>
               </a:rPr>
@@ -6474,7 +5816,7 @@
             <a:r>
               <a:rPr sz="4200" b="1" i="0">
                 <a:solidFill>
-                  <a:srgbClr val="1B3A5C"/>
+                  <a:srgbClr val="D97706"/>
                 </a:solidFill>
                 <a:latin typeface="Arial"/>
               </a:rPr>
@@ -6511,7 +5853,7 @@
             <a:r>
               <a:rPr sz="4200" b="1" i="0">
                 <a:solidFill>
-                  <a:srgbClr val="1B3A5C"/>
+                  <a:srgbClr val="D97706"/>
                 </a:solidFill>
                 <a:latin typeface="Arial"/>
               </a:rPr>
@@ -6570,7 +5912,7 @@
 </p:sldLayout>
 </file>
 
-<file path=ppt/slideLayouts/slideLayout29.xml><?xml version="1.0" encoding="utf-8"?>
+<file path=ppt/slideLayouts/slideLayout28.xml><?xml version="1.0" encoding="utf-8"?>
 <p:sldLayout xmlns:a="http://schemas.openxmlformats.org/drawingml/2006/main" xmlns:r="http://schemas.openxmlformats.org/officeDocument/2006/relationships" xmlns:p="http://schemas.openxmlformats.org/presentationml/2006/main" type="blank" preserve="1">
   <p:cSld name="slidekit · Two Panel List">
     <p:bg>
@@ -6607,8 +5949,8 @@
         </p:nvSpPr>
         <p:spPr>
           <a:xfrm>
-            <a:off x="10363200" y="6035040"/>
-            <a:ext cx="1371600" cy="365760"/>
+            <a:off x="11186160" y="6035040"/>
+            <a:ext cx="548640" cy="365760"/>
           </a:xfrm>
         </p:spPr>
         <p:txBody>
@@ -6651,7 +5993,7 @@
             <a:r>
               <a:rPr sz="4200" b="1" i="0">
                 <a:solidFill>
-                  <a:srgbClr val="1B3A5C"/>
+                  <a:srgbClr val="D97706"/>
                 </a:solidFill>
                 <a:latin typeface="Arial"/>
               </a:rPr>
@@ -6688,7 +6030,7 @@
             <a:r>
               <a:rPr sz="3400" b="1" i="0">
                 <a:solidFill>
-                  <a:srgbClr val="1B3A5C"/>
+                  <a:srgbClr val="D97706"/>
                 </a:solidFill>
                 <a:latin typeface="Arial"/>
               </a:rPr>
@@ -6707,14 +6049,14 @@
         </p:nvSpPr>
         <p:spPr>
           <a:xfrm>
-            <a:off x="548640" y="2176271"/>
-            <a:ext cx="1650492" cy="54864"/>
+            <a:off x="457200" y="2176271"/>
+            <a:ext cx="1367718" cy="54864"/>
           </a:xfrm>
           <a:prstGeom prst="rect">
             <a:avLst/>
           </a:prstGeom>
           <a:solidFill>
-            <a:srgbClr val="1B3A5C"/>
+            <a:srgbClr val="D97706"/>
           </a:solidFill>
           <a:ln>
             <a:noFill/>
@@ -6757,7 +6099,7 @@
             <a:r>
               <a:rPr sz="3400" b="1" i="0">
                 <a:solidFill>
-                  <a:srgbClr val="7A8590"/>
+                  <a:srgbClr val="1A1A2E"/>
                 </a:solidFill>
                 <a:latin typeface="Arial"/>
               </a:rPr>
@@ -6776,14 +6118,14 @@
         </p:nvSpPr>
         <p:spPr>
           <a:xfrm>
-            <a:off x="6324600" y="2176271"/>
-            <a:ext cx="1650492" cy="54864"/>
+            <a:off x="6233160" y="2176271"/>
+            <a:ext cx="1007604" cy="54864"/>
           </a:xfrm>
           <a:prstGeom prst="rect">
             <a:avLst/>
           </a:prstGeom>
           <a:solidFill>
-            <a:srgbClr val="7A8590"/>
+            <a:srgbClr val="1A1A2E"/>
           </a:solidFill>
           <a:ln>
             <a:noFill/>
@@ -7016,6 +6358,294 @@
                 <a:latin typeface="Arial"/>
               </a:rPr>
               <a:t>In-product live chat</a:t>
+            </a:r>
+          </a:p>
+        </p:txBody>
+      </p:sp>
+    </p:spTree>
+    <p:extLst>
+      <p:ext uri="{BB962C8B-B14F-4D97-AF65-F5344CB8AC3E}">
+        <p14:creationId xmlns:p14="http://schemas.microsoft.com/office/powerpoint/2010/main" val="1212999818"/>
+      </p:ext>
+    </p:extLst>
+  </p:cSld>
+  <p:clrMapOvr>
+    <a:masterClrMapping/>
+  </p:clrMapOvr>
+</p:sldLayout>
+</file>
+
+<file path=ppt/slideLayouts/slideLayout29.xml><?xml version="1.0" encoding="utf-8"?>
+<p:sldLayout xmlns:a="http://schemas.openxmlformats.org/drawingml/2006/main" xmlns:r="http://schemas.openxmlformats.org/officeDocument/2006/relationships" xmlns:p="http://schemas.openxmlformats.org/presentationml/2006/main" type="blank" preserve="1">
+  <p:cSld name="slidekit · This vs That">
+    <p:bg>
+      <p:bgPr>
+        <a:solidFill>
+          <a:srgbClr val="FFFFFF"/>
+        </a:solidFill>
+        <a:effectLst/>
+      </p:bgPr>
+    </p:bg>
+    <p:spTree>
+      <p:nvGrpSpPr>
+        <p:cNvPr id="1" name=""/>
+        <p:cNvGrpSpPr/>
+        <p:nvPr/>
+      </p:nvGrpSpPr>
+      <p:grpSpPr>
+        <a:xfrm>
+          <a:off x="0" y="0"/>
+          <a:ext cx="0" cy="0"/>
+          <a:chOff x="0" y="0"/>
+          <a:chExt cx="0" cy="0"/>
+        </a:xfrm>
+      </p:grpSpPr>
+      <p:sp>
+        <p:nvSpPr>
+          <p:cNvPr id="4" name="Slide Number Placeholder 3"/>
+          <p:cNvSpPr>
+            <a:spLocks noGrp="1"/>
+          </p:cNvSpPr>
+          <p:nvPr>
+            <p:ph type="sldNum" sz="quarter" idx="12"/>
+          </p:nvPr>
+        </p:nvSpPr>
+        <p:spPr>
+          <a:xfrm>
+            <a:off x="11186160" y="6035040"/>
+            <a:ext cx="548640" cy="365760"/>
+          </a:xfrm>
+        </p:spPr>
+        <p:txBody>
+          <a:bodyPr/>
+          <a:lstStyle/>
+          <a:p>
+            <a:fld id="{C1FF6DA9-008F-8B48-92A6-B652298478BF}" type="slidenum">
+              <a:rPr lang="en-US" smtClean="0"/>
+              <a:t>‹#›</a:t>
+            </a:fld>
+            <a:endParaRPr lang="en-US"/>
+          </a:p>
+        </p:txBody>
+      </p:sp>
+      <p:sp>
+        <p:nvSpPr>
+          <p:cNvPr id="5" name="TextBox 4"/>
+          <p:cNvSpPr/>
+          <p:nvPr>
+            <p:ph type="title"/>
+          </p:nvPr>
+        </p:nvSpPr>
+        <p:spPr>
+          <a:xfrm>
+            <a:off x="457200" y="457200"/>
+            <a:ext cx="11277600" cy="768096"/>
+          </a:xfrm>
+          <a:prstGeom prst="rect">
+            <a:avLst/>
+          </a:prstGeom>
+          <a:noFill/>
+        </p:spPr>
+        <p:txBody>
+          <a:bodyPr wrap="none" lIns="0" rIns="0">
+            <a:noAutofit/>
+          </a:bodyPr>
+          <a:lstStyle/>
+          <a:p>
+            <a:pPr algn="l"/>
+            <a:r>
+              <a:rPr sz="4200" b="1" i="0">
+                <a:solidFill>
+                  <a:srgbClr val="D97706"/>
+                </a:solidFill>
+                <a:latin typeface="Arial"/>
+              </a:rPr>
+              <a:t>Cloud or On-Prem</a:t>
+            </a:r>
+          </a:p>
+        </p:txBody>
+      </p:sp>
+      <p:sp>
+        <p:nvSpPr>
+          <p:cNvPr id="6" name="TextBox 5"/>
+          <p:cNvSpPr/>
+          <p:nvPr>
+            <p:ph type="body" idx="1"/>
+          </p:nvPr>
+        </p:nvSpPr>
+        <p:spPr>
+          <a:xfrm>
+            <a:off x="457200" y="2776728"/>
+            <a:ext cx="4792980" cy="914400"/>
+          </a:xfrm>
+          <a:prstGeom prst="rect">
+            <a:avLst/>
+          </a:prstGeom>
+          <a:noFill/>
+        </p:spPr>
+        <p:txBody>
+          <a:bodyPr wrap="none" lIns="0" rIns="0">
+            <a:noAutofit/>
+          </a:bodyPr>
+          <a:lstStyle/>
+          <a:p>
+            <a:pPr algn="ctr"/>
+            <a:r>
+              <a:rPr sz="6000" b="1" i="0">
+                <a:solidFill>
+                  <a:srgbClr val="1A1A2E"/>
+                </a:solidFill>
+                <a:latin typeface="Arial"/>
+              </a:rPr>
+              <a:t>3 wks</a:t>
+            </a:r>
+          </a:p>
+        </p:txBody>
+      </p:sp>
+      <p:sp>
+        <p:nvSpPr>
+          <p:cNvPr id="7" name="TextBox 6"/>
+          <p:cNvSpPr/>
+          <p:nvPr>
+            <p:ph type="body" idx="2"/>
+          </p:nvPr>
+        </p:nvSpPr>
+        <p:spPr>
+          <a:xfrm>
+            <a:off x="0" y="3965448"/>
+            <a:ext cx="5707380" cy="518159"/>
+          </a:xfrm>
+          <a:prstGeom prst="rect">
+            <a:avLst/>
+          </a:prstGeom>
+          <a:noFill/>
+        </p:spPr>
+        <p:txBody>
+          <a:bodyPr wrap="none" lIns="0" rIns="0">
+            <a:noAutofit/>
+          </a:bodyPr>
+          <a:lstStyle/>
+          <a:p>
+            <a:pPr algn="ctr"/>
+            <a:r>
+              <a:rPr sz="3400" b="0" i="0">
+                <a:solidFill>
+                  <a:srgbClr val="1A1A2E"/>
+                </a:solidFill>
+                <a:latin typeface="Arial"/>
+              </a:rPr>
+              <a:t>Cloud time-to-launch</a:t>
+            </a:r>
+          </a:p>
+        </p:txBody>
+      </p:sp>
+      <p:sp>
+        <p:nvSpPr>
+          <p:cNvPr id="8" name="TextBox 7"/>
+          <p:cNvSpPr/>
+          <p:nvPr>
+            <p:ph type="body" idx="3"/>
+          </p:nvPr>
+        </p:nvSpPr>
+        <p:spPr>
+          <a:xfrm>
+            <a:off x="6941820" y="2776728"/>
+            <a:ext cx="4792980" cy="914400"/>
+          </a:xfrm>
+          <a:prstGeom prst="rect">
+            <a:avLst/>
+          </a:prstGeom>
+          <a:noFill/>
+        </p:spPr>
+        <p:txBody>
+          <a:bodyPr wrap="none" lIns="0" rIns="0">
+            <a:noAutofit/>
+          </a:bodyPr>
+          <a:lstStyle/>
+          <a:p>
+            <a:pPr algn="ctr"/>
+            <a:r>
+              <a:rPr sz="6000" b="1" i="0">
+                <a:solidFill>
+                  <a:srgbClr val="1A1A2E"/>
+                </a:solidFill>
+                <a:latin typeface="Arial"/>
+              </a:rPr>
+              <a:t>6 mo</a:t>
+            </a:r>
+          </a:p>
+        </p:txBody>
+      </p:sp>
+      <p:sp>
+        <p:nvSpPr>
+          <p:cNvPr id="9" name="TextBox 8"/>
+          <p:cNvSpPr/>
+          <p:nvPr>
+            <p:ph type="body" idx="4"/>
+          </p:nvPr>
+        </p:nvSpPr>
+        <p:spPr>
+          <a:xfrm>
+            <a:off x="6484620" y="3965448"/>
+            <a:ext cx="5707380" cy="518159"/>
+          </a:xfrm>
+          <a:prstGeom prst="rect">
+            <a:avLst/>
+          </a:prstGeom>
+          <a:noFill/>
+        </p:spPr>
+        <p:txBody>
+          <a:bodyPr wrap="none" lIns="0" rIns="0">
+            <a:noAutofit/>
+          </a:bodyPr>
+          <a:lstStyle/>
+          <a:p>
+            <a:pPr algn="ctr"/>
+            <a:r>
+              <a:rPr sz="3400" b="0" i="0">
+                <a:solidFill>
+                  <a:srgbClr val="1A1A2E"/>
+                </a:solidFill>
+                <a:latin typeface="Arial"/>
+              </a:rPr>
+              <a:t>On-prem time-to-launch</a:t>
+            </a:r>
+          </a:p>
+        </p:txBody>
+      </p:sp>
+      <p:sp>
+        <p:nvSpPr>
+          <p:cNvPr id="10" name="TextBox 9"/>
+          <p:cNvSpPr/>
+          <p:nvPr>
+            <p:ph type="body" idx="5"/>
+          </p:nvPr>
+        </p:nvSpPr>
+        <p:spPr>
+          <a:xfrm>
+            <a:off x="5435323" y="3310127"/>
+            <a:ext cx="1321354" cy="640080"/>
+          </a:xfrm>
+          <a:prstGeom prst="rect">
+            <a:avLst/>
+          </a:prstGeom>
+          <a:noFill/>
+        </p:spPr>
+        <p:txBody>
+          <a:bodyPr wrap="none" lIns="0" rIns="0">
+            <a:noAutofit/>
+          </a:bodyPr>
+          <a:lstStyle/>
+          <a:p>
+            <a:pPr algn="ctr"/>
+            <a:r>
+              <a:rPr sz="4200" b="1" i="0">
+                <a:solidFill>
+                  <a:srgbClr val="1A1A2E"/>
+                </a:solidFill>
+                <a:latin typeface="Arial"/>
+              </a:rPr>
+              <a:t>VS</a:t>
             </a:r>
           </a:p>
         </p:txBody>
@@ -7281,294 +6911,6 @@
 
 <file path=ppt/slideLayouts/slideLayout30.xml><?xml version="1.0" encoding="utf-8"?>
 <p:sldLayout xmlns:a="http://schemas.openxmlformats.org/drawingml/2006/main" xmlns:r="http://schemas.openxmlformats.org/officeDocument/2006/relationships" xmlns:p="http://schemas.openxmlformats.org/presentationml/2006/main" type="blank" preserve="1">
-  <p:cSld name="slidekit · This vs That">
-    <p:bg>
-      <p:bgPr>
-        <a:solidFill>
-          <a:srgbClr val="FFFFFF"/>
-        </a:solidFill>
-        <a:effectLst/>
-      </p:bgPr>
-    </p:bg>
-    <p:spTree>
-      <p:nvGrpSpPr>
-        <p:cNvPr id="1" name=""/>
-        <p:cNvGrpSpPr/>
-        <p:nvPr/>
-      </p:nvGrpSpPr>
-      <p:grpSpPr>
-        <a:xfrm>
-          <a:off x="0" y="0"/>
-          <a:ext cx="0" cy="0"/>
-          <a:chOff x="0" y="0"/>
-          <a:chExt cx="0" cy="0"/>
-        </a:xfrm>
-      </p:grpSpPr>
-      <p:sp>
-        <p:nvSpPr>
-          <p:cNvPr id="4" name="Slide Number Placeholder 3"/>
-          <p:cNvSpPr>
-            <a:spLocks noGrp="1"/>
-          </p:cNvSpPr>
-          <p:nvPr>
-            <p:ph type="sldNum" sz="quarter" idx="12"/>
-          </p:nvPr>
-        </p:nvSpPr>
-        <p:spPr>
-          <a:xfrm>
-            <a:off x="10363200" y="6035040"/>
-            <a:ext cx="1371600" cy="365760"/>
-          </a:xfrm>
-        </p:spPr>
-        <p:txBody>
-          <a:bodyPr/>
-          <a:lstStyle/>
-          <a:p>
-            <a:fld id="{C1FF6DA9-008F-8B48-92A6-B652298478BF}" type="slidenum">
-              <a:rPr lang="en-US" smtClean="0"/>
-              <a:t>‹#›</a:t>
-            </a:fld>
-            <a:endParaRPr lang="en-US"/>
-          </a:p>
-        </p:txBody>
-      </p:sp>
-      <p:sp>
-        <p:nvSpPr>
-          <p:cNvPr id="5" name="TextBox 4"/>
-          <p:cNvSpPr/>
-          <p:nvPr>
-            <p:ph type="title"/>
-          </p:nvPr>
-        </p:nvSpPr>
-        <p:spPr>
-          <a:xfrm>
-            <a:off x="457200" y="457200"/>
-            <a:ext cx="11277600" cy="768096"/>
-          </a:xfrm>
-          <a:prstGeom prst="rect">
-            <a:avLst/>
-          </a:prstGeom>
-          <a:noFill/>
-        </p:spPr>
-        <p:txBody>
-          <a:bodyPr wrap="none" lIns="0" rIns="0">
-            <a:noAutofit/>
-          </a:bodyPr>
-          <a:lstStyle/>
-          <a:p>
-            <a:pPr algn="l"/>
-            <a:r>
-              <a:rPr sz="4200" b="1" i="0">
-                <a:solidFill>
-                  <a:srgbClr val="1B3A5C"/>
-                </a:solidFill>
-                <a:latin typeface="Arial"/>
-              </a:rPr>
-              <a:t>Cloud or On-Prem</a:t>
-            </a:r>
-          </a:p>
-        </p:txBody>
-      </p:sp>
-      <p:sp>
-        <p:nvSpPr>
-          <p:cNvPr id="6" name="TextBox 5"/>
-          <p:cNvSpPr/>
-          <p:nvPr>
-            <p:ph type="body" idx="1"/>
-          </p:nvPr>
-        </p:nvSpPr>
-        <p:spPr>
-          <a:xfrm>
-            <a:off x="457200" y="2776728"/>
-            <a:ext cx="4792980" cy="914400"/>
-          </a:xfrm>
-          <a:prstGeom prst="rect">
-            <a:avLst/>
-          </a:prstGeom>
-          <a:noFill/>
-        </p:spPr>
-        <p:txBody>
-          <a:bodyPr wrap="none" lIns="0" rIns="0">
-            <a:noAutofit/>
-          </a:bodyPr>
-          <a:lstStyle/>
-          <a:p>
-            <a:pPr algn="ctr"/>
-            <a:r>
-              <a:rPr sz="6000" b="1" i="0">
-                <a:solidFill>
-                  <a:srgbClr val="1A1A2E"/>
-                </a:solidFill>
-                <a:latin typeface="Arial"/>
-              </a:rPr>
-              <a:t>3 wks</a:t>
-            </a:r>
-          </a:p>
-        </p:txBody>
-      </p:sp>
-      <p:sp>
-        <p:nvSpPr>
-          <p:cNvPr id="7" name="TextBox 6"/>
-          <p:cNvSpPr/>
-          <p:nvPr>
-            <p:ph type="body" idx="2"/>
-          </p:nvPr>
-        </p:nvSpPr>
-        <p:spPr>
-          <a:xfrm>
-            <a:off x="0" y="3965448"/>
-            <a:ext cx="5707380" cy="518159"/>
-          </a:xfrm>
-          <a:prstGeom prst="rect">
-            <a:avLst/>
-          </a:prstGeom>
-          <a:noFill/>
-        </p:spPr>
-        <p:txBody>
-          <a:bodyPr wrap="none" lIns="0" rIns="0">
-            <a:noAutofit/>
-          </a:bodyPr>
-          <a:lstStyle/>
-          <a:p>
-            <a:pPr algn="ctr"/>
-            <a:r>
-              <a:rPr sz="3400" b="0" i="0">
-                <a:solidFill>
-                  <a:srgbClr val="1A1A2E"/>
-                </a:solidFill>
-                <a:latin typeface="Arial"/>
-              </a:rPr>
-              <a:t>Cloud time-to-launch</a:t>
-            </a:r>
-          </a:p>
-        </p:txBody>
-      </p:sp>
-      <p:sp>
-        <p:nvSpPr>
-          <p:cNvPr id="8" name="TextBox 7"/>
-          <p:cNvSpPr/>
-          <p:nvPr>
-            <p:ph type="body" idx="3"/>
-          </p:nvPr>
-        </p:nvSpPr>
-        <p:spPr>
-          <a:xfrm>
-            <a:off x="6941820" y="2776728"/>
-            <a:ext cx="4792980" cy="914400"/>
-          </a:xfrm>
-          <a:prstGeom prst="rect">
-            <a:avLst/>
-          </a:prstGeom>
-          <a:noFill/>
-        </p:spPr>
-        <p:txBody>
-          <a:bodyPr wrap="none" lIns="0" rIns="0">
-            <a:noAutofit/>
-          </a:bodyPr>
-          <a:lstStyle/>
-          <a:p>
-            <a:pPr algn="ctr"/>
-            <a:r>
-              <a:rPr sz="6000" b="1" i="0">
-                <a:solidFill>
-                  <a:srgbClr val="1A1A2E"/>
-                </a:solidFill>
-                <a:latin typeface="Arial"/>
-              </a:rPr>
-              <a:t>6 mo</a:t>
-            </a:r>
-          </a:p>
-        </p:txBody>
-      </p:sp>
-      <p:sp>
-        <p:nvSpPr>
-          <p:cNvPr id="9" name="TextBox 8"/>
-          <p:cNvSpPr/>
-          <p:nvPr>
-            <p:ph type="body" idx="4"/>
-          </p:nvPr>
-        </p:nvSpPr>
-        <p:spPr>
-          <a:xfrm>
-            <a:off x="6484620" y="3965448"/>
-            <a:ext cx="5707380" cy="518159"/>
-          </a:xfrm>
-          <a:prstGeom prst="rect">
-            <a:avLst/>
-          </a:prstGeom>
-          <a:noFill/>
-        </p:spPr>
-        <p:txBody>
-          <a:bodyPr wrap="none" lIns="0" rIns="0">
-            <a:noAutofit/>
-          </a:bodyPr>
-          <a:lstStyle/>
-          <a:p>
-            <a:pPr algn="ctr"/>
-            <a:r>
-              <a:rPr sz="3400" b="0" i="0">
-                <a:solidFill>
-                  <a:srgbClr val="1A1A2E"/>
-                </a:solidFill>
-                <a:latin typeface="Arial"/>
-              </a:rPr>
-              <a:t>On-prem time-to-launch</a:t>
-            </a:r>
-          </a:p>
-        </p:txBody>
-      </p:sp>
-      <p:sp>
-        <p:nvSpPr>
-          <p:cNvPr id="10" name="TextBox 9"/>
-          <p:cNvSpPr/>
-          <p:nvPr>
-            <p:ph type="body" idx="5"/>
-          </p:nvPr>
-        </p:nvSpPr>
-        <p:spPr>
-          <a:xfrm>
-            <a:off x="5435323" y="3310127"/>
-            <a:ext cx="1321354" cy="640080"/>
-          </a:xfrm>
-          <a:prstGeom prst="rect">
-            <a:avLst/>
-          </a:prstGeom>
-          <a:noFill/>
-        </p:spPr>
-        <p:txBody>
-          <a:bodyPr wrap="none" lIns="0" rIns="0">
-            <a:noAutofit/>
-          </a:bodyPr>
-          <a:lstStyle/>
-          <a:p>
-            <a:pPr algn="ctr"/>
-            <a:r>
-              <a:rPr sz="4200" b="1" i="0">
-                <a:solidFill>
-                  <a:srgbClr val="7A8590"/>
-                </a:solidFill>
-                <a:latin typeface="Arial"/>
-              </a:rPr>
-              <a:t>VS</a:t>
-            </a:r>
-          </a:p>
-        </p:txBody>
-      </p:sp>
-    </p:spTree>
-    <p:extLst>
-      <p:ext uri="{BB962C8B-B14F-4D97-AF65-F5344CB8AC3E}">
-        <p14:creationId xmlns:p14="http://schemas.microsoft.com/office/powerpoint/2010/main" val="1212999818"/>
-      </p:ext>
-    </p:extLst>
-  </p:cSld>
-  <p:clrMapOvr>
-    <a:masterClrMapping/>
-  </p:clrMapOvr>
-</p:sldLayout>
-</file>
-
-<file path=ppt/slideLayouts/slideLayout31.xml><?xml version="1.0" encoding="utf-8"?>
-<p:sldLayout xmlns:a="http://schemas.openxmlformats.org/drawingml/2006/main" xmlns:r="http://schemas.openxmlformats.org/officeDocument/2006/relationships" xmlns:p="http://schemas.openxmlformats.org/presentationml/2006/main" type="blank" preserve="1">
   <p:cSld name="slidekit · KPI Grid">
     <p:bg>
       <p:bgPr>
@@ -7604,8 +6946,8 @@
         </p:nvSpPr>
         <p:spPr>
           <a:xfrm>
-            <a:off x="10363200" y="6035040"/>
-            <a:ext cx="1371600" cy="365760"/>
+            <a:off x="11186160" y="6035040"/>
+            <a:ext cx="548640" cy="365760"/>
           </a:xfrm>
         </p:spPr>
         <p:txBody>
@@ -7648,7 +6990,7 @@
             <a:r>
               <a:rPr sz="4200" b="1" i="0">
                 <a:solidFill>
-                  <a:srgbClr val="1B3A5C"/>
+                  <a:srgbClr val="D97706"/>
                 </a:solidFill>
                 <a:latin typeface="Arial"/>
               </a:rPr>
@@ -8091,7 +7433,7 @@
         </p:nvSpPr>
         <p:spPr>
           <a:xfrm>
-            <a:off x="4307840" y="3797808"/>
+            <a:off x="4307840" y="4056888"/>
             <a:ext cx="3576320" cy="640080"/>
           </a:xfrm>
           <a:prstGeom prst="rect">
@@ -8128,7 +7470,7 @@
         </p:nvSpPr>
         <p:spPr>
           <a:xfrm>
-            <a:off x="5559552" y="4492752"/>
+            <a:off x="5559552" y="4751832"/>
             <a:ext cx="1072896" cy="54864"/>
           </a:xfrm>
           <a:prstGeom prst="rect">
@@ -8160,16 +7502,16 @@
         </p:nvSpPr>
         <p:spPr>
           <a:xfrm>
-            <a:off x="4307840" y="4602480"/>
-            <a:ext cx="3576320" cy="1127760"/>
-          </a:xfrm>
-          <a:prstGeom prst="rect">
-            <a:avLst/>
-          </a:prstGeom>
-          <a:noFill/>
-        </p:spPr>
-        <p:txBody>
-          <a:bodyPr wrap="square" lIns="0" rIns="0">
+            <a:off x="3943896" y="4861560"/>
+            <a:ext cx="4304208" cy="609600"/>
+          </a:xfrm>
+          <a:prstGeom prst="rect">
+            <a:avLst/>
+          </a:prstGeom>
+          <a:noFill/>
+        </p:spPr>
+        <p:txBody>
+          <a:bodyPr wrap="none" lIns="0" rIns="0">
             <a:noAutofit/>
           </a:bodyPr>
           <a:lstStyle/>
@@ -8182,7 +7524,7 @@
                 </a:solidFill>
                 <a:latin typeface="Arial"/>
               </a:rPr>
-              <a:t>Avg. time to value</a:t>
+              <a:t>Time to value</a:t>
             </a:r>
           </a:p>
         </p:txBody>
@@ -8306,7 +7648,7 @@
 </p:sldLayout>
 </file>
 
-<file path=ppt/slideLayouts/slideLayout32.xml><?xml version="1.0" encoding="utf-8"?>
+<file path=ppt/slideLayouts/slideLayout31.xml><?xml version="1.0" encoding="utf-8"?>
 <p:sldLayout xmlns:a="http://schemas.openxmlformats.org/drawingml/2006/main" xmlns:r="http://schemas.openxmlformats.org/officeDocument/2006/relationships" xmlns:p="http://schemas.openxmlformats.org/presentationml/2006/main" type="blank" preserve="1">
   <p:cSld name="slidekit · Chart With Insight">
     <p:bg>
@@ -8343,8 +7685,8 @@
         </p:nvSpPr>
         <p:spPr>
           <a:xfrm>
-            <a:off x="10363200" y="6035040"/>
-            <a:ext cx="1371600" cy="365760"/>
+            <a:off x="11186160" y="6035040"/>
+            <a:ext cx="548640" cy="365760"/>
           </a:xfrm>
         </p:spPr>
         <p:txBody>
@@ -8387,7 +7729,7 @@
             <a:r>
               <a:rPr sz="4200" b="1" i="0">
                 <a:solidFill>
-                  <a:srgbClr val="1B3A5C"/>
+                  <a:srgbClr val="D97706"/>
                 </a:solidFill>
                 <a:latin typeface="Arial"/>
               </a:rPr>
@@ -8493,7 +7835,7 @@
             <a:r>
               <a:rPr sz="2500" b="0" i="0">
                 <a:solidFill>
-                  <a:srgbClr val="7A8590"/>
+                  <a:srgbClr val="1A1A2E"/>
                 </a:solidFill>
                 <a:latin typeface="Arial"/>
               </a:rPr>
@@ -8599,7 +7941,7 @@
             <a:r>
               <a:rPr sz="2500" b="0" i="0">
                 <a:solidFill>
-                  <a:srgbClr val="7A8590"/>
+                  <a:srgbClr val="1A1A2E"/>
                 </a:solidFill>
                 <a:latin typeface="Arial"/>
               </a:rPr>
@@ -8705,7 +8047,7 @@
             <a:r>
               <a:rPr sz="2500" b="0" i="0">
                 <a:solidFill>
-                  <a:srgbClr val="7A8590"/>
+                  <a:srgbClr val="1A1A2E"/>
                 </a:solidFill>
                 <a:latin typeface="Arial"/>
               </a:rPr>
@@ -8811,7 +8153,7 @@
             <a:r>
               <a:rPr sz="2500" b="0" i="0">
                 <a:solidFill>
-                  <a:srgbClr val="7A8590"/>
+                  <a:srgbClr val="1A1A2E"/>
                 </a:solidFill>
                 <a:latin typeface="Arial"/>
               </a:rPr>
@@ -8830,8 +8172,8 @@
         </p:nvSpPr>
         <p:spPr>
           <a:xfrm>
-            <a:off x="7498080" y="1770888"/>
-            <a:ext cx="128016" cy="3718560"/>
+            <a:off x="7498080" y="3325368"/>
+            <a:ext cx="128016" cy="609600"/>
           </a:xfrm>
           <a:prstGeom prst="rect">
             <a:avLst/>
@@ -8862,16 +8204,16 @@
         </p:nvSpPr>
         <p:spPr>
           <a:xfrm>
-            <a:off x="8037576" y="1770888"/>
-            <a:ext cx="3697224" cy="3718560"/>
-          </a:xfrm>
-          <a:prstGeom prst="rect">
-            <a:avLst/>
-          </a:prstGeom>
-          <a:noFill/>
-        </p:spPr>
-        <p:txBody>
-          <a:bodyPr wrap="square" lIns="0" rIns="0">
+            <a:off x="8037576" y="3325368"/>
+            <a:ext cx="4154424" cy="609600"/>
+          </a:xfrm>
+          <a:prstGeom prst="rect">
+            <a:avLst/>
+          </a:prstGeom>
+          <a:noFill/>
+        </p:spPr>
+        <p:txBody>
+          <a:bodyPr wrap="none" lIns="0" rIns="0">
             <a:noAutofit/>
           </a:bodyPr>
           <a:lstStyle/>
@@ -8884,7 +8226,7 @@
                 </a:solidFill>
                 <a:latin typeface="Arial"/>
               </a:rPr>
-              <a:t>Activations nearly quadrupled once self-serve onboarding shipped in February.</a:t>
+              <a:t>Activations 4x.</a:t>
             </a:r>
           </a:p>
         </p:txBody>
@@ -8902,7 +8244,7 @@
 </p:sldLayout>
 </file>
 
-<file path=ppt/slideLayouts/slideLayout33.xml><?xml version="1.0" encoding="utf-8"?>
+<file path=ppt/slideLayouts/slideLayout32.xml><?xml version="1.0" encoding="utf-8"?>
 <p:sldLayout xmlns:a="http://schemas.openxmlformats.org/drawingml/2006/main" xmlns:r="http://schemas.openxmlformats.org/officeDocument/2006/relationships" xmlns:p="http://schemas.openxmlformats.org/presentationml/2006/main" type="blank" preserve="1">
   <p:cSld name="slidekit · Table">
     <p:bg>
@@ -8939,8 +8281,8 @@
         </p:nvSpPr>
         <p:spPr>
           <a:xfrm>
-            <a:off x="10363200" y="6035040"/>
-            <a:ext cx="1371600" cy="365760"/>
+            <a:off x="11186160" y="6035040"/>
+            <a:ext cx="548640" cy="365760"/>
           </a:xfrm>
         </p:spPr>
         <p:txBody>
@@ -8983,7 +8325,7 @@
             <a:r>
               <a:rPr sz="4200" b="1" i="0">
                 <a:solidFill>
-                  <a:srgbClr val="1B3A5C"/>
+                  <a:srgbClr val="D97706"/>
                 </a:solidFill>
                 <a:latin typeface="Arial"/>
               </a:rPr>
@@ -9020,7 +8362,7 @@
             <a:r>
               <a:rPr sz="3400" b="1" i="0">
                 <a:solidFill>
-                  <a:srgbClr val="1B3A5C"/>
+                  <a:srgbClr val="D97706"/>
                 </a:solidFill>
                 <a:latin typeface="Arial"/>
               </a:rPr>
@@ -9057,7 +8399,7 @@
             <a:r>
               <a:rPr sz="3400" b="1" i="0">
                 <a:solidFill>
-                  <a:srgbClr val="1B3A5C"/>
+                  <a:srgbClr val="D97706"/>
                 </a:solidFill>
                 <a:latin typeface="Arial"/>
               </a:rPr>
@@ -9094,7 +8436,7 @@
             <a:r>
               <a:rPr sz="3400" b="1" i="0">
                 <a:solidFill>
-                  <a:srgbClr val="1B3A5C"/>
+                  <a:srgbClr val="D97706"/>
                 </a:solidFill>
                 <a:latin typeface="Arial"/>
               </a:rPr>
@@ -9592,7 +8934,7 @@
 </p:sldLayout>
 </file>
 
-<file path=ppt/slideLayouts/slideLayout34.xml><?xml version="1.0" encoding="utf-8"?>
+<file path=ppt/slideLayouts/slideLayout33.xml><?xml version="1.0" encoding="utf-8"?>
 <p:sldLayout xmlns:a="http://schemas.openxmlformats.org/drawingml/2006/main" xmlns:r="http://schemas.openxmlformats.org/officeDocument/2006/relationships" xmlns:p="http://schemas.openxmlformats.org/presentationml/2006/main" type="blank" preserve="1">
   <p:cSld name="slidekit · Metric Comparison">
     <p:bg>
@@ -9629,8 +8971,8 @@
         </p:nvSpPr>
         <p:spPr>
           <a:xfrm>
-            <a:off x="10363200" y="6035040"/>
-            <a:ext cx="1371600" cy="365760"/>
+            <a:off x="11186160" y="6035040"/>
+            <a:ext cx="548640" cy="365760"/>
           </a:xfrm>
         </p:spPr>
         <p:txBody>
@@ -9673,7 +9015,7 @@
             <a:r>
               <a:rPr sz="4200" b="1" i="0">
                 <a:solidFill>
-                  <a:srgbClr val="1B3A5C"/>
+                  <a:srgbClr val="D97706"/>
                 </a:solidFill>
                 <a:latin typeface="Arial"/>
               </a:rPr>
@@ -9692,7 +9034,7 @@
         </p:nvSpPr>
         <p:spPr>
           <a:xfrm>
-            <a:off x="457200" y="2075688"/>
+            <a:off x="457200" y="2334768"/>
             <a:ext cx="3576320" cy="914400"/>
           </a:xfrm>
           <a:prstGeom prst="rect">
@@ -9729,16 +9071,16 @@
         </p:nvSpPr>
         <p:spPr>
           <a:xfrm>
-            <a:off x="457200" y="3264408"/>
-            <a:ext cx="3576320" cy="1127760"/>
-          </a:xfrm>
-          <a:prstGeom prst="rect">
-            <a:avLst/>
-          </a:prstGeom>
-          <a:noFill/>
-        </p:spPr>
-        <p:txBody>
-          <a:bodyPr wrap="square" lIns="0" rIns="0">
+            <a:off x="457200" y="3523488"/>
+            <a:ext cx="3576320" cy="609600"/>
+          </a:xfrm>
+          <a:prstGeom prst="rect">
+            <a:avLst/>
+          </a:prstGeom>
+          <a:noFill/>
+        </p:spPr>
+        <p:txBody>
+          <a:bodyPr wrap="none" lIns="0" rIns="0">
             <a:noAutofit/>
           </a:bodyPr>
           <a:lstStyle/>
@@ -9751,7 +9093,7 @@
                 </a:solidFill>
                 <a:latin typeface="Arial"/>
               </a:rPr>
-              <a:t>Annual recurring revenue</a:t>
+              <a:t>Revenue</a:t>
             </a:r>
           </a:p>
         </p:txBody>
@@ -9766,7 +9108,7 @@
         </p:nvSpPr>
         <p:spPr>
           <a:xfrm>
-            <a:off x="1522569" y="4666488"/>
+            <a:off x="1522569" y="4407408"/>
             <a:ext cx="1445581" cy="518159"/>
           </a:xfrm>
           <a:prstGeom prst="rect">
@@ -9798,7 +9140,7 @@
         </p:nvSpPr>
         <p:spPr>
           <a:xfrm>
-            <a:off x="1260802" y="4666488"/>
+            <a:off x="1260802" y="4407408"/>
             <a:ext cx="1969115" cy="518159"/>
           </a:xfrm>
           <a:prstGeom prst="rect">
@@ -9835,7 +9177,7 @@
         </p:nvSpPr>
         <p:spPr>
           <a:xfrm>
-            <a:off x="4307840" y="2075688"/>
+            <a:off x="4307840" y="2334768"/>
             <a:ext cx="3576320" cy="914400"/>
           </a:xfrm>
           <a:prstGeom prst="rect">
@@ -9872,8 +9214,8 @@
         </p:nvSpPr>
         <p:spPr>
           <a:xfrm>
-            <a:off x="3834934" y="3264408"/>
-            <a:ext cx="4522132" cy="1127760"/>
+            <a:off x="3834934" y="3523488"/>
+            <a:ext cx="4522132" cy="609600"/>
           </a:xfrm>
           <a:prstGeom prst="rect">
             <a:avLst/>
@@ -9909,7 +9251,7 @@
         </p:nvSpPr>
         <p:spPr>
           <a:xfrm>
-            <a:off x="5175547" y="4666488"/>
+            <a:off x="5175547" y="4407408"/>
             <a:ext cx="1840906" cy="518159"/>
           </a:xfrm>
           <a:prstGeom prst="rect">
@@ -9941,7 +9283,7 @@
         </p:nvSpPr>
         <p:spPr>
           <a:xfrm>
-            <a:off x="4795183" y="4666488"/>
+            <a:off x="4795183" y="4407408"/>
             <a:ext cx="2601634" cy="518159"/>
           </a:xfrm>
           <a:prstGeom prst="rect">
@@ -9978,7 +9320,7 @@
         </p:nvSpPr>
         <p:spPr>
           <a:xfrm>
-            <a:off x="8158480" y="2075688"/>
+            <a:off x="8158480" y="2334768"/>
             <a:ext cx="3576320" cy="914400"/>
           </a:xfrm>
           <a:prstGeom prst="rect">
@@ -10015,16 +9357,16 @@
         </p:nvSpPr>
         <p:spPr>
           <a:xfrm>
-            <a:off x="8158480" y="3264408"/>
-            <a:ext cx="3576320" cy="1127760"/>
-          </a:xfrm>
-          <a:prstGeom prst="rect">
-            <a:avLst/>
-          </a:prstGeom>
-          <a:noFill/>
-        </p:spPr>
-        <p:txBody>
-          <a:bodyPr wrap="square" lIns="0" rIns="0">
+            <a:off x="7701280" y="3523488"/>
+            <a:ext cx="4490720" cy="609600"/>
+          </a:xfrm>
+          <a:prstGeom prst="rect">
+            <a:avLst/>
+          </a:prstGeom>
+          <a:noFill/>
+        </p:spPr>
+        <p:txBody>
+          <a:bodyPr wrap="none" lIns="0" rIns="0">
             <a:noAutofit/>
           </a:bodyPr>
           <a:lstStyle/>
@@ -10037,7 +9379,7 @@
                 </a:solidFill>
                 <a:latin typeface="Arial"/>
               </a:rPr>
-              <a:t>Net promoter score</a:t>
+              <a:t>Promoter score</a:t>
             </a:r>
           </a:p>
         </p:txBody>
@@ -10052,7 +9394,7 @@
         </p:nvSpPr>
         <p:spPr>
           <a:xfrm>
-            <a:off x="9427731" y="4666488"/>
+            <a:off x="9427731" y="4407408"/>
             <a:ext cx="1037817" cy="518159"/>
           </a:xfrm>
           <a:prstGeom prst="rect">
@@ -10084,7 +9426,7 @@
         </p:nvSpPr>
         <p:spPr>
           <a:xfrm>
-            <a:off x="9288294" y="4666488"/>
+            <a:off x="9288294" y="4407408"/>
             <a:ext cx="1316691" cy="518159"/>
           </a:xfrm>
           <a:prstGeom prst="rect">
@@ -10124,7 +9466,7 @@
 </p:sldLayout>
 </file>
 
-<file path=ppt/slideLayouts/slideLayout35.xml><?xml version="1.0" encoding="utf-8"?>
+<file path=ppt/slideLayouts/slideLayout34.xml><?xml version="1.0" encoding="utf-8"?>
 <p:sldLayout xmlns:a="http://schemas.openxmlformats.org/drawingml/2006/main" xmlns:r="http://schemas.openxmlformats.org/officeDocument/2006/relationships" xmlns:p="http://schemas.openxmlformats.org/presentationml/2006/main" type="blank" preserve="1">
   <p:cSld name="slidekit · Process Steps">
     <p:bg>
@@ -10161,8 +9503,8 @@
         </p:nvSpPr>
         <p:spPr>
           <a:xfrm>
-            <a:off x="10363200" y="6035040"/>
-            <a:ext cx="1371600" cy="365760"/>
+            <a:off x="11186160" y="6035040"/>
+            <a:ext cx="548640" cy="365760"/>
           </a:xfrm>
         </p:spPr>
         <p:txBody>
@@ -10205,7 +9547,7 @@
             <a:r>
               <a:rPr sz="4200" b="1" i="0">
                 <a:solidFill>
-                  <a:srgbClr val="1B3A5C"/>
+                  <a:srgbClr val="D97706"/>
                 </a:solidFill>
                 <a:latin typeface="Arial"/>
               </a:rPr>
@@ -10242,7 +9584,7 @@
             <a:r>
               <a:rPr sz="4200" b="1" i="0">
                 <a:solidFill>
-                  <a:srgbClr val="1B3A5C"/>
+                  <a:srgbClr val="D97706"/>
                 </a:solidFill>
                 <a:latin typeface="Arial"/>
               </a:rPr>
@@ -10262,13 +9604,13 @@
         <p:spPr>
           <a:xfrm>
             <a:off x="457200" y="2194560"/>
-            <a:ext cx="784098" cy="54864"/>
+            <a:ext cx="593303" cy="54864"/>
           </a:xfrm>
           <a:prstGeom prst="rect">
             <a:avLst/>
           </a:prstGeom>
           <a:solidFill>
-            <a:srgbClr val="1B3A5C"/>
+            <a:srgbClr val="D97706"/>
           </a:solidFill>
           <a:ln>
             <a:noFill/>
@@ -10311,7 +9653,7 @@
             <a:r>
               <a:rPr sz="3400" b="1" i="0">
                 <a:solidFill>
-                  <a:srgbClr val="1B3A5C"/>
+                  <a:srgbClr val="D97706"/>
                 </a:solidFill>
                 <a:latin typeface="Arial"/>
               </a:rPr>
@@ -10385,7 +9727,7 @@
             <a:r>
               <a:rPr sz="4200" b="1" i="0">
                 <a:solidFill>
-                  <a:srgbClr val="1B3A5C"/>
+                  <a:srgbClr val="D97706"/>
                 </a:solidFill>
                 <a:latin typeface="Arial"/>
               </a:rPr>
@@ -10405,13 +9747,13 @@
         <p:spPr>
           <a:xfrm>
             <a:off x="3345180" y="2194560"/>
-            <a:ext cx="784098" cy="54864"/>
+            <a:ext cx="593303" cy="54864"/>
           </a:xfrm>
           <a:prstGeom prst="rect">
             <a:avLst/>
           </a:prstGeom>
           <a:solidFill>
-            <a:srgbClr val="1B3A5C"/>
+            <a:srgbClr val="D97706"/>
           </a:solidFill>
           <a:ln>
             <a:noFill/>
@@ -10454,7 +9796,7 @@
             <a:r>
               <a:rPr sz="3400" b="1" i="0">
                 <a:solidFill>
-                  <a:srgbClr val="1B3A5C"/>
+                  <a:srgbClr val="D97706"/>
                 </a:solidFill>
                 <a:latin typeface="Arial"/>
               </a:rPr>
@@ -10528,7 +9870,7 @@
             <a:r>
               <a:rPr sz="4200" b="1" i="0">
                 <a:solidFill>
-                  <a:srgbClr val="1B3A5C"/>
+                  <a:srgbClr val="D97706"/>
                 </a:solidFill>
                 <a:latin typeface="Arial"/>
               </a:rPr>
@@ -10548,13 +9890,13 @@
         <p:spPr>
           <a:xfrm>
             <a:off x="6233160" y="2194560"/>
-            <a:ext cx="784098" cy="54864"/>
+            <a:ext cx="593303" cy="54864"/>
           </a:xfrm>
           <a:prstGeom prst="rect">
             <a:avLst/>
           </a:prstGeom>
           <a:solidFill>
-            <a:srgbClr val="1B3A5C"/>
+            <a:srgbClr val="D97706"/>
           </a:solidFill>
           <a:ln>
             <a:noFill/>
@@ -10597,7 +9939,7 @@
             <a:r>
               <a:rPr sz="3400" b="1" i="0">
                 <a:solidFill>
-                  <a:srgbClr val="1B3A5C"/>
+                  <a:srgbClr val="D97706"/>
                 </a:solidFill>
                 <a:latin typeface="Arial"/>
               </a:rPr>
@@ -10671,7 +10013,7 @@
             <a:r>
               <a:rPr sz="4200" b="1" i="0">
                 <a:solidFill>
-                  <a:srgbClr val="1B3A5C"/>
+                  <a:srgbClr val="D97706"/>
                 </a:solidFill>
                 <a:latin typeface="Arial"/>
               </a:rPr>
@@ -10691,13 +10033,13 @@
         <p:spPr>
           <a:xfrm>
             <a:off x="9121140" y="2194560"/>
-            <a:ext cx="784098" cy="54864"/>
+            <a:ext cx="593303" cy="54864"/>
           </a:xfrm>
           <a:prstGeom prst="rect">
             <a:avLst/>
           </a:prstGeom>
           <a:solidFill>
-            <a:srgbClr val="1B3A5C"/>
+            <a:srgbClr val="D97706"/>
           </a:solidFill>
           <a:ln>
             <a:noFill/>
@@ -10740,7 +10082,7 @@
             <a:r>
               <a:rPr sz="3400" b="1" i="0">
                 <a:solidFill>
-                  <a:srgbClr val="1B3A5C"/>
+                  <a:srgbClr val="D97706"/>
                 </a:solidFill>
                 <a:latin typeface="Arial"/>
               </a:rPr>
@@ -10799,7 +10141,7 @@
 </p:sldLayout>
 </file>
 
-<file path=ppt/slideLayouts/slideLayout36.xml><?xml version="1.0" encoding="utf-8"?>
+<file path=ppt/slideLayouts/slideLayout35.xml><?xml version="1.0" encoding="utf-8"?>
 <p:sldLayout xmlns:a="http://schemas.openxmlformats.org/drawingml/2006/main" xmlns:r="http://schemas.openxmlformats.org/officeDocument/2006/relationships" xmlns:p="http://schemas.openxmlformats.org/presentationml/2006/main" type="blank" preserve="1">
   <p:cSld name="slidekit · Roadmap">
     <p:bg>
@@ -10836,8 +10178,8 @@
         </p:nvSpPr>
         <p:spPr>
           <a:xfrm>
-            <a:off x="10363200" y="6035040"/>
-            <a:ext cx="1371600" cy="365760"/>
+            <a:off x="11186160" y="6035040"/>
+            <a:ext cx="548640" cy="365760"/>
           </a:xfrm>
         </p:spPr>
         <p:txBody>
@@ -10880,7 +10222,7 @@
             <a:r>
               <a:rPr sz="4200" b="1" i="0">
                 <a:solidFill>
-                  <a:srgbClr val="1B3A5C"/>
+                  <a:srgbClr val="D97706"/>
                 </a:solidFill>
                 <a:latin typeface="Arial"/>
               </a:rPr>
@@ -11331,7 +10673,7 @@
 </p:sldLayout>
 </file>
 
-<file path=ppt/slideLayouts/slideLayout37.xml><?xml version="1.0" encoding="utf-8"?>
+<file path=ppt/slideLayouts/slideLayout36.xml><?xml version="1.0" encoding="utf-8"?>
 <p:sldLayout xmlns:a="http://schemas.openxmlformats.org/drawingml/2006/main" xmlns:r="http://schemas.openxmlformats.org/officeDocument/2006/relationships" xmlns:p="http://schemas.openxmlformats.org/presentationml/2006/main" type="blank" preserve="1">
   <p:cSld name="slidekit · Funnel">
     <p:bg>
@@ -11368,8 +10710,8 @@
         </p:nvSpPr>
         <p:spPr>
           <a:xfrm>
-            <a:off x="10363200" y="6035040"/>
-            <a:ext cx="1371600" cy="365760"/>
+            <a:off x="11186160" y="6035040"/>
+            <a:ext cx="548640" cy="365760"/>
           </a:xfrm>
         </p:spPr>
         <p:txBody>
@@ -11412,7 +10754,7 @@
             <a:r>
               <a:rPr sz="4200" b="1" i="0">
                 <a:solidFill>
-                  <a:srgbClr val="1B3A5C"/>
+                  <a:srgbClr val="D97706"/>
                 </a:solidFill>
                 <a:latin typeface="Arial"/>
               </a:rPr>
@@ -11710,7 +11052,7 @@
 </p:sldLayout>
 </file>
 
-<file path=ppt/slideLayouts/slideLayout38.xml><?xml version="1.0" encoding="utf-8"?>
+<file path=ppt/slideLayouts/slideLayout37.xml><?xml version="1.0" encoding="utf-8"?>
 <p:sldLayout xmlns:a="http://schemas.openxmlformats.org/drawingml/2006/main" xmlns:r="http://schemas.openxmlformats.org/officeDocument/2006/relationships" xmlns:p="http://schemas.openxmlformats.org/presentationml/2006/main" type="blank" preserve="1">
   <p:cSld name="slidekit · Nested Circles">
     <p:bg>
@@ -11747,8 +11089,8 @@
         </p:nvSpPr>
         <p:spPr>
           <a:xfrm>
-            <a:off x="10363200" y="6035040"/>
-            <a:ext cx="1371600" cy="365760"/>
+            <a:off x="11186160" y="6035040"/>
+            <a:ext cx="548640" cy="365760"/>
           </a:xfrm>
         </p:spPr>
         <p:txBody>
@@ -11791,7 +11133,7 @@
             <a:r>
               <a:rPr sz="4200" b="1" i="0">
                 <a:solidFill>
-                  <a:srgbClr val="1B3A5C"/>
+                  <a:srgbClr val="D97706"/>
                 </a:solidFill>
                 <a:latin typeface="Arial"/>
               </a:rPr>
@@ -11817,7 +11159,7 @@
             <a:avLst/>
           </a:prstGeom>
           <a:solidFill>
-            <a:srgbClr val="7A8590"/>
+            <a:srgbClr val="1A1A2E"/>
           </a:solidFill>
           <a:ln>
             <a:noFill/>
@@ -11881,7 +11223,7 @@
             <a:avLst/>
           </a:prstGeom>
           <a:solidFill>
-            <a:srgbClr val="1B3A5C"/>
+            <a:srgbClr val="1A1A2E"/>
           </a:solidFill>
           <a:ln>
             <a:noFill/>
@@ -12131,7 +11473,7 @@
 </p:sldLayout>
 </file>
 
-<file path=ppt/slideLayouts/slideLayout39.xml><?xml version="1.0" encoding="utf-8"?>
+<file path=ppt/slideLayouts/slideLayout38.xml><?xml version="1.0" encoding="utf-8"?>
 <p:sldLayout xmlns:a="http://schemas.openxmlformats.org/drawingml/2006/main" xmlns:r="http://schemas.openxmlformats.org/officeDocument/2006/relationships" xmlns:p="http://schemas.openxmlformats.org/presentationml/2006/main" type="blank" preserve="1">
   <p:cSld name="slidekit · Pyramid">
     <p:bg>
@@ -12168,8 +11510,8 @@
         </p:nvSpPr>
         <p:spPr>
           <a:xfrm>
-            <a:off x="10363200" y="6035040"/>
-            <a:ext cx="1371600" cy="365760"/>
+            <a:off x="11186160" y="6035040"/>
+            <a:ext cx="548640" cy="365760"/>
           </a:xfrm>
         </p:spPr>
         <p:txBody>
@@ -12212,7 +11554,7 @@
             <a:r>
               <a:rPr sz="4200" b="1" i="0">
                 <a:solidFill>
-                  <a:srgbClr val="1B3A5C"/>
+                  <a:srgbClr val="D97706"/>
                 </a:solidFill>
                 <a:latin typeface="Arial"/>
               </a:rPr>
@@ -12233,75 +11575,6 @@
           <a:xfrm>
             <a:off x="3840480" y="1499616"/>
             <a:ext cx="4511040" cy="859536"/>
-          </a:xfrm>
-          <a:prstGeom prst="rect">
-            <a:avLst/>
-          </a:prstGeom>
-          <a:solidFill>
-            <a:srgbClr val="1B3A5C"/>
-          </a:solidFill>
-          <a:ln>
-            <a:noFill/>
-          </a:ln>
-          <a:effectLst/>
-        </p:spPr>
-        <p:txBody>
-          <a:bodyPr rtlCol="0" anchor="ctr"/>
-          <a:lstStyle/>
-          <a:p>
-            <a:pPr algn="ctr"/>
-          </a:p>
-        </p:txBody>
-      </p:sp>
-      <p:sp>
-        <p:nvSpPr>
-          <p:cNvPr id="7" name="TextBox 6"/>
-          <p:cNvSpPr/>
-          <p:nvPr>
-            <p:ph type="body" idx="2"/>
-          </p:nvPr>
-        </p:nvSpPr>
-        <p:spPr>
-          <a:xfrm>
-            <a:off x="3840480" y="1499616"/>
-            <a:ext cx="4511040" cy="859536"/>
-          </a:xfrm>
-          <a:prstGeom prst="rect">
-            <a:avLst/>
-          </a:prstGeom>
-          <a:noFill/>
-        </p:spPr>
-        <p:txBody>
-          <a:bodyPr wrap="none" lIns="0" rIns="0">
-            <a:noAutofit/>
-          </a:bodyPr>
-          <a:lstStyle/>
-          <a:p>
-            <a:pPr algn="l"/>
-            <a:r>
-              <a:rPr sz="3400" b="1" i="0">
-                <a:solidFill>
-                  <a:srgbClr val="FFFFFF"/>
-                </a:solidFill>
-                <a:latin typeface="Arial"/>
-              </a:rPr>
-              <a:t>Vision</a:t>
-            </a:r>
-          </a:p>
-        </p:txBody>
-      </p:sp>
-      <p:sp>
-        <p:nvSpPr>
-          <p:cNvPr id="8" name="Rectangle 7"/>
-          <p:cNvSpPr/>
-          <p:nvPr>
-            <p:ph type="body" idx="3"/>
-          </p:nvPr>
-        </p:nvSpPr>
-        <p:spPr>
-          <a:xfrm>
-            <a:off x="2712720" y="2633472"/>
-            <a:ext cx="6766560" cy="859536"/>
           </a:xfrm>
           <a:prstGeom prst="rect">
             <a:avLst/>
@@ -12324,122 +11597,53 @@
       </p:sp>
       <p:sp>
         <p:nvSpPr>
-          <p:cNvPr id="9" name="TextBox 8"/>
-          <p:cNvSpPr/>
-          <p:nvPr>
-            <p:ph type="body" idx="4"/>
+          <p:cNvPr id="7" name="TextBox 6"/>
+          <p:cNvSpPr/>
+          <p:nvPr>
+            <p:ph type="body" idx="2"/>
+          </p:nvPr>
+        </p:nvSpPr>
+        <p:spPr>
+          <a:xfrm>
+            <a:off x="3840480" y="1499616"/>
+            <a:ext cx="4511040" cy="859536"/>
+          </a:xfrm>
+          <a:prstGeom prst="rect">
+            <a:avLst/>
+          </a:prstGeom>
+          <a:noFill/>
+        </p:spPr>
+        <p:txBody>
+          <a:bodyPr wrap="none" lIns="0" rIns="0">
+            <a:noAutofit/>
+          </a:bodyPr>
+          <a:lstStyle/>
+          <a:p>
+            <a:pPr algn="l"/>
+            <a:r>
+              <a:rPr sz="3400" b="1" i="0">
+                <a:solidFill>
+                  <a:srgbClr val="FFFFFF"/>
+                </a:solidFill>
+                <a:latin typeface="Arial"/>
+              </a:rPr>
+              <a:t>Vision</a:t>
+            </a:r>
+          </a:p>
+        </p:txBody>
+      </p:sp>
+      <p:sp>
+        <p:nvSpPr>
+          <p:cNvPr id="8" name="Rectangle 7"/>
+          <p:cNvSpPr/>
+          <p:nvPr>
+            <p:ph type="body" idx="3"/>
           </p:nvPr>
         </p:nvSpPr>
         <p:spPr>
           <a:xfrm>
             <a:off x="2712720" y="2633472"/>
             <a:ext cx="6766560" cy="859536"/>
-          </a:xfrm>
-          <a:prstGeom prst="rect">
-            <a:avLst/>
-          </a:prstGeom>
-          <a:noFill/>
-        </p:spPr>
-        <p:txBody>
-          <a:bodyPr wrap="none" lIns="0" rIns="0">
-            <a:noAutofit/>
-          </a:bodyPr>
-          <a:lstStyle/>
-          <a:p>
-            <a:pPr algn="l"/>
-            <a:r>
-              <a:rPr sz="3400" b="1" i="0">
-                <a:solidFill>
-                  <a:srgbClr val="FFFFFF"/>
-                </a:solidFill>
-                <a:latin typeface="Arial"/>
-              </a:rPr>
-              <a:t>Strategy</a:t>
-            </a:r>
-          </a:p>
-        </p:txBody>
-      </p:sp>
-      <p:sp>
-        <p:nvSpPr>
-          <p:cNvPr id="10" name="Rectangle 9"/>
-          <p:cNvSpPr/>
-          <p:nvPr>
-            <p:ph type="body" idx="5"/>
-          </p:nvPr>
-        </p:nvSpPr>
-        <p:spPr>
-          <a:xfrm>
-            <a:off x="1584960" y="3767328"/>
-            <a:ext cx="9022080" cy="859536"/>
-          </a:xfrm>
-          <a:prstGeom prst="rect">
-            <a:avLst/>
-          </a:prstGeom>
-          <a:solidFill>
-            <a:srgbClr val="1B3A5C"/>
-          </a:solidFill>
-          <a:ln>
-            <a:noFill/>
-          </a:ln>
-          <a:effectLst/>
-        </p:spPr>
-        <p:txBody>
-          <a:bodyPr rtlCol="0" anchor="ctr"/>
-          <a:lstStyle/>
-          <a:p>
-            <a:pPr algn="ctr"/>
-          </a:p>
-        </p:txBody>
-      </p:sp>
-      <p:sp>
-        <p:nvSpPr>
-          <p:cNvPr id="11" name="TextBox 10"/>
-          <p:cNvSpPr/>
-          <p:nvPr>
-            <p:ph type="body" idx="6"/>
-          </p:nvPr>
-        </p:nvSpPr>
-        <p:spPr>
-          <a:xfrm>
-            <a:off x="1584960" y="3767328"/>
-            <a:ext cx="9022080" cy="859536"/>
-          </a:xfrm>
-          <a:prstGeom prst="rect">
-            <a:avLst/>
-          </a:prstGeom>
-          <a:noFill/>
-        </p:spPr>
-        <p:txBody>
-          <a:bodyPr wrap="none" lIns="0" rIns="0">
-            <a:noAutofit/>
-          </a:bodyPr>
-          <a:lstStyle/>
-          <a:p>
-            <a:pPr algn="l"/>
-            <a:r>
-              <a:rPr sz="3400" b="1" i="0">
-                <a:solidFill>
-                  <a:srgbClr val="FFFFFF"/>
-                </a:solidFill>
-                <a:latin typeface="Arial"/>
-              </a:rPr>
-              <a:t>Goals</a:t>
-            </a:r>
-          </a:p>
-        </p:txBody>
-      </p:sp>
-      <p:sp>
-        <p:nvSpPr>
-          <p:cNvPr id="12" name="Rectangle 11"/>
-          <p:cNvSpPr/>
-          <p:nvPr>
-            <p:ph type="body" idx="7"/>
-          </p:nvPr>
-        </p:nvSpPr>
-        <p:spPr>
-          <a:xfrm>
-            <a:off x="457200" y="4901184"/>
-            <a:ext cx="11277600" cy="859536"/>
           </a:xfrm>
           <a:prstGeom prst="rect">
             <a:avLst/>
@@ -12462,10 +11666,116 @@
       </p:sp>
       <p:sp>
         <p:nvSpPr>
-          <p:cNvPr id="13" name="TextBox 12"/>
-          <p:cNvSpPr/>
-          <p:nvPr>
-            <p:ph type="body" idx="8"/>
+          <p:cNvPr id="9" name="TextBox 8"/>
+          <p:cNvSpPr/>
+          <p:nvPr>
+            <p:ph type="body" idx="4"/>
+          </p:nvPr>
+        </p:nvSpPr>
+        <p:spPr>
+          <a:xfrm>
+            <a:off x="2712720" y="2633472"/>
+            <a:ext cx="6766560" cy="859536"/>
+          </a:xfrm>
+          <a:prstGeom prst="rect">
+            <a:avLst/>
+          </a:prstGeom>
+          <a:noFill/>
+        </p:spPr>
+        <p:txBody>
+          <a:bodyPr wrap="none" lIns="0" rIns="0">
+            <a:noAutofit/>
+          </a:bodyPr>
+          <a:lstStyle/>
+          <a:p>
+            <a:pPr algn="l"/>
+            <a:r>
+              <a:rPr sz="3400" b="1" i="0">
+                <a:solidFill>
+                  <a:srgbClr val="FFFFFF"/>
+                </a:solidFill>
+                <a:latin typeface="Arial"/>
+              </a:rPr>
+              <a:t>Strategy</a:t>
+            </a:r>
+          </a:p>
+        </p:txBody>
+      </p:sp>
+      <p:sp>
+        <p:nvSpPr>
+          <p:cNvPr id="10" name="Rectangle 9"/>
+          <p:cNvSpPr/>
+          <p:nvPr>
+            <p:ph type="body" idx="5"/>
+          </p:nvPr>
+        </p:nvSpPr>
+        <p:spPr>
+          <a:xfrm>
+            <a:off x="1584960" y="3767328"/>
+            <a:ext cx="9022080" cy="859536"/>
+          </a:xfrm>
+          <a:prstGeom prst="rect">
+            <a:avLst/>
+          </a:prstGeom>
+          <a:solidFill>
+            <a:srgbClr val="D97706"/>
+          </a:solidFill>
+          <a:ln>
+            <a:noFill/>
+          </a:ln>
+          <a:effectLst/>
+        </p:spPr>
+        <p:txBody>
+          <a:bodyPr rtlCol="0" anchor="ctr"/>
+          <a:lstStyle/>
+          <a:p>
+            <a:pPr algn="ctr"/>
+          </a:p>
+        </p:txBody>
+      </p:sp>
+      <p:sp>
+        <p:nvSpPr>
+          <p:cNvPr id="11" name="TextBox 10"/>
+          <p:cNvSpPr/>
+          <p:nvPr>
+            <p:ph type="body" idx="6"/>
+          </p:nvPr>
+        </p:nvSpPr>
+        <p:spPr>
+          <a:xfrm>
+            <a:off x="1584960" y="3767328"/>
+            <a:ext cx="9022080" cy="859536"/>
+          </a:xfrm>
+          <a:prstGeom prst="rect">
+            <a:avLst/>
+          </a:prstGeom>
+          <a:noFill/>
+        </p:spPr>
+        <p:txBody>
+          <a:bodyPr wrap="none" lIns="0" rIns="0">
+            <a:noAutofit/>
+          </a:bodyPr>
+          <a:lstStyle/>
+          <a:p>
+            <a:pPr algn="l"/>
+            <a:r>
+              <a:rPr sz="3400" b="1" i="0">
+                <a:solidFill>
+                  <a:srgbClr val="FFFFFF"/>
+                </a:solidFill>
+                <a:latin typeface="Arial"/>
+              </a:rPr>
+              <a:t>Goals</a:t>
+            </a:r>
+          </a:p>
+        </p:txBody>
+      </p:sp>
+      <p:sp>
+        <p:nvSpPr>
+          <p:cNvPr id="12" name="Rectangle 11"/>
+          <p:cNvSpPr/>
+          <p:nvPr>
+            <p:ph type="body" idx="7"/>
           </p:nvPr>
         </p:nvSpPr>
         <p:spPr>
@@ -12476,6 +11786,38 @@
           <a:prstGeom prst="rect">
             <a:avLst/>
           </a:prstGeom>
+          <a:solidFill>
+            <a:srgbClr val="D97706"/>
+          </a:solidFill>
+          <a:ln>
+            <a:noFill/>
+          </a:ln>
+          <a:effectLst/>
+        </p:spPr>
+        <p:txBody>
+          <a:bodyPr rtlCol="0" anchor="ctr"/>
+          <a:lstStyle/>
+          <a:p>
+            <a:pPr algn="ctr"/>
+          </a:p>
+        </p:txBody>
+      </p:sp>
+      <p:sp>
+        <p:nvSpPr>
+          <p:cNvPr id="13" name="TextBox 12"/>
+          <p:cNvSpPr/>
+          <p:nvPr>
+            <p:ph type="body" idx="8"/>
+          </p:nvPr>
+        </p:nvSpPr>
+        <p:spPr>
+          <a:xfrm>
+            <a:off x="457200" y="4901184"/>
+            <a:ext cx="11277600" cy="859536"/>
+          </a:xfrm>
+          <a:prstGeom prst="rect">
+            <a:avLst/>
+          </a:prstGeom>
           <a:noFill/>
         </p:spPr>
         <p:txBody>
@@ -12493,6 +11835,533 @@
                 <a:latin typeface="Arial"/>
               </a:rPr>
               <a:t>Tactics</a:t>
+            </a:r>
+          </a:p>
+        </p:txBody>
+      </p:sp>
+    </p:spTree>
+    <p:extLst>
+      <p:ext uri="{BB962C8B-B14F-4D97-AF65-F5344CB8AC3E}">
+        <p14:creationId xmlns:p14="http://schemas.microsoft.com/office/powerpoint/2010/main" val="1212999818"/>
+      </p:ext>
+    </p:extLst>
+  </p:cSld>
+  <p:clrMapOvr>
+    <a:masterClrMapping/>
+  </p:clrMapOvr>
+</p:sldLayout>
+</file>
+
+<file path=ppt/slideLayouts/slideLayout39.xml><?xml version="1.0" encoding="utf-8"?>
+<p:sldLayout xmlns:a="http://schemas.openxmlformats.org/drawingml/2006/main" xmlns:r="http://schemas.openxmlformats.org/officeDocument/2006/relationships" xmlns:p="http://schemas.openxmlformats.org/presentationml/2006/main" type="blank" preserve="1">
+  <p:cSld name="slidekit · SWOT">
+    <p:bg>
+      <p:bgPr>
+        <a:solidFill>
+          <a:srgbClr val="FFFFFF"/>
+        </a:solidFill>
+        <a:effectLst/>
+      </p:bgPr>
+    </p:bg>
+    <p:spTree>
+      <p:nvGrpSpPr>
+        <p:cNvPr id="1" name=""/>
+        <p:cNvGrpSpPr/>
+        <p:nvPr/>
+      </p:nvGrpSpPr>
+      <p:grpSpPr>
+        <a:xfrm>
+          <a:off x="0" y="0"/>
+          <a:ext cx="0" cy="0"/>
+          <a:chOff x="0" y="0"/>
+          <a:chExt cx="0" cy="0"/>
+        </a:xfrm>
+      </p:grpSpPr>
+      <p:sp>
+        <p:nvSpPr>
+          <p:cNvPr id="4" name="Slide Number Placeholder 3"/>
+          <p:cNvSpPr>
+            <a:spLocks noGrp="1"/>
+          </p:cNvSpPr>
+          <p:nvPr>
+            <p:ph type="sldNum" sz="quarter" idx="12"/>
+          </p:nvPr>
+        </p:nvSpPr>
+        <p:spPr>
+          <a:xfrm>
+            <a:off x="11186160" y="6035040"/>
+            <a:ext cx="548640" cy="365760"/>
+          </a:xfrm>
+        </p:spPr>
+        <p:txBody>
+          <a:bodyPr/>
+          <a:lstStyle/>
+          <a:p>
+            <a:fld id="{C1FF6DA9-008F-8B48-92A6-B652298478BF}" type="slidenum">
+              <a:rPr lang="en-US" smtClean="0"/>
+              <a:t>‹#›</a:t>
+            </a:fld>
+            <a:endParaRPr lang="en-US"/>
+          </a:p>
+        </p:txBody>
+      </p:sp>
+      <p:sp>
+        <p:nvSpPr>
+          <p:cNvPr id="5" name="TextBox 4"/>
+          <p:cNvSpPr/>
+          <p:nvPr>
+            <p:ph type="title"/>
+          </p:nvPr>
+        </p:nvSpPr>
+        <p:spPr>
+          <a:xfrm>
+            <a:off x="457200" y="457200"/>
+            <a:ext cx="11277600" cy="768096"/>
+          </a:xfrm>
+          <a:prstGeom prst="rect">
+            <a:avLst/>
+          </a:prstGeom>
+          <a:noFill/>
+        </p:spPr>
+        <p:txBody>
+          <a:bodyPr wrap="none" lIns="0" rIns="0">
+            <a:noAutofit/>
+          </a:bodyPr>
+          <a:lstStyle/>
+          <a:p>
+            <a:pPr algn="l"/>
+            <a:r>
+              <a:rPr sz="4200" b="1" i="0">
+                <a:solidFill>
+                  <a:srgbClr val="D97706"/>
+                </a:solidFill>
+                <a:latin typeface="Arial"/>
+              </a:rPr>
+              <a:t>SWOT Analysis</a:t>
+            </a:r>
+          </a:p>
+        </p:txBody>
+      </p:sp>
+      <p:sp>
+        <p:nvSpPr>
+          <p:cNvPr id="6" name="TextBox 5"/>
+          <p:cNvSpPr/>
+          <p:nvPr>
+            <p:ph type="body" idx="1"/>
+          </p:nvPr>
+        </p:nvSpPr>
+        <p:spPr>
+          <a:xfrm>
+            <a:off x="457200" y="1499616"/>
+            <a:ext cx="5501640" cy="621791"/>
+          </a:xfrm>
+          <a:prstGeom prst="rect">
+            <a:avLst/>
+          </a:prstGeom>
+          <a:noFill/>
+        </p:spPr>
+        <p:txBody>
+          <a:bodyPr wrap="none" lIns="0" rIns="0">
+            <a:noAutofit/>
+          </a:bodyPr>
+          <a:lstStyle/>
+          <a:p>
+            <a:pPr algn="l"/>
+            <a:r>
+              <a:rPr sz="3400" b="1" i="0">
+                <a:solidFill>
+                  <a:srgbClr val="D97706"/>
+                </a:solidFill>
+                <a:latin typeface="Arial"/>
+              </a:rPr>
+              <a:t>Strengths</a:t>
+            </a:r>
+          </a:p>
+        </p:txBody>
+      </p:sp>
+      <p:sp>
+        <p:nvSpPr>
+          <p:cNvPr id="7" name="Rectangle 6"/>
+          <p:cNvSpPr/>
+          <p:nvPr>
+            <p:ph type="body" idx="2"/>
+          </p:nvPr>
+        </p:nvSpPr>
+        <p:spPr>
+          <a:xfrm>
+            <a:off x="457200" y="2176271"/>
+            <a:ext cx="2015207" cy="54864"/>
+          </a:xfrm>
+          <a:prstGeom prst="rect">
+            <a:avLst/>
+          </a:prstGeom>
+          <a:solidFill>
+            <a:srgbClr val="D97706"/>
+          </a:solidFill>
+          <a:ln>
+            <a:noFill/>
+          </a:ln>
+          <a:effectLst/>
+        </p:spPr>
+        <p:txBody>
+          <a:bodyPr rtlCol="0" anchor="ctr"/>
+          <a:lstStyle/>
+          <a:p>
+            <a:pPr algn="ctr"/>
+          </a:p>
+        </p:txBody>
+      </p:sp>
+      <p:sp>
+        <p:nvSpPr>
+          <p:cNvPr id="8" name="TextBox 7"/>
+          <p:cNvSpPr/>
+          <p:nvPr>
+            <p:ph type="body" idx="3"/>
+          </p:nvPr>
+        </p:nvSpPr>
+        <p:spPr>
+          <a:xfrm>
+            <a:off x="457200" y="2395727"/>
+            <a:ext cx="7863523" cy="609600"/>
+          </a:xfrm>
+          <a:prstGeom prst="rect">
+            <a:avLst/>
+          </a:prstGeom>
+          <a:noFill/>
+        </p:spPr>
+        <p:txBody>
+          <a:bodyPr wrap="none" lIns="0" rIns="0">
+            <a:noAutofit/>
+          </a:bodyPr>
+          <a:lstStyle/>
+          <a:p>
+            <a:pPr algn="l"/>
+            <a:r>
+              <a:rPr sz="3400" b="0" i="0">
+                <a:solidFill>
+                  <a:srgbClr val="1A1A2E"/>
+                </a:solidFill>
+                <a:latin typeface="Arial"/>
+              </a:rPr>
+              <a:t>Strong brand, loyal users</a:t>
+            </a:r>
+          </a:p>
+        </p:txBody>
+      </p:sp>
+      <p:sp>
+        <p:nvSpPr>
+          <p:cNvPr id="9" name="TextBox 8"/>
+          <p:cNvSpPr/>
+          <p:nvPr>
+            <p:ph type="body" idx="4"/>
+          </p:nvPr>
+        </p:nvSpPr>
+        <p:spPr>
+          <a:xfrm>
+            <a:off x="6233160" y="1499616"/>
+            <a:ext cx="5501640" cy="621791"/>
+          </a:xfrm>
+          <a:prstGeom prst="rect">
+            <a:avLst/>
+          </a:prstGeom>
+          <a:noFill/>
+        </p:spPr>
+        <p:txBody>
+          <a:bodyPr wrap="none" lIns="0" rIns="0">
+            <a:noAutofit/>
+          </a:bodyPr>
+          <a:lstStyle/>
+          <a:p>
+            <a:pPr algn="l"/>
+            <a:r>
+              <a:rPr sz="3400" b="1" i="0">
+                <a:solidFill>
+                  <a:srgbClr val="1A1A2E"/>
+                </a:solidFill>
+                <a:latin typeface="Arial"/>
+              </a:rPr>
+              <a:t>Weaknesses</a:t>
+            </a:r>
+          </a:p>
+        </p:txBody>
+      </p:sp>
+      <p:sp>
+        <p:nvSpPr>
+          <p:cNvPr id="10" name="Rectangle 9"/>
+          <p:cNvSpPr/>
+          <p:nvPr>
+            <p:ph type="body" idx="5"/>
+          </p:nvPr>
+        </p:nvSpPr>
+        <p:spPr>
+          <a:xfrm>
+            <a:off x="6233160" y="2176271"/>
+            <a:ext cx="2584686" cy="54864"/>
+          </a:xfrm>
+          <a:prstGeom prst="rect">
+            <a:avLst/>
+          </a:prstGeom>
+          <a:solidFill>
+            <a:srgbClr val="1A1A2E"/>
+          </a:solidFill>
+          <a:ln>
+            <a:noFill/>
+          </a:ln>
+          <a:effectLst/>
+        </p:spPr>
+        <p:txBody>
+          <a:bodyPr rtlCol="0" anchor="ctr"/>
+          <a:lstStyle/>
+          <a:p>
+            <a:pPr algn="ctr"/>
+          </a:p>
+        </p:txBody>
+      </p:sp>
+      <p:sp>
+        <p:nvSpPr>
+          <p:cNvPr id="11" name="TextBox 10"/>
+          <p:cNvSpPr/>
+          <p:nvPr>
+            <p:ph type="body" idx="6"/>
+          </p:nvPr>
+        </p:nvSpPr>
+        <p:spPr>
+          <a:xfrm>
+            <a:off x="6233160" y="2395727"/>
+            <a:ext cx="5958840" cy="609600"/>
+          </a:xfrm>
+          <a:prstGeom prst="rect">
+            <a:avLst/>
+          </a:prstGeom>
+          <a:noFill/>
+        </p:spPr>
+        <p:txBody>
+          <a:bodyPr wrap="none" lIns="0" rIns="0">
+            <a:noAutofit/>
+          </a:bodyPr>
+          <a:lstStyle/>
+          <a:p>
+            <a:pPr algn="l"/>
+            <a:r>
+              <a:rPr sz="3400" b="0" i="0">
+                <a:solidFill>
+                  <a:srgbClr val="1A1A2E"/>
+                </a:solidFill>
+                <a:latin typeface="Arial"/>
+              </a:rPr>
+              <a:t>Thin margins, small team</a:t>
+            </a:r>
+          </a:p>
+        </p:txBody>
+      </p:sp>
+      <p:sp>
+        <p:nvSpPr>
+          <p:cNvPr id="12" name="TextBox 11"/>
+          <p:cNvSpPr/>
+          <p:nvPr>
+            <p:ph type="body" idx="7"/>
+          </p:nvPr>
+        </p:nvSpPr>
+        <p:spPr>
+          <a:xfrm>
+            <a:off x="457200" y="3767328"/>
+            <a:ext cx="5501640" cy="621791"/>
+          </a:xfrm>
+          <a:prstGeom prst="rect">
+            <a:avLst/>
+          </a:prstGeom>
+          <a:noFill/>
+        </p:spPr>
+        <p:txBody>
+          <a:bodyPr wrap="none" lIns="0" rIns="0">
+            <a:noAutofit/>
+          </a:bodyPr>
+          <a:lstStyle/>
+          <a:p>
+            <a:pPr algn="l"/>
+            <a:r>
+              <a:rPr sz="3400" b="1" i="0">
+                <a:solidFill>
+                  <a:srgbClr val="D97706"/>
+                </a:solidFill>
+                <a:latin typeface="Arial"/>
+              </a:rPr>
+              <a:t>Opportunities</a:t>
+            </a:r>
+          </a:p>
+        </p:txBody>
+      </p:sp>
+      <p:sp>
+        <p:nvSpPr>
+          <p:cNvPr id="13" name="Rectangle 12"/>
+          <p:cNvSpPr/>
+          <p:nvPr>
+            <p:ph type="body" idx="8"/>
+          </p:nvPr>
+        </p:nvSpPr>
+        <p:spPr>
+          <a:xfrm>
+            <a:off x="457200" y="4443983"/>
+            <a:ext cx="2830525" cy="54864"/>
+          </a:xfrm>
+          <a:prstGeom prst="rect">
+            <a:avLst/>
+          </a:prstGeom>
+          <a:solidFill>
+            <a:srgbClr val="D97706"/>
+          </a:solidFill>
+          <a:ln>
+            <a:noFill/>
+          </a:ln>
+          <a:effectLst/>
+        </p:spPr>
+        <p:txBody>
+          <a:bodyPr rtlCol="0" anchor="ctr"/>
+          <a:lstStyle/>
+          <a:p>
+            <a:pPr algn="ctr"/>
+          </a:p>
+        </p:txBody>
+      </p:sp>
+      <p:sp>
+        <p:nvSpPr>
+          <p:cNvPr id="14" name="TextBox 13"/>
+          <p:cNvSpPr/>
+          <p:nvPr>
+            <p:ph type="body" idx="9"/>
+          </p:nvPr>
+        </p:nvSpPr>
+        <p:spPr>
+          <a:xfrm>
+            <a:off x="457200" y="4663439"/>
+            <a:ext cx="8015326" cy="609600"/>
+          </a:xfrm>
+          <a:prstGeom prst="rect">
+            <a:avLst/>
+          </a:prstGeom>
+          <a:noFill/>
+        </p:spPr>
+        <p:txBody>
+          <a:bodyPr wrap="none" lIns="0" rIns="0">
+            <a:noAutofit/>
+          </a:bodyPr>
+          <a:lstStyle/>
+          <a:p>
+            <a:pPr algn="l"/>
+            <a:r>
+              <a:rPr sz="3400" b="0" i="0">
+                <a:solidFill>
+                  <a:srgbClr val="1A1A2E"/>
+                </a:solidFill>
+                <a:latin typeface="Arial"/>
+              </a:rPr>
+              <a:t>New markets via partners</a:t>
+            </a:r>
+          </a:p>
+        </p:txBody>
+      </p:sp>
+      <p:sp>
+        <p:nvSpPr>
+          <p:cNvPr id="15" name="TextBox 14"/>
+          <p:cNvSpPr/>
+          <p:nvPr>
+            <p:ph type="body" idx="13"/>
+          </p:nvPr>
+        </p:nvSpPr>
+        <p:spPr>
+          <a:xfrm>
+            <a:off x="6233160" y="3767328"/>
+            <a:ext cx="5501640" cy="621791"/>
+          </a:xfrm>
+          <a:prstGeom prst="rect">
+            <a:avLst/>
+          </a:prstGeom>
+          <a:noFill/>
+        </p:spPr>
+        <p:txBody>
+          <a:bodyPr wrap="none" lIns="0" rIns="0">
+            <a:noAutofit/>
+          </a:bodyPr>
+          <a:lstStyle/>
+          <a:p>
+            <a:pPr algn="l"/>
+            <a:r>
+              <a:rPr sz="3400" b="1" i="0">
+                <a:solidFill>
+                  <a:srgbClr val="1A1A2E"/>
+                </a:solidFill>
+                <a:latin typeface="Arial"/>
+              </a:rPr>
+              <a:t>Threats</a:t>
+            </a:r>
+          </a:p>
+        </p:txBody>
+      </p:sp>
+      <p:sp>
+        <p:nvSpPr>
+          <p:cNvPr id="16" name="Rectangle 15"/>
+          <p:cNvSpPr/>
+          <p:nvPr>
+            <p:ph type="body" idx="14"/>
+          </p:nvPr>
+        </p:nvSpPr>
+        <p:spPr>
+          <a:xfrm>
+            <a:off x="6233160" y="4443983"/>
+            <a:ext cx="1559793" cy="54864"/>
+          </a:xfrm>
+          <a:prstGeom prst="rect">
+            <a:avLst/>
+          </a:prstGeom>
+          <a:solidFill>
+            <a:srgbClr val="1A1A2E"/>
+          </a:solidFill>
+          <a:ln>
+            <a:noFill/>
+          </a:ln>
+          <a:effectLst/>
+        </p:spPr>
+        <p:txBody>
+          <a:bodyPr rtlCol="0" anchor="ctr"/>
+          <a:lstStyle/>
+          <a:p>
+            <a:pPr algn="ctr"/>
+          </a:p>
+        </p:txBody>
+      </p:sp>
+      <p:sp>
+        <p:nvSpPr>
+          <p:cNvPr id="17" name="TextBox 16"/>
+          <p:cNvSpPr/>
+          <p:nvPr>
+            <p:ph type="body" idx="15"/>
+          </p:nvPr>
+        </p:nvSpPr>
+        <p:spPr>
+          <a:xfrm>
+            <a:off x="6233160" y="4663439"/>
+            <a:ext cx="5958840" cy="609600"/>
+          </a:xfrm>
+          <a:prstGeom prst="rect">
+            <a:avLst/>
+          </a:prstGeom>
+          <a:noFill/>
+        </p:spPr>
+        <p:txBody>
+          <a:bodyPr wrap="none" lIns="0" rIns="0">
+            <a:noAutofit/>
+          </a:bodyPr>
+          <a:lstStyle/>
+          <a:p>
+            <a:pPr algn="l"/>
+            <a:r>
+              <a:rPr sz="3400" b="0" i="0">
+                <a:solidFill>
+                  <a:srgbClr val="1A1A2E"/>
+                </a:solidFill>
+                <a:latin typeface="Arial"/>
+              </a:rPr>
+              <a:t>New entrants cut prices</a:t>
             </a:r>
           </a:p>
         </p:txBody>
@@ -12800,533 +12669,6 @@
 
 <file path=ppt/slideLayouts/slideLayout40.xml><?xml version="1.0" encoding="utf-8"?>
 <p:sldLayout xmlns:a="http://schemas.openxmlformats.org/drawingml/2006/main" xmlns:r="http://schemas.openxmlformats.org/officeDocument/2006/relationships" xmlns:p="http://schemas.openxmlformats.org/presentationml/2006/main" type="blank" preserve="1">
-  <p:cSld name="slidekit · SWOT">
-    <p:bg>
-      <p:bgPr>
-        <a:solidFill>
-          <a:srgbClr val="FFFFFF"/>
-        </a:solidFill>
-        <a:effectLst/>
-      </p:bgPr>
-    </p:bg>
-    <p:spTree>
-      <p:nvGrpSpPr>
-        <p:cNvPr id="1" name=""/>
-        <p:cNvGrpSpPr/>
-        <p:nvPr/>
-      </p:nvGrpSpPr>
-      <p:grpSpPr>
-        <a:xfrm>
-          <a:off x="0" y="0"/>
-          <a:ext cx="0" cy="0"/>
-          <a:chOff x="0" y="0"/>
-          <a:chExt cx="0" cy="0"/>
-        </a:xfrm>
-      </p:grpSpPr>
-      <p:sp>
-        <p:nvSpPr>
-          <p:cNvPr id="4" name="Slide Number Placeholder 3"/>
-          <p:cNvSpPr>
-            <a:spLocks noGrp="1"/>
-          </p:cNvSpPr>
-          <p:nvPr>
-            <p:ph type="sldNum" sz="quarter" idx="12"/>
-          </p:nvPr>
-        </p:nvSpPr>
-        <p:spPr>
-          <a:xfrm>
-            <a:off x="10363200" y="6035040"/>
-            <a:ext cx="1371600" cy="365760"/>
-          </a:xfrm>
-        </p:spPr>
-        <p:txBody>
-          <a:bodyPr/>
-          <a:lstStyle/>
-          <a:p>
-            <a:fld id="{C1FF6DA9-008F-8B48-92A6-B652298478BF}" type="slidenum">
-              <a:rPr lang="en-US" smtClean="0"/>
-              <a:t>‹#›</a:t>
-            </a:fld>
-            <a:endParaRPr lang="en-US"/>
-          </a:p>
-        </p:txBody>
-      </p:sp>
-      <p:sp>
-        <p:nvSpPr>
-          <p:cNvPr id="5" name="TextBox 4"/>
-          <p:cNvSpPr/>
-          <p:nvPr>
-            <p:ph type="title"/>
-          </p:nvPr>
-        </p:nvSpPr>
-        <p:spPr>
-          <a:xfrm>
-            <a:off x="457200" y="457200"/>
-            <a:ext cx="11277600" cy="768096"/>
-          </a:xfrm>
-          <a:prstGeom prst="rect">
-            <a:avLst/>
-          </a:prstGeom>
-          <a:noFill/>
-        </p:spPr>
-        <p:txBody>
-          <a:bodyPr wrap="none" lIns="0" rIns="0">
-            <a:noAutofit/>
-          </a:bodyPr>
-          <a:lstStyle/>
-          <a:p>
-            <a:pPr algn="l"/>
-            <a:r>
-              <a:rPr sz="4200" b="1" i="0">
-                <a:solidFill>
-                  <a:srgbClr val="1B3A5C"/>
-                </a:solidFill>
-                <a:latin typeface="Arial"/>
-              </a:rPr>
-              <a:t>SWOT Analysis</a:t>
-            </a:r>
-          </a:p>
-        </p:txBody>
-      </p:sp>
-      <p:sp>
-        <p:nvSpPr>
-          <p:cNvPr id="6" name="TextBox 5"/>
-          <p:cNvSpPr/>
-          <p:nvPr>
-            <p:ph type="body" idx="1"/>
-          </p:nvPr>
-        </p:nvSpPr>
-        <p:spPr>
-          <a:xfrm>
-            <a:off x="457200" y="1499616"/>
-            <a:ext cx="5501640" cy="621791"/>
-          </a:xfrm>
-          <a:prstGeom prst="rect">
-            <a:avLst/>
-          </a:prstGeom>
-          <a:noFill/>
-        </p:spPr>
-        <p:txBody>
-          <a:bodyPr wrap="none" lIns="0" rIns="0">
-            <a:noAutofit/>
-          </a:bodyPr>
-          <a:lstStyle/>
-          <a:p>
-            <a:pPr algn="l"/>
-            <a:r>
-              <a:rPr sz="3400" b="1" i="0">
-                <a:solidFill>
-                  <a:srgbClr val="D97706"/>
-                </a:solidFill>
-                <a:latin typeface="Arial"/>
-              </a:rPr>
-              <a:t>Strengths</a:t>
-            </a:r>
-          </a:p>
-        </p:txBody>
-      </p:sp>
-      <p:sp>
-        <p:nvSpPr>
-          <p:cNvPr id="7" name="Rectangle 6"/>
-          <p:cNvSpPr/>
-          <p:nvPr>
-            <p:ph type="body" idx="2"/>
-          </p:nvPr>
-        </p:nvSpPr>
-        <p:spPr>
-          <a:xfrm>
-            <a:off x="457200" y="2176271"/>
-            <a:ext cx="1650492" cy="54864"/>
-          </a:xfrm>
-          <a:prstGeom prst="rect">
-            <a:avLst/>
-          </a:prstGeom>
-          <a:solidFill>
-            <a:srgbClr val="D97706"/>
-          </a:solidFill>
-          <a:ln>
-            <a:noFill/>
-          </a:ln>
-          <a:effectLst/>
-        </p:spPr>
-        <p:txBody>
-          <a:bodyPr rtlCol="0" anchor="ctr"/>
-          <a:lstStyle/>
-          <a:p>
-            <a:pPr algn="ctr"/>
-          </a:p>
-        </p:txBody>
-      </p:sp>
-      <p:sp>
-        <p:nvSpPr>
-          <p:cNvPr id="8" name="TextBox 7"/>
-          <p:cNvSpPr/>
-          <p:nvPr>
-            <p:ph type="body" idx="3"/>
-          </p:nvPr>
-        </p:nvSpPr>
-        <p:spPr>
-          <a:xfrm>
-            <a:off x="457200" y="2395727"/>
-            <a:ext cx="5501640" cy="1097281"/>
-          </a:xfrm>
-          <a:prstGeom prst="rect">
-            <a:avLst/>
-          </a:prstGeom>
-          <a:noFill/>
-        </p:spPr>
-        <p:txBody>
-          <a:bodyPr wrap="square" lIns="0" rIns="0">
-            <a:noAutofit/>
-          </a:bodyPr>
-          <a:lstStyle/>
-          <a:p>
-            <a:pPr algn="l"/>
-            <a:r>
-              <a:rPr sz="3400" b="0" i="0">
-                <a:solidFill>
-                  <a:srgbClr val="1A1A2E"/>
-                </a:solidFill>
-                <a:latin typeface="Arial"/>
-              </a:rPr>
-              <a:t>A strong brand with loyal users</a:t>
-            </a:r>
-          </a:p>
-        </p:txBody>
-      </p:sp>
-      <p:sp>
-        <p:nvSpPr>
-          <p:cNvPr id="9" name="TextBox 8"/>
-          <p:cNvSpPr/>
-          <p:nvPr>
-            <p:ph type="body" idx="4"/>
-          </p:nvPr>
-        </p:nvSpPr>
-        <p:spPr>
-          <a:xfrm>
-            <a:off x="6233160" y="1499616"/>
-            <a:ext cx="5501640" cy="621791"/>
-          </a:xfrm>
-          <a:prstGeom prst="rect">
-            <a:avLst/>
-          </a:prstGeom>
-          <a:noFill/>
-        </p:spPr>
-        <p:txBody>
-          <a:bodyPr wrap="none" lIns="0" rIns="0">
-            <a:noAutofit/>
-          </a:bodyPr>
-          <a:lstStyle/>
-          <a:p>
-            <a:pPr algn="l"/>
-            <a:r>
-              <a:rPr sz="3400" b="1" i="0">
-                <a:solidFill>
-                  <a:srgbClr val="7A8590"/>
-                </a:solidFill>
-                <a:latin typeface="Arial"/>
-              </a:rPr>
-              <a:t>Weaknesses</a:t>
-            </a:r>
-          </a:p>
-        </p:txBody>
-      </p:sp>
-      <p:sp>
-        <p:nvSpPr>
-          <p:cNvPr id="10" name="Rectangle 9"/>
-          <p:cNvSpPr/>
-          <p:nvPr>
-            <p:ph type="body" idx="5"/>
-          </p:nvPr>
-        </p:nvSpPr>
-        <p:spPr>
-          <a:xfrm>
-            <a:off x="6233160" y="2176271"/>
-            <a:ext cx="1650492" cy="54864"/>
-          </a:xfrm>
-          <a:prstGeom prst="rect">
-            <a:avLst/>
-          </a:prstGeom>
-          <a:solidFill>
-            <a:srgbClr val="7A8590"/>
-          </a:solidFill>
-          <a:ln>
-            <a:noFill/>
-          </a:ln>
-          <a:effectLst/>
-        </p:spPr>
-        <p:txBody>
-          <a:bodyPr rtlCol="0" anchor="ctr"/>
-          <a:lstStyle/>
-          <a:p>
-            <a:pPr algn="ctr"/>
-          </a:p>
-        </p:txBody>
-      </p:sp>
-      <p:sp>
-        <p:nvSpPr>
-          <p:cNvPr id="11" name="TextBox 10"/>
-          <p:cNvSpPr/>
-          <p:nvPr>
-            <p:ph type="body" idx="6"/>
-          </p:nvPr>
-        </p:nvSpPr>
-        <p:spPr>
-          <a:xfrm>
-            <a:off x="6233160" y="2395727"/>
-            <a:ext cx="5501640" cy="1097281"/>
-          </a:xfrm>
-          <a:prstGeom prst="rect">
-            <a:avLst/>
-          </a:prstGeom>
-          <a:noFill/>
-        </p:spPr>
-        <p:txBody>
-          <a:bodyPr wrap="square" lIns="0" rIns="0">
-            <a:noAutofit/>
-          </a:bodyPr>
-          <a:lstStyle/>
-          <a:p>
-            <a:pPr algn="l"/>
-            <a:r>
-              <a:rPr sz="3400" b="0" i="0">
-                <a:solidFill>
-                  <a:srgbClr val="1A1A2E"/>
-                </a:solidFill>
-                <a:latin typeface="Arial"/>
-              </a:rPr>
-              <a:t>Thin margins and a small team</a:t>
-            </a:r>
-          </a:p>
-        </p:txBody>
-      </p:sp>
-      <p:sp>
-        <p:nvSpPr>
-          <p:cNvPr id="12" name="TextBox 11"/>
-          <p:cNvSpPr/>
-          <p:nvPr>
-            <p:ph type="body" idx="7"/>
-          </p:nvPr>
-        </p:nvSpPr>
-        <p:spPr>
-          <a:xfrm>
-            <a:off x="457200" y="3767328"/>
-            <a:ext cx="5501640" cy="621791"/>
-          </a:xfrm>
-          <a:prstGeom prst="rect">
-            <a:avLst/>
-          </a:prstGeom>
-          <a:noFill/>
-        </p:spPr>
-        <p:txBody>
-          <a:bodyPr wrap="none" lIns="0" rIns="0">
-            <a:noAutofit/>
-          </a:bodyPr>
-          <a:lstStyle/>
-          <a:p>
-            <a:pPr algn="l"/>
-            <a:r>
-              <a:rPr sz="3400" b="1" i="0">
-                <a:solidFill>
-                  <a:srgbClr val="D97706"/>
-                </a:solidFill>
-                <a:latin typeface="Arial"/>
-              </a:rPr>
-              <a:t>Opportunities</a:t>
-            </a:r>
-          </a:p>
-        </p:txBody>
-      </p:sp>
-      <p:sp>
-        <p:nvSpPr>
-          <p:cNvPr id="13" name="Rectangle 12"/>
-          <p:cNvSpPr/>
-          <p:nvPr>
-            <p:ph type="body" idx="8"/>
-          </p:nvPr>
-        </p:nvSpPr>
-        <p:spPr>
-          <a:xfrm>
-            <a:off x="457200" y="4443983"/>
-            <a:ext cx="1650492" cy="54864"/>
-          </a:xfrm>
-          <a:prstGeom prst="rect">
-            <a:avLst/>
-          </a:prstGeom>
-          <a:solidFill>
-            <a:srgbClr val="D97706"/>
-          </a:solidFill>
-          <a:ln>
-            <a:noFill/>
-          </a:ln>
-          <a:effectLst/>
-        </p:spPr>
-        <p:txBody>
-          <a:bodyPr rtlCol="0" anchor="ctr"/>
-          <a:lstStyle/>
-          <a:p>
-            <a:pPr algn="ctr"/>
-          </a:p>
-        </p:txBody>
-      </p:sp>
-      <p:sp>
-        <p:nvSpPr>
-          <p:cNvPr id="14" name="TextBox 13"/>
-          <p:cNvSpPr/>
-          <p:nvPr>
-            <p:ph type="body" idx="9"/>
-          </p:nvPr>
-        </p:nvSpPr>
-        <p:spPr>
-          <a:xfrm>
-            <a:off x="457200" y="4663439"/>
-            <a:ext cx="5501640" cy="1097281"/>
-          </a:xfrm>
-          <a:prstGeom prst="rect">
-            <a:avLst/>
-          </a:prstGeom>
-          <a:noFill/>
-        </p:spPr>
-        <p:txBody>
-          <a:bodyPr wrap="square" lIns="0" rIns="0">
-            <a:noAutofit/>
-          </a:bodyPr>
-          <a:lstStyle/>
-          <a:p>
-            <a:pPr algn="l"/>
-            <a:r>
-              <a:rPr sz="3400" b="0" i="0">
-                <a:solidFill>
-                  <a:srgbClr val="1A1A2E"/>
-                </a:solidFill>
-                <a:latin typeface="Arial"/>
-              </a:rPr>
-              <a:t>New markets through partnerships</a:t>
-            </a:r>
-          </a:p>
-        </p:txBody>
-      </p:sp>
-      <p:sp>
-        <p:nvSpPr>
-          <p:cNvPr id="15" name="TextBox 14"/>
-          <p:cNvSpPr/>
-          <p:nvPr>
-            <p:ph type="body" idx="13"/>
-          </p:nvPr>
-        </p:nvSpPr>
-        <p:spPr>
-          <a:xfrm>
-            <a:off x="6233160" y="3767328"/>
-            <a:ext cx="5501640" cy="621791"/>
-          </a:xfrm>
-          <a:prstGeom prst="rect">
-            <a:avLst/>
-          </a:prstGeom>
-          <a:noFill/>
-        </p:spPr>
-        <p:txBody>
-          <a:bodyPr wrap="none" lIns="0" rIns="0">
-            <a:noAutofit/>
-          </a:bodyPr>
-          <a:lstStyle/>
-          <a:p>
-            <a:pPr algn="l"/>
-            <a:r>
-              <a:rPr sz="3400" b="1" i="0">
-                <a:solidFill>
-                  <a:srgbClr val="7A8590"/>
-                </a:solidFill>
-                <a:latin typeface="Arial"/>
-              </a:rPr>
-              <a:t>Threats</a:t>
-            </a:r>
-          </a:p>
-        </p:txBody>
-      </p:sp>
-      <p:sp>
-        <p:nvSpPr>
-          <p:cNvPr id="16" name="Rectangle 15"/>
-          <p:cNvSpPr/>
-          <p:nvPr>
-            <p:ph type="body" idx="14"/>
-          </p:nvPr>
-        </p:nvSpPr>
-        <p:spPr>
-          <a:xfrm>
-            <a:off x="6233160" y="4443983"/>
-            <a:ext cx="1650492" cy="54864"/>
-          </a:xfrm>
-          <a:prstGeom prst="rect">
-            <a:avLst/>
-          </a:prstGeom>
-          <a:solidFill>
-            <a:srgbClr val="7A8590"/>
-          </a:solidFill>
-          <a:ln>
-            <a:noFill/>
-          </a:ln>
-          <a:effectLst/>
-        </p:spPr>
-        <p:txBody>
-          <a:bodyPr rtlCol="0" anchor="ctr"/>
-          <a:lstStyle/>
-          <a:p>
-            <a:pPr algn="ctr"/>
-          </a:p>
-        </p:txBody>
-      </p:sp>
-      <p:sp>
-        <p:nvSpPr>
-          <p:cNvPr id="17" name="TextBox 16"/>
-          <p:cNvSpPr/>
-          <p:nvPr>
-            <p:ph type="body" idx="15"/>
-          </p:nvPr>
-        </p:nvSpPr>
-        <p:spPr>
-          <a:xfrm>
-            <a:off x="6233160" y="4663439"/>
-            <a:ext cx="5501640" cy="1097281"/>
-          </a:xfrm>
-          <a:prstGeom prst="rect">
-            <a:avLst/>
-          </a:prstGeom>
-          <a:noFill/>
-        </p:spPr>
-        <p:txBody>
-          <a:bodyPr wrap="square" lIns="0" rIns="0">
-            <a:noAutofit/>
-          </a:bodyPr>
-          <a:lstStyle/>
-          <a:p>
-            <a:pPr algn="l"/>
-            <a:r>
-              <a:rPr sz="3400" b="0" i="0">
-                <a:solidFill>
-                  <a:srgbClr val="1A1A2E"/>
-                </a:solidFill>
-                <a:latin typeface="Arial"/>
-              </a:rPr>
-              <a:t>New entrants driving price pressure</a:t>
-            </a:r>
-          </a:p>
-        </p:txBody>
-      </p:sp>
-    </p:spTree>
-    <p:extLst>
-      <p:ext uri="{BB962C8B-B14F-4D97-AF65-F5344CB8AC3E}">
-        <p14:creationId xmlns:p14="http://schemas.microsoft.com/office/powerpoint/2010/main" val="1212999818"/>
-      </p:ext>
-    </p:extLst>
-  </p:cSld>
-  <p:clrMapOvr>
-    <a:masterClrMapping/>
-  </p:clrMapOvr>
-</p:sldLayout>
-</file>
-
-<file path=ppt/slideLayouts/slideLayout41.xml><?xml version="1.0" encoding="utf-8"?>
-<p:sldLayout xmlns:a="http://schemas.openxmlformats.org/drawingml/2006/main" xmlns:r="http://schemas.openxmlformats.org/officeDocument/2006/relationships" xmlns:p="http://schemas.openxmlformats.org/presentationml/2006/main" type="blank" preserve="1">
   <p:cSld name="slidekit · Comparison Matrix">
     <p:bg>
       <p:bgPr>
@@ -13362,8 +12704,8 @@
         </p:nvSpPr>
         <p:spPr>
           <a:xfrm>
-            <a:off x="10363200" y="6035040"/>
-            <a:ext cx="1371600" cy="365760"/>
+            <a:off x="11186160" y="6035040"/>
+            <a:ext cx="548640" cy="365760"/>
           </a:xfrm>
         </p:spPr>
         <p:txBody>
@@ -13406,7 +12748,7 @@
             <a:r>
               <a:rPr sz="4200" b="1" i="0">
                 <a:solidFill>
-                  <a:srgbClr val="1B3A5C"/>
+                  <a:srgbClr val="D97706"/>
                 </a:solidFill>
                 <a:latin typeface="Arial"/>
               </a:rPr>
@@ -15529,7 +14871,6 @@
     <p:sldLayoutId id="2147483738" r:id="rId39"/>
     <p:sldLayoutId id="2147483739" r:id="rId40"/>
     <p:sldLayoutId id="2147483740" r:id="rId41"/>
-    <p:sldLayoutId id="2147483741" r:id="rId42"/>
   </p:sldLayoutIdLst>
   <p:txStyles>
     <p:titleStyle>
@@ -15828,7 +15169,7 @@
             <a:r>
               <a:rPr sz="6000" b="1" i="0">
                 <a:solidFill>
-                  <a:srgbClr val="1B3A5C"/>
+                  <a:srgbClr val="D97706"/>
                 </a:solidFill>
                 <a:latin typeface="Arial"/>
               </a:rPr>
@@ -15924,7 +15265,7 @@
             <a:r>
               <a:rPr sz="4200" b="1" i="0">
                 <a:solidFill>
-                  <a:srgbClr val="1B3A5C"/>
+                  <a:srgbClr val="D97706"/>
                 </a:solidFill>
                 <a:latin typeface="Arial"/>
               </a:rPr>
@@ -16363,25 +15704,25 @@
         </p:nvSpPr>
         <p:spPr>
           <a:xfrm>
-            <a:off x="10363200" y="6035040"/>
-            <a:ext cx="1371600" cy="365760"/>
-          </a:xfrm>
-          <a:prstGeom prst="rect">
-            <a:avLst/>
-          </a:prstGeom>
-          <a:noFill/>
-        </p:spPr>
-        <p:txBody>
-          <a:bodyPr wrap="none" lIns="0" rIns="0">
-            <a:noAutofit/>
-          </a:bodyPr>
-          <a:lstStyle/>
-          <a:p>
-            <a:pPr algn="l"/>
+            <a:off x="11186160" y="6035040"/>
+            <a:ext cx="548640" cy="365760"/>
+          </a:xfrm>
+          <a:prstGeom prst="rect">
+            <a:avLst/>
+          </a:prstGeom>
+          <a:noFill/>
+        </p:spPr>
+        <p:txBody>
+          <a:bodyPr wrap="none" lIns="0" rIns="0">
+            <a:noAutofit/>
+          </a:bodyPr>
+          <a:lstStyle/>
+          <a:p>
+            <a:pPr algn="r"/>
             <a:fld id="{4B0E1F8A-6C1D-4E2A-9F3B-7A5C8D2E1F60}" type="slidenum">
               <a:rPr sz="1600" b="0" i="0">
                 <a:solidFill>
-                  <a:srgbClr val="7A8590"/>
+                  <a:srgbClr val="1A1A2E"/>
                 </a:solidFill>
                 <a:latin typeface="Arial"/>
               </a:rPr>
@@ -16442,7 +15783,7 @@
             <a:r>
               <a:rPr sz="4200" b="1" i="0">
                 <a:solidFill>
-                  <a:srgbClr val="1B3A5C"/>
+                  <a:srgbClr val="D97706"/>
                 </a:solidFill>
                 <a:latin typeface="Arial"/>
               </a:rPr>
@@ -16495,7 +15836,7 @@
         <p:spPr>
           <a:xfrm>
             <a:off x="457200" y="2176271"/>
-            <a:ext cx="1650492" cy="54864"/>
+            <a:ext cx="2015207" cy="54864"/>
           </a:xfrm>
           <a:prstGeom prst="rect">
             <a:avLst/>
@@ -16591,7 +15932,7 @@
             <a:r>
               <a:rPr sz="3400" b="1" i="0">
                 <a:solidFill>
-                  <a:srgbClr val="7A8590"/>
+                  <a:srgbClr val="1A1A2E"/>
                 </a:solidFill>
                 <a:latin typeface="Arial"/>
               </a:rPr>
@@ -16609,13 +15950,13 @@
         <p:spPr>
           <a:xfrm>
             <a:off x="6233160" y="2176271"/>
-            <a:ext cx="1650492" cy="54864"/>
+            <a:ext cx="2584686" cy="54864"/>
           </a:xfrm>
           <a:prstGeom prst="rect">
             <a:avLst/>
           </a:prstGeom>
           <a:solidFill>
-            <a:srgbClr val="7A8590"/>
+            <a:srgbClr val="1A1A2E"/>
           </a:solidFill>
           <a:ln>
             <a:noFill/>
@@ -16723,7 +16064,7 @@
         <p:spPr>
           <a:xfrm>
             <a:off x="457200" y="4443983"/>
-            <a:ext cx="1650492" cy="54864"/>
+            <a:ext cx="2830525" cy="54864"/>
           </a:xfrm>
           <a:prstGeom prst="rect">
             <a:avLst/>
@@ -16819,7 +16160,7 @@
             <a:r>
               <a:rPr sz="3400" b="1" i="0">
                 <a:solidFill>
-                  <a:srgbClr val="7A8590"/>
+                  <a:srgbClr val="1A1A2E"/>
                 </a:solidFill>
                 <a:latin typeface="Arial"/>
               </a:rPr>
@@ -16837,13 +16178,13 @@
         <p:spPr>
           <a:xfrm>
             <a:off x="6233160" y="4443983"/>
-            <a:ext cx="1650492" cy="54864"/>
+            <a:ext cx="1559793" cy="54864"/>
           </a:xfrm>
           <a:prstGeom prst="rect">
             <a:avLst/>
           </a:prstGeom>
           <a:solidFill>
-            <a:srgbClr val="7A8590"/>
+            <a:srgbClr val="1A1A2E"/>
           </a:solidFill>
           <a:ln>
             <a:noFill/>
@@ -16917,25 +16258,25 @@
         </p:nvSpPr>
         <p:spPr>
           <a:xfrm>
-            <a:off x="10363200" y="6035040"/>
-            <a:ext cx="1371600" cy="365760"/>
-          </a:xfrm>
-          <a:prstGeom prst="rect">
-            <a:avLst/>
-          </a:prstGeom>
-          <a:noFill/>
-        </p:spPr>
-        <p:txBody>
-          <a:bodyPr wrap="none" lIns="0" rIns="0">
-            <a:noAutofit/>
-          </a:bodyPr>
-          <a:lstStyle/>
-          <a:p>
-            <a:pPr algn="l"/>
+            <a:off x="11186160" y="6035040"/>
+            <a:ext cx="548640" cy="365760"/>
+          </a:xfrm>
+          <a:prstGeom prst="rect">
+            <a:avLst/>
+          </a:prstGeom>
+          <a:noFill/>
+        </p:spPr>
+        <p:txBody>
+          <a:bodyPr wrap="none" lIns="0" rIns="0">
+            <a:noAutofit/>
+          </a:bodyPr>
+          <a:lstStyle/>
+          <a:p>
+            <a:pPr algn="r"/>
             <a:fld id="{4B0E1F8A-6C1D-4E2A-9F3B-7A5C8D2E1F60}" type="slidenum">
               <a:rPr sz="1600" b="0" i="0">
                 <a:solidFill>
-                  <a:srgbClr val="7A8590"/>
+                  <a:srgbClr val="1A1A2E"/>
                 </a:solidFill>
                 <a:latin typeface="Arial"/>
               </a:rPr>
